--- a/docs/slides/AGJ_dynamics_2026-08-17_genspark.pptx
+++ b/docs/slides/AGJ_dynamics_2026-08-17_genspark.pptx
@@ -6,12 +6,12 @@
   </p:sldMasterIdLst>
   <p:sldIdLst>
     <p:sldId id="301" r:id="rId2"/>
-    <p:sldId id="338" r:id="rId3"/>
+    <p:sldId id="371" r:id="rId3"/>
     <p:sldId id="305" r:id="rId4"/>
     <p:sldId id="341" r:id="rId5"/>
-    <p:sldId id="309" r:id="rId6"/>
+    <p:sldId id="372" r:id="rId6"/>
     <p:sldId id="345" r:id="rId7"/>
-    <p:sldId id="317" r:id="rId8"/>
+    <p:sldId id="373" r:id="rId8"/>
     <p:sldId id="346" r:id="rId9"/>
     <p:sldId id="347" r:id="rId10"/>
     <p:sldId id="324" r:id="rId11"/>
@@ -19,7 +19,7 @@
     <p:sldId id="328" r:id="rId13"/>
     <p:sldId id="330" r:id="rId14"/>
     <p:sldId id="331" r:id="rId15"/>
-    <p:sldId id="353" r:id="rId16"/>
+    <p:sldId id="367" r:id="rId16"/>
   </p:sldIdLst>
   <p:sldSz cx="12192000" cy="6858000"/>
   <p:notesSz cx="6858000" cy="9144000"/>
@@ -9567,41 +9567,120 @@
           </a:p>
         </p:txBody>
       </p:sp>
-      <p:sp>
-        <p:nvSpPr>
-          <p:cNvPr id="5" name="TextBox 4"/>
-          <p:cNvSpPr txBox="1"/>
-          <p:nvPr/>
-        </p:nvSpPr>
-        <p:spPr>
-          <a:xfrm>
-            <a:off x="749300" y="3149600"/>
-            <a:ext cx="2082800" cy="406400"/>
-          </a:xfrm>
-          <a:prstGeom prst="rect">
-            <a:avLst/>
-          </a:prstGeom>
-          <a:noFill/>
-        </p:spPr>
-        <p:txBody>
-          <a:bodyPr wrap="square" lIns="0" tIns="0" rIns="0" bIns="0">
-            <a:spAutoFit/>
-          </a:bodyPr>
-          <a:lstStyle/>
-          <a:p>
-            <a:pPr algn="l"/>
-            <a:r>
-              <a:rPr lang="ja-JP" sz="1900" b="1" dirty="0">
-                <a:solidFill>
-                  <a:srgbClr val="1A2744"/>
-                </a:solidFill>
-                <a:latin typeface="Cambria Math"/>
-              </a:rPr>
-              <a:t>I = Y V</a:t>
-            </a:r>
-          </a:p>
-        </p:txBody>
-      </p:sp>
+      <mc:AlternateContent xmlns:mc="http://schemas.openxmlformats.org/markup-compatibility/2006">
+        <mc:Choice xmlns:a14="http://schemas.microsoft.com/office/drawing/2010/main" Requires="a14">
+          <p:sp>
+            <p:nvSpPr>
+              <p:cNvPr id="5" name="TextBox 4"/>
+              <p:cNvSpPr txBox="1"/>
+              <p:nvPr/>
+            </p:nvSpPr>
+            <p:spPr>
+              <a:xfrm>
+                <a:off x="749300" y="3022600"/>
+                <a:ext cx="2082800" cy="261610"/>
+              </a:xfrm>
+              <a:prstGeom prst="rect">
+                <a:avLst/>
+              </a:prstGeom>
+              <a:noFill/>
+            </p:spPr>
+            <p:txBody>
+              <a:bodyPr wrap="square" lIns="0" tIns="0" rIns="0" bIns="0">
+                <a:spAutoFit/>
+              </a:bodyPr>
+              <a:lstStyle/>
+              <a:p>
+                <a:pPr algn="l"/>
+                <a14:m>
+                  <m:oMathPara xmlns:m="http://schemas.openxmlformats.org/officeDocument/2006/math">
+                    <m:oMathParaPr>
+                      <m:jc m:val="left"/>
+                    </m:oMathParaPr>
+                    <m:oMath>
+                      <m:r>
+                        <a:rPr lang="en-US" sz="1700" dirty="0">
+                          <a:solidFill>
+                            <a:srgbClr val="2C5F8A"/>
+                          </a:solidFill>
+                          <a:latin typeface="Cambria Math" panose="02040503050406030204" pitchFamily="18" charset="0"/>
+                        </a:rPr>
+                        <m:t>𝐼</m:t>
+                      </m:r>
+                      <m:r>
+                        <a:rPr lang="en-US" sz="1700" dirty="0">
+                          <a:solidFill>
+                            <a:srgbClr val="1A2744"/>
+                          </a:solidFill>
+                          <a:latin typeface="Cambria Math" panose="02040503050406030204" pitchFamily="18" charset="0"/>
+                        </a:rPr>
+                        <m:t> = </m:t>
+                      </m:r>
+                      <m:r>
+                        <a:rPr lang="en-US" sz="1700" dirty="0">
+                          <a:solidFill>
+                            <a:srgbClr val="8A2E3B"/>
+                          </a:solidFill>
+                          <a:latin typeface="Cambria Math" panose="02040503050406030204" pitchFamily="18" charset="0"/>
+                        </a:rPr>
+                        <m:t>𝑌</m:t>
+                      </m:r>
+                      <m:r>
+                        <a:rPr lang="en-US" sz="1700" dirty="0">
+                          <a:solidFill>
+                            <a:srgbClr val="1A2744"/>
+                          </a:solidFill>
+                          <a:latin typeface="Cambria Math" panose="02040503050406030204" pitchFamily="18" charset="0"/>
+                        </a:rPr>
+                        <m:t>𝑉</m:t>
+                      </m:r>
+                    </m:oMath>
+                  </m:oMathPara>
+                </a14:m>
+                <a:endParaRPr/>
+              </a:p>
+            </p:txBody>
+          </p:sp>
+        </mc:Choice>
+        <mc:Fallback>
+          <p:sp>
+            <p:nvSpPr>
+              <p:cNvPr id="5" name="TextBox 4"/>
+              <p:cNvSpPr txBox="1">
+                <a:spLocks noRot="1" noChangeAspect="1" noMove="1" noResize="1" noEditPoints="1" noAdjustHandles="1" noChangeArrowheads="1" noChangeShapeType="1" noTextEdit="1"/>
+              </p:cNvSpPr>
+              <p:nvPr/>
+            </p:nvSpPr>
+            <p:spPr>
+              <a:xfrm>
+                <a:off x="749300" y="3022600"/>
+                <a:ext cx="2082800" cy="261610"/>
+              </a:xfrm>
+              <a:prstGeom prst="rect">
+                <a:avLst/>
+              </a:prstGeom>
+              <a:blipFill>
+                <a:blip r:embed="rId2"/>
+                <a:stretch>
+                  <a:fillRect l="-3636" t="-9524" b="-38095"/>
+                </a:stretch>
+              </a:blipFill>
+            </p:spPr>
+            <p:txBody>
+              <a:bodyPr/>
+              <a:lstStyle/>
+              <a:p>
+                <a:r>
+                  <a:rPr lang="ja-JP" altLang="en-US">
+                    <a:noFill/>
+                  </a:rPr>
+                  <a:t> </a:t>
+                </a:r>
+              </a:p>
+            </p:txBody>
+          </p:sp>
+        </mc:Fallback>
+      </mc:AlternateContent>
       <p:sp>
         <p:nvSpPr>
           <p:cNvPr id="6" name="TextBox 5"/>
@@ -9610,8 +9689,8 @@
         </p:nvSpPr>
         <p:spPr>
           <a:xfrm>
-            <a:off x="749300" y="3683000"/>
-            <a:ext cx="2082800" cy="537455"/>
+            <a:off x="749300" y="3505200"/>
+            <a:ext cx="2082800" cy="1016000"/>
           </a:xfrm>
           <a:prstGeom prst="rect">
             <a:avLst/>
@@ -9641,41 +9720,204 @@
           </a:p>
         </p:txBody>
       </p:sp>
-      <p:sp>
-        <p:nvSpPr>
-          <p:cNvPr id="7" name="TextBox 6"/>
-          <p:cNvSpPr txBox="1"/>
-          <p:nvPr/>
-        </p:nvSpPr>
-        <p:spPr>
-          <a:xfrm>
-            <a:off x="3619500" y="3149600"/>
-            <a:ext cx="2082800" cy="406400"/>
-          </a:xfrm>
-          <a:prstGeom prst="rect">
-            <a:avLst/>
-          </a:prstGeom>
-          <a:noFill/>
-        </p:spPr>
-        <p:txBody>
-          <a:bodyPr wrap="square" lIns="0" tIns="0" rIns="0" bIns="0">
-            <a:spAutoFit/>
-          </a:bodyPr>
-          <a:lstStyle/>
-          <a:p>
-            <a:pPr algn="l"/>
-            <a:r>
-              <a:rPr lang="ja-JP" sz="1800" b="1" dirty="0">
-                <a:solidFill>
-                  <a:srgbClr val="1A2744"/>
-                </a:solidFill>
-                <a:latin typeface="Cambria Math"/>
-              </a:rPr>
-              <a:t>Zth = [ Y⁻¹ ]ii</a:t>
-            </a:r>
-          </a:p>
-        </p:txBody>
-      </p:sp>
+      <mc:AlternateContent xmlns:mc="http://schemas.openxmlformats.org/markup-compatibility/2006">
+        <mc:Choice xmlns:a14="http://schemas.microsoft.com/office/drawing/2010/main" Requires="a14">
+          <p:sp>
+            <p:nvSpPr>
+              <p:cNvPr id="7" name="TextBox 6"/>
+              <p:cNvSpPr txBox="1"/>
+              <p:nvPr/>
+            </p:nvSpPr>
+            <p:spPr>
+              <a:xfrm>
+                <a:off x="3619500" y="3022600"/>
+                <a:ext cx="2082800" cy="261610"/>
+              </a:xfrm>
+              <a:prstGeom prst="rect">
+                <a:avLst/>
+              </a:prstGeom>
+              <a:noFill/>
+            </p:spPr>
+            <p:txBody>
+              <a:bodyPr wrap="square" lIns="0" tIns="0" rIns="0" bIns="0">
+                <a:spAutoFit/>
+              </a:bodyPr>
+              <a:lstStyle/>
+              <a:p>
+                <a:pPr algn="l"/>
+                <a14:m>
+                  <m:oMathPara xmlns:m="http://schemas.openxmlformats.org/officeDocument/2006/math">
+                    <m:oMathParaPr>
+                      <m:jc m:val="left"/>
+                    </m:oMathParaPr>
+                    <m:oMath>
+                      <m:sSub>
+                        <m:sSubPr>
+                          <m:ctrlPr>
+                            <a:rPr lang="en-US" sz="1700" dirty="0">
+                              <a:solidFill>
+                                <a:srgbClr val="8A2E3B"/>
+                              </a:solidFill>
+                              <a:latin typeface="Cambria Math" panose="02040503050406030204" pitchFamily="18" charset="0"/>
+                            </a:rPr>
+                          </m:ctrlPr>
+                        </m:sSubPr>
+                        <m:e>
+                          <m:r>
+                            <a:rPr lang="en-US" sz="1700" dirty="0">
+                              <a:solidFill>
+                                <a:srgbClr val="8A2E3B"/>
+                              </a:solidFill>
+                              <a:latin typeface="Cambria Math" panose="02040503050406030204" pitchFamily="18" charset="0"/>
+                            </a:rPr>
+                            <m:t>𝑍</m:t>
+                          </m:r>
+                        </m:e>
+                        <m:sub>
+                          <m:r>
+                            <a:rPr lang="en-US" sz="1700" dirty="0">
+                              <a:solidFill>
+                                <a:srgbClr val="8A2E3B"/>
+                              </a:solidFill>
+                              <a:latin typeface="Cambria Math" panose="02040503050406030204" pitchFamily="18" charset="0"/>
+                            </a:rPr>
+                            <m:t>𝑡ℎ</m:t>
+                          </m:r>
+                        </m:sub>
+                      </m:sSub>
+                      <m:r>
+                        <a:rPr lang="en-US" sz="1700" dirty="0">
+                          <a:solidFill>
+                            <a:srgbClr val="1A2744"/>
+                          </a:solidFill>
+                          <a:latin typeface="Cambria Math" panose="02040503050406030204" pitchFamily="18" charset="0"/>
+                        </a:rPr>
+                        <m:t> = </m:t>
+                      </m:r>
+                      <m:sSub>
+                        <m:sSubPr>
+                          <m:ctrlPr>
+                            <a:rPr lang="en-US" sz="1700" dirty="0">
+                              <a:solidFill>
+                                <a:srgbClr val="1A2744"/>
+                              </a:solidFill>
+                              <a:latin typeface="Cambria Math" panose="02040503050406030204" pitchFamily="18" charset="0"/>
+                            </a:rPr>
+                          </m:ctrlPr>
+                        </m:sSubPr>
+                        <m:e>
+                          <m:r>
+                            <a:rPr lang="en-US" sz="1700" dirty="0">
+                              <a:solidFill>
+                                <a:srgbClr val="1A2744"/>
+                              </a:solidFill>
+                              <a:latin typeface="Cambria Math" panose="02040503050406030204" pitchFamily="18" charset="0"/>
+                            </a:rPr>
+                            <m:t>[</m:t>
+                          </m:r>
+                          <m:sSup>
+                            <m:sSupPr>
+                              <m:ctrlPr>
+                                <a:rPr lang="en-US" sz="1700" dirty="0">
+                                  <a:solidFill>
+                                    <a:srgbClr val="2C5F8A"/>
+                                  </a:solidFill>
+                                  <a:latin typeface="Cambria Math" panose="02040503050406030204" pitchFamily="18" charset="0"/>
+                                </a:rPr>
+                              </m:ctrlPr>
+                            </m:sSupPr>
+                            <m:e>
+                              <m:r>
+                                <a:rPr lang="en-US" sz="1700" dirty="0">
+                                  <a:solidFill>
+                                    <a:srgbClr val="2C5F8A"/>
+                                  </a:solidFill>
+                                  <a:latin typeface="Cambria Math" panose="02040503050406030204" pitchFamily="18" charset="0"/>
+                                </a:rPr>
+                                <m:t>𝑌</m:t>
+                              </m:r>
+                            </m:e>
+                            <m:sup>
+                              <m:r>
+                                <a:rPr lang="en-US" sz="1700" dirty="0">
+                                  <a:solidFill>
+                                    <a:srgbClr val="1A2744"/>
+                                  </a:solidFill>
+                                  <a:latin typeface="Cambria Math" panose="02040503050406030204" pitchFamily="18" charset="0"/>
+                                </a:rPr>
+                                <m:t>−1</m:t>
+                              </m:r>
+                            </m:sup>
+                          </m:sSup>
+                          <m:r>
+                            <a:rPr lang="en-US" sz="1700" dirty="0">
+                              <a:solidFill>
+                                <a:srgbClr val="1A2744"/>
+                              </a:solidFill>
+                              <a:latin typeface="Cambria Math" panose="02040503050406030204" pitchFamily="18" charset="0"/>
+                            </a:rPr>
+                            <m:t>]</m:t>
+                          </m:r>
+                        </m:e>
+                        <m:sub>
+                          <m:r>
+                            <a:rPr lang="en-US" sz="1700" dirty="0">
+                              <a:solidFill>
+                                <a:srgbClr val="1A2744"/>
+                              </a:solidFill>
+                              <a:latin typeface="Cambria Math" panose="02040503050406030204" pitchFamily="18" charset="0"/>
+                            </a:rPr>
+                            <m:t>𝑖𝑖</m:t>
+                          </m:r>
+                        </m:sub>
+                      </m:sSub>
+                    </m:oMath>
+                  </m:oMathPara>
+                </a14:m>
+                <a:endParaRPr/>
+              </a:p>
+            </p:txBody>
+          </p:sp>
+        </mc:Choice>
+        <mc:Fallback>
+          <p:sp>
+            <p:nvSpPr>
+              <p:cNvPr id="7" name="TextBox 6"/>
+              <p:cNvSpPr txBox="1">
+                <a:spLocks noRot="1" noChangeAspect="1" noMove="1" noResize="1" noEditPoints="1" noAdjustHandles="1" noChangeArrowheads="1" noChangeShapeType="1" noTextEdit="1"/>
+              </p:cNvSpPr>
+              <p:nvPr/>
+            </p:nvSpPr>
+            <p:spPr>
+              <a:xfrm>
+                <a:off x="3619500" y="3022600"/>
+                <a:ext cx="2082800" cy="261610"/>
+              </a:xfrm>
+              <a:prstGeom prst="rect">
+                <a:avLst/>
+              </a:prstGeom>
+              <a:blipFill>
+                <a:blip r:embed="rId3"/>
+                <a:stretch>
+                  <a:fillRect l="-3659" t="-9524" b="-38095"/>
+                </a:stretch>
+              </a:blipFill>
+            </p:spPr>
+            <p:txBody>
+              <a:bodyPr/>
+              <a:lstStyle/>
+              <a:p>
+                <a:r>
+                  <a:rPr lang="ja-JP" altLang="en-US">
+                    <a:noFill/>
+                  </a:rPr>
+                  <a:t> </a:t>
+                </a:r>
+              </a:p>
+            </p:txBody>
+          </p:sp>
+        </mc:Fallback>
+      </mc:AlternateContent>
       <p:sp>
         <p:nvSpPr>
           <p:cNvPr id="8" name="TextBox 7"/>
@@ -9684,8 +9926,8 @@
         </p:nvSpPr>
         <p:spPr>
           <a:xfrm>
-            <a:off x="3619500" y="3683000"/>
-            <a:ext cx="2082800" cy="533992"/>
+            <a:off x="3619500" y="3505200"/>
+            <a:ext cx="2082800" cy="1016000"/>
           </a:xfrm>
           <a:prstGeom prst="rect">
             <a:avLst/>
@@ -9715,41 +9957,127 @@
           </a:p>
         </p:txBody>
       </p:sp>
-      <p:sp>
-        <p:nvSpPr>
-          <p:cNvPr id="9" name="TextBox 8"/>
-          <p:cNvSpPr txBox="1"/>
-          <p:nvPr/>
-        </p:nvSpPr>
-        <p:spPr>
-          <a:xfrm>
-            <a:off x="6489700" y="3149600"/>
-            <a:ext cx="2082800" cy="406400"/>
-          </a:xfrm>
-          <a:prstGeom prst="rect">
-            <a:avLst/>
-          </a:prstGeom>
-          <a:noFill/>
-        </p:spPr>
-        <p:txBody>
-          <a:bodyPr wrap="square" lIns="0" tIns="0" rIns="0" bIns="0">
-            <a:spAutoFit/>
-          </a:bodyPr>
-          <a:lstStyle/>
-          <a:p>
-            <a:pPr algn="l"/>
-            <a:r>
-              <a:rPr lang="ja-JP" sz="1900" b="1" dirty="0">
-                <a:solidFill>
-                  <a:srgbClr val="1A2744"/>
-                </a:solidFill>
-                <a:latin typeface="Cambria Math"/>
-              </a:rPr>
-              <a:t>M⁻¹K</a:t>
-            </a:r>
-          </a:p>
-        </p:txBody>
-      </p:sp>
+      <mc:AlternateContent xmlns:mc="http://schemas.openxmlformats.org/markup-compatibility/2006">
+        <mc:Choice xmlns:a14="http://schemas.microsoft.com/office/drawing/2010/main" Requires="a14">
+          <p:sp>
+            <p:nvSpPr>
+              <p:cNvPr id="9" name="TextBox 8"/>
+              <p:cNvSpPr txBox="1"/>
+              <p:nvPr/>
+            </p:nvSpPr>
+            <p:spPr>
+              <a:xfrm>
+                <a:off x="6489700" y="3022600"/>
+                <a:ext cx="2082800" cy="261610"/>
+              </a:xfrm>
+              <a:prstGeom prst="rect">
+                <a:avLst/>
+              </a:prstGeom>
+              <a:noFill/>
+            </p:spPr>
+            <p:txBody>
+              <a:bodyPr wrap="square" lIns="0" tIns="0" rIns="0" bIns="0">
+                <a:spAutoFit/>
+              </a:bodyPr>
+              <a:lstStyle/>
+              <a:p>
+                <a:pPr algn="l"/>
+                <a14:m>
+                  <m:oMathPara xmlns:m="http://schemas.openxmlformats.org/officeDocument/2006/math">
+                    <m:oMathParaPr>
+                      <m:jc m:val="left"/>
+                    </m:oMathParaPr>
+                    <m:oMath>
+                      <m:sSup>
+                        <m:sSupPr>
+                          <m:ctrlPr>
+                            <a:rPr lang="en-US" sz="1700" dirty="0">
+                              <a:solidFill>
+                                <a:srgbClr val="1A2744"/>
+                              </a:solidFill>
+                              <a:latin typeface="Cambria Math" panose="02040503050406030204" pitchFamily="18" charset="0"/>
+                            </a:rPr>
+                          </m:ctrlPr>
+                        </m:sSupPr>
+                        <m:e>
+                          <m:r>
+                            <a:rPr lang="en-US" sz="1700" dirty="0">
+                              <a:solidFill>
+                                <a:srgbClr val="1A2744"/>
+                              </a:solidFill>
+                              <a:latin typeface="Cambria Math" panose="02040503050406030204" pitchFamily="18" charset="0"/>
+                            </a:rPr>
+                            <m:t>𝑀</m:t>
+                          </m:r>
+                        </m:e>
+                        <m:sup>
+                          <m:r>
+                            <a:rPr lang="en-US" sz="1700" dirty="0">
+                              <a:solidFill>
+                                <a:srgbClr val="1A2744"/>
+                              </a:solidFill>
+                              <a:latin typeface="Cambria Math" panose="02040503050406030204" pitchFamily="18" charset="0"/>
+                            </a:rPr>
+                            <m:t>−1</m:t>
+                          </m:r>
+                        </m:sup>
+                      </m:sSup>
+                      <m:r>
+                        <a:rPr lang="en-US" sz="1700" dirty="0">
+                          <a:solidFill>
+                            <a:srgbClr val="8A2E3B"/>
+                          </a:solidFill>
+                          <a:latin typeface="Cambria Math" panose="02040503050406030204" pitchFamily="18" charset="0"/>
+                        </a:rPr>
+                        <m:t>𝐾</m:t>
+                      </m:r>
+                    </m:oMath>
+                  </m:oMathPara>
+                </a14:m>
+                <a:endParaRPr/>
+              </a:p>
+            </p:txBody>
+          </p:sp>
+        </mc:Choice>
+        <mc:Fallback>
+          <p:sp>
+            <p:nvSpPr>
+              <p:cNvPr id="9" name="TextBox 8"/>
+              <p:cNvSpPr txBox="1">
+                <a:spLocks noRot="1" noChangeAspect="1" noMove="1" noResize="1" noEditPoints="1" noAdjustHandles="1" noChangeArrowheads="1" noChangeShapeType="1" noTextEdit="1"/>
+              </p:cNvSpPr>
+              <p:nvPr/>
+            </p:nvSpPr>
+            <p:spPr>
+              <a:xfrm>
+                <a:off x="6489700" y="3022600"/>
+                <a:ext cx="2082800" cy="261610"/>
+              </a:xfrm>
+              <a:prstGeom prst="rect">
+                <a:avLst/>
+              </a:prstGeom>
+              <a:blipFill>
+                <a:blip r:embed="rId4"/>
+                <a:stretch>
+                  <a:fillRect l="-3659" t="-4762" b="-4762"/>
+                </a:stretch>
+              </a:blipFill>
+            </p:spPr>
+            <p:txBody>
+              <a:bodyPr/>
+              <a:lstStyle/>
+              <a:p>
+                <a:r>
+                  <a:rPr lang="ja-JP" altLang="en-US">
+                    <a:noFill/>
+                  </a:rPr>
+                  <a:t> </a:t>
+                </a:r>
+              </a:p>
+            </p:txBody>
+          </p:sp>
+        </mc:Fallback>
+      </mc:AlternateContent>
       <p:sp>
         <p:nvSpPr>
           <p:cNvPr id="10" name="TextBox 9"/>
@@ -9758,8 +10086,8 @@
         </p:nvSpPr>
         <p:spPr>
           <a:xfrm>
-            <a:off x="6489700" y="3683000"/>
-            <a:ext cx="2082800" cy="533992"/>
+            <a:off x="6489700" y="3505200"/>
+            <a:ext cx="2082800" cy="1016000"/>
           </a:xfrm>
           <a:prstGeom prst="rect">
             <a:avLst/>
@@ -9789,41 +10117,161 @@
           </a:p>
         </p:txBody>
       </p:sp>
-      <p:sp>
-        <p:nvSpPr>
-          <p:cNvPr id="11" name="TextBox 10"/>
-          <p:cNvSpPr txBox="1"/>
-          <p:nvPr/>
-        </p:nvSpPr>
-        <p:spPr>
-          <a:xfrm>
-            <a:off x="9359900" y="3149600"/>
-            <a:ext cx="2082800" cy="406400"/>
-          </a:xfrm>
-          <a:prstGeom prst="rect">
-            <a:avLst/>
-          </a:prstGeom>
-          <a:noFill/>
-        </p:spPr>
-        <p:txBody>
-          <a:bodyPr wrap="square" lIns="0" tIns="0" rIns="0" bIns="0">
-            <a:spAutoFit/>
-          </a:bodyPr>
-          <a:lstStyle/>
-          <a:p>
-            <a:pPr algn="l"/>
-            <a:r>
-              <a:rPr lang="ja-JP" sz="1700" b="1" dirty="0">
-                <a:solidFill>
-                  <a:srgbClr val="1A2744"/>
-                </a:solidFill>
-                <a:latin typeface="Calibri"/>
-              </a:rPr>
-              <a:t>Z比ナイキスト</a:t>
-            </a:r>
-          </a:p>
-        </p:txBody>
-      </p:sp>
+      <mc:AlternateContent xmlns:mc="http://schemas.openxmlformats.org/markup-compatibility/2006">
+        <mc:Choice xmlns:a14="http://schemas.microsoft.com/office/drawing/2010/main" Requires="a14">
+          <p:sp>
+            <p:nvSpPr>
+              <p:cNvPr id="11" name="TextBox 10"/>
+              <p:cNvSpPr txBox="1"/>
+              <p:nvPr/>
+            </p:nvSpPr>
+            <p:spPr>
+              <a:xfrm>
+                <a:off x="9359900" y="3022600"/>
+                <a:ext cx="2082800" cy="282963"/>
+              </a:xfrm>
+              <a:prstGeom prst="rect">
+                <a:avLst/>
+              </a:prstGeom>
+              <a:noFill/>
+            </p:spPr>
+            <p:txBody>
+              <a:bodyPr wrap="square" lIns="0" tIns="0" rIns="0" bIns="0">
+                <a:spAutoFit/>
+              </a:bodyPr>
+              <a:lstStyle/>
+              <a:p>
+                <a:pPr algn="l"/>
+                <a14:m>
+                  <m:oMathPara xmlns:m="http://schemas.openxmlformats.org/officeDocument/2006/math">
+                    <m:oMathParaPr>
+                      <m:jc m:val="left"/>
+                    </m:oMathParaPr>
+                    <m:oMath>
+                      <m:sSub>
+                        <m:sSubPr>
+                          <m:ctrlPr>
+                            <a:rPr lang="en-US" sz="1700" dirty="0">
+                              <a:solidFill>
+                                <a:srgbClr val="8A2E3B"/>
+                              </a:solidFill>
+                              <a:latin typeface="Cambria Math" panose="02040503050406030204" pitchFamily="18" charset="0"/>
+                            </a:rPr>
+                          </m:ctrlPr>
+                        </m:sSubPr>
+                        <m:e>
+                          <m:r>
+                            <a:rPr lang="en-US" sz="1700" dirty="0">
+                              <a:solidFill>
+                                <a:srgbClr val="8A2E3B"/>
+                              </a:solidFill>
+                              <a:latin typeface="Cambria Math" panose="02040503050406030204" pitchFamily="18" charset="0"/>
+                            </a:rPr>
+                            <m:t>𝑍</m:t>
+                          </m:r>
+                        </m:e>
+                        <m:sub>
+                          <m:r>
+                            <a:rPr lang="en-US" sz="1700" dirty="0">
+                              <a:solidFill>
+                                <a:srgbClr val="8A2E3B"/>
+                              </a:solidFill>
+                              <a:latin typeface="Cambria Math" panose="02040503050406030204" pitchFamily="18" charset="0"/>
+                            </a:rPr>
+                            <m:t>𝑔𝑟𝑖𝑑</m:t>
+                          </m:r>
+                        </m:sub>
+                      </m:sSub>
+                      <m:r>
+                        <a:rPr lang="en-US" sz="1700" dirty="0">
+                          <a:solidFill>
+                            <a:srgbClr val="1A2744"/>
+                          </a:solidFill>
+                          <a:latin typeface="Cambria Math" panose="02040503050406030204" pitchFamily="18" charset="0"/>
+                        </a:rPr>
+                        <m:t>/</m:t>
+                      </m:r>
+                      <m:sSub>
+                        <m:sSubPr>
+                          <m:ctrlPr>
+                            <a:rPr lang="en-US" sz="1700" dirty="0">
+                              <a:solidFill>
+                                <a:srgbClr val="2C5F8A"/>
+                              </a:solidFill>
+                              <a:latin typeface="Cambria Math" panose="02040503050406030204" pitchFamily="18" charset="0"/>
+                            </a:rPr>
+                          </m:ctrlPr>
+                        </m:sSubPr>
+                        <m:e>
+                          <m:r>
+                            <a:rPr lang="en-US" sz="1700" dirty="0">
+                              <a:solidFill>
+                                <a:srgbClr val="2C5F8A"/>
+                              </a:solidFill>
+                              <a:latin typeface="Cambria Math" panose="02040503050406030204" pitchFamily="18" charset="0"/>
+                            </a:rPr>
+                            <m:t>𝑍</m:t>
+                          </m:r>
+                        </m:e>
+                        <m:sub>
+                          <m:r>
+                            <a:rPr lang="en-US" sz="1700" dirty="0">
+                              <a:solidFill>
+                                <a:srgbClr val="2C5F8A"/>
+                              </a:solidFill>
+                              <a:latin typeface="Cambria Math" panose="02040503050406030204" pitchFamily="18" charset="0"/>
+                            </a:rPr>
+                            <m:t>𝑖𝑛𝑣</m:t>
+                          </m:r>
+                        </m:sub>
+                      </m:sSub>
+                    </m:oMath>
+                  </m:oMathPara>
+                </a14:m>
+                <a:endParaRPr/>
+              </a:p>
+            </p:txBody>
+          </p:sp>
+        </mc:Choice>
+        <mc:Fallback>
+          <p:sp>
+            <p:nvSpPr>
+              <p:cNvPr id="11" name="TextBox 10"/>
+              <p:cNvSpPr txBox="1">
+                <a:spLocks noRot="1" noChangeAspect="1" noMove="1" noResize="1" noEditPoints="1" noAdjustHandles="1" noChangeArrowheads="1" noChangeShapeType="1" noTextEdit="1"/>
+              </p:cNvSpPr>
+              <p:nvPr/>
+            </p:nvSpPr>
+            <p:spPr>
+              <a:xfrm>
+                <a:off x="9359900" y="3022600"/>
+                <a:ext cx="2082800" cy="282963"/>
+              </a:xfrm>
+              <a:prstGeom prst="rect">
+                <a:avLst/>
+              </a:prstGeom>
+              <a:blipFill>
+                <a:blip r:embed="rId5"/>
+                <a:stretch>
+                  <a:fillRect l="-3030" t="-4348" b="-26087"/>
+                </a:stretch>
+              </a:blipFill>
+            </p:spPr>
+            <p:txBody>
+              <a:bodyPr/>
+              <a:lstStyle/>
+              <a:p>
+                <a:r>
+                  <a:rPr lang="ja-JP" altLang="en-US">
+                    <a:noFill/>
+                  </a:rPr>
+                  <a:t> </a:t>
+                </a:r>
+              </a:p>
+            </p:txBody>
+          </p:sp>
+        </mc:Fallback>
+      </mc:AlternateContent>
       <p:sp>
         <p:nvSpPr>
           <p:cNvPr id="12" name="TextBox 11"/>
@@ -9832,8 +10280,8 @@
         </p:nvSpPr>
         <p:spPr>
           <a:xfrm>
-            <a:off x="9359900" y="3683000"/>
-            <a:ext cx="2082800" cy="253916"/>
+            <a:off x="9359900" y="3505200"/>
+            <a:ext cx="2082800" cy="1016000"/>
           </a:xfrm>
           <a:prstGeom prst="rect">
             <a:avLst/>
@@ -10020,130 +10468,162 @@
           </a:p>
         </p:txBody>
       </p:sp>
-      <p:pic>
-        <p:nvPicPr>
-          <p:cNvPr id="392" name="Graphic 392" descr="系統のネットワーク図（Y行列）"/>
-          <p:cNvPicPr>
-            <a:picLocks noChangeAspect="1"/>
-          </p:cNvPicPr>
-          <p:nvPr/>
-        </p:nvPicPr>
-        <p:blipFill>
-          <a:blip>
-            <a:extLst>
-              <a:ext uri="{96DAC541-7B7A-43D3-8B79-37D633B846F1}">
-                <asvg:svgBlip xmlns:asvg="http://schemas.microsoft.com/office/drawing/2016/SVG/main" r:embed="rId2"/>
-              </a:ext>
-            </a:extLst>
-          </a:blip>
-          <a:stretch>
-            <a:fillRect/>
-          </a:stretch>
-        </p:blipFill>
-        <p:spPr>
-          <a:xfrm>
-            <a:off x="1536700" y="2489200"/>
-            <a:ext cx="508000" cy="508000"/>
-          </a:xfrm>
-          <a:prstGeom prst="rect">
-            <a:avLst/>
-          </a:prstGeom>
-        </p:spPr>
-      </p:pic>
-      <p:pic>
-        <p:nvPicPr>
-          <p:cNvPr id="393" name="Graphic 393" descr="短絡容量・系統の強さ"/>
-          <p:cNvPicPr>
-            <a:picLocks noChangeAspect="1"/>
-          </p:cNvPicPr>
-          <p:nvPr/>
-        </p:nvPicPr>
-        <p:blipFill>
-          <a:blip>
-            <a:extLst>
-              <a:ext uri="{96DAC541-7B7A-43D3-8B79-37D633B846F1}">
-                <asvg:svgBlip xmlns:asvg="http://schemas.microsoft.com/office/drawing/2016/SVG/main" r:embed="rId3"/>
-              </a:ext>
-            </a:extLst>
-          </a:blip>
-          <a:stretch>
-            <a:fillRect/>
-          </a:stretch>
-        </p:blipFill>
-        <p:spPr>
-          <a:xfrm>
-            <a:off x="4406900" y="2489200"/>
-            <a:ext cx="508000" cy="508000"/>
-          </a:xfrm>
-          <a:prstGeom prst="rect">
-            <a:avLst/>
-          </a:prstGeom>
-        </p:spPr>
-      </p:pic>
-      <p:pic>
-        <p:nvPicPr>
-          <p:cNvPr id="394" name="Graphic 394" descr="動揺モード・系統の揺れ"/>
-          <p:cNvPicPr>
-            <a:picLocks noChangeAspect="1"/>
-          </p:cNvPicPr>
-          <p:nvPr/>
-        </p:nvPicPr>
-        <p:blipFill>
-          <a:blip>
-            <a:extLst>
-              <a:ext uri="{96DAC541-7B7A-43D3-8B79-37D633B846F1}">
-                <asvg:svgBlip xmlns:asvg="http://schemas.microsoft.com/office/drawing/2016/SVG/main" r:embed="rId4"/>
-              </a:ext>
-            </a:extLst>
-          </a:blip>
-          <a:stretch>
-            <a:fillRect/>
-          </a:stretch>
-        </p:blipFill>
-        <p:spPr>
-          <a:xfrm>
-            <a:off x="7277100" y="2489200"/>
-            <a:ext cx="508000" cy="508000"/>
-          </a:xfrm>
-          <a:prstGeom prst="rect">
-            <a:avLst/>
-          </a:prstGeom>
-        </p:spPr>
-      </p:pic>
-      <p:pic>
-        <p:nvPicPr>
-          <p:cNvPr id="395" name="Graphic 395" descr="安定性判定"/>
-          <p:cNvPicPr>
-            <a:picLocks noChangeAspect="1"/>
-          </p:cNvPicPr>
-          <p:nvPr/>
-        </p:nvPicPr>
-        <p:blipFill>
-          <a:blip>
-            <a:extLst>
-              <a:ext uri="{96DAC541-7B7A-43D3-8B79-37D633B846F1}">
-                <asvg:svgBlip xmlns:asvg="http://schemas.microsoft.com/office/drawing/2016/SVG/main" r:embed="rId5"/>
-              </a:ext>
-            </a:extLst>
-          </a:blip>
-          <a:stretch>
-            <a:fillRect/>
-          </a:stretch>
-        </p:blipFill>
-        <p:spPr>
-          <a:xfrm>
-            <a:off x="10147300" y="2489200"/>
-            <a:ext cx="508000" cy="508000"/>
-          </a:xfrm>
-          <a:prstGeom prst="rect">
-            <a:avLst/>
-          </a:prstGeom>
-        </p:spPr>
-      </p:pic>
+      <p:sp>
+        <p:nvSpPr>
+          <p:cNvPr id="870" name="Num 870"/>
+          <p:cNvSpPr/>
+          <p:nvPr/>
+        </p:nvSpPr>
+        <p:spPr>
+          <a:xfrm>
+            <a:off x="749300" y="2489200"/>
+            <a:ext cx="355600" cy="355600"/>
+          </a:xfrm>
+          <a:prstGeom prst="ellipse">
+            <a:avLst/>
+          </a:prstGeom>
+          <a:solidFill>
+            <a:srgbClr val="8A2E3B"/>
+          </a:solidFill>
+          <a:ln>
+            <a:noFill/>
+          </a:ln>
+        </p:spPr>
+        <p:txBody>
+          <a:bodyPr lIns="0" tIns="0" rIns="0" bIns="0" rtlCol="0" anchor="ctr"/>
+          <a:lstStyle/>
+          <a:p>
+            <a:pPr algn="ctr"/>
+            <a:r>
+              <a:rPr lang="en-US" sz="1400" b="1" dirty="0">
+                <a:solidFill>
+                  <a:srgbClr val="FFFFFF"/>
+                </a:solidFill>
+                <a:latin typeface="Calibri"/>
+              </a:rPr>
+              <a:t>1</a:t>
+            </a:r>
+          </a:p>
+        </p:txBody>
+      </p:sp>
+      <p:sp>
+        <p:nvSpPr>
+          <p:cNvPr id="871" name="Num 871"/>
+          <p:cNvSpPr/>
+          <p:nvPr/>
+        </p:nvSpPr>
+        <p:spPr>
+          <a:xfrm>
+            <a:off x="3619500" y="2489200"/>
+            <a:ext cx="355600" cy="355600"/>
+          </a:xfrm>
+          <a:prstGeom prst="ellipse">
+            <a:avLst/>
+          </a:prstGeom>
+          <a:solidFill>
+            <a:srgbClr val="8A2E3B"/>
+          </a:solidFill>
+          <a:ln>
+            <a:noFill/>
+          </a:ln>
+        </p:spPr>
+        <p:txBody>
+          <a:bodyPr lIns="0" tIns="0" rIns="0" bIns="0" rtlCol="0" anchor="ctr"/>
+          <a:lstStyle/>
+          <a:p>
+            <a:pPr algn="ctr"/>
+            <a:r>
+              <a:rPr lang="en-US" sz="1400" b="1" dirty="0">
+                <a:solidFill>
+                  <a:srgbClr val="FFFFFF"/>
+                </a:solidFill>
+                <a:latin typeface="Calibri"/>
+              </a:rPr>
+              <a:t>2</a:t>
+            </a:r>
+          </a:p>
+        </p:txBody>
+      </p:sp>
+      <p:sp>
+        <p:nvSpPr>
+          <p:cNvPr id="872" name="Num 872"/>
+          <p:cNvSpPr/>
+          <p:nvPr/>
+        </p:nvSpPr>
+        <p:spPr>
+          <a:xfrm>
+            <a:off x="6489700" y="2489200"/>
+            <a:ext cx="355600" cy="355600"/>
+          </a:xfrm>
+          <a:prstGeom prst="ellipse">
+            <a:avLst/>
+          </a:prstGeom>
+          <a:solidFill>
+            <a:srgbClr val="8A2E3B"/>
+          </a:solidFill>
+          <a:ln>
+            <a:noFill/>
+          </a:ln>
+        </p:spPr>
+        <p:txBody>
+          <a:bodyPr lIns="0" tIns="0" rIns="0" bIns="0" rtlCol="0" anchor="ctr"/>
+          <a:lstStyle/>
+          <a:p>
+            <a:pPr algn="ctr"/>
+            <a:r>
+              <a:rPr lang="en-US" sz="1400" b="1" dirty="0">
+                <a:solidFill>
+                  <a:srgbClr val="FFFFFF"/>
+                </a:solidFill>
+                <a:latin typeface="Calibri"/>
+              </a:rPr>
+              <a:t>3</a:t>
+            </a:r>
+          </a:p>
+        </p:txBody>
+      </p:sp>
+      <p:sp>
+        <p:nvSpPr>
+          <p:cNvPr id="873" name="Num 873"/>
+          <p:cNvSpPr/>
+          <p:nvPr/>
+        </p:nvSpPr>
+        <p:spPr>
+          <a:xfrm>
+            <a:off x="9359900" y="2489200"/>
+            <a:ext cx="355600" cy="355600"/>
+          </a:xfrm>
+          <a:prstGeom prst="ellipse">
+            <a:avLst/>
+          </a:prstGeom>
+          <a:solidFill>
+            <a:srgbClr val="8A2E3B"/>
+          </a:solidFill>
+          <a:ln>
+            <a:noFill/>
+          </a:ln>
+        </p:spPr>
+        <p:txBody>
+          <a:bodyPr lIns="0" tIns="0" rIns="0" bIns="0" rtlCol="0" anchor="ctr"/>
+          <a:lstStyle/>
+          <a:p>
+            <a:pPr algn="ctr"/>
+            <a:r>
+              <a:rPr lang="en-US" sz="1400" b="1" dirty="0">
+                <a:solidFill>
+                  <a:srgbClr val="FFFFFF"/>
+                </a:solidFill>
+                <a:latin typeface="Calibri"/>
+              </a:rPr>
+              <a:t>4</a:t>
+            </a:r>
+          </a:p>
+        </p:txBody>
+      </p:sp>
     </p:spTree>
     <p:extLst>
       <p:ext uri="{BB962C8B-B14F-4D97-AF65-F5344CB8AC3E}">
-        <p14:creationId xmlns:p14="http://schemas.microsoft.com/office/powerpoint/2010/main" val="3152034267"/>
+        <p14:creationId xmlns:p14="http://schemas.microsoft.com/office/powerpoint/2010/main" val="475579695"/>
       </p:ext>
     </p:extLst>
   </p:cSld>
@@ -10179,7 +10659,7 @@
         <p:spPr>
           <a:xfrm>
             <a:off x="0" y="0"/>
-            <a:ext cx="12191695" cy="6858000"/>
+            <a:ext cx="12192000" cy="6858000"/>
           </a:xfrm>
           <a:prstGeom prst="rect">
             <a:avLst/>
@@ -10223,7 +10703,7 @@
         </p:nvSpPr>
         <p:spPr>
           <a:xfrm>
-            <a:off x="546100" y="2159000"/>
+            <a:off x="495300" y="2009458"/>
             <a:ext cx="5969000" cy="2286000"/>
           </a:xfrm>
           <a:prstGeom prst="rect">
@@ -10509,122 +10989,6 @@
       </p:sp>
       <p:sp>
         <p:nvSpPr>
-          <p:cNvPr id="10" name="Deco 310"/>
-          <p:cNvSpPr/>
-          <p:nvPr/>
-        </p:nvSpPr>
-        <p:spPr>
-          <a:xfrm>
-            <a:off x="6680200" y="2235200"/>
-            <a:ext cx="4965700" cy="2870200"/>
-          </a:xfrm>
-          <a:prstGeom prst="rect">
-            <a:avLst/>
-          </a:prstGeom>
-          <a:solidFill>
-            <a:srgbClr val="F4F6FA"/>
-          </a:solidFill>
-          <a:ln>
-            <a:noFill/>
-          </a:ln>
-        </p:spPr>
-        <p:txBody>
-          <a:bodyPr/>
-          <a:lstStyle/>
-          <a:p>
-            <a:endParaRPr/>
-          </a:p>
-        </p:txBody>
-      </p:sp>
-      <p:sp>
-        <p:nvSpPr>
-          <p:cNvPr id="12" name="Deco 311"/>
-          <p:cNvSpPr/>
-          <p:nvPr/>
-        </p:nvSpPr>
-        <p:spPr>
-          <a:xfrm>
-            <a:off x="6680200" y="2235200"/>
-            <a:ext cx="4965700" cy="38100"/>
-          </a:xfrm>
-          <a:prstGeom prst="rect">
-            <a:avLst/>
-          </a:prstGeom>
-          <a:solidFill>
-            <a:srgbClr val="8A2E3B"/>
-          </a:solidFill>
-          <a:ln>
-            <a:noFill/>
-          </a:ln>
-        </p:spPr>
-        <p:txBody>
-          <a:bodyPr/>
-          <a:lstStyle/>
-          <a:p>
-            <a:endParaRPr/>
-          </a:p>
-        </p:txBody>
-      </p:sp>
-      <p:sp>
-        <p:nvSpPr>
-          <p:cNvPr id="13" name="Deco 320"/>
-          <p:cNvSpPr/>
-          <p:nvPr/>
-        </p:nvSpPr>
-        <p:spPr>
-          <a:xfrm>
-            <a:off x="546100" y="2235200"/>
-            <a:ext cx="5969000" cy="1270000"/>
-          </a:xfrm>
-          <a:prstGeom prst="rect">
-            <a:avLst/>
-          </a:prstGeom>
-          <a:solidFill>
-            <a:srgbClr val="F4F6FA"/>
-          </a:solidFill>
-          <a:ln>
-            <a:noFill/>
-          </a:ln>
-        </p:spPr>
-        <p:txBody>
-          <a:bodyPr/>
-          <a:lstStyle/>
-          <a:p>
-            <a:endParaRPr/>
-          </a:p>
-        </p:txBody>
-      </p:sp>
-      <p:sp>
-        <p:nvSpPr>
-          <p:cNvPr id="14" name="Deco 321"/>
-          <p:cNvSpPr/>
-          <p:nvPr/>
-        </p:nvSpPr>
-        <p:spPr>
-          <a:xfrm>
-            <a:off x="546100" y="2235200"/>
-            <a:ext cx="38100" cy="1270000"/>
-          </a:xfrm>
-          <a:prstGeom prst="rect">
-            <a:avLst/>
-          </a:prstGeom>
-          <a:solidFill>
-            <a:srgbClr val="8A2E3B"/>
-          </a:solidFill>
-          <a:ln>
-            <a:noFill/>
-          </a:ln>
-        </p:spPr>
-        <p:txBody>
-          <a:bodyPr/>
-          <a:lstStyle/>
-          <a:p>
-            <a:endParaRPr/>
-          </a:p>
-        </p:txBody>
-      </p:sp>
-      <p:sp>
-        <p:nvSpPr>
           <p:cNvPr id="3" name="TextBox 2"/>
           <p:cNvSpPr txBox="1"/>
           <p:nvPr/>
@@ -10732,515 +11096,917 @@
           </a:p>
         </p:txBody>
       </p:sp>
-      <p:sp>
-        <p:nvSpPr>
-          <p:cNvPr id="6" name="Rectangle 5"/>
-          <p:cNvSpPr/>
-          <p:nvPr/>
-        </p:nvSpPr>
-        <p:spPr>
-          <a:xfrm>
-            <a:off x="546100" y="4826000"/>
-            <a:ext cx="5969000" cy="1346200"/>
-          </a:xfrm>
-          <a:prstGeom prst="rect">
-            <a:avLst/>
-          </a:prstGeom>
-          <a:solidFill>
-            <a:srgbClr val="F4F6FA"/>
-          </a:solidFill>
-          <a:ln/>
-          <a:effectLst/>
-        </p:spPr>
-        <p:style>
-          <a:lnRef idx="1">
-            <a:schemeClr val="accent1"/>
-          </a:lnRef>
-          <a:fillRef idx="3">
-            <a:schemeClr val="accent1"/>
-          </a:fillRef>
-          <a:effectRef idx="2">
-            <a:schemeClr val="accent1"/>
-          </a:effectRef>
-          <a:fontRef idx="minor">
-            <a:schemeClr val="lt1"/>
-          </a:fontRef>
-        </p:style>
-        <p:txBody>
-          <a:bodyPr wrap="square" lIns="228600" tIns="152400" rIns="152400" bIns="152400" rtlCol="0" anchor="ctr"/>
-          <a:lstStyle/>
-          <a:p>
-            <a:pPr algn="l">
-              <a:spcAft>
-                <a:spcPts val="400"/>
-              </a:spcAft>
-            </a:pPr>
-            <a:r>
-              <a:rPr lang="en-US" sz="1900" b="1" dirty="0">
-                <a:solidFill>
-                  <a:srgbClr val="2C5F8A"/>
-                </a:solidFill>
-                <a:latin typeface="Cambria Math"/>
-              </a:rPr>
-              <a:t>I</a:t>
-            </a:r>
-            <a:r>
-              <a:rPr lang="en-US" sz="1900" dirty="0">
-                <a:solidFill>
-                  <a:srgbClr val="1A2744"/>
-                </a:solidFill>
-                <a:latin typeface="Cambria Math"/>
-              </a:rPr>
-              <a:t> = </a:t>
-            </a:r>
-            <a:r>
-              <a:rPr lang="en-US" sz="1900" b="1" dirty="0">
-                <a:solidFill>
-                  <a:srgbClr val="8A2E3B"/>
-                </a:solidFill>
-                <a:latin typeface="Cambria Math"/>
-              </a:rPr>
-              <a:t>Y</a:t>
-            </a:r>
-            <a:r>
-              <a:rPr lang="en-US" sz="1900" dirty="0">
-                <a:solidFill>
-                  <a:srgbClr val="1A2744"/>
-                </a:solidFill>
-                <a:latin typeface="Cambria Math"/>
-              </a:rPr>
-              <a:t> · </a:t>
-            </a:r>
-            <a:r>
-              <a:rPr lang="en-US" sz="1900" b="1" dirty="0">
-                <a:solidFill>
-                  <a:srgbClr val="2E7D5B"/>
-                </a:solidFill>
-                <a:latin typeface="Cambria Math"/>
-              </a:rPr>
-              <a:t>V</a:t>
-            </a:r>
-          </a:p>
-          <a:p>
-            <a:pPr algn="l">
-              <a:spcAft>
-                <a:spcPts val="500"/>
-              </a:spcAft>
-            </a:pPr>
-            <a:r>
-              <a:rPr lang="en-US" sz="1900" b="1" dirty="0">
-                <a:solidFill>
-                  <a:srgbClr val="8A2E3B"/>
-                </a:solidFill>
-                <a:latin typeface="Cambria Math"/>
-              </a:rPr>
-              <a:t>Y</a:t>
-            </a:r>
-            <a:r>
-              <a:rPr lang="en-US" sz="1368" b="1" baseline="-25000" dirty="0">
-                <a:solidFill>
-                  <a:srgbClr val="8A2E3B"/>
-                </a:solidFill>
-                <a:latin typeface="Cambria Math"/>
-              </a:rPr>
-              <a:t>ij</a:t>
-            </a:r>
-            <a:r>
-              <a:rPr lang="en-US" sz="1900" dirty="0">
-                <a:solidFill>
-                  <a:srgbClr val="1A2744"/>
-                </a:solidFill>
-                <a:latin typeface="Cambria Math"/>
-              </a:rPr>
-              <a:t> = − </a:t>
-            </a:r>
-            <a:r>
-              <a:rPr lang="en-US" sz="1900" b="1" dirty="0">
-                <a:solidFill>
-                  <a:srgbClr val="1A2744"/>
-                </a:solidFill>
-                <a:latin typeface="Cambria Math"/>
-              </a:rPr>
-              <a:t>y</a:t>
-            </a:r>
-            <a:r>
-              <a:rPr lang="en-US" sz="1368" baseline="-25000" dirty="0">
-                <a:solidFill>
-                  <a:srgbClr val="1A2744"/>
-                </a:solidFill>
-                <a:latin typeface="Cambria Math"/>
-              </a:rPr>
-              <a:t>ij</a:t>
-            </a:r>
-            <a:r>
-              <a:rPr lang="en-US" sz="1900" dirty="0">
-                <a:solidFill>
-                  <a:srgbClr val="1A2744"/>
-                </a:solidFill>
-                <a:latin typeface="Cambria Math"/>
-              </a:rPr>
-              <a:t> ,    </a:t>
-            </a:r>
-            <a:r>
-              <a:rPr lang="en-US" sz="1900" b="1" dirty="0">
-                <a:solidFill>
-                  <a:srgbClr val="8A2E3B"/>
-                </a:solidFill>
-                <a:latin typeface="Cambria Math"/>
-              </a:rPr>
-              <a:t>Y</a:t>
-            </a:r>
-            <a:r>
-              <a:rPr lang="en-US" sz="1368" b="1" baseline="-25000" dirty="0">
-                <a:solidFill>
-                  <a:srgbClr val="8A2E3B"/>
-                </a:solidFill>
-                <a:latin typeface="Cambria Math"/>
-              </a:rPr>
-              <a:t>ii</a:t>
-            </a:r>
-            <a:r>
-              <a:rPr lang="en-US" sz="1900" dirty="0">
-                <a:solidFill>
-                  <a:srgbClr val="1A2744"/>
-                </a:solidFill>
-                <a:latin typeface="Cambria Math"/>
-              </a:rPr>
-              <a:t> = Σ</a:t>
-            </a:r>
-            <a:r>
-              <a:rPr lang="en-US" sz="1368" baseline="-25000" dirty="0">
-                <a:solidFill>
-                  <a:srgbClr val="1A2744"/>
-                </a:solidFill>
-                <a:latin typeface="Cambria Math"/>
-              </a:rPr>
-              <a:t>k</a:t>
-            </a:r>
-            <a:r>
-              <a:rPr lang="en-US" sz="1900" dirty="0">
-                <a:solidFill>
-                  <a:srgbClr val="1A2744"/>
-                </a:solidFill>
-                <a:latin typeface="Cambria Math"/>
-              </a:rPr>
-              <a:t> </a:t>
-            </a:r>
-            <a:r>
-              <a:rPr lang="en-US" sz="1900" b="1" dirty="0">
-                <a:solidFill>
-                  <a:srgbClr val="1A2744"/>
-                </a:solidFill>
-                <a:latin typeface="Cambria Math"/>
-              </a:rPr>
-              <a:t>y</a:t>
-            </a:r>
-            <a:r>
-              <a:rPr lang="en-US" sz="1368" baseline="-25000" dirty="0">
-                <a:solidFill>
-                  <a:srgbClr val="1A2744"/>
-                </a:solidFill>
-                <a:latin typeface="Cambria Math"/>
-              </a:rPr>
-              <a:t>ik</a:t>
-            </a:r>
-            <a:r>
-              <a:rPr lang="en-US" sz="1900" dirty="0">
-                <a:solidFill>
-                  <a:srgbClr val="1A2744"/>
-                </a:solidFill>
-                <a:latin typeface="Cambria Math"/>
-              </a:rPr>
-              <a:t> + </a:t>
-            </a:r>
-            <a:r>
-              <a:rPr lang="en-US" sz="1900" b="1" dirty="0">
-                <a:solidFill>
-                  <a:srgbClr val="1A2744"/>
-                </a:solidFill>
-                <a:latin typeface="Cambria Math"/>
-              </a:rPr>
-              <a:t>y</a:t>
-            </a:r>
-            <a:r>
-              <a:rPr lang="en-US" sz="1368" baseline="-25000" dirty="0">
-                <a:solidFill>
-                  <a:srgbClr val="1A2744"/>
-                </a:solidFill>
-                <a:latin typeface="Cambria Math"/>
-              </a:rPr>
-              <a:t>i(sh)</a:t>
-            </a:r>
-          </a:p>
-          <a:p>
-            <a:pPr algn="l">
-              <a:lnSpc>
-                <a:spcPct val="130000"/>
-              </a:lnSpc>
-            </a:pPr>
-            <a:r>
-              <a:rPr lang="ja-JP" sz="1400" dirty="0">
-                <a:solidFill>
-                  <a:srgbClr val="5B6470"/>
-                </a:solidFill>
-                <a:latin typeface="Calibri"/>
-              </a:rPr>
-              <a:t>I = 節点注入電流 ・ V = 節点電圧 (17,862² ・ 非零 0.019%)</a:t>
-            </a:r>
-          </a:p>
-        </p:txBody>
-      </p:sp>
-      <p:sp>
-        <p:nvSpPr>
-          <p:cNvPr id="7" name="Rectangle 6"/>
-          <p:cNvSpPr/>
-          <p:nvPr/>
-        </p:nvSpPr>
-        <p:spPr>
-          <a:xfrm>
-            <a:off x="6680200" y="2159000"/>
-            <a:ext cx="4965700" cy="1651000"/>
-          </a:xfrm>
-          <a:prstGeom prst="rect">
-            <a:avLst/>
-          </a:prstGeom>
-          <a:solidFill>
-            <a:srgbClr val="F4F6FA"/>
-          </a:solidFill>
-          <a:ln/>
-          <a:effectLst/>
-        </p:spPr>
-        <p:style>
-          <a:lnRef idx="1">
-            <a:schemeClr val="accent1"/>
-          </a:lnRef>
-          <a:fillRef idx="3">
-            <a:schemeClr val="accent1"/>
-          </a:fillRef>
-          <a:effectRef idx="2">
-            <a:schemeClr val="accent1"/>
-          </a:effectRef>
-          <a:fontRef idx="minor">
-            <a:schemeClr val="lt1"/>
-          </a:fontRef>
-        </p:style>
-        <p:txBody>
-          <a:bodyPr wrap="square" lIns="228600" tIns="152400" rIns="152400" bIns="152400" rtlCol="0" anchor="ctr"/>
-          <a:lstStyle/>
-          <a:p>
-            <a:pPr algn="l">
-              <a:spcAft>
-                <a:spcPts val="500"/>
-              </a:spcAft>
-            </a:pPr>
-            <a:r>
-              <a:rPr lang="en-US" sz="1700" b="1" dirty="0">
-                <a:solidFill>
-                  <a:srgbClr val="1A2744"/>
-                </a:solidFill>
-                <a:latin typeface="Cambria Math"/>
-              </a:rPr>
-              <a:t>P</a:t>
-            </a:r>
-            <a:r>
-              <a:rPr lang="en-US" sz="1224" baseline="-25000" dirty="0">
-                <a:solidFill>
-                  <a:srgbClr val="1A2744"/>
-                </a:solidFill>
-                <a:latin typeface="Cambria Math"/>
-              </a:rPr>
-              <a:t>i</a:t>
-            </a:r>
-            <a:r>
-              <a:rPr lang="en-US" sz="1700" dirty="0">
-                <a:solidFill>
-                  <a:srgbClr val="1A2744"/>
-                </a:solidFill>
-                <a:latin typeface="Cambria Math"/>
-              </a:rPr>
-              <a:t> = </a:t>
-            </a:r>
-            <a:r>
-              <a:rPr lang="en-US" sz="1700" b="1" dirty="0">
-                <a:solidFill>
-                  <a:srgbClr val="2E7D5B"/>
-                </a:solidFill>
-                <a:latin typeface="Cambria Math"/>
-              </a:rPr>
-              <a:t>V</a:t>
-            </a:r>
-            <a:r>
-              <a:rPr lang="en-US" sz="1224" baseline="-25000" dirty="0">
-                <a:solidFill>
-                  <a:srgbClr val="2E7D5B"/>
-                </a:solidFill>
-                <a:latin typeface="Cambria Math"/>
-              </a:rPr>
-              <a:t>i</a:t>
-            </a:r>
-            <a:r>
-              <a:rPr lang="en-US" sz="1700" dirty="0">
-                <a:solidFill>
-                  <a:srgbClr val="1A2744"/>
-                </a:solidFill>
-                <a:latin typeface="Cambria Math"/>
-              </a:rPr>
-              <a:t> Σ</a:t>
-            </a:r>
-            <a:r>
-              <a:rPr lang="en-US" sz="1224" baseline="-25000" dirty="0">
-                <a:solidFill>
-                  <a:srgbClr val="1A2744"/>
-                </a:solidFill>
-                <a:latin typeface="Cambria Math"/>
-              </a:rPr>
-              <a:t>j</a:t>
-            </a:r>
-            <a:r>
-              <a:rPr lang="en-US" sz="1700" dirty="0">
-                <a:solidFill>
-                  <a:srgbClr val="1A2744"/>
-                </a:solidFill>
-                <a:latin typeface="Cambria Math"/>
-              </a:rPr>
-              <a:t> </a:t>
-            </a:r>
-            <a:r>
-              <a:rPr lang="en-US" sz="1700" b="1" dirty="0">
-                <a:solidFill>
-                  <a:srgbClr val="2E7D5B"/>
-                </a:solidFill>
-                <a:latin typeface="Cambria Math"/>
-              </a:rPr>
-              <a:t>V</a:t>
-            </a:r>
-            <a:r>
-              <a:rPr lang="en-US" sz="1224" baseline="-25000" dirty="0">
-                <a:solidFill>
-                  <a:srgbClr val="2E7D5B"/>
-                </a:solidFill>
-                <a:latin typeface="Cambria Math"/>
-              </a:rPr>
-              <a:t>j</a:t>
-            </a:r>
-            <a:r>
-              <a:rPr lang="en-US" sz="1700" dirty="0">
-                <a:solidFill>
-                  <a:srgbClr val="1A2744"/>
-                </a:solidFill>
-                <a:latin typeface="Cambria Math"/>
-              </a:rPr>
-              <a:t> ( </a:t>
-            </a:r>
-            <a:r>
-              <a:rPr lang="en-US" sz="1700" b="1" dirty="0">
-                <a:solidFill>
-                  <a:srgbClr val="2C5F8A"/>
-                </a:solidFill>
-                <a:latin typeface="Cambria Math"/>
-              </a:rPr>
-              <a:t>G</a:t>
-            </a:r>
-            <a:r>
-              <a:rPr lang="en-US" sz="1224" baseline="-25000" dirty="0">
-                <a:solidFill>
-                  <a:srgbClr val="2C5F8A"/>
-                </a:solidFill>
-                <a:latin typeface="Cambria Math"/>
-              </a:rPr>
-              <a:t>ij</a:t>
-            </a:r>
-            <a:r>
-              <a:rPr lang="en-US" sz="1700" dirty="0">
-                <a:solidFill>
-                  <a:srgbClr val="1A2744"/>
-                </a:solidFill>
-                <a:latin typeface="Cambria Math"/>
-              </a:rPr>
-              <a:t> cos θ</a:t>
-            </a:r>
-            <a:r>
-              <a:rPr lang="en-US" sz="1224" baseline="-25000" dirty="0">
-                <a:solidFill>
-                  <a:srgbClr val="1A2744"/>
-                </a:solidFill>
-                <a:latin typeface="Cambria Math"/>
-              </a:rPr>
-              <a:t>ij</a:t>
-            </a:r>
-            <a:r>
-              <a:rPr lang="en-US" sz="1700" dirty="0">
-                <a:solidFill>
-                  <a:srgbClr val="1A2744"/>
-                </a:solidFill>
-                <a:latin typeface="Cambria Math"/>
-              </a:rPr>
-              <a:t> + </a:t>
-            </a:r>
-            <a:r>
-              <a:rPr lang="en-US" sz="1700" b="1" dirty="0">
-                <a:solidFill>
-                  <a:srgbClr val="8A2E3B"/>
-                </a:solidFill>
-                <a:latin typeface="Cambria Math"/>
-              </a:rPr>
-              <a:t>B</a:t>
-            </a:r>
-            <a:r>
-              <a:rPr lang="en-US" sz="1224" baseline="-25000" dirty="0">
-                <a:solidFill>
-                  <a:srgbClr val="8A2E3B"/>
-                </a:solidFill>
-                <a:latin typeface="Cambria Math"/>
-              </a:rPr>
-              <a:t>ij</a:t>
-            </a:r>
-            <a:r>
-              <a:rPr lang="en-US" sz="1700" dirty="0">
-                <a:solidFill>
-                  <a:srgbClr val="1A2744"/>
-                </a:solidFill>
-                <a:latin typeface="Cambria Math"/>
-              </a:rPr>
-              <a:t> sin θ</a:t>
-            </a:r>
-            <a:r>
-              <a:rPr lang="en-US" sz="1224" baseline="-25000" dirty="0">
-                <a:solidFill>
-                  <a:srgbClr val="1A2744"/>
-                </a:solidFill>
-                <a:latin typeface="Cambria Math"/>
-              </a:rPr>
-              <a:t>ij</a:t>
-            </a:r>
-            <a:r>
-              <a:rPr lang="en-US" sz="1700" dirty="0">
-                <a:solidFill>
-                  <a:srgbClr val="1A2744"/>
-                </a:solidFill>
-                <a:latin typeface="Cambria Math"/>
-              </a:rPr>
-              <a:t> )</a:t>
-            </a:r>
-          </a:p>
-          <a:p>
-            <a:pPr algn="l">
-              <a:lnSpc>
-                <a:spcPct val="130000"/>
-              </a:lnSpc>
-            </a:pPr>
-            <a:r>
-              <a:rPr lang="ja-JP" sz="1400" dirty="0">
-                <a:solidFill>
-                  <a:srgbClr val="5B6470"/>
-                </a:solidFill>
-                <a:latin typeface="Calibri"/>
-              </a:rPr>
-              <a:t>潮流方程式。G + jB = Y の実部/虚部、θij = 位相差。Newton–Raphson で解く = 潮流計算。</a:t>
-            </a:r>
-          </a:p>
-        </p:txBody>
-      </p:sp>
+      <mc:AlternateContent xmlns:mc="http://schemas.openxmlformats.org/markup-compatibility/2006">
+        <mc:Choice xmlns:a14="http://schemas.microsoft.com/office/drawing/2010/main" Requires="a14">
+          <p:sp>
+            <p:nvSpPr>
+              <p:cNvPr id="6" name="Rectangle 5"/>
+              <p:cNvSpPr/>
+              <p:nvPr/>
+            </p:nvSpPr>
+            <p:spPr>
+              <a:xfrm>
+                <a:off x="546100" y="4826000"/>
+                <a:ext cx="5969000" cy="1346200"/>
+              </a:xfrm>
+              <a:prstGeom prst="rect">
+                <a:avLst/>
+              </a:prstGeom>
+              <a:solidFill>
+                <a:srgbClr val="F4F6FA"/>
+              </a:solidFill>
+              <a:ln>
+                <a:noFill/>
+              </a:ln>
+              <a:effectLst/>
+            </p:spPr>
+            <p:style>
+              <a:lnRef idx="1">
+                <a:schemeClr val="accent1"/>
+              </a:lnRef>
+              <a:fillRef idx="3">
+                <a:schemeClr val="accent1"/>
+              </a:fillRef>
+              <a:effectRef idx="2">
+                <a:schemeClr val="accent1"/>
+              </a:effectRef>
+              <a:fontRef idx="minor">
+                <a:schemeClr val="lt1"/>
+              </a:fontRef>
+            </p:style>
+            <p:txBody>
+              <a:bodyPr wrap="square" lIns="228600" tIns="152400" rIns="152400" bIns="152400" rtlCol="0" anchor="ctr"/>
+              <a:lstStyle/>
+              <a:p>
+                <a:pPr algn="l"/>
+                <a14:m>
+                  <m:oMathPara xmlns:m="http://schemas.openxmlformats.org/officeDocument/2006/math">
+                    <m:oMathParaPr>
+                      <m:jc m:val="left"/>
+                    </m:oMathParaPr>
+                    <m:oMath>
+                      <m:r>
+                        <a:rPr lang="en-US" sz="1800" dirty="0">
+                          <a:solidFill>
+                            <a:srgbClr val="2C5F8A"/>
+                          </a:solidFill>
+                          <a:latin typeface="Cambria Math" panose="02040503050406030204" pitchFamily="18" charset="0"/>
+                        </a:rPr>
+                        <m:t>𝐼</m:t>
+                      </m:r>
+                      <m:r>
+                        <a:rPr lang="en-US" sz="1800" dirty="0">
+                          <a:solidFill>
+                            <a:srgbClr val="1A2744"/>
+                          </a:solidFill>
+                          <a:latin typeface="Cambria Math" panose="02040503050406030204" pitchFamily="18" charset="0"/>
+                        </a:rPr>
+                        <m:t> = </m:t>
+                      </m:r>
+                      <m:r>
+                        <a:rPr lang="en-US" sz="1800" dirty="0">
+                          <a:solidFill>
+                            <a:srgbClr val="8A2E3B"/>
+                          </a:solidFill>
+                          <a:latin typeface="Cambria Math" panose="02040503050406030204" pitchFamily="18" charset="0"/>
+                        </a:rPr>
+                        <m:t>𝑌</m:t>
+                      </m:r>
+                      <m:r>
+                        <a:rPr lang="en-US" sz="1800" dirty="0">
+                          <a:solidFill>
+                            <a:srgbClr val="2E7D5B"/>
+                          </a:solidFill>
+                          <a:latin typeface="Cambria Math" panose="02040503050406030204" pitchFamily="18" charset="0"/>
+                        </a:rPr>
+                        <m:t>𝑉</m:t>
+                      </m:r>
+                    </m:oMath>
+                  </m:oMathPara>
+                </a14:m>
+                <a:endParaRPr dirty="0"/>
+              </a:p>
+              <a:p>
+                <a:pPr algn="l"/>
+                <a14:m>
+                  <m:oMathPara xmlns:m="http://schemas.openxmlformats.org/officeDocument/2006/math">
+                    <m:oMathParaPr>
+                      <m:jc m:val="left"/>
+                    </m:oMathParaPr>
+                    <m:oMath>
+                      <m:sSub>
+                        <m:sSubPr>
+                          <m:ctrlPr>
+                            <a:rPr lang="en-US" sz="1800" dirty="0">
+                              <a:solidFill>
+                                <a:srgbClr val="8A2E3B"/>
+                              </a:solidFill>
+                              <a:latin typeface="Cambria Math" panose="02040503050406030204" pitchFamily="18" charset="0"/>
+                            </a:rPr>
+                          </m:ctrlPr>
+                        </m:sSubPr>
+                        <m:e>
+                          <m:r>
+                            <a:rPr lang="en-US" sz="1800" dirty="0">
+                              <a:solidFill>
+                                <a:srgbClr val="8A2E3B"/>
+                              </a:solidFill>
+                              <a:latin typeface="Cambria Math" panose="02040503050406030204" pitchFamily="18" charset="0"/>
+                            </a:rPr>
+                            <m:t>𝑌</m:t>
+                          </m:r>
+                        </m:e>
+                        <m:sub>
+                          <m:r>
+                            <a:rPr lang="en-US" sz="1800" dirty="0">
+                              <a:solidFill>
+                                <a:srgbClr val="8A2E3B"/>
+                              </a:solidFill>
+                              <a:latin typeface="Cambria Math" panose="02040503050406030204" pitchFamily="18" charset="0"/>
+                            </a:rPr>
+                            <m:t>𝑖𝑗</m:t>
+                          </m:r>
+                        </m:sub>
+                      </m:sSub>
+                      <m:r>
+                        <a:rPr lang="en-US" sz="1800" dirty="0">
+                          <a:solidFill>
+                            <a:srgbClr val="1A2744"/>
+                          </a:solidFill>
+                          <a:latin typeface="Cambria Math" panose="02040503050406030204" pitchFamily="18" charset="0"/>
+                        </a:rPr>
+                        <m:t> = −</m:t>
+                      </m:r>
+                      <m:sSub>
+                        <m:sSubPr>
+                          <m:ctrlPr>
+                            <a:rPr lang="en-US" sz="1800" dirty="0">
+                              <a:solidFill>
+                                <a:srgbClr val="1A2744"/>
+                              </a:solidFill>
+                              <a:latin typeface="Cambria Math" panose="02040503050406030204" pitchFamily="18" charset="0"/>
+                            </a:rPr>
+                          </m:ctrlPr>
+                        </m:sSubPr>
+                        <m:e>
+                          <m:r>
+                            <a:rPr lang="en-US" sz="1800" dirty="0">
+                              <a:solidFill>
+                                <a:srgbClr val="1A2744"/>
+                              </a:solidFill>
+                              <a:latin typeface="Cambria Math" panose="02040503050406030204" pitchFamily="18" charset="0"/>
+                            </a:rPr>
+                            <m:t>𝑦</m:t>
+                          </m:r>
+                        </m:e>
+                        <m:sub>
+                          <m:r>
+                            <a:rPr lang="en-US" sz="1800" dirty="0">
+                              <a:solidFill>
+                                <a:srgbClr val="1A2744"/>
+                              </a:solidFill>
+                              <a:latin typeface="Cambria Math" panose="02040503050406030204" pitchFamily="18" charset="0"/>
+                            </a:rPr>
+                            <m:t>𝑖𝑗</m:t>
+                          </m:r>
+                        </m:sub>
+                      </m:sSub>
+                      <m:r>
+                        <a:rPr lang="en-US" sz="1800" dirty="0">
+                          <a:solidFill>
+                            <a:srgbClr val="1A2744"/>
+                          </a:solidFill>
+                          <a:latin typeface="Cambria Math" panose="02040503050406030204" pitchFamily="18" charset="0"/>
+                        </a:rPr>
+                        <m:t> ,   </m:t>
+                      </m:r>
+                      <m:sSub>
+                        <m:sSubPr>
+                          <m:ctrlPr>
+                            <a:rPr lang="en-US" sz="1800" dirty="0">
+                              <a:solidFill>
+                                <a:srgbClr val="8A2E3B"/>
+                              </a:solidFill>
+                              <a:latin typeface="Cambria Math" panose="02040503050406030204" pitchFamily="18" charset="0"/>
+                            </a:rPr>
+                          </m:ctrlPr>
+                        </m:sSubPr>
+                        <m:e>
+                          <m:r>
+                            <a:rPr lang="en-US" sz="1800" dirty="0">
+                              <a:solidFill>
+                                <a:srgbClr val="8A2E3B"/>
+                              </a:solidFill>
+                              <a:latin typeface="Cambria Math" panose="02040503050406030204" pitchFamily="18" charset="0"/>
+                            </a:rPr>
+                            <m:t>𝑌</m:t>
+                          </m:r>
+                        </m:e>
+                        <m:sub>
+                          <m:r>
+                            <a:rPr lang="en-US" sz="1800" dirty="0">
+                              <a:solidFill>
+                                <a:srgbClr val="8A2E3B"/>
+                              </a:solidFill>
+                              <a:latin typeface="Cambria Math" panose="02040503050406030204" pitchFamily="18" charset="0"/>
+                            </a:rPr>
+                            <m:t>𝑖𝑖</m:t>
+                          </m:r>
+                        </m:sub>
+                      </m:sSub>
+                      <m:r>
+                        <a:rPr lang="en-US" sz="1800" dirty="0">
+                          <a:solidFill>
+                            <a:srgbClr val="1A2744"/>
+                          </a:solidFill>
+                          <a:latin typeface="Cambria Math" panose="02040503050406030204" pitchFamily="18" charset="0"/>
+                        </a:rPr>
+                        <m:t> = </m:t>
+                      </m:r>
+                      <m:sSub>
+                        <m:sSubPr>
+                          <m:ctrlPr>
+                            <a:rPr lang="en-US" sz="1800" dirty="0">
+                              <a:solidFill>
+                                <a:srgbClr val="1A2744"/>
+                              </a:solidFill>
+                              <a:latin typeface="Cambria Math" panose="02040503050406030204" pitchFamily="18" charset="0"/>
+                            </a:rPr>
+                          </m:ctrlPr>
+                        </m:sSubPr>
+                        <m:e>
+                          <m:r>
+                            <a:rPr lang="en-US" sz="1800" dirty="0">
+                              <a:solidFill>
+                                <a:srgbClr val="1A2744"/>
+                              </a:solidFill>
+                              <a:latin typeface="Cambria Math" panose="02040503050406030204" pitchFamily="18" charset="0"/>
+                            </a:rPr>
+                            <m:t>∑</m:t>
+                          </m:r>
+                        </m:e>
+                        <m:sub>
+                          <m:r>
+                            <a:rPr lang="en-US" sz="1800" dirty="0">
+                              <a:solidFill>
+                                <a:srgbClr val="1A2744"/>
+                              </a:solidFill>
+                              <a:latin typeface="Cambria Math" panose="02040503050406030204" pitchFamily="18" charset="0"/>
+                            </a:rPr>
+                            <m:t>𝑘</m:t>
+                          </m:r>
+                        </m:sub>
+                      </m:sSub>
+                      <m:sSub>
+                        <m:sSubPr>
+                          <m:ctrlPr>
+                            <a:rPr lang="en-US" sz="1800" dirty="0">
+                              <a:solidFill>
+                                <a:srgbClr val="1A2744"/>
+                              </a:solidFill>
+                              <a:latin typeface="Cambria Math" panose="02040503050406030204" pitchFamily="18" charset="0"/>
+                            </a:rPr>
+                          </m:ctrlPr>
+                        </m:sSubPr>
+                        <m:e>
+                          <m:r>
+                            <a:rPr lang="en-US" sz="1800" dirty="0">
+                              <a:solidFill>
+                                <a:srgbClr val="1A2744"/>
+                              </a:solidFill>
+                              <a:latin typeface="Cambria Math" panose="02040503050406030204" pitchFamily="18" charset="0"/>
+                            </a:rPr>
+                            <m:t>𝑦</m:t>
+                          </m:r>
+                        </m:e>
+                        <m:sub>
+                          <m:r>
+                            <a:rPr lang="en-US" sz="1800" dirty="0">
+                              <a:solidFill>
+                                <a:srgbClr val="1A2744"/>
+                              </a:solidFill>
+                              <a:latin typeface="Cambria Math" panose="02040503050406030204" pitchFamily="18" charset="0"/>
+                            </a:rPr>
+                            <m:t>𝑖𝑘</m:t>
+                          </m:r>
+                        </m:sub>
+                      </m:sSub>
+                      <m:r>
+                        <a:rPr lang="en-US" sz="1800" dirty="0">
+                          <a:solidFill>
+                            <a:srgbClr val="1A2744"/>
+                          </a:solidFill>
+                          <a:latin typeface="Cambria Math" panose="02040503050406030204" pitchFamily="18" charset="0"/>
+                        </a:rPr>
+                        <m:t> + </m:t>
+                      </m:r>
+                      <m:sSub>
+                        <m:sSubPr>
+                          <m:ctrlPr>
+                            <a:rPr lang="en-US" sz="1800" dirty="0">
+                              <a:solidFill>
+                                <a:srgbClr val="1A2744"/>
+                              </a:solidFill>
+                              <a:latin typeface="Cambria Math" panose="02040503050406030204" pitchFamily="18" charset="0"/>
+                            </a:rPr>
+                          </m:ctrlPr>
+                        </m:sSubPr>
+                        <m:e>
+                          <m:r>
+                            <a:rPr lang="en-US" sz="1800" dirty="0">
+                              <a:solidFill>
+                                <a:srgbClr val="1A2744"/>
+                              </a:solidFill>
+                              <a:latin typeface="Cambria Math" panose="02040503050406030204" pitchFamily="18" charset="0"/>
+                            </a:rPr>
+                            <m:t>𝑦</m:t>
+                          </m:r>
+                        </m:e>
+                        <m:sub>
+                          <m:r>
+                            <a:rPr lang="en-US" sz="1800" dirty="0">
+                              <a:solidFill>
+                                <a:srgbClr val="1A2744"/>
+                              </a:solidFill>
+                              <a:latin typeface="Cambria Math" panose="02040503050406030204" pitchFamily="18" charset="0"/>
+                            </a:rPr>
+                            <m:t>𝑖</m:t>
+                          </m:r>
+                          <m:r>
+                            <a:rPr lang="en-US" sz="1800" dirty="0">
+                              <a:solidFill>
+                                <a:srgbClr val="1A2744"/>
+                              </a:solidFill>
+                              <a:latin typeface="Cambria Math" panose="02040503050406030204" pitchFamily="18" charset="0"/>
+                            </a:rPr>
+                            <m:t>(</m:t>
+                          </m:r>
+                          <m:r>
+                            <a:rPr lang="en-US" sz="1800" dirty="0">
+                              <a:solidFill>
+                                <a:srgbClr val="1A2744"/>
+                              </a:solidFill>
+                              <a:latin typeface="Cambria Math" panose="02040503050406030204" pitchFamily="18" charset="0"/>
+                            </a:rPr>
+                            <m:t>𝑠ℎ</m:t>
+                          </m:r>
+                          <m:r>
+                            <a:rPr lang="en-US" sz="1800" dirty="0">
+                              <a:solidFill>
+                                <a:srgbClr val="1A2744"/>
+                              </a:solidFill>
+                              <a:latin typeface="Cambria Math" panose="02040503050406030204" pitchFamily="18" charset="0"/>
+                            </a:rPr>
+                            <m:t>)</m:t>
+                          </m:r>
+                        </m:sub>
+                      </m:sSub>
+                    </m:oMath>
+                  </m:oMathPara>
+                </a14:m>
+                <a:endParaRPr dirty="0"/>
+              </a:p>
+              <a:p>
+                <a:pPr algn="l">
+                  <a:lnSpc>
+                    <a:spcPct val="130000"/>
+                  </a:lnSpc>
+                </a:pPr>
+                <a:r>
+                  <a:rPr lang="ja-JP" sz="1400" dirty="0">
+                    <a:solidFill>
+                      <a:srgbClr val="5B6470"/>
+                    </a:solidFill>
+                    <a:latin typeface="Calibri"/>
+                  </a:rPr>
+                  <a:t>I = 節点注入電流 ・ V = 節点電圧 (17,862² ・ 非零 0.019%)</a:t>
+                </a:r>
+              </a:p>
+            </p:txBody>
+          </p:sp>
+        </mc:Choice>
+        <mc:Fallback>
+          <p:sp>
+            <p:nvSpPr>
+              <p:cNvPr id="6" name="Rectangle 5"/>
+              <p:cNvSpPr>
+                <a:spLocks noRot="1" noChangeAspect="1" noMove="1" noResize="1" noEditPoints="1" noAdjustHandles="1" noChangeArrowheads="1" noChangeShapeType="1" noTextEdit="1"/>
+              </p:cNvSpPr>
+              <p:nvPr/>
+            </p:nvSpPr>
+            <p:spPr>
+              <a:xfrm>
+                <a:off x="546100" y="4826000"/>
+                <a:ext cx="5969000" cy="1346200"/>
+              </a:xfrm>
+              <a:prstGeom prst="rect">
+                <a:avLst/>
+              </a:prstGeom>
+              <a:blipFill>
+                <a:blip r:embed="rId2"/>
+                <a:stretch>
+                  <a:fillRect/>
+                </a:stretch>
+              </a:blipFill>
+              <a:ln>
+                <a:noFill/>
+              </a:ln>
+              <a:effectLst/>
+            </p:spPr>
+            <p:txBody>
+              <a:bodyPr/>
+              <a:lstStyle/>
+              <a:p>
+                <a:r>
+                  <a:rPr lang="ja-JP" altLang="en-US">
+                    <a:noFill/>
+                  </a:rPr>
+                  <a:t> </a:t>
+                </a:r>
+              </a:p>
+            </p:txBody>
+          </p:sp>
+        </mc:Fallback>
+      </mc:AlternateContent>
+      <mc:AlternateContent xmlns:mc="http://schemas.openxmlformats.org/markup-compatibility/2006">
+        <mc:Choice xmlns:a14="http://schemas.microsoft.com/office/drawing/2010/main" Requires="a14">
+          <p:sp>
+            <p:nvSpPr>
+              <p:cNvPr id="7" name="Rectangle 6"/>
+              <p:cNvSpPr/>
+              <p:nvPr/>
+            </p:nvSpPr>
+            <p:spPr>
+              <a:xfrm>
+                <a:off x="6680200" y="2159000"/>
+                <a:ext cx="4965700" cy="1651000"/>
+              </a:xfrm>
+              <a:prstGeom prst="rect">
+                <a:avLst/>
+              </a:prstGeom>
+              <a:solidFill>
+                <a:srgbClr val="F4F6FA"/>
+              </a:solidFill>
+              <a:ln>
+                <a:noFill/>
+              </a:ln>
+              <a:effectLst/>
+            </p:spPr>
+            <p:style>
+              <a:lnRef idx="1">
+                <a:schemeClr val="accent1"/>
+              </a:lnRef>
+              <a:fillRef idx="3">
+                <a:schemeClr val="accent1"/>
+              </a:fillRef>
+              <a:effectRef idx="2">
+                <a:schemeClr val="accent1"/>
+              </a:effectRef>
+              <a:fontRef idx="minor">
+                <a:schemeClr val="lt1"/>
+              </a:fontRef>
+            </p:style>
+            <p:txBody>
+              <a:bodyPr wrap="square" lIns="228600" tIns="152400" rIns="152400" bIns="152400" rtlCol="0" anchor="ctr"/>
+              <a:lstStyle/>
+              <a:p>
+                <a:pPr algn="l"/>
+                <a14:m>
+                  <m:oMathPara xmlns:m="http://schemas.openxmlformats.org/officeDocument/2006/math">
+                    <m:oMathParaPr>
+                      <m:jc m:val="left"/>
+                    </m:oMathParaPr>
+                    <m:oMath>
+                      <m:sSub>
+                        <m:sSubPr>
+                          <m:ctrlPr>
+                            <a:rPr lang="en-US" sz="1700" dirty="0">
+                              <a:solidFill>
+                                <a:srgbClr val="1A2744"/>
+                              </a:solidFill>
+                              <a:latin typeface="Cambria Math" panose="02040503050406030204" pitchFamily="18" charset="0"/>
+                            </a:rPr>
+                          </m:ctrlPr>
+                        </m:sSubPr>
+                        <m:e>
+                          <m:r>
+                            <a:rPr lang="en-US" sz="1700" dirty="0">
+                              <a:solidFill>
+                                <a:srgbClr val="1A2744"/>
+                              </a:solidFill>
+                              <a:latin typeface="Cambria Math" panose="02040503050406030204" pitchFamily="18" charset="0"/>
+                            </a:rPr>
+                            <m:t>𝑃</m:t>
+                          </m:r>
+                        </m:e>
+                        <m:sub>
+                          <m:r>
+                            <a:rPr lang="en-US" sz="1700" dirty="0">
+                              <a:solidFill>
+                                <a:srgbClr val="1A2744"/>
+                              </a:solidFill>
+                              <a:latin typeface="Cambria Math" panose="02040503050406030204" pitchFamily="18" charset="0"/>
+                            </a:rPr>
+                            <m:t>𝑖</m:t>
+                          </m:r>
+                        </m:sub>
+                      </m:sSub>
+                      <m:r>
+                        <a:rPr lang="en-US" sz="1700" dirty="0">
+                          <a:solidFill>
+                            <a:srgbClr val="1A2744"/>
+                          </a:solidFill>
+                          <a:latin typeface="Cambria Math" panose="02040503050406030204" pitchFamily="18" charset="0"/>
+                        </a:rPr>
+                        <m:t> = </m:t>
+                      </m:r>
+                      <m:sSub>
+                        <m:sSubPr>
+                          <m:ctrlPr>
+                            <a:rPr lang="en-US" sz="1700" dirty="0">
+                              <a:solidFill>
+                                <a:srgbClr val="2E7D5B"/>
+                              </a:solidFill>
+                              <a:latin typeface="Cambria Math" panose="02040503050406030204" pitchFamily="18" charset="0"/>
+                            </a:rPr>
+                          </m:ctrlPr>
+                        </m:sSubPr>
+                        <m:e>
+                          <m:r>
+                            <a:rPr lang="en-US" sz="1700" dirty="0">
+                              <a:solidFill>
+                                <a:srgbClr val="2E7D5B"/>
+                              </a:solidFill>
+                              <a:latin typeface="Cambria Math" panose="02040503050406030204" pitchFamily="18" charset="0"/>
+                            </a:rPr>
+                            <m:t>𝑉</m:t>
+                          </m:r>
+                        </m:e>
+                        <m:sub>
+                          <m:r>
+                            <a:rPr lang="en-US" sz="1700" dirty="0">
+                              <a:solidFill>
+                                <a:srgbClr val="2E7D5B"/>
+                              </a:solidFill>
+                              <a:latin typeface="Cambria Math" panose="02040503050406030204" pitchFamily="18" charset="0"/>
+                            </a:rPr>
+                            <m:t>𝑖</m:t>
+                          </m:r>
+                        </m:sub>
+                      </m:sSub>
+                      <m:nary>
+                        <m:naryPr>
+                          <m:chr m:val="∑"/>
+                          <m:limLoc m:val="subSup"/>
+                          <m:supHide m:val="on"/>
+                          <m:ctrlPr>
+                            <a:rPr lang="en-US" sz="1700" dirty="0">
+                              <a:solidFill>
+                                <a:srgbClr val="1A2744"/>
+                              </a:solidFill>
+                              <a:latin typeface="Cambria Math" panose="02040503050406030204" pitchFamily="18" charset="0"/>
+                            </a:rPr>
+                          </m:ctrlPr>
+                        </m:naryPr>
+                        <m:sub>
+                          <m:r>
+                            <a:rPr lang="en-US" sz="1700" dirty="0">
+                              <a:solidFill>
+                                <a:srgbClr val="1A2744"/>
+                              </a:solidFill>
+                              <a:latin typeface="Cambria Math" panose="02040503050406030204" pitchFamily="18" charset="0"/>
+                            </a:rPr>
+                            <m:t>𝑗</m:t>
+                          </m:r>
+                        </m:sub>
+                        <m:sup/>
+                        <m:e>
+                          <m:sSub>
+                            <m:sSubPr>
+                              <m:ctrlPr>
+                                <a:rPr lang="en-US" sz="1700" dirty="0">
+                                  <a:solidFill>
+                                    <a:srgbClr val="2E7D5B"/>
+                                  </a:solidFill>
+                                  <a:latin typeface="Cambria Math" panose="02040503050406030204" pitchFamily="18" charset="0"/>
+                                </a:rPr>
+                              </m:ctrlPr>
+                            </m:sSubPr>
+                            <m:e>
+                              <m:r>
+                                <a:rPr lang="en-US" sz="1700" dirty="0">
+                                  <a:solidFill>
+                                    <a:srgbClr val="2E7D5B"/>
+                                  </a:solidFill>
+                                  <a:latin typeface="Cambria Math" panose="02040503050406030204" pitchFamily="18" charset="0"/>
+                                </a:rPr>
+                                <m:t>𝑉</m:t>
+                              </m:r>
+                            </m:e>
+                            <m:sub>
+                              <m:r>
+                                <a:rPr lang="en-US" sz="1700" dirty="0">
+                                  <a:solidFill>
+                                    <a:srgbClr val="2E7D5B"/>
+                                  </a:solidFill>
+                                  <a:latin typeface="Cambria Math" panose="02040503050406030204" pitchFamily="18" charset="0"/>
+                                </a:rPr>
+                                <m:t>𝑗</m:t>
+                              </m:r>
+                            </m:sub>
+                          </m:sSub>
+                          <m:r>
+                            <a:rPr lang="en-US" sz="1700" dirty="0">
+                              <a:solidFill>
+                                <a:srgbClr val="1A2744"/>
+                              </a:solidFill>
+                              <a:latin typeface="Cambria Math" panose="02040503050406030204" pitchFamily="18" charset="0"/>
+                            </a:rPr>
+                            <m:t>(</m:t>
+                          </m:r>
+                          <m:sSub>
+                            <m:sSubPr>
+                              <m:ctrlPr>
+                                <a:rPr lang="en-US" sz="1700" dirty="0">
+                                  <a:solidFill>
+                                    <a:srgbClr val="2C5F8A"/>
+                                  </a:solidFill>
+                                  <a:latin typeface="Cambria Math" panose="02040503050406030204" pitchFamily="18" charset="0"/>
+                                </a:rPr>
+                              </m:ctrlPr>
+                            </m:sSubPr>
+                            <m:e>
+                              <m:r>
+                                <a:rPr lang="en-US" sz="1700" dirty="0">
+                                  <a:solidFill>
+                                    <a:srgbClr val="2C5F8A"/>
+                                  </a:solidFill>
+                                  <a:latin typeface="Cambria Math" panose="02040503050406030204" pitchFamily="18" charset="0"/>
+                                </a:rPr>
+                                <m:t>𝐺</m:t>
+                              </m:r>
+                            </m:e>
+                            <m:sub>
+                              <m:r>
+                                <a:rPr lang="en-US" sz="1700" dirty="0">
+                                  <a:solidFill>
+                                    <a:srgbClr val="2C5F8A"/>
+                                  </a:solidFill>
+                                  <a:latin typeface="Cambria Math" panose="02040503050406030204" pitchFamily="18" charset="0"/>
+                                </a:rPr>
+                                <m:t>𝑖𝑗</m:t>
+                              </m:r>
+                            </m:sub>
+                          </m:sSub>
+                          <m:r>
+                            <a:rPr lang="en-US" sz="1700" dirty="0">
+                              <a:solidFill>
+                                <a:srgbClr val="1A2744"/>
+                              </a:solidFill>
+                              <a:latin typeface="Cambria Math" panose="02040503050406030204" pitchFamily="18" charset="0"/>
+                            </a:rPr>
+                            <m:t> </m:t>
+                          </m:r>
+                          <m:r>
+                            <m:rPr>
+                              <m:sty m:val="p"/>
+                            </m:rPr>
+                            <a:rPr lang="en-US" sz="1700" dirty="0">
+                              <a:solidFill>
+                                <a:srgbClr val="1A2744"/>
+                              </a:solidFill>
+                              <a:latin typeface="Cambria Math" panose="02040503050406030204" pitchFamily="18" charset="0"/>
+                            </a:rPr>
+                            <m:t>cos</m:t>
+                          </m:r>
+                          <m:r>
+                            <a:rPr lang="en-US" sz="1700" dirty="0">
+                              <a:solidFill>
+                                <a:srgbClr val="1A2744"/>
+                              </a:solidFill>
+                              <a:latin typeface="Cambria Math" panose="02040503050406030204" pitchFamily="18" charset="0"/>
+                            </a:rPr>
+                            <m:t> </m:t>
+                          </m:r>
+                          <m:sSub>
+                            <m:sSubPr>
+                              <m:ctrlPr>
+                                <a:rPr lang="en-US" sz="1700" dirty="0">
+                                  <a:solidFill>
+                                    <a:srgbClr val="1A2744"/>
+                                  </a:solidFill>
+                                  <a:latin typeface="Cambria Math" panose="02040503050406030204" pitchFamily="18" charset="0"/>
+                                </a:rPr>
+                              </m:ctrlPr>
+                            </m:sSubPr>
+                            <m:e>
+                              <m:r>
+                                <a:rPr lang="en-US" sz="1700" dirty="0">
+                                  <a:solidFill>
+                                    <a:srgbClr val="1A2744"/>
+                                  </a:solidFill>
+                                  <a:latin typeface="Cambria Math" panose="02040503050406030204" pitchFamily="18" charset="0"/>
+                                </a:rPr>
+                                <m:t>𝜃</m:t>
+                              </m:r>
+                            </m:e>
+                            <m:sub>
+                              <m:r>
+                                <a:rPr lang="en-US" sz="1700" dirty="0">
+                                  <a:solidFill>
+                                    <a:srgbClr val="1A2744"/>
+                                  </a:solidFill>
+                                  <a:latin typeface="Cambria Math" panose="02040503050406030204" pitchFamily="18" charset="0"/>
+                                </a:rPr>
+                                <m:t>𝑖𝑗</m:t>
+                              </m:r>
+                            </m:sub>
+                          </m:sSub>
+                          <m:r>
+                            <a:rPr lang="en-US" sz="1700" dirty="0">
+                              <a:solidFill>
+                                <a:srgbClr val="1A2744"/>
+                              </a:solidFill>
+                              <a:latin typeface="Cambria Math" panose="02040503050406030204" pitchFamily="18" charset="0"/>
+                            </a:rPr>
+                            <m:t> + </m:t>
+                          </m:r>
+                          <m:sSub>
+                            <m:sSubPr>
+                              <m:ctrlPr>
+                                <a:rPr lang="en-US" sz="1700" dirty="0">
+                                  <a:solidFill>
+                                    <a:srgbClr val="8A2E3B"/>
+                                  </a:solidFill>
+                                  <a:latin typeface="Cambria Math" panose="02040503050406030204" pitchFamily="18" charset="0"/>
+                                </a:rPr>
+                              </m:ctrlPr>
+                            </m:sSubPr>
+                            <m:e>
+                              <m:r>
+                                <a:rPr lang="en-US" sz="1700" dirty="0">
+                                  <a:solidFill>
+                                    <a:srgbClr val="8A2E3B"/>
+                                  </a:solidFill>
+                                  <a:latin typeface="Cambria Math" panose="02040503050406030204" pitchFamily="18" charset="0"/>
+                                </a:rPr>
+                                <m:t>𝐵</m:t>
+                              </m:r>
+                            </m:e>
+                            <m:sub>
+                              <m:r>
+                                <a:rPr lang="en-US" sz="1700" dirty="0">
+                                  <a:solidFill>
+                                    <a:srgbClr val="8A2E3B"/>
+                                  </a:solidFill>
+                                  <a:latin typeface="Cambria Math" panose="02040503050406030204" pitchFamily="18" charset="0"/>
+                                </a:rPr>
+                                <m:t>𝑖𝑗</m:t>
+                              </m:r>
+                            </m:sub>
+                          </m:sSub>
+                          <m:r>
+                            <a:rPr lang="en-US" sz="1700" dirty="0">
+                              <a:solidFill>
+                                <a:srgbClr val="1A2744"/>
+                              </a:solidFill>
+                              <a:latin typeface="Cambria Math" panose="02040503050406030204" pitchFamily="18" charset="0"/>
+                            </a:rPr>
+                            <m:t> </m:t>
+                          </m:r>
+                          <m:r>
+                            <m:rPr>
+                              <m:sty m:val="p"/>
+                            </m:rPr>
+                            <a:rPr lang="en-US" sz="1700" dirty="0">
+                              <a:solidFill>
+                                <a:srgbClr val="1A2744"/>
+                              </a:solidFill>
+                              <a:latin typeface="Cambria Math" panose="02040503050406030204" pitchFamily="18" charset="0"/>
+                            </a:rPr>
+                            <m:t>sin</m:t>
+                          </m:r>
+                          <m:r>
+                            <a:rPr lang="en-US" sz="1700" dirty="0">
+                              <a:solidFill>
+                                <a:srgbClr val="1A2744"/>
+                              </a:solidFill>
+                              <a:latin typeface="Cambria Math" panose="02040503050406030204" pitchFamily="18" charset="0"/>
+                            </a:rPr>
+                            <m:t> </m:t>
+                          </m:r>
+                          <m:sSub>
+                            <m:sSubPr>
+                              <m:ctrlPr>
+                                <a:rPr lang="en-US" sz="1700" dirty="0">
+                                  <a:solidFill>
+                                    <a:srgbClr val="1A2744"/>
+                                  </a:solidFill>
+                                  <a:latin typeface="Cambria Math" panose="02040503050406030204" pitchFamily="18" charset="0"/>
+                                </a:rPr>
+                              </m:ctrlPr>
+                            </m:sSubPr>
+                            <m:e>
+                              <m:r>
+                                <a:rPr lang="en-US" sz="1700" dirty="0">
+                                  <a:solidFill>
+                                    <a:srgbClr val="1A2744"/>
+                                  </a:solidFill>
+                                  <a:latin typeface="Cambria Math" panose="02040503050406030204" pitchFamily="18" charset="0"/>
+                                </a:rPr>
+                                <m:t>𝜃</m:t>
+                              </m:r>
+                            </m:e>
+                            <m:sub>
+                              <m:r>
+                                <a:rPr lang="en-US" sz="1700" dirty="0">
+                                  <a:solidFill>
+                                    <a:srgbClr val="1A2744"/>
+                                  </a:solidFill>
+                                  <a:latin typeface="Cambria Math" panose="02040503050406030204" pitchFamily="18" charset="0"/>
+                                </a:rPr>
+                                <m:t>𝑖𝑗</m:t>
+                              </m:r>
+                            </m:sub>
+                          </m:sSub>
+                          <m:r>
+                            <a:rPr lang="en-US" sz="1700" dirty="0">
+                              <a:solidFill>
+                                <a:srgbClr val="1A2744"/>
+                              </a:solidFill>
+                              <a:latin typeface="Cambria Math" panose="02040503050406030204" pitchFamily="18" charset="0"/>
+                            </a:rPr>
+                            <m:t>)</m:t>
+                          </m:r>
+                        </m:e>
+                      </m:nary>
+                    </m:oMath>
+                  </m:oMathPara>
+                </a14:m>
+                <a:endParaRPr/>
+              </a:p>
+              <a:p>
+                <a:pPr algn="l">
+                  <a:lnSpc>
+                    <a:spcPct val="130000"/>
+                  </a:lnSpc>
+                </a:pPr>
+                <a:r>
+                  <a:rPr lang="ja-JP" sz="1400" dirty="0">
+                    <a:solidFill>
+                      <a:srgbClr val="5B6470"/>
+                    </a:solidFill>
+                    <a:latin typeface="Calibri"/>
+                  </a:rPr>
+                  <a:t>潮流方程式。G + jB = Y の実部/虚部、θij = 位相差。Newton–Raphson で解く = 潮流計算。</a:t>
+                </a:r>
+              </a:p>
+            </p:txBody>
+          </p:sp>
+        </mc:Choice>
+        <mc:Fallback>
+          <p:sp>
+            <p:nvSpPr>
+              <p:cNvPr id="7" name="Rectangle 6"/>
+              <p:cNvSpPr>
+                <a:spLocks noRot="1" noChangeAspect="1" noMove="1" noResize="1" noEditPoints="1" noAdjustHandles="1" noChangeArrowheads="1" noChangeShapeType="1" noTextEdit="1"/>
+              </p:cNvSpPr>
+              <p:nvPr/>
+            </p:nvSpPr>
+            <p:spPr>
+              <a:xfrm>
+                <a:off x="6680200" y="2159000"/>
+                <a:ext cx="4965700" cy="1651000"/>
+              </a:xfrm>
+              <a:prstGeom prst="rect">
+                <a:avLst/>
+              </a:prstGeom>
+              <a:blipFill>
+                <a:blip r:embed="rId3"/>
+                <a:stretch>
+                  <a:fillRect t="-39695" b="-32061"/>
+                </a:stretch>
+              </a:blipFill>
+              <a:ln>
+                <a:noFill/>
+              </a:ln>
+              <a:effectLst/>
+            </p:spPr>
+            <p:txBody>
+              <a:bodyPr/>
+              <a:lstStyle/>
+              <a:p>
+                <a:r>
+                  <a:rPr lang="ja-JP" altLang="en-US">
+                    <a:noFill/>
+                  </a:rPr>
+                  <a:t> </a:t>
+                </a:r>
+              </a:p>
+            </p:txBody>
+          </p:sp>
+        </mc:Fallback>
+      </mc:AlternateContent>
       <p:sp>
         <p:nvSpPr>
           <p:cNvPr id="8" name="TextBox 7"/>
@@ -11562,209 +12328,6 @@
       </p:sp>
       <p:sp>
         <p:nvSpPr>
-          <p:cNvPr id="413" name="Dg 413"/>
-          <p:cNvSpPr/>
-          <p:nvPr/>
-        </p:nvSpPr>
-        <p:spPr>
-          <a:xfrm>
-            <a:off x="3479800" y="3200400"/>
-            <a:ext cx="508000" cy="38100"/>
-          </a:xfrm>
-          <a:prstGeom prst="rect">
-            <a:avLst/>
-          </a:prstGeom>
-          <a:solidFill>
-            <a:srgbClr val="1A2744"/>
-          </a:solidFill>
-          <a:ln>
-            <a:noFill/>
-          </a:ln>
-        </p:spPr>
-        <p:txBody>
-          <a:bodyPr lIns="0" tIns="0" rIns="0" bIns="0" rtlCol="0" anchor="ctr"/>
-          <a:lstStyle/>
-          <a:p>
-            <a:endParaRPr/>
-          </a:p>
-        </p:txBody>
-      </p:sp>
-      <p:sp>
-        <p:nvSpPr>
-          <p:cNvPr id="414" name="Dg 414"/>
-          <p:cNvSpPr/>
-          <p:nvPr/>
-        </p:nvSpPr>
-        <p:spPr>
-          <a:xfrm>
-            <a:off x="3810000" y="2997200"/>
-            <a:ext cx="1168400" cy="38100"/>
-          </a:xfrm>
-          <a:prstGeom prst="rect">
-            <a:avLst/>
-          </a:prstGeom>
-          <a:solidFill>
-            <a:srgbClr val="1A2744"/>
-          </a:solidFill>
-          <a:ln>
-            <a:noFill/>
-          </a:ln>
-        </p:spPr>
-        <p:txBody>
-          <a:bodyPr lIns="0" tIns="0" rIns="0" bIns="0" rtlCol="0" anchor="ctr"/>
-          <a:lstStyle/>
-          <a:p>
-            <a:endParaRPr/>
-          </a:p>
-        </p:txBody>
-      </p:sp>
-      <p:sp>
-        <p:nvSpPr>
-          <p:cNvPr id="415" name="Dg 415"/>
-          <p:cNvSpPr/>
-          <p:nvPr/>
-        </p:nvSpPr>
-        <p:spPr>
-          <a:xfrm>
-            <a:off x="3810000" y="3200400"/>
-            <a:ext cx="1168400" cy="38100"/>
-          </a:xfrm>
-          <a:prstGeom prst="rect">
-            <a:avLst/>
-          </a:prstGeom>
-          <a:solidFill>
-            <a:srgbClr val="1A2744"/>
-          </a:solidFill>
-          <a:ln>
-            <a:noFill/>
-          </a:ln>
-        </p:spPr>
-        <p:txBody>
-          <a:bodyPr lIns="0" tIns="0" rIns="0" bIns="0" rtlCol="0" anchor="ctr"/>
-          <a:lstStyle/>
-          <a:p>
-            <a:endParaRPr/>
-          </a:p>
-        </p:txBody>
-      </p:sp>
-      <p:sp>
-        <p:nvSpPr>
-          <p:cNvPr id="416" name="Dg 416"/>
-          <p:cNvSpPr/>
-          <p:nvPr/>
-        </p:nvSpPr>
-        <p:spPr>
-          <a:xfrm>
-            <a:off x="3810000" y="3403600"/>
-            <a:ext cx="1168400" cy="38100"/>
-          </a:xfrm>
-          <a:prstGeom prst="rect">
-            <a:avLst/>
-          </a:prstGeom>
-          <a:solidFill>
-            <a:srgbClr val="1A2744"/>
-          </a:solidFill>
-          <a:ln>
-            <a:noFill/>
-          </a:ln>
-        </p:spPr>
-        <p:txBody>
-          <a:bodyPr lIns="0" tIns="0" rIns="0" bIns="0" rtlCol="0" anchor="ctr"/>
-          <a:lstStyle/>
-          <a:p>
-            <a:endParaRPr/>
-          </a:p>
-        </p:txBody>
-      </p:sp>
-      <p:sp>
-        <p:nvSpPr>
-          <p:cNvPr id="417" name="Dg 417"/>
-          <p:cNvSpPr/>
-          <p:nvPr/>
-        </p:nvSpPr>
-        <p:spPr>
-          <a:xfrm>
-            <a:off x="4978400" y="2997200"/>
-            <a:ext cx="50800" cy="444500"/>
-          </a:xfrm>
-          <a:prstGeom prst="rect">
-            <a:avLst/>
-          </a:prstGeom>
-          <a:solidFill>
-            <a:srgbClr val="8A2E3B"/>
-          </a:solidFill>
-          <a:ln>
-            <a:noFill/>
-          </a:ln>
-        </p:spPr>
-        <p:txBody>
-          <a:bodyPr lIns="0" tIns="0" rIns="0" bIns="0" rtlCol="0" anchor="ctr"/>
-          <a:lstStyle/>
-          <a:p>
-            <a:endParaRPr/>
-          </a:p>
-        </p:txBody>
-      </p:sp>
-      <p:sp>
-        <p:nvSpPr>
-          <p:cNvPr id="418" name="Dg 418"/>
-          <p:cNvSpPr/>
-          <p:nvPr/>
-        </p:nvSpPr>
-        <p:spPr>
-          <a:xfrm>
-            <a:off x="5029200" y="2870200"/>
-            <a:ext cx="254000" cy="698500"/>
-          </a:xfrm>
-          <a:prstGeom prst="lightningBolt">
-            <a:avLst/>
-          </a:prstGeom>
-          <a:solidFill>
-            <a:srgbClr val="8A2E3B"/>
-          </a:solidFill>
-          <a:ln>
-            <a:noFill/>
-          </a:ln>
-        </p:spPr>
-        <p:txBody>
-          <a:bodyPr lIns="0" tIns="0" rIns="0" bIns="0" rtlCol="0" anchor="ctr"/>
-          <a:lstStyle/>
-          <a:p>
-            <a:endParaRPr/>
-          </a:p>
-        </p:txBody>
-      </p:sp>
-      <p:sp>
-        <p:nvSpPr>
-          <p:cNvPr id="419" name="Dg 419"/>
-          <p:cNvSpPr/>
-          <p:nvPr/>
-        </p:nvSpPr>
-        <p:spPr>
-          <a:xfrm>
-            <a:off x="5334000" y="3098800"/>
-            <a:ext cx="558800" cy="254000"/>
-          </a:xfrm>
-          <a:prstGeom prst="rightArrow">
-            <a:avLst/>
-          </a:prstGeom>
-          <a:solidFill>
-            <a:srgbClr val="8A2E3B"/>
-          </a:solidFill>
-          <a:ln>
-            <a:noFill/>
-          </a:ln>
-        </p:spPr>
-        <p:txBody>
-          <a:bodyPr lIns="0" tIns="0" rIns="0" bIns="0" rtlCol="0" anchor="ctr"/>
-          <a:lstStyle/>
-          <a:p>
-            <a:endParaRPr/>
-          </a:p>
-        </p:txBody>
-      </p:sp>
-      <p:sp>
-        <p:nvSpPr>
           <p:cNvPr id="420" name="TB 420"/>
           <p:cNvSpPr txBox="1"/>
           <p:nvPr/>
@@ -11829,16 +12392,340 @@
           </a:p>
         </p:txBody>
       </p:sp>
-      <p:sp>
-        <p:nvSpPr>
-          <p:cNvPr id="422" name="TB 422"/>
+      <mc:AlternateContent xmlns:mc="http://schemas.openxmlformats.org/markup-compatibility/2006">
+        <mc:Choice xmlns:a14="http://schemas.microsoft.com/office/drawing/2010/main" Requires="a14">
+          <p:sp>
+            <p:nvSpPr>
+              <p:cNvPr id="425" name="TB 425"/>
+              <p:cNvSpPr txBox="1"/>
+              <p:nvPr/>
+            </p:nvSpPr>
+            <p:spPr>
+              <a:xfrm>
+                <a:off x="698500" y="3987800"/>
+                <a:ext cx="5664200" cy="584200"/>
+              </a:xfrm>
+              <a:prstGeom prst="rect">
+                <a:avLst/>
+              </a:prstGeom>
+              <a:noFill/>
+            </p:spPr>
+            <p:txBody>
+              <a:bodyPr wrap="square" lIns="0" tIns="0" rIns="0" bIns="0"/>
+              <a:lstStyle/>
+              <a:p>
+                <a:pPr algn="l"/>
+                <a14:m>
+                  <m:oMath xmlns:m="http://schemas.openxmlformats.org/officeDocument/2006/math">
+                    <m:sSub>
+                      <m:sSubPr>
+                        <m:ctrlPr>
+                          <a:rPr lang="en-US" sz="1700" dirty="0">
+                            <a:solidFill>
+                              <a:srgbClr val="8A2E3B"/>
+                            </a:solidFill>
+                            <a:latin typeface="Cambria Math" panose="02040503050406030204" pitchFamily="18" charset="0"/>
+                          </a:rPr>
+                        </m:ctrlPr>
+                      </m:sSubPr>
+                      <m:e>
+                        <m:r>
+                          <a:rPr lang="en-US" sz="1700" dirty="0">
+                            <a:solidFill>
+                              <a:srgbClr val="8A2E3B"/>
+                            </a:solidFill>
+                            <a:latin typeface="Cambria Math" panose="02040503050406030204" pitchFamily="18" charset="0"/>
+                          </a:rPr>
+                          <m:t>𝐼</m:t>
+                        </m:r>
+                      </m:e>
+                      <m:sub>
+                        <m:r>
+                          <a:rPr lang="en-US" sz="1700" dirty="0">
+                            <a:solidFill>
+                              <a:srgbClr val="8A2E3B"/>
+                            </a:solidFill>
+                            <a:latin typeface="Cambria Math" panose="02040503050406030204" pitchFamily="18" charset="0"/>
+                          </a:rPr>
+                          <m:t>𝑠𝑐</m:t>
+                        </m:r>
+                      </m:sub>
+                    </m:sSub>
+                    <m:r>
+                      <a:rPr lang="en-US" sz="1700" dirty="0">
+                        <a:solidFill>
+                          <a:srgbClr val="1A2744"/>
+                        </a:solidFill>
+                        <a:latin typeface="Cambria Math" panose="02040503050406030204" pitchFamily="18" charset="0"/>
+                      </a:rPr>
+                      <m:t> = </m:t>
+                    </m:r>
+                    <m:f>
+                      <m:fPr>
+                        <m:ctrlPr>
+                          <a:rPr lang="en-US" sz="1700" dirty="0">
+                            <a:solidFill>
+                              <a:srgbClr val="1A2744"/>
+                            </a:solidFill>
+                            <a:latin typeface="Cambria Math" panose="02040503050406030204" pitchFamily="18" charset="0"/>
+                          </a:rPr>
+                        </m:ctrlPr>
+                      </m:fPr>
+                      <m:num>
+                        <m:r>
+                          <a:rPr lang="en-US" sz="1700" dirty="0">
+                            <a:solidFill>
+                              <a:srgbClr val="1A2744"/>
+                            </a:solidFill>
+                            <a:latin typeface="Cambria Math" panose="02040503050406030204" pitchFamily="18" charset="0"/>
+                          </a:rPr>
+                          <m:t>𝐸</m:t>
+                        </m:r>
+                      </m:num>
+                      <m:den>
+                        <m:r>
+                          <a:rPr lang="en-US" sz="1700" dirty="0">
+                            <a:solidFill>
+                              <a:srgbClr val="2C5F8A"/>
+                            </a:solidFill>
+                            <a:latin typeface="Cambria Math" panose="02040503050406030204" pitchFamily="18" charset="0"/>
+                          </a:rPr>
+                          <m:t>𝑍</m:t>
+                        </m:r>
+                      </m:den>
+                    </m:f>
+                  </m:oMath>
+                </a14:m>
+                <a:r>
+                  <a:rPr lang="ja-JP" sz="1400" dirty="0">
+                    <a:solidFill>
+                      <a:srgbClr val="5B6470"/>
+                    </a:solidFill>
+                    <a:latin typeface="Calibri"/>
+                  </a:rPr>
+                  <a:t>　短絡電流は電源とインピーダンスだけで決まる</a:t>
+                </a:r>
+              </a:p>
+            </p:txBody>
+          </p:sp>
+        </mc:Choice>
+        <mc:Fallback>
+          <p:sp>
+            <p:nvSpPr>
+              <p:cNvPr id="425" name="TB 425"/>
+              <p:cNvSpPr txBox="1">
+                <a:spLocks noRot="1" noChangeAspect="1" noMove="1" noResize="1" noEditPoints="1" noAdjustHandles="1" noChangeArrowheads="1" noChangeShapeType="1" noTextEdit="1"/>
+              </p:cNvSpPr>
+              <p:nvPr/>
+            </p:nvSpPr>
+            <p:spPr>
+              <a:xfrm>
+                <a:off x="698500" y="3987800"/>
+                <a:ext cx="5664200" cy="584200"/>
+              </a:xfrm>
+              <a:prstGeom prst="rect">
+                <a:avLst/>
+              </a:prstGeom>
+              <a:blipFill>
+                <a:blip r:embed="rId4"/>
+                <a:stretch>
+                  <a:fillRect l="-1342"/>
+                </a:stretch>
+              </a:blipFill>
+            </p:spPr>
+            <p:txBody>
+              <a:bodyPr/>
+              <a:lstStyle/>
+              <a:p>
+                <a:r>
+                  <a:rPr lang="ja-JP" altLang="en-US">
+                    <a:noFill/>
+                  </a:rPr>
+                  <a:t> </a:t>
+                </a:r>
+              </a:p>
+            </p:txBody>
+          </p:sp>
+        </mc:Fallback>
+      </mc:AlternateContent>
+      <p:sp>
+        <p:nvSpPr>
+          <p:cNvPr id="426" name="TB 426"/>
           <p:cNvSpPr txBox="1"/>
           <p:nvPr/>
         </p:nvSpPr>
         <p:spPr>
           <a:xfrm>
-            <a:off x="4089400" y="3759200"/>
-            <a:ext cx="1778000" cy="279400"/>
+            <a:off x="546100" y="4521200"/>
+            <a:ext cx="5969000" cy="254000"/>
+          </a:xfrm>
+          <a:prstGeom prst="rect">
+            <a:avLst/>
+          </a:prstGeom>
+          <a:noFill/>
+        </p:spPr>
+        <p:txBody>
+          <a:bodyPr wrap="square" lIns="0" tIns="0" rIns="0" bIns="0"/>
+          <a:lstStyle/>
+          <a:p>
+            <a:pPr algn="l"/>
+            <a:r>
+              <a:rPr lang="ja-JP" sz="1400" dirty="0">
+                <a:solidFill>
+                  <a:srgbClr val="5B6470"/>
+                </a:solidFill>
+                <a:latin typeface="Calibri"/>
+              </a:rPr>
+              <a:t>「インピーダンスだけで系統は基本計算できる」— その理由が下の2式。</a:t>
+            </a:r>
+          </a:p>
+        </p:txBody>
+      </p:sp>
+      <p:sp>
+        <p:nvSpPr>
+          <p:cNvPr id="903" name="Dg 903"/>
+          <p:cNvSpPr/>
+          <p:nvPr/>
+        </p:nvSpPr>
+        <p:spPr>
+          <a:xfrm>
+            <a:off x="4225678" y="2922905"/>
+            <a:ext cx="584200" cy="228600"/>
+          </a:xfrm>
+          <a:prstGeom prst="rightArrow">
+            <a:avLst/>
+          </a:prstGeom>
+          <a:solidFill>
+            <a:srgbClr val="8A2E3B"/>
+          </a:solidFill>
+          <a:ln>
+            <a:noFill/>
+          </a:ln>
+        </p:spPr>
+        <p:txBody>
+          <a:bodyPr/>
+          <a:lstStyle/>
+          <a:p>
+            <a:endParaRPr dirty="0"/>
+          </a:p>
+        </p:txBody>
+      </p:sp>
+      <mc:AlternateContent xmlns:mc="http://schemas.openxmlformats.org/markup-compatibility/2006">
+        <mc:Choice xmlns:a14="http://schemas.microsoft.com/office/drawing/2010/main" Requires="a14">
+          <p:sp>
+            <p:nvSpPr>
+              <p:cNvPr id="904" name="TB 904"/>
+              <p:cNvSpPr txBox="1"/>
+              <p:nvPr/>
+            </p:nvSpPr>
+            <p:spPr>
+              <a:xfrm>
+                <a:off x="3964679" y="2708751"/>
+                <a:ext cx="838200" cy="254000"/>
+              </a:xfrm>
+              <a:prstGeom prst="rect">
+                <a:avLst/>
+              </a:prstGeom>
+              <a:noFill/>
+            </p:spPr>
+            <p:txBody>
+              <a:bodyPr wrap="square" lIns="0" tIns="0" rIns="0" bIns="0"/>
+              <a:lstStyle/>
+              <a:p>
+                <a:pPr algn="ctr"/>
+                <a14:m>
+                  <m:oMathPara xmlns:m="http://schemas.openxmlformats.org/officeDocument/2006/math">
+                    <m:oMath>
+                      <m:sSub>
+                        <m:sSubPr>
+                          <m:ctrlPr>
+                            <a:rPr lang="ja-JP" altLang="en-US" sz="1400" b="1" i="1" dirty="0" smtClean="0">
+                              <a:solidFill>
+                                <a:srgbClr val="8A2E3B"/>
+                              </a:solidFill>
+                              <a:latin typeface="Cambria Math" panose="02040503050406030204" pitchFamily="18" charset="0"/>
+                            </a:rPr>
+                          </m:ctrlPr>
+                        </m:sSubPr>
+                        <m:e>
+                          <m:r>
+                            <a:rPr lang="ja-JP" altLang="en-US" sz="1400" b="1" i="1" dirty="0" smtClean="0">
+                              <a:solidFill>
+                                <a:srgbClr val="8A2E3B"/>
+                              </a:solidFill>
+                              <a:latin typeface="Cambria Math" panose="02040503050406030204" pitchFamily="18" charset="0"/>
+                            </a:rPr>
+                            <m:t>𝑰</m:t>
+                          </m:r>
+                        </m:e>
+                        <m:sub>
+                          <m:r>
+                            <a:rPr lang="ja-JP" altLang="en-US" sz="1400" b="1" i="1" dirty="0">
+                              <a:solidFill>
+                                <a:srgbClr val="8A2E3B"/>
+                              </a:solidFill>
+                              <a:latin typeface="Cambria Math" panose="02040503050406030204" pitchFamily="18" charset="0"/>
+                            </a:rPr>
+                            <m:t>𝒔𝒄</m:t>
+                          </m:r>
+                        </m:sub>
+                      </m:sSub>
+                    </m:oMath>
+                  </m:oMathPara>
+                </a14:m>
+              </a:p>
+            </p:txBody>
+          </p:sp>
+        </mc:Choice>
+        <mc:Fallback>
+          <p:sp>
+            <p:nvSpPr>
+              <p:cNvPr id="904" name="TB 904"/>
+              <p:cNvSpPr txBox="1">
+                <a:spLocks noRot="1" noChangeAspect="1" noMove="1" noResize="1" noEditPoints="1" noAdjustHandles="1" noChangeArrowheads="1" noChangeShapeType="1" noTextEdit="1"/>
+              </p:cNvSpPr>
+              <p:nvPr/>
+            </p:nvSpPr>
+            <p:spPr>
+              <a:xfrm>
+                <a:off x="3964679" y="2708751"/>
+                <a:ext cx="838200" cy="254000"/>
+              </a:xfrm>
+              <a:prstGeom prst="rect">
+                <a:avLst/>
+              </a:prstGeom>
+              <a:blipFill>
+                <a:blip r:embed="rId5"/>
+                <a:stretch>
+                  <a:fillRect t="-23810" b="-28571"/>
+                </a:stretch>
+              </a:blipFill>
+            </p:spPr>
+            <p:txBody>
+              <a:bodyPr/>
+              <a:lstStyle/>
+              <a:p>
+                <a:r>
+                  <a:rPr lang="ja-JP" altLang="en-US">
+                    <a:noFill/>
+                  </a:rPr>
+                  <a:t> </a:t>
+                </a:r>
+              </a:p>
+            </p:txBody>
+          </p:sp>
+        </mc:Fallback>
+      </mc:AlternateContent>
+      <p:sp>
+        <p:nvSpPr>
+          <p:cNvPr id="905" name="TB 905"/>
+          <p:cNvSpPr txBox="1"/>
+          <p:nvPr/>
+        </p:nvSpPr>
+        <p:spPr>
+          <a:xfrm>
+            <a:off x="4198570" y="3245326"/>
+            <a:ext cx="1168400" cy="254000"/>
           </a:xfrm>
           <a:prstGeom prst="rect">
             <a:avLst/>
@@ -11862,205 +12749,290 @@
           </a:p>
         </p:txBody>
       </p:sp>
-      <p:sp>
-        <p:nvSpPr>
-          <p:cNvPr id="423" name="TB 423"/>
-          <p:cNvSpPr txBox="1"/>
-          <p:nvPr/>
-        </p:nvSpPr>
-        <p:spPr>
-          <a:xfrm>
-            <a:off x="3759200" y="2616200"/>
-            <a:ext cx="1473200" cy="279400"/>
-          </a:xfrm>
-          <a:prstGeom prst="rect">
-            <a:avLst/>
-          </a:prstGeom>
-          <a:noFill/>
-        </p:spPr>
-        <p:txBody>
-          <a:bodyPr wrap="square" lIns="0" tIns="0" rIns="0" bIns="0"/>
-          <a:lstStyle/>
-          <a:p>
-            <a:pPr algn="ctr"/>
-            <a:r>
-              <a:rPr lang="ja-JP" sz="1400" dirty="0">
-                <a:solidFill>
-                  <a:srgbClr val="5B6470"/>
-                </a:solidFill>
-                <a:latin typeface="Calibri"/>
-              </a:rPr>
-              <a:t>三相母線</a:t>
-            </a:r>
-          </a:p>
-        </p:txBody>
-      </p:sp>
-      <p:sp>
-        <p:nvSpPr>
-          <p:cNvPr id="424" name="TB 424"/>
-          <p:cNvSpPr txBox="1"/>
-          <p:nvPr/>
-        </p:nvSpPr>
-        <p:spPr>
-          <a:xfrm>
-            <a:off x="5257800" y="2667000"/>
-            <a:ext cx="762000" cy="279400"/>
-          </a:xfrm>
-          <a:prstGeom prst="rect">
-            <a:avLst/>
-          </a:prstGeom>
-          <a:noFill/>
-        </p:spPr>
-        <p:txBody>
-          <a:bodyPr wrap="square" lIns="0" tIns="0" rIns="0" bIns="0"/>
-          <a:lstStyle/>
-          <a:p>
-            <a:pPr algn="ctr"/>
-            <a:r>
-              <a:rPr lang="en-US" sz="1600" b="1" dirty="0">
-                <a:solidFill>
-                  <a:srgbClr val="8A2E3B"/>
-                </a:solidFill>
-                <a:latin typeface="Cambria Math"/>
-              </a:rPr>
-              <a:t>I</a:t>
-            </a:r>
-            <a:r>
-              <a:rPr lang="en-US" sz="1152" b="1" baseline="-25000" dirty="0">
-                <a:solidFill>
-                  <a:srgbClr val="8A2E3B"/>
-                </a:solidFill>
-                <a:latin typeface="Cambria Math"/>
-              </a:rPr>
-              <a:t>sc</a:t>
-            </a:r>
-          </a:p>
-        </p:txBody>
-      </p:sp>
-      <p:sp>
-        <p:nvSpPr>
-          <p:cNvPr id="425" name="TB 425"/>
-          <p:cNvSpPr txBox="1"/>
-          <p:nvPr/>
-        </p:nvSpPr>
-        <p:spPr>
-          <a:xfrm>
-            <a:off x="698500" y="4114800"/>
-            <a:ext cx="5664200" cy="279400"/>
-          </a:xfrm>
-          <a:prstGeom prst="rect">
-            <a:avLst/>
-          </a:prstGeom>
-          <a:noFill/>
-        </p:spPr>
-        <p:txBody>
-          <a:bodyPr wrap="square" lIns="0" tIns="0" rIns="0" bIns="0"/>
-          <a:lstStyle/>
-          <a:p>
-            <a:pPr algn="l"/>
-            <a:r>
-              <a:rPr lang="en-US" sz="1500" b="1" dirty="0">
-                <a:solidFill>
-                  <a:srgbClr val="8A2E3B"/>
-                </a:solidFill>
-                <a:latin typeface="Cambria Math"/>
-              </a:rPr>
-              <a:t>I</a:t>
-            </a:r>
-            <a:r>
-              <a:rPr lang="en-US" sz="1080" b="1" baseline="-25000" dirty="0">
-                <a:solidFill>
-                  <a:srgbClr val="8A2E3B"/>
-                </a:solidFill>
-                <a:latin typeface="Cambria Math"/>
-              </a:rPr>
-              <a:t>sc</a:t>
-            </a:r>
-            <a:r>
-              <a:rPr lang="en-US" sz="1500" dirty="0">
-                <a:solidFill>
-                  <a:srgbClr val="1A2744"/>
-                </a:solidFill>
-                <a:latin typeface="Cambria Math"/>
-              </a:rPr>
-              <a:t> = </a:t>
-            </a:r>
-            <a:r>
-              <a:rPr lang="en-US" sz="1500" b="1" dirty="0">
-                <a:solidFill>
-                  <a:srgbClr val="1A2744"/>
-                </a:solidFill>
-                <a:latin typeface="Cambria Math"/>
-              </a:rPr>
-              <a:t>E</a:t>
-            </a:r>
-            <a:r>
-              <a:rPr lang="en-US" sz="1500" dirty="0">
-                <a:solidFill>
-                  <a:srgbClr val="1A2744"/>
-                </a:solidFill>
-                <a:latin typeface="Cambria Math"/>
-              </a:rPr>
-              <a:t> / </a:t>
-            </a:r>
-            <a:r>
-              <a:rPr lang="en-US" sz="1500" b="1" dirty="0">
-                <a:solidFill>
-                  <a:srgbClr val="2C5F8A"/>
-                </a:solidFill>
-                <a:latin typeface="Cambria Math"/>
-              </a:rPr>
-              <a:t>Z</a:t>
-            </a:r>
-            <a:r>
-              <a:rPr lang="ja-JP" sz="1400" dirty="0">
-                <a:solidFill>
-                  <a:srgbClr val="5B6470"/>
-                </a:solidFill>
-                <a:latin typeface="Calibri"/>
-              </a:rPr>
-              <a:t>　— 短絡電流は電源とインピーダンスだけで決まる</a:t>
-            </a:r>
-          </a:p>
-        </p:txBody>
-      </p:sp>
-      <p:sp>
-        <p:nvSpPr>
-          <p:cNvPr id="426" name="TB 426"/>
-          <p:cNvSpPr txBox="1"/>
-          <p:nvPr/>
-        </p:nvSpPr>
-        <p:spPr>
-          <a:xfrm>
-            <a:off x="546100" y="4521200"/>
-            <a:ext cx="5969000" cy="254000"/>
-          </a:xfrm>
-          <a:prstGeom prst="rect">
-            <a:avLst/>
-          </a:prstGeom>
-          <a:noFill/>
-        </p:spPr>
-        <p:txBody>
-          <a:bodyPr wrap="square" lIns="0" tIns="0" rIns="0" bIns="0"/>
-          <a:lstStyle/>
-          <a:p>
-            <a:pPr algn="l"/>
-            <a:r>
-              <a:rPr lang="ja-JP" sz="1400" i="1" dirty="0">
-                <a:solidFill>
-                  <a:srgbClr val="5B6470"/>
-                </a:solidFill>
-                <a:latin typeface="Calibri"/>
-              </a:rPr>
-              <a:t>「インピーダンスだけで系統は基本計算できる」— その理由が下の2式。</a:t>
-            </a:r>
+      <p:grpSp>
+        <p:nvGrpSpPr>
+          <p:cNvPr id="26" name="グループ化 25">
+            <a:extLst>
+              <a:ext uri="{FF2B5EF4-FFF2-40B4-BE49-F238E27FC236}">
+                <a16:creationId xmlns:a16="http://schemas.microsoft.com/office/drawing/2014/main" id="{7725A016-22F0-2AD2-AC56-EBECC4625108}"/>
+              </a:ext>
+            </a:extLst>
+          </p:cNvPr>
+          <p:cNvGrpSpPr/>
+          <p:nvPr/>
+        </p:nvGrpSpPr>
+        <p:grpSpPr>
+          <a:xfrm>
+            <a:off x="4052323" y="3207702"/>
+            <a:ext cx="394335" cy="544195"/>
+            <a:chOff x="4343400" y="3208655"/>
+            <a:chExt cx="394335" cy="544195"/>
+          </a:xfrm>
+        </p:grpSpPr>
+        <p:cxnSp>
+          <p:nvCxnSpPr>
+            <p:cNvPr id="10" name="直線コネクタ 9">
+              <a:extLst>
+                <a:ext uri="{FF2B5EF4-FFF2-40B4-BE49-F238E27FC236}">
+                  <a16:creationId xmlns:a16="http://schemas.microsoft.com/office/drawing/2014/main" id="{68F930BF-2E45-38DE-F70D-E8BB62165479}"/>
+                </a:ext>
+              </a:extLst>
+            </p:cNvPr>
+            <p:cNvCxnSpPr>
+              <a:cxnSpLocks/>
+            </p:cNvCxnSpPr>
+            <p:nvPr/>
+          </p:nvCxnSpPr>
+          <p:spPr>
+            <a:xfrm>
+              <a:off x="4343400" y="3219450"/>
+              <a:ext cx="239077" cy="0"/>
+            </a:xfrm>
+            <a:prstGeom prst="line">
+              <a:avLst/>
+            </a:prstGeom>
+          </p:spPr>
+          <p:style>
+            <a:lnRef idx="2">
+              <a:schemeClr val="accent1"/>
+            </a:lnRef>
+            <a:fillRef idx="0">
+              <a:schemeClr val="accent1"/>
+            </a:fillRef>
+            <a:effectRef idx="1">
+              <a:schemeClr val="accent1"/>
+            </a:effectRef>
+            <a:fontRef idx="minor">
+              <a:schemeClr val="tx1"/>
+            </a:fontRef>
+          </p:style>
+        </p:cxnSp>
+        <p:cxnSp>
+          <p:nvCxnSpPr>
+            <p:cNvPr id="12" name="直線コネクタ 11">
+              <a:extLst>
+                <a:ext uri="{FF2B5EF4-FFF2-40B4-BE49-F238E27FC236}">
+                  <a16:creationId xmlns:a16="http://schemas.microsoft.com/office/drawing/2014/main" id="{5A4F5D32-1CD3-3D89-4BF8-9F56937239A3}"/>
+                </a:ext>
+              </a:extLst>
+            </p:cNvPr>
+            <p:cNvCxnSpPr>
+              <a:cxnSpLocks/>
+            </p:cNvCxnSpPr>
+            <p:nvPr/>
+          </p:nvCxnSpPr>
+          <p:spPr>
+            <a:xfrm>
+              <a:off x="4582477" y="3208655"/>
+              <a:ext cx="0" cy="397510"/>
+            </a:xfrm>
+            <a:prstGeom prst="line">
+              <a:avLst/>
+            </a:prstGeom>
+          </p:spPr>
+          <p:style>
+            <a:lnRef idx="2">
+              <a:schemeClr val="accent1"/>
+            </a:lnRef>
+            <a:fillRef idx="0">
+              <a:schemeClr val="accent1"/>
+            </a:fillRef>
+            <a:effectRef idx="1">
+              <a:schemeClr val="accent1"/>
+            </a:effectRef>
+            <a:fontRef idx="minor">
+              <a:schemeClr val="tx1"/>
+            </a:fontRef>
+          </p:style>
+        </p:cxnSp>
+        <p:cxnSp>
+          <p:nvCxnSpPr>
+            <p:cNvPr id="13" name="直線コネクタ 12">
+              <a:extLst>
+                <a:ext uri="{FF2B5EF4-FFF2-40B4-BE49-F238E27FC236}">
+                  <a16:creationId xmlns:a16="http://schemas.microsoft.com/office/drawing/2014/main" id="{BBAE64D5-B826-F06A-D353-876B641766A5}"/>
+                </a:ext>
+              </a:extLst>
+            </p:cNvPr>
+            <p:cNvCxnSpPr>
+              <a:cxnSpLocks/>
+            </p:cNvCxnSpPr>
+            <p:nvPr/>
+          </p:nvCxnSpPr>
+          <p:spPr>
+            <a:xfrm>
+              <a:off x="4427220" y="3613150"/>
+              <a:ext cx="310515" cy="0"/>
+            </a:xfrm>
+            <a:prstGeom prst="line">
+              <a:avLst/>
+            </a:prstGeom>
+          </p:spPr>
+          <p:style>
+            <a:lnRef idx="2">
+              <a:schemeClr val="accent1"/>
+            </a:lnRef>
+            <a:fillRef idx="0">
+              <a:schemeClr val="accent1"/>
+            </a:fillRef>
+            <a:effectRef idx="1">
+              <a:schemeClr val="accent1"/>
+            </a:effectRef>
+            <a:fontRef idx="minor">
+              <a:schemeClr val="tx1"/>
+            </a:fontRef>
+          </p:style>
+        </p:cxnSp>
+        <p:cxnSp>
+          <p:nvCxnSpPr>
+            <p:cNvPr id="14" name="直線コネクタ 13">
+              <a:extLst>
+                <a:ext uri="{FF2B5EF4-FFF2-40B4-BE49-F238E27FC236}">
+                  <a16:creationId xmlns:a16="http://schemas.microsoft.com/office/drawing/2014/main" id="{13AA81AF-35A9-BD76-3779-CB64407BA794}"/>
+                </a:ext>
+              </a:extLst>
+            </p:cNvPr>
+            <p:cNvCxnSpPr>
+              <a:cxnSpLocks/>
+            </p:cNvCxnSpPr>
+            <p:nvPr/>
+          </p:nvCxnSpPr>
+          <p:spPr>
+            <a:xfrm>
+              <a:off x="4473416" y="3683000"/>
+              <a:ext cx="218122" cy="0"/>
+            </a:xfrm>
+            <a:prstGeom prst="line">
+              <a:avLst/>
+            </a:prstGeom>
+          </p:spPr>
+          <p:style>
+            <a:lnRef idx="2">
+              <a:schemeClr val="accent1"/>
+            </a:lnRef>
+            <a:fillRef idx="0">
+              <a:schemeClr val="accent1"/>
+            </a:fillRef>
+            <a:effectRef idx="1">
+              <a:schemeClr val="accent1"/>
+            </a:effectRef>
+            <a:fontRef idx="minor">
+              <a:schemeClr val="tx1"/>
+            </a:fontRef>
+          </p:style>
+        </p:cxnSp>
+        <p:cxnSp>
+          <p:nvCxnSpPr>
+            <p:cNvPr id="15" name="直線コネクタ 14">
+              <a:extLst>
+                <a:ext uri="{FF2B5EF4-FFF2-40B4-BE49-F238E27FC236}">
+                  <a16:creationId xmlns:a16="http://schemas.microsoft.com/office/drawing/2014/main" id="{52F18EC8-E3AE-6710-2DB3-7E53DF2C7C2B}"/>
+                </a:ext>
+              </a:extLst>
+            </p:cNvPr>
+            <p:cNvCxnSpPr>
+              <a:cxnSpLocks/>
+            </p:cNvCxnSpPr>
+            <p:nvPr/>
+          </p:nvCxnSpPr>
+          <p:spPr>
+            <a:xfrm>
+              <a:off x="4516755" y="3752850"/>
+              <a:ext cx="131445" cy="0"/>
+            </a:xfrm>
+            <a:prstGeom prst="line">
+              <a:avLst/>
+            </a:prstGeom>
+          </p:spPr>
+          <p:style>
+            <a:lnRef idx="2">
+              <a:schemeClr val="accent1"/>
+            </a:lnRef>
+            <a:fillRef idx="0">
+              <a:schemeClr val="accent1"/>
+            </a:fillRef>
+            <a:effectRef idx="1">
+              <a:schemeClr val="accent1"/>
+            </a:effectRef>
+            <a:fontRef idx="minor">
+              <a:schemeClr val="tx1"/>
+            </a:fontRef>
+          </p:style>
+        </p:cxnSp>
+      </p:grpSp>
+      <p:sp>
+        <p:nvSpPr>
+          <p:cNvPr id="27" name="Ln 901">
+            <a:extLst>
+              <a:ext uri="{FF2B5EF4-FFF2-40B4-BE49-F238E27FC236}">
+                <a16:creationId xmlns:a16="http://schemas.microsoft.com/office/drawing/2014/main" id="{EA8F69D7-B457-989B-B5B7-E0088AB2986C}"/>
+              </a:ext>
+            </a:extLst>
+          </p:cNvPr>
+          <p:cNvSpPr/>
+          <p:nvPr/>
+        </p:nvSpPr>
+        <p:spPr>
+          <a:xfrm>
+            <a:off x="4053469" y="2923948"/>
+            <a:ext cx="0" cy="555852"/>
+          </a:xfrm>
+          <a:prstGeom prst="line">
+            <a:avLst/>
+          </a:prstGeom>
+          <a:ln w="63500">
+            <a:solidFill>
+              <a:srgbClr val="8A2E3B"/>
+            </a:solidFill>
+          </a:ln>
+        </p:spPr>
+        <p:txBody>
+          <a:bodyPr/>
+          <a:lstStyle/>
+          <a:p>
+            <a:endParaRPr/>
+          </a:p>
+        </p:txBody>
+      </p:sp>
+      <p:sp>
+        <p:nvSpPr>
+          <p:cNvPr id="28" name="Dg 411">
+            <a:extLst>
+              <a:ext uri="{FF2B5EF4-FFF2-40B4-BE49-F238E27FC236}">
+                <a16:creationId xmlns:a16="http://schemas.microsoft.com/office/drawing/2014/main" id="{9B696906-5F25-B891-A287-411792F990AC}"/>
+              </a:ext>
+            </a:extLst>
+          </p:cNvPr>
+          <p:cNvSpPr/>
+          <p:nvPr/>
+        </p:nvSpPr>
+        <p:spPr>
+          <a:xfrm>
+            <a:off x="3474791" y="3200400"/>
+            <a:ext cx="558800" cy="38100"/>
+          </a:xfrm>
+          <a:prstGeom prst="rect">
+            <a:avLst/>
+          </a:prstGeom>
+          <a:solidFill>
+            <a:srgbClr val="1A2744"/>
+          </a:solidFill>
+          <a:ln>
+            <a:noFill/>
+          </a:ln>
+        </p:spPr>
+        <p:txBody>
+          <a:bodyPr lIns="0" tIns="0" rIns="0" bIns="0" rtlCol="0" anchor="ctr"/>
+          <a:lstStyle/>
+          <a:p>
+            <a:endParaRPr/>
           </a:p>
         </p:txBody>
       </p:sp>
     </p:spTree>
     <p:extLst>
       <p:ext uri="{BB962C8B-B14F-4D97-AF65-F5344CB8AC3E}">
-        <p14:creationId xmlns:p14="http://schemas.microsoft.com/office/powerpoint/2010/main" val="1481954900"/>
+        <p14:creationId xmlns:p14="http://schemas.microsoft.com/office/powerpoint/2010/main" val="1337527496"/>
       </p:ext>
     </p:extLst>
   </p:cSld>
@@ -13692,6 +14664,64 @@
       </p:sp>
       <p:sp>
         <p:nvSpPr>
+          <p:cNvPr id="800" name="Dg 800"/>
+          <p:cNvSpPr/>
+          <p:nvPr/>
+        </p:nvSpPr>
+        <p:spPr>
+          <a:xfrm>
+            <a:off x="546100" y="2133600"/>
+            <a:ext cx="5969000" cy="1930400"/>
+          </a:xfrm>
+          <a:prstGeom prst="rect">
+            <a:avLst/>
+          </a:prstGeom>
+          <a:solidFill>
+            <a:srgbClr val="F4F6FA"/>
+          </a:solidFill>
+          <a:ln>
+            <a:noFill/>
+          </a:ln>
+        </p:spPr>
+        <p:txBody>
+          <a:bodyPr/>
+          <a:lstStyle/>
+          <a:p>
+            <a:endParaRPr/>
+          </a:p>
+        </p:txBody>
+      </p:sp>
+      <p:sp>
+        <p:nvSpPr>
+          <p:cNvPr id="801" name="Dg 801"/>
+          <p:cNvSpPr/>
+          <p:nvPr/>
+        </p:nvSpPr>
+        <p:spPr>
+          <a:xfrm>
+            <a:off x="546100" y="2133600"/>
+            <a:ext cx="38100" cy="1930400"/>
+          </a:xfrm>
+          <a:prstGeom prst="rect">
+            <a:avLst/>
+          </a:prstGeom>
+          <a:solidFill>
+            <a:srgbClr val="8A2E3B"/>
+          </a:solidFill>
+          <a:ln>
+            <a:noFill/>
+          </a:ln>
+        </p:spPr>
+        <p:txBody>
+          <a:bodyPr/>
+          <a:lstStyle/>
+          <a:p>
+            <a:endParaRPr/>
+          </a:p>
+        </p:txBody>
+      </p:sp>
+      <p:sp>
+        <p:nvSpPr>
           <p:cNvPr id="300" name="Dg 300"/>
           <p:cNvSpPr/>
           <p:nvPr/>
@@ -13785,8 +14815,8 @@
         </p:nvSpPr>
         <p:spPr>
           <a:xfrm>
-            <a:off x="546100" y="4064000"/>
-            <a:ext cx="5969000" cy="1727200"/>
+            <a:off x="546100" y="4191000"/>
+            <a:ext cx="5969000" cy="1981200"/>
           </a:xfrm>
           <a:prstGeom prst="rect">
             <a:avLst/>
@@ -13814,8 +14844,8 @@
         </p:nvSpPr>
         <p:spPr>
           <a:xfrm>
-            <a:off x="546100" y="4064000"/>
-            <a:ext cx="38100" cy="1727200"/>
+            <a:off x="546100" y="4191000"/>
+            <a:ext cx="38100" cy="1981200"/>
           </a:xfrm>
           <a:prstGeom prst="rect">
             <a:avLst/>
@@ -13843,8 +14873,8 @@
         </p:nvSpPr>
         <p:spPr>
           <a:xfrm>
-            <a:off x="6680200" y="2286000"/>
-            <a:ext cx="4965700" cy="1574800"/>
+            <a:off x="6680200" y="1752600"/>
+            <a:ext cx="4965700" cy="1930400"/>
           </a:xfrm>
           <a:prstGeom prst="rect">
             <a:avLst/>
@@ -13872,8 +14902,8 @@
         </p:nvSpPr>
         <p:spPr>
           <a:xfrm>
-            <a:off x="6680200" y="2286000"/>
-            <a:ext cx="38100" cy="1574800"/>
+            <a:off x="6680200" y="1752600"/>
+            <a:ext cx="38100" cy="1930400"/>
           </a:xfrm>
           <a:prstGeom prst="rect">
             <a:avLst/>
@@ -13901,8 +14931,8 @@
         </p:nvSpPr>
         <p:spPr>
           <a:xfrm>
-            <a:off x="6680200" y="4013200"/>
-            <a:ext cx="4965700" cy="1778000"/>
+            <a:off x="6680200" y="3835400"/>
+            <a:ext cx="4965700" cy="2336800"/>
           </a:xfrm>
           <a:prstGeom prst="rect">
             <a:avLst/>
@@ -13930,7 +14960,7 @@
         </p:nvSpPr>
         <p:spPr>
           <a:xfrm>
-            <a:off x="6680200" y="4013200"/>
+            <a:off x="6680200" y="3835400"/>
             <a:ext cx="4965700" cy="38100"/>
           </a:xfrm>
           <a:prstGeom prst="rect">
@@ -14029,8 +15059,8 @@
         </p:nvSpPr>
         <p:spPr>
           <a:xfrm>
-            <a:off x="546100" y="1473200"/>
-            <a:ext cx="5969000" cy="704937"/>
+            <a:off x="546100" y="1447800"/>
+            <a:ext cx="5969000" cy="635000"/>
           </a:xfrm>
           <a:prstGeom prst="rect">
             <a:avLst/>
@@ -14068,8 +15098,8 @@
         </p:nvSpPr>
         <p:spPr>
           <a:xfrm>
-            <a:off x="546100" y="4064000"/>
-            <a:ext cx="5969000" cy="1727200"/>
+            <a:off x="800100" y="5715000"/>
+            <a:ext cx="5461000" cy="406400"/>
           </a:xfrm>
           <a:ln/>
           <a:effectLst/>
@@ -14089,48 +15119,13 @@
           </a:fontRef>
         </p:style>
         <p:txBody>
-          <a:bodyPr wrap="square" lIns="228600" tIns="152400" rIns="152400" bIns="152400" rtlCol="0" anchor="ctr"/>
-          <a:lstStyle/>
-          <a:p>
-            <a:pPr algn="l">
-              <a:spcAft>
-                <a:spcPts val="300"/>
-              </a:spcAft>
-            </a:pPr>
-            <a:r>
-              <a:rPr lang="en-US" sz="1900" dirty="0">
-                <a:solidFill>
-                  <a:srgbClr val="1A2744"/>
-                </a:solidFill>
-                <a:latin typeface="Cambria Math"/>
-              </a:rPr>
-              <a:t>Zth,i = [ Y⁻¹ ]ii</a:t>
-            </a:r>
-          </a:p>
-          <a:p>
-            <a:pPr algn="l">
-              <a:spcAft>
-                <a:spcPts val="300"/>
-              </a:spcAft>
-            </a:pPr>
-            <a:r>
-              <a:rPr lang="en-US" sz="1900" dirty="0">
-                <a:solidFill>
-                  <a:srgbClr val="1A2744"/>
-                </a:solidFill>
-                <a:latin typeface="Cambria Math"/>
-              </a:rPr>
-              <a:t>Ssc,i = |V|² / |Zth,i| ≈ Sbase / |Zth,i(pu)|</a:t>
-            </a:r>
-          </a:p>
+          <a:bodyPr wrap="square" lIns="0" tIns="0" rIns="0" bIns="0" rtlCol="0" anchor="ctr"/>
+          <a:lstStyle/>
           <a:p>
             <a:pPr algn="l">
               <a:lnSpc>
-                <a:spcPct val="135000"/>
+                <a:spcPct val="130000"/>
               </a:lnSpc>
-              <a:spcBef>
-                <a:spcPts val="500"/>
-              </a:spcBef>
             </a:pPr>
             <a:r>
               <a:rPr lang="ja-JP" sz="1400" dirty="0">
@@ -14139,7 +15134,7 @@
                 </a:solidFill>
                 <a:latin typeface="Calibri"/>
               </a:rPr>
-              <a:t>逆行列は作らず疎LUで Y x = ei を解き対角のみ取得(島あたり数十秒)。発電機は xd″=0.2pu(典型値)で参加。</a:t>
+              <a:t>逆行列は作らず疏ＬＵで Y x = ei を解き対角のみ取得(島あたり数十秒)。発電機は x″d = 0.2pu(典型値)で参加。</a:t>
             </a:r>
           </a:p>
         </p:txBody>
@@ -14152,8 +15147,8 @@
         </p:nvSpPr>
         <p:spPr>
           <a:xfrm>
-            <a:off x="6680200" y="2286000"/>
-            <a:ext cx="4965700" cy="1574800"/>
+            <a:off x="6934200" y="3251200"/>
+            <a:ext cx="4457700" cy="431800"/>
           </a:xfrm>
           <a:ln/>
           <a:effectLst/>
@@ -14173,32 +15168,13 @@
           </a:fontRef>
         </p:style>
         <p:txBody>
-          <a:bodyPr wrap="square" lIns="228600" tIns="152400" rIns="152400" bIns="152400" rtlCol="0" anchor="ctr"/>
-          <a:lstStyle/>
-          <a:p>
-            <a:pPr algn="l">
-              <a:spcAft>
-                <a:spcPts val="300"/>
-              </a:spcAft>
-            </a:pPr>
-            <a:r>
-              <a:rPr lang="en-US" sz="1800" dirty="0">
-                <a:solidFill>
-                  <a:srgbClr val="1A2744"/>
-                </a:solidFill>
-                <a:latin typeface="Cambria Math"/>
-              </a:rPr>
-              <a:t>ΔV ≈ Zth · ΔI ,   SCRi = Ssc,i / SIBR,i</a:t>
-            </a:r>
-          </a:p>
+          <a:bodyPr wrap="square" lIns="0" tIns="0" rIns="0" bIns="0" rtlCol="0" anchor="ctr"/>
+          <a:lstStyle/>
           <a:p>
             <a:pPr algn="l">
               <a:lnSpc>
-                <a:spcPct val="135000"/>
+                <a:spcPct val="130000"/>
               </a:lnSpc>
-              <a:spcBef>
-                <a:spcPts val="500"/>
-              </a:spcBef>
             </a:pPr>
             <a:r>
               <a:rPr lang="ja-JP" sz="1400" dirty="0">
@@ -14207,7 +15183,7 @@
                 </a:solidFill>
                 <a:latin typeface="Calibri"/>
               </a:rPr>
-              <a:t>Zthが大きい(弱い)ほどインバータの電流変化が自端電圧を動かし、PLLが自分の起こした変動を追って発振する。</a:t>
+              <a:t>Zth が大きい(弱い)ほど、インバータの電流変化が自端電圧を動かし、PLLが自分の起こした変動を追って発振する。</a:t>
             </a:r>
           </a:p>
         </p:txBody>
@@ -14220,8 +15196,8 @@
         </p:nvSpPr>
         <p:spPr>
           <a:xfrm>
-            <a:off x="6934200" y="4267200"/>
-            <a:ext cx="4457700" cy="369332"/>
+            <a:off x="6934200" y="4089400"/>
+            <a:ext cx="4457700" cy="330200"/>
           </a:xfrm>
           <a:prstGeom prst="rect">
             <a:avLst/>
@@ -14255,8 +15231,8 @@
         </p:nvSpPr>
         <p:spPr>
           <a:xfrm>
-            <a:off x="6934200" y="4724400"/>
-            <a:ext cx="4457700" cy="1263423"/>
+            <a:off x="6934200" y="4572000"/>
+            <a:ext cx="4457700" cy="1397000"/>
           </a:xfrm>
           <a:prstGeom prst="rect">
             <a:avLst/>
@@ -14376,17 +15352,19 @@
         </p:nvSpPr>
         <p:spPr>
           <a:xfrm>
-            <a:off x="546100" y="2438400"/>
-            <a:ext cx="2032000" cy="1117600"/>
+            <a:off x="698500" y="2362200"/>
+            <a:ext cx="1930400" cy="1016000"/>
           </a:xfrm>
           <a:prstGeom prst="cloud">
             <a:avLst/>
           </a:prstGeom>
           <a:solidFill>
-            <a:srgbClr val="F4F6FA"/>
+            <a:srgbClr val="FFFFFF"/>
           </a:solidFill>
-          <a:ln>
-            <a:noFill/>
+          <a:ln w="12700">
+            <a:solidFill>
+              <a:srgbClr val="5B6470"/>
+            </a:solidFill>
           </a:ln>
         </p:spPr>
         <p:txBody>
@@ -14414,8 +15392,8 @@
         </p:nvSpPr>
         <p:spPr>
           <a:xfrm>
-            <a:off x="2616200" y="2540000"/>
-            <a:ext cx="711200" cy="228600"/>
+            <a:off x="2717800" y="2438400"/>
+            <a:ext cx="685800" cy="228600"/>
           </a:xfrm>
           <a:prstGeom prst="rect">
             <a:avLst/>
@@ -14447,8 +15425,8 @@
         </p:nvSpPr>
         <p:spPr>
           <a:xfrm>
-            <a:off x="2667000" y="2844800"/>
-            <a:ext cx="609600" cy="304800"/>
+            <a:off x="2692400" y="2743200"/>
+            <a:ext cx="635000" cy="330200"/>
           </a:xfrm>
           <a:prstGeom prst="rightArrow">
             <a:avLst/>
@@ -14476,8 +15454,8 @@
         </p:nvSpPr>
         <p:spPr>
           <a:xfrm>
-            <a:off x="3505200" y="2743200"/>
-            <a:ext cx="508000" cy="508000"/>
+            <a:off x="3454400" y="2590800"/>
+            <a:ext cx="635000" cy="635000"/>
           </a:xfrm>
           <a:prstGeom prst="ellipse">
             <a:avLst/>
@@ -14516,8 +15494,8 @@
         </p:nvSpPr>
         <p:spPr>
           <a:xfrm>
-            <a:off x="4013200" y="2984500"/>
-            <a:ext cx="406400" cy="19050"/>
+            <a:off x="4089400" y="2895600"/>
+            <a:ext cx="381000" cy="25400"/>
           </a:xfrm>
           <a:prstGeom prst="rect">
             <a:avLst/>
@@ -14545,8 +15523,8 @@
         </p:nvSpPr>
         <p:spPr>
           <a:xfrm>
-            <a:off x="4419600" y="2819400"/>
-            <a:ext cx="914400" cy="330200"/>
+            <a:off x="4470400" y="2705100"/>
+            <a:ext cx="1016000" cy="406400"/>
           </a:xfrm>
           <a:prstGeom prst="rect">
             <a:avLst/>
@@ -14585,8 +15563,8 @@
         </p:nvSpPr>
         <p:spPr>
           <a:xfrm>
-            <a:off x="5334000" y="2984500"/>
-            <a:ext cx="330200" cy="19050"/>
+            <a:off x="5486400" y="2895600"/>
+            <a:ext cx="330200" cy="25400"/>
           </a:xfrm>
           <a:prstGeom prst="rect">
             <a:avLst/>
@@ -14614,8 +15592,8 @@
         </p:nvSpPr>
         <p:spPr>
           <a:xfrm>
-            <a:off x="5664200" y="2641600"/>
-            <a:ext cx="63500" cy="711200"/>
+            <a:off x="5816600" y="2514600"/>
+            <a:ext cx="63500" cy="787400"/>
           </a:xfrm>
           <a:prstGeom prst="rect">
             <a:avLst/>
@@ -14643,7 +15621,7 @@
         </p:nvSpPr>
         <p:spPr>
           <a:xfrm>
-            <a:off x="3378200" y="3327400"/>
+            <a:off x="3390900" y="3276600"/>
             <a:ext cx="762000" cy="228600"/>
           </a:xfrm>
           <a:prstGeom prst="rect">
@@ -14676,8 +15654,8 @@
         </p:nvSpPr>
         <p:spPr>
           <a:xfrm>
-            <a:off x="5207000" y="3403600"/>
-            <a:ext cx="990600" cy="228600"/>
+            <a:off x="5334000" y="3352800"/>
+            <a:ext cx="1016000" cy="228600"/>
           </a:xfrm>
           <a:prstGeom prst="rect">
             <a:avLst/>
@@ -14709,8 +15687,8 @@
         </p:nvSpPr>
         <p:spPr>
           <a:xfrm>
-            <a:off x="546100" y="3708400"/>
-            <a:ext cx="5969000" cy="254000"/>
+            <a:off x="698500" y="3657600"/>
+            <a:ext cx="5588000" cy="254000"/>
           </a:xfrm>
           <a:prstGeom prst="rect">
             <a:avLst/>
@@ -14734,10 +15712,1097 @@
           </a:p>
         </p:txBody>
       </p:sp>
+      <mc:AlternateContent xmlns:mc="http://schemas.openxmlformats.org/markup-compatibility/2006">
+        <mc:Choice xmlns:a14="http://schemas.microsoft.com/office/drawing/2010/main" Requires="a14">
+          <p:sp>
+            <p:nvSpPr>
+              <p:cNvPr id="810" name="TB 810"/>
+              <p:cNvSpPr txBox="1"/>
+              <p:nvPr/>
+            </p:nvSpPr>
+            <p:spPr>
+              <a:xfrm>
+                <a:off x="800100" y="4368800"/>
+                <a:ext cx="5461000" cy="381000"/>
+              </a:xfrm>
+              <a:prstGeom prst="rect">
+                <a:avLst/>
+              </a:prstGeom>
+              <a:noFill/>
+            </p:spPr>
+            <p:txBody>
+              <a:bodyPr wrap="square" lIns="0" tIns="0" rIns="0" bIns="0"/>
+              <a:lstStyle/>
+              <a:p>
+                <a:pPr algn="l"/>
+                <a14:m>
+                  <m:oMathPara xmlns:m="http://schemas.openxmlformats.org/officeDocument/2006/math">
+                    <m:oMathParaPr>
+                      <m:jc m:val="left"/>
+                    </m:oMathParaPr>
+                    <m:oMath>
+                      <m:sSub>
+                        <m:sSubPr>
+                          <m:ctrlPr>
+                            <a:rPr lang="en-US" sz="1700" dirty="0">
+                              <a:solidFill>
+                                <a:srgbClr val="8A2E3B"/>
+                              </a:solidFill>
+                              <a:latin typeface="Cambria Math" panose="02040503050406030204" pitchFamily="18" charset="0"/>
+                            </a:rPr>
+                          </m:ctrlPr>
+                        </m:sSubPr>
+                        <m:e>
+                          <m:r>
+                            <a:rPr lang="en-US" sz="1700" dirty="0">
+                              <a:solidFill>
+                                <a:srgbClr val="8A2E3B"/>
+                              </a:solidFill>
+                              <a:latin typeface="Cambria Math" panose="02040503050406030204" pitchFamily="18" charset="0"/>
+                            </a:rPr>
+                            <m:t>𝑍</m:t>
+                          </m:r>
+                        </m:e>
+                        <m:sub>
+                          <m:r>
+                            <a:rPr lang="en-US" sz="1700" dirty="0">
+                              <a:solidFill>
+                                <a:srgbClr val="8A2E3B"/>
+                              </a:solidFill>
+                              <a:latin typeface="Cambria Math" panose="02040503050406030204" pitchFamily="18" charset="0"/>
+                            </a:rPr>
+                            <m:t>𝑡ℎ</m:t>
+                          </m:r>
+                          <m:r>
+                            <a:rPr lang="en-US" sz="1700" dirty="0">
+                              <a:solidFill>
+                                <a:srgbClr val="8A2E3B"/>
+                              </a:solidFill>
+                              <a:latin typeface="Cambria Math" panose="02040503050406030204" pitchFamily="18" charset="0"/>
+                            </a:rPr>
+                            <m:t>,</m:t>
+                          </m:r>
+                          <m:r>
+                            <a:rPr lang="en-US" sz="1700" dirty="0">
+                              <a:solidFill>
+                                <a:srgbClr val="8A2E3B"/>
+                              </a:solidFill>
+                              <a:latin typeface="Cambria Math" panose="02040503050406030204" pitchFamily="18" charset="0"/>
+                            </a:rPr>
+                            <m:t>𝑖</m:t>
+                          </m:r>
+                        </m:sub>
+                      </m:sSub>
+                      <m:r>
+                        <a:rPr lang="en-US" sz="1700" dirty="0">
+                          <a:solidFill>
+                            <a:srgbClr val="1A2744"/>
+                          </a:solidFill>
+                          <a:latin typeface="Cambria Math" panose="02040503050406030204" pitchFamily="18" charset="0"/>
+                        </a:rPr>
+                        <m:t> = </m:t>
+                      </m:r>
+                      <m:sSub>
+                        <m:sSubPr>
+                          <m:ctrlPr>
+                            <a:rPr lang="en-US" sz="1700" dirty="0">
+                              <a:solidFill>
+                                <a:srgbClr val="1A2744"/>
+                              </a:solidFill>
+                              <a:latin typeface="Cambria Math" panose="02040503050406030204" pitchFamily="18" charset="0"/>
+                            </a:rPr>
+                          </m:ctrlPr>
+                        </m:sSubPr>
+                        <m:e>
+                          <m:r>
+                            <a:rPr lang="en-US" sz="1700" dirty="0">
+                              <a:solidFill>
+                                <a:srgbClr val="1A2744"/>
+                              </a:solidFill>
+                              <a:latin typeface="Cambria Math" panose="02040503050406030204" pitchFamily="18" charset="0"/>
+                            </a:rPr>
+                            <m:t>[</m:t>
+                          </m:r>
+                          <m:sSup>
+                            <m:sSupPr>
+                              <m:ctrlPr>
+                                <a:rPr lang="en-US" sz="1700" dirty="0">
+                                  <a:solidFill>
+                                    <a:srgbClr val="2C5F8A"/>
+                                  </a:solidFill>
+                                  <a:latin typeface="Cambria Math" panose="02040503050406030204" pitchFamily="18" charset="0"/>
+                                </a:rPr>
+                              </m:ctrlPr>
+                            </m:sSupPr>
+                            <m:e>
+                              <m:r>
+                                <a:rPr lang="en-US" sz="1700" dirty="0">
+                                  <a:solidFill>
+                                    <a:srgbClr val="2C5F8A"/>
+                                  </a:solidFill>
+                                  <a:latin typeface="Cambria Math" panose="02040503050406030204" pitchFamily="18" charset="0"/>
+                                </a:rPr>
+                                <m:t>𝑌</m:t>
+                              </m:r>
+                            </m:e>
+                            <m:sup>
+                              <m:r>
+                                <a:rPr lang="en-US" sz="1700" dirty="0">
+                                  <a:solidFill>
+                                    <a:srgbClr val="1A2744"/>
+                                  </a:solidFill>
+                                  <a:latin typeface="Cambria Math" panose="02040503050406030204" pitchFamily="18" charset="0"/>
+                                </a:rPr>
+                                <m:t>−1</m:t>
+                              </m:r>
+                            </m:sup>
+                          </m:sSup>
+                          <m:r>
+                            <a:rPr lang="en-US" sz="1700" dirty="0">
+                              <a:solidFill>
+                                <a:srgbClr val="1A2744"/>
+                              </a:solidFill>
+                              <a:latin typeface="Cambria Math" panose="02040503050406030204" pitchFamily="18" charset="0"/>
+                            </a:rPr>
+                            <m:t>]</m:t>
+                          </m:r>
+                        </m:e>
+                        <m:sub>
+                          <m:r>
+                            <a:rPr lang="en-US" sz="1700" dirty="0">
+                              <a:solidFill>
+                                <a:srgbClr val="1A2744"/>
+                              </a:solidFill>
+                              <a:latin typeface="Cambria Math" panose="02040503050406030204" pitchFamily="18" charset="0"/>
+                            </a:rPr>
+                            <m:t>𝑖𝑖</m:t>
+                          </m:r>
+                        </m:sub>
+                      </m:sSub>
+                    </m:oMath>
+                  </m:oMathPara>
+                </a14:m>
+                <a:endParaRPr/>
+              </a:p>
+            </p:txBody>
+          </p:sp>
+        </mc:Choice>
+        <mc:Fallback>
+          <p:sp>
+            <p:nvSpPr>
+              <p:cNvPr id="810" name="TB 810"/>
+              <p:cNvSpPr txBox="1">
+                <a:spLocks noRot="1" noChangeAspect="1" noMove="1" noResize="1" noEditPoints="1" noAdjustHandles="1" noChangeArrowheads="1" noChangeShapeType="1" noTextEdit="1"/>
+              </p:cNvSpPr>
+              <p:nvPr/>
+            </p:nvSpPr>
+            <p:spPr>
+              <a:xfrm>
+                <a:off x="800100" y="4368800"/>
+                <a:ext cx="5461000" cy="381000"/>
+              </a:xfrm>
+              <a:prstGeom prst="rect">
+                <a:avLst/>
+              </a:prstGeom>
+              <a:blipFill>
+                <a:blip r:embed="rId2"/>
+                <a:stretch>
+                  <a:fillRect l="-1160" t="-3333"/>
+                </a:stretch>
+              </a:blipFill>
+            </p:spPr>
+            <p:txBody>
+              <a:bodyPr/>
+              <a:lstStyle/>
+              <a:p>
+                <a:r>
+                  <a:rPr lang="ja-JP" altLang="en-US">
+                    <a:noFill/>
+                  </a:rPr>
+                  <a:t> </a:t>
+                </a:r>
+              </a:p>
+            </p:txBody>
+          </p:sp>
+        </mc:Fallback>
+      </mc:AlternateContent>
+      <mc:AlternateContent xmlns:mc="http://schemas.openxmlformats.org/markup-compatibility/2006">
+        <mc:Choice xmlns:a14="http://schemas.microsoft.com/office/drawing/2010/main" Requires="a14">
+          <p:sp>
+            <p:nvSpPr>
+              <p:cNvPr id="811" name="TB 811"/>
+              <p:cNvSpPr txBox="1"/>
+              <p:nvPr/>
+            </p:nvSpPr>
+            <p:spPr>
+              <a:xfrm>
+                <a:off x="800100" y="4902200"/>
+                <a:ext cx="5461000" cy="711200"/>
+              </a:xfrm>
+              <a:prstGeom prst="rect">
+                <a:avLst/>
+              </a:prstGeom>
+              <a:noFill/>
+            </p:spPr>
+            <p:txBody>
+              <a:bodyPr wrap="square" lIns="0" tIns="0" rIns="0" bIns="0"/>
+              <a:lstStyle/>
+              <a:p>
+                <a:pPr algn="l"/>
+                <a14:m>
+                  <m:oMathPara xmlns:m="http://schemas.openxmlformats.org/officeDocument/2006/math">
+                    <m:oMathParaPr>
+                      <m:jc m:val="left"/>
+                    </m:oMathParaPr>
+                    <m:oMath>
+                      <m:sSub>
+                        <m:sSubPr>
+                          <m:ctrlPr>
+                            <a:rPr lang="en-US" sz="1700" dirty="0">
+                              <a:solidFill>
+                                <a:srgbClr val="8A2E3B"/>
+                              </a:solidFill>
+                              <a:latin typeface="Cambria Math" panose="02040503050406030204" pitchFamily="18" charset="0"/>
+                            </a:rPr>
+                          </m:ctrlPr>
+                        </m:sSubPr>
+                        <m:e>
+                          <m:r>
+                            <a:rPr lang="en-US" sz="1700" dirty="0">
+                              <a:solidFill>
+                                <a:srgbClr val="8A2E3B"/>
+                              </a:solidFill>
+                              <a:latin typeface="Cambria Math" panose="02040503050406030204" pitchFamily="18" charset="0"/>
+                            </a:rPr>
+                            <m:t>𝑆</m:t>
+                          </m:r>
+                        </m:e>
+                        <m:sub>
+                          <m:r>
+                            <a:rPr lang="en-US" sz="1700" dirty="0">
+                              <a:solidFill>
+                                <a:srgbClr val="8A2E3B"/>
+                              </a:solidFill>
+                              <a:latin typeface="Cambria Math" panose="02040503050406030204" pitchFamily="18" charset="0"/>
+                            </a:rPr>
+                            <m:t>𝑠𝑐</m:t>
+                          </m:r>
+                          <m:r>
+                            <a:rPr lang="en-US" sz="1700" dirty="0">
+                              <a:solidFill>
+                                <a:srgbClr val="8A2E3B"/>
+                              </a:solidFill>
+                              <a:latin typeface="Cambria Math" panose="02040503050406030204" pitchFamily="18" charset="0"/>
+                            </a:rPr>
+                            <m:t>,</m:t>
+                          </m:r>
+                          <m:r>
+                            <a:rPr lang="en-US" sz="1700" dirty="0">
+                              <a:solidFill>
+                                <a:srgbClr val="8A2E3B"/>
+                              </a:solidFill>
+                              <a:latin typeface="Cambria Math" panose="02040503050406030204" pitchFamily="18" charset="0"/>
+                            </a:rPr>
+                            <m:t>𝑖</m:t>
+                          </m:r>
+                        </m:sub>
+                      </m:sSub>
+                      <m:r>
+                        <a:rPr lang="en-US" sz="1700" dirty="0">
+                          <a:solidFill>
+                            <a:srgbClr val="1A2744"/>
+                          </a:solidFill>
+                          <a:latin typeface="Cambria Math" panose="02040503050406030204" pitchFamily="18" charset="0"/>
+                        </a:rPr>
+                        <m:t> = </m:t>
+                      </m:r>
+                      <m:f>
+                        <m:fPr>
+                          <m:ctrlPr>
+                            <a:rPr lang="en-US" sz="1700" i="1" dirty="0">
+                              <a:solidFill>
+                                <a:srgbClr val="1A2744"/>
+                              </a:solidFill>
+                              <a:latin typeface="Cambria Math" panose="02040503050406030204" pitchFamily="18" charset="0"/>
+                            </a:rPr>
+                          </m:ctrlPr>
+                        </m:fPr>
+                        <m:num>
+                          <m:sSup>
+                            <m:sSupPr>
+                              <m:ctrlPr>
+                                <a:rPr lang="en-US" sz="1700" dirty="0">
+                                  <a:solidFill>
+                                    <a:srgbClr val="1A2744"/>
+                                  </a:solidFill>
+                                  <a:latin typeface="Cambria Math" panose="02040503050406030204" pitchFamily="18" charset="0"/>
+                                </a:rPr>
+                              </m:ctrlPr>
+                            </m:sSupPr>
+                            <m:e>
+                              <m:r>
+                                <a:rPr lang="en-US" sz="1700" dirty="0">
+                                  <a:solidFill>
+                                    <a:srgbClr val="1A2744"/>
+                                  </a:solidFill>
+                                  <a:latin typeface="Cambria Math" panose="02040503050406030204" pitchFamily="18" charset="0"/>
+                                </a:rPr>
+                                <m:t>|</m:t>
+                              </m:r>
+                              <m:r>
+                                <a:rPr lang="en-US" sz="1700" dirty="0">
+                                  <a:solidFill>
+                                    <a:srgbClr val="2C5F8A"/>
+                                  </a:solidFill>
+                                  <a:latin typeface="Cambria Math" panose="02040503050406030204" pitchFamily="18" charset="0"/>
+                                </a:rPr>
+                                <m:t>𝑉</m:t>
+                              </m:r>
+                              <m:r>
+                                <a:rPr lang="en-US" sz="1700" dirty="0">
+                                  <a:solidFill>
+                                    <a:srgbClr val="1A2744"/>
+                                  </a:solidFill>
+                                  <a:latin typeface="Cambria Math" panose="02040503050406030204" pitchFamily="18" charset="0"/>
+                                </a:rPr>
+                                <m:t>|</m:t>
+                              </m:r>
+                            </m:e>
+                            <m:sup>
+                              <m:r>
+                                <a:rPr lang="en-US" sz="1700" dirty="0">
+                                  <a:solidFill>
+                                    <a:srgbClr val="1A2744"/>
+                                  </a:solidFill>
+                                  <a:latin typeface="Cambria Math" panose="02040503050406030204" pitchFamily="18" charset="0"/>
+                                </a:rPr>
+                                <m:t>2</m:t>
+                              </m:r>
+                            </m:sup>
+                          </m:sSup>
+                        </m:num>
+                        <m:den>
+                          <m:r>
+                            <a:rPr lang="en-US" sz="1700" dirty="0">
+                              <a:solidFill>
+                                <a:srgbClr val="1A2744"/>
+                              </a:solidFill>
+                              <a:latin typeface="Cambria Math" panose="02040503050406030204" pitchFamily="18" charset="0"/>
+                            </a:rPr>
+                            <m:t>|</m:t>
+                          </m:r>
+                          <m:sSub>
+                            <m:sSubPr>
+                              <m:ctrlPr>
+                                <a:rPr lang="en-US" sz="1700" dirty="0">
+                                  <a:solidFill>
+                                    <a:srgbClr val="8A2E3B"/>
+                                  </a:solidFill>
+                                  <a:latin typeface="Cambria Math" panose="02040503050406030204" pitchFamily="18" charset="0"/>
+                                </a:rPr>
+                              </m:ctrlPr>
+                            </m:sSubPr>
+                            <m:e>
+                              <m:r>
+                                <a:rPr lang="en-US" sz="1700" dirty="0">
+                                  <a:solidFill>
+                                    <a:srgbClr val="8A2E3B"/>
+                                  </a:solidFill>
+                                  <a:latin typeface="Cambria Math" panose="02040503050406030204" pitchFamily="18" charset="0"/>
+                                </a:rPr>
+                                <m:t>𝑍</m:t>
+                              </m:r>
+                            </m:e>
+                            <m:sub>
+                              <m:r>
+                                <a:rPr lang="en-US" sz="1700" dirty="0">
+                                  <a:solidFill>
+                                    <a:srgbClr val="8A2E3B"/>
+                                  </a:solidFill>
+                                  <a:latin typeface="Cambria Math" panose="02040503050406030204" pitchFamily="18" charset="0"/>
+                                </a:rPr>
+                                <m:t>𝑡ℎ</m:t>
+                              </m:r>
+                              <m:r>
+                                <a:rPr lang="en-US" sz="1700" dirty="0">
+                                  <a:solidFill>
+                                    <a:srgbClr val="8A2E3B"/>
+                                  </a:solidFill>
+                                  <a:latin typeface="Cambria Math" panose="02040503050406030204" pitchFamily="18" charset="0"/>
+                                </a:rPr>
+                                <m:t>,</m:t>
+                              </m:r>
+                              <m:r>
+                                <a:rPr lang="en-US" sz="1700" dirty="0">
+                                  <a:solidFill>
+                                    <a:srgbClr val="8A2E3B"/>
+                                  </a:solidFill>
+                                  <a:latin typeface="Cambria Math" panose="02040503050406030204" pitchFamily="18" charset="0"/>
+                                </a:rPr>
+                                <m:t>𝑖</m:t>
+                              </m:r>
+                            </m:sub>
+                          </m:sSub>
+                          <m:r>
+                            <a:rPr lang="en-US" sz="1700" dirty="0">
+                              <a:solidFill>
+                                <a:srgbClr val="1A2744"/>
+                              </a:solidFill>
+                              <a:latin typeface="Cambria Math" panose="02040503050406030204" pitchFamily="18" charset="0"/>
+                            </a:rPr>
+                            <m:t>|</m:t>
+                          </m:r>
+                        </m:den>
+                      </m:f>
+                      <m:r>
+                        <a:rPr lang="en-US" sz="1700" dirty="0">
+                          <a:solidFill>
+                            <a:srgbClr val="1A2744"/>
+                          </a:solidFill>
+                          <a:latin typeface="Cambria Math" panose="02040503050406030204" pitchFamily="18" charset="0"/>
+                        </a:rPr>
+                        <m:t>  ≈  </m:t>
+                      </m:r>
+                      <m:f>
+                        <m:fPr>
+                          <m:ctrlPr>
+                            <a:rPr lang="en-US" sz="1700" i="1" dirty="0">
+                              <a:solidFill>
+                                <a:srgbClr val="1A2744"/>
+                              </a:solidFill>
+                              <a:latin typeface="Cambria Math" panose="02040503050406030204" pitchFamily="18" charset="0"/>
+                            </a:rPr>
+                          </m:ctrlPr>
+                        </m:fPr>
+                        <m:num>
+                          <m:sSub>
+                            <m:sSubPr>
+                              <m:ctrlPr>
+                                <a:rPr lang="en-US" sz="1700" dirty="0">
+                                  <a:solidFill>
+                                    <a:srgbClr val="1A2744"/>
+                                  </a:solidFill>
+                                  <a:latin typeface="Cambria Math" panose="02040503050406030204" pitchFamily="18" charset="0"/>
+                                </a:rPr>
+                              </m:ctrlPr>
+                            </m:sSubPr>
+                            <m:e>
+                              <m:r>
+                                <a:rPr lang="en-US" sz="1700" dirty="0">
+                                  <a:solidFill>
+                                    <a:srgbClr val="1A2744"/>
+                                  </a:solidFill>
+                                  <a:latin typeface="Cambria Math" panose="02040503050406030204" pitchFamily="18" charset="0"/>
+                                </a:rPr>
+                                <m:t>𝑆</m:t>
+                              </m:r>
+                            </m:e>
+                            <m:sub>
+                              <m:r>
+                                <a:rPr lang="en-US" sz="1700" dirty="0">
+                                  <a:solidFill>
+                                    <a:srgbClr val="1A2744"/>
+                                  </a:solidFill>
+                                  <a:latin typeface="Cambria Math" panose="02040503050406030204" pitchFamily="18" charset="0"/>
+                                </a:rPr>
+                                <m:t>𝑏𝑎𝑠𝑒</m:t>
+                              </m:r>
+                            </m:sub>
+                          </m:sSub>
+                        </m:num>
+                        <m:den>
+                          <m:r>
+                            <a:rPr lang="en-US" sz="1700" dirty="0">
+                              <a:solidFill>
+                                <a:srgbClr val="1A2744"/>
+                              </a:solidFill>
+                              <a:latin typeface="Cambria Math" panose="02040503050406030204" pitchFamily="18" charset="0"/>
+                            </a:rPr>
+                            <m:t>|</m:t>
+                          </m:r>
+                          <m:sSub>
+                            <m:sSubPr>
+                              <m:ctrlPr>
+                                <a:rPr lang="en-US" sz="1700" dirty="0">
+                                  <a:solidFill>
+                                    <a:srgbClr val="8A2E3B"/>
+                                  </a:solidFill>
+                                  <a:latin typeface="Cambria Math" panose="02040503050406030204" pitchFamily="18" charset="0"/>
+                                </a:rPr>
+                              </m:ctrlPr>
+                            </m:sSubPr>
+                            <m:e>
+                              <m:r>
+                                <a:rPr lang="en-US" sz="1700" dirty="0">
+                                  <a:solidFill>
+                                    <a:srgbClr val="8A2E3B"/>
+                                  </a:solidFill>
+                                  <a:latin typeface="Cambria Math" panose="02040503050406030204" pitchFamily="18" charset="0"/>
+                                </a:rPr>
+                                <m:t>𝑍</m:t>
+                              </m:r>
+                            </m:e>
+                            <m:sub>
+                              <m:r>
+                                <a:rPr lang="en-US" sz="1700" dirty="0">
+                                  <a:solidFill>
+                                    <a:srgbClr val="8A2E3B"/>
+                                  </a:solidFill>
+                                  <a:latin typeface="Cambria Math" panose="02040503050406030204" pitchFamily="18" charset="0"/>
+                                </a:rPr>
+                                <m:t>𝑡ℎ</m:t>
+                              </m:r>
+                              <m:r>
+                                <a:rPr lang="en-US" sz="1700" dirty="0">
+                                  <a:solidFill>
+                                    <a:srgbClr val="8A2E3B"/>
+                                  </a:solidFill>
+                                  <a:latin typeface="Cambria Math" panose="02040503050406030204" pitchFamily="18" charset="0"/>
+                                </a:rPr>
+                                <m:t>,</m:t>
+                              </m:r>
+                              <m:r>
+                                <a:rPr lang="en-US" sz="1700" dirty="0">
+                                  <a:solidFill>
+                                    <a:srgbClr val="8A2E3B"/>
+                                  </a:solidFill>
+                                  <a:latin typeface="Cambria Math" panose="02040503050406030204" pitchFamily="18" charset="0"/>
+                                </a:rPr>
+                                <m:t>𝑖</m:t>
+                              </m:r>
+                              <m:r>
+                                <a:rPr lang="en-US" sz="1700" dirty="0">
+                                  <a:solidFill>
+                                    <a:srgbClr val="8A2E3B"/>
+                                  </a:solidFill>
+                                  <a:latin typeface="Cambria Math" panose="02040503050406030204" pitchFamily="18" charset="0"/>
+                                </a:rPr>
+                                <m:t>(</m:t>
+                              </m:r>
+                              <m:r>
+                                <a:rPr lang="en-US" sz="1700" dirty="0">
+                                  <a:solidFill>
+                                    <a:srgbClr val="8A2E3B"/>
+                                  </a:solidFill>
+                                  <a:latin typeface="Cambria Math" panose="02040503050406030204" pitchFamily="18" charset="0"/>
+                                </a:rPr>
+                                <m:t>𝑝𝑢</m:t>
+                              </m:r>
+                              <m:r>
+                                <a:rPr lang="en-US" sz="1700" dirty="0">
+                                  <a:solidFill>
+                                    <a:srgbClr val="8A2E3B"/>
+                                  </a:solidFill>
+                                  <a:latin typeface="Cambria Math" panose="02040503050406030204" pitchFamily="18" charset="0"/>
+                                </a:rPr>
+                                <m:t>)</m:t>
+                              </m:r>
+                            </m:sub>
+                          </m:sSub>
+                          <m:r>
+                            <a:rPr lang="en-US" sz="1700" dirty="0">
+                              <a:solidFill>
+                                <a:srgbClr val="1A2744"/>
+                              </a:solidFill>
+                              <a:latin typeface="Cambria Math" panose="02040503050406030204" pitchFamily="18" charset="0"/>
+                            </a:rPr>
+                            <m:t>|</m:t>
+                          </m:r>
+                        </m:den>
+                      </m:f>
+                    </m:oMath>
+                  </m:oMathPara>
+                </a14:m>
+                <a:endParaRPr/>
+              </a:p>
+            </p:txBody>
+          </p:sp>
+        </mc:Choice>
+        <mc:Fallback>
+          <p:sp>
+            <p:nvSpPr>
+              <p:cNvPr id="811" name="TB 811"/>
+              <p:cNvSpPr txBox="1">
+                <a:spLocks noRot="1" noChangeAspect="1" noMove="1" noResize="1" noEditPoints="1" noAdjustHandles="1" noChangeArrowheads="1" noChangeShapeType="1" noTextEdit="1"/>
+              </p:cNvSpPr>
+              <p:nvPr/>
+            </p:nvSpPr>
+            <p:spPr>
+              <a:xfrm>
+                <a:off x="800100" y="4902200"/>
+                <a:ext cx="5461000" cy="711200"/>
+              </a:xfrm>
+              <a:prstGeom prst="rect">
+                <a:avLst/>
+              </a:prstGeom>
+              <a:blipFill>
+                <a:blip r:embed="rId3"/>
+                <a:stretch>
+                  <a:fillRect l="-1160"/>
+                </a:stretch>
+              </a:blipFill>
+            </p:spPr>
+            <p:txBody>
+              <a:bodyPr/>
+              <a:lstStyle/>
+              <a:p>
+                <a:r>
+                  <a:rPr lang="ja-JP" altLang="en-US">
+                    <a:noFill/>
+                  </a:rPr>
+                  <a:t> </a:t>
+                </a:r>
+              </a:p>
+            </p:txBody>
+          </p:sp>
+        </mc:Fallback>
+      </mc:AlternateContent>
+      <p:sp>
+        <p:nvSpPr>
+          <p:cNvPr id="850" name="TB 850"/>
+          <p:cNvSpPr txBox="1"/>
+          <p:nvPr/>
+        </p:nvSpPr>
+        <p:spPr>
+          <a:xfrm>
+            <a:off x="6680200" y="1397000"/>
+            <a:ext cx="4965700" cy="279400"/>
+          </a:xfrm>
+          <a:prstGeom prst="rect">
+            <a:avLst/>
+          </a:prstGeom>
+          <a:noFill/>
+        </p:spPr>
+        <p:txBody>
+          <a:bodyPr wrap="square" lIns="0" tIns="0" rIns="0" bIns="0"/>
+          <a:lstStyle/>
+          <a:p>
+            <a:pPr algn="l"/>
+            <a:r>
+              <a:rPr lang="ja-JP" sz="1500" b="1" dirty="0">
+                <a:solidFill>
+                  <a:srgbClr val="8A2E3B"/>
+                </a:solidFill>
+                <a:latin typeface="Calibri"/>
+              </a:rPr>
+              <a:t>弱い系統ほど電圧が動く → SCR</a:t>
+            </a:r>
+          </a:p>
+        </p:txBody>
+      </p:sp>
+      <mc:AlternateContent xmlns:mc="http://schemas.openxmlformats.org/markup-compatibility/2006">
+        <mc:Choice xmlns:a14="http://schemas.microsoft.com/office/drawing/2010/main" Requires="a14">
+          <p:sp>
+            <p:nvSpPr>
+              <p:cNvPr id="851" name="TB 851"/>
+              <p:cNvSpPr txBox="1"/>
+              <p:nvPr/>
+            </p:nvSpPr>
+            <p:spPr>
+              <a:xfrm>
+                <a:off x="6934200" y="2006600"/>
+                <a:ext cx="4457700" cy="381000"/>
+              </a:xfrm>
+              <a:prstGeom prst="rect">
+                <a:avLst/>
+              </a:prstGeom>
+              <a:noFill/>
+            </p:spPr>
+            <p:txBody>
+              <a:bodyPr wrap="square" lIns="0" tIns="0" rIns="0" bIns="0"/>
+              <a:lstStyle/>
+              <a:p>
+                <a:pPr algn="l"/>
+                <a14:m>
+                  <m:oMathPara xmlns:m="http://schemas.openxmlformats.org/officeDocument/2006/math">
+                    <m:oMathParaPr>
+                      <m:jc m:val="left"/>
+                    </m:oMathParaPr>
+                    <m:oMath>
+                      <m:r>
+                        <m:rPr>
+                          <m:sty m:val="p"/>
+                        </m:rPr>
+                        <a:rPr lang="en-US" sz="1700" dirty="0">
+                          <a:solidFill>
+                            <a:srgbClr val="1A2744"/>
+                          </a:solidFill>
+                          <a:latin typeface="Cambria Math" panose="02040503050406030204" pitchFamily="18" charset="0"/>
+                        </a:rPr>
+                        <m:t>Δ</m:t>
+                      </m:r>
+                      <m:r>
+                        <a:rPr lang="en-US" sz="1700" dirty="0">
+                          <a:solidFill>
+                            <a:srgbClr val="2C5F8A"/>
+                          </a:solidFill>
+                          <a:latin typeface="Cambria Math" panose="02040503050406030204" pitchFamily="18" charset="0"/>
+                        </a:rPr>
+                        <m:t>𝑉</m:t>
+                      </m:r>
+                      <m:r>
+                        <a:rPr lang="en-US" sz="1700" dirty="0">
+                          <a:solidFill>
+                            <a:srgbClr val="1A2744"/>
+                          </a:solidFill>
+                          <a:latin typeface="Cambria Math" panose="02040503050406030204" pitchFamily="18" charset="0"/>
+                        </a:rPr>
+                        <m:t> ≈ </m:t>
+                      </m:r>
+                      <m:sSub>
+                        <m:sSubPr>
+                          <m:ctrlPr>
+                            <a:rPr lang="en-US" sz="1700" dirty="0">
+                              <a:solidFill>
+                                <a:srgbClr val="8A2E3B"/>
+                              </a:solidFill>
+                              <a:latin typeface="Cambria Math" panose="02040503050406030204" pitchFamily="18" charset="0"/>
+                            </a:rPr>
+                          </m:ctrlPr>
+                        </m:sSubPr>
+                        <m:e>
+                          <m:r>
+                            <a:rPr lang="en-US" sz="1700" dirty="0">
+                              <a:solidFill>
+                                <a:srgbClr val="8A2E3B"/>
+                              </a:solidFill>
+                              <a:latin typeface="Cambria Math" panose="02040503050406030204" pitchFamily="18" charset="0"/>
+                            </a:rPr>
+                            <m:t>𝑍</m:t>
+                          </m:r>
+                        </m:e>
+                        <m:sub>
+                          <m:r>
+                            <a:rPr lang="en-US" sz="1700" dirty="0">
+                              <a:solidFill>
+                                <a:srgbClr val="8A2E3B"/>
+                              </a:solidFill>
+                              <a:latin typeface="Cambria Math" panose="02040503050406030204" pitchFamily="18" charset="0"/>
+                            </a:rPr>
+                            <m:t>𝑡ℎ</m:t>
+                          </m:r>
+                        </m:sub>
+                      </m:sSub>
+                      <m:r>
+                        <a:rPr lang="en-US" sz="1700" dirty="0">
+                          <a:solidFill>
+                            <a:srgbClr val="1A2744"/>
+                          </a:solidFill>
+                          <a:latin typeface="Cambria Math" panose="02040503050406030204" pitchFamily="18" charset="0"/>
+                        </a:rPr>
+                        <m:t> · </m:t>
+                      </m:r>
+                      <m:r>
+                        <m:rPr>
+                          <m:sty m:val="p"/>
+                        </m:rPr>
+                        <a:rPr lang="en-US" sz="1700" dirty="0">
+                          <a:solidFill>
+                            <a:srgbClr val="1A2744"/>
+                          </a:solidFill>
+                          <a:latin typeface="Cambria Math" panose="02040503050406030204" pitchFamily="18" charset="0"/>
+                        </a:rPr>
+                        <m:t>Δ</m:t>
+                      </m:r>
+                      <m:r>
+                        <a:rPr lang="en-US" sz="1700" dirty="0">
+                          <a:solidFill>
+                            <a:srgbClr val="1A2744"/>
+                          </a:solidFill>
+                          <a:latin typeface="Cambria Math" panose="02040503050406030204" pitchFamily="18" charset="0"/>
+                        </a:rPr>
+                        <m:t>𝐼</m:t>
+                      </m:r>
+                    </m:oMath>
+                  </m:oMathPara>
+                </a14:m>
+                <a:endParaRPr/>
+              </a:p>
+            </p:txBody>
+          </p:sp>
+        </mc:Choice>
+        <mc:Fallback>
+          <p:sp>
+            <p:nvSpPr>
+              <p:cNvPr id="851" name="TB 851"/>
+              <p:cNvSpPr txBox="1">
+                <a:spLocks noRot="1" noChangeAspect="1" noMove="1" noResize="1" noEditPoints="1" noAdjustHandles="1" noChangeArrowheads="1" noChangeShapeType="1" noTextEdit="1"/>
+              </p:cNvSpPr>
+              <p:nvPr/>
+            </p:nvSpPr>
+            <p:spPr>
+              <a:xfrm>
+                <a:off x="6934200" y="2006600"/>
+                <a:ext cx="4457700" cy="381000"/>
+              </a:xfrm>
+              <a:prstGeom prst="rect">
+                <a:avLst/>
+              </a:prstGeom>
+              <a:blipFill>
+                <a:blip r:embed="rId4"/>
+                <a:stretch>
+                  <a:fillRect l="-1705" t="-3125"/>
+                </a:stretch>
+              </a:blipFill>
+            </p:spPr>
+            <p:txBody>
+              <a:bodyPr/>
+              <a:lstStyle/>
+              <a:p>
+                <a:r>
+                  <a:rPr lang="ja-JP" altLang="en-US">
+                    <a:noFill/>
+                  </a:rPr>
+                  <a:t> </a:t>
+                </a:r>
+              </a:p>
+            </p:txBody>
+          </p:sp>
+        </mc:Fallback>
+      </mc:AlternateContent>
+      <mc:AlternateContent xmlns:mc="http://schemas.openxmlformats.org/markup-compatibility/2006">
+        <mc:Choice xmlns:a14="http://schemas.microsoft.com/office/drawing/2010/main" Requires="a14">
+          <p:sp>
+            <p:nvSpPr>
+              <p:cNvPr id="852" name="TB 852"/>
+              <p:cNvSpPr txBox="1"/>
+              <p:nvPr/>
+            </p:nvSpPr>
+            <p:spPr>
+              <a:xfrm>
+                <a:off x="6934200" y="2463800"/>
+                <a:ext cx="4457700" cy="711200"/>
+              </a:xfrm>
+              <a:prstGeom prst="rect">
+                <a:avLst/>
+              </a:prstGeom>
+              <a:noFill/>
+            </p:spPr>
+            <p:txBody>
+              <a:bodyPr wrap="square" lIns="0" tIns="0" rIns="0" bIns="0"/>
+              <a:lstStyle/>
+              <a:p>
+                <a:pPr algn="l"/>
+                <a14:m>
+                  <m:oMathPara xmlns:m="http://schemas.openxmlformats.org/officeDocument/2006/math">
+                    <m:oMathParaPr>
+                      <m:jc m:val="left"/>
+                    </m:oMathParaPr>
+                    <m:oMath>
+                      <m:sSub>
+                        <m:sSubPr>
+                          <m:ctrlPr>
+                            <a:rPr lang="en-US" sz="1700" dirty="0">
+                              <a:solidFill>
+                                <a:srgbClr val="8A2E3B"/>
+                              </a:solidFill>
+                              <a:latin typeface="Cambria Math" panose="02040503050406030204" pitchFamily="18" charset="0"/>
+                            </a:rPr>
+                          </m:ctrlPr>
+                        </m:sSubPr>
+                        <m:e>
+                          <m:r>
+                            <a:rPr lang="en-US" sz="1700" dirty="0">
+                              <a:solidFill>
+                                <a:srgbClr val="8A2E3B"/>
+                              </a:solidFill>
+                              <a:latin typeface="Cambria Math" panose="02040503050406030204" pitchFamily="18" charset="0"/>
+                            </a:rPr>
+                            <m:t>𝑆𝐶𝑅</m:t>
+                          </m:r>
+                        </m:e>
+                        <m:sub>
+                          <m:r>
+                            <a:rPr lang="en-US" sz="1700" dirty="0">
+                              <a:solidFill>
+                                <a:srgbClr val="8A2E3B"/>
+                              </a:solidFill>
+                              <a:latin typeface="Cambria Math" panose="02040503050406030204" pitchFamily="18" charset="0"/>
+                            </a:rPr>
+                            <m:t>𝑖</m:t>
+                          </m:r>
+                        </m:sub>
+                      </m:sSub>
+                      <m:r>
+                        <a:rPr lang="en-US" sz="1700" dirty="0">
+                          <a:solidFill>
+                            <a:srgbClr val="1A2744"/>
+                          </a:solidFill>
+                          <a:latin typeface="Cambria Math" panose="02040503050406030204" pitchFamily="18" charset="0"/>
+                        </a:rPr>
+                        <m:t> = </m:t>
+                      </m:r>
+                      <m:f>
+                        <m:fPr>
+                          <m:ctrlPr>
+                            <a:rPr lang="en-US" sz="1700" i="1" dirty="0">
+                              <a:solidFill>
+                                <a:srgbClr val="1A2744"/>
+                              </a:solidFill>
+                              <a:latin typeface="Cambria Math" panose="02040503050406030204" pitchFamily="18" charset="0"/>
+                            </a:rPr>
+                          </m:ctrlPr>
+                        </m:fPr>
+                        <m:num>
+                          <m:sSub>
+                            <m:sSubPr>
+                              <m:ctrlPr>
+                                <a:rPr lang="en-US" sz="1700" dirty="0">
+                                  <a:solidFill>
+                                    <a:srgbClr val="1A2744"/>
+                                  </a:solidFill>
+                                  <a:latin typeface="Cambria Math" panose="02040503050406030204" pitchFamily="18" charset="0"/>
+                                </a:rPr>
+                              </m:ctrlPr>
+                            </m:sSubPr>
+                            <m:e>
+                              <m:r>
+                                <a:rPr lang="en-US" sz="1700" dirty="0">
+                                  <a:solidFill>
+                                    <a:srgbClr val="1A2744"/>
+                                  </a:solidFill>
+                                  <a:latin typeface="Cambria Math" panose="02040503050406030204" pitchFamily="18" charset="0"/>
+                                </a:rPr>
+                                <m:t>𝑆</m:t>
+                              </m:r>
+                            </m:e>
+                            <m:sub>
+                              <m:r>
+                                <a:rPr lang="en-US" sz="1700" dirty="0">
+                                  <a:solidFill>
+                                    <a:srgbClr val="1A2744"/>
+                                  </a:solidFill>
+                                  <a:latin typeface="Cambria Math" panose="02040503050406030204" pitchFamily="18" charset="0"/>
+                                </a:rPr>
+                                <m:t>𝑠𝑐</m:t>
+                              </m:r>
+                              <m:r>
+                                <a:rPr lang="en-US" sz="1700" dirty="0">
+                                  <a:solidFill>
+                                    <a:srgbClr val="1A2744"/>
+                                  </a:solidFill>
+                                  <a:latin typeface="Cambria Math" panose="02040503050406030204" pitchFamily="18" charset="0"/>
+                                </a:rPr>
+                                <m:t>,</m:t>
+                              </m:r>
+                              <m:r>
+                                <a:rPr lang="en-US" sz="1700" dirty="0">
+                                  <a:solidFill>
+                                    <a:srgbClr val="1A2744"/>
+                                  </a:solidFill>
+                                  <a:latin typeface="Cambria Math" panose="02040503050406030204" pitchFamily="18" charset="0"/>
+                                </a:rPr>
+                                <m:t>𝑖</m:t>
+                              </m:r>
+                            </m:sub>
+                          </m:sSub>
+                        </m:num>
+                        <m:den>
+                          <m:sSub>
+                            <m:sSubPr>
+                              <m:ctrlPr>
+                                <a:rPr lang="en-US" sz="1700" dirty="0">
+                                  <a:solidFill>
+                                    <a:srgbClr val="1A2744"/>
+                                  </a:solidFill>
+                                  <a:latin typeface="Cambria Math" panose="02040503050406030204" pitchFamily="18" charset="0"/>
+                                </a:rPr>
+                              </m:ctrlPr>
+                            </m:sSubPr>
+                            <m:e>
+                              <m:r>
+                                <a:rPr lang="en-US" sz="1700" dirty="0">
+                                  <a:solidFill>
+                                    <a:srgbClr val="1A2744"/>
+                                  </a:solidFill>
+                                  <a:latin typeface="Cambria Math" panose="02040503050406030204" pitchFamily="18" charset="0"/>
+                                </a:rPr>
+                                <m:t>𝑆</m:t>
+                              </m:r>
+                            </m:e>
+                            <m:sub>
+                              <m:r>
+                                <a:rPr lang="en-US" sz="1700" dirty="0">
+                                  <a:solidFill>
+                                    <a:srgbClr val="1A2744"/>
+                                  </a:solidFill>
+                                  <a:latin typeface="Cambria Math" panose="02040503050406030204" pitchFamily="18" charset="0"/>
+                                </a:rPr>
+                                <m:t>𝐼𝐵𝑅</m:t>
+                              </m:r>
+                              <m:r>
+                                <a:rPr lang="en-US" sz="1700" dirty="0">
+                                  <a:solidFill>
+                                    <a:srgbClr val="1A2744"/>
+                                  </a:solidFill>
+                                  <a:latin typeface="Cambria Math" panose="02040503050406030204" pitchFamily="18" charset="0"/>
+                                </a:rPr>
+                                <m:t>,</m:t>
+                              </m:r>
+                              <m:r>
+                                <a:rPr lang="en-US" sz="1700" dirty="0">
+                                  <a:solidFill>
+                                    <a:srgbClr val="1A2744"/>
+                                  </a:solidFill>
+                                  <a:latin typeface="Cambria Math" panose="02040503050406030204" pitchFamily="18" charset="0"/>
+                                </a:rPr>
+                                <m:t>𝑖</m:t>
+                              </m:r>
+                            </m:sub>
+                          </m:sSub>
+                        </m:den>
+                      </m:f>
+                    </m:oMath>
+                  </m:oMathPara>
+                </a14:m>
+                <a:endParaRPr/>
+              </a:p>
+            </p:txBody>
+          </p:sp>
+        </mc:Choice>
+        <mc:Fallback>
+          <p:sp>
+            <p:nvSpPr>
+              <p:cNvPr id="852" name="TB 852"/>
+              <p:cNvSpPr txBox="1">
+                <a:spLocks noRot="1" noChangeAspect="1" noMove="1" noResize="1" noEditPoints="1" noAdjustHandles="1" noChangeArrowheads="1" noChangeShapeType="1" noTextEdit="1"/>
+              </p:cNvSpPr>
+              <p:nvPr/>
+            </p:nvSpPr>
+            <p:spPr>
+              <a:xfrm>
+                <a:off x="6934200" y="2463800"/>
+                <a:ext cx="4457700" cy="711200"/>
+              </a:xfrm>
+              <a:prstGeom prst="rect">
+                <a:avLst/>
+              </a:prstGeom>
+              <a:blipFill>
+                <a:blip r:embed="rId5"/>
+                <a:stretch>
+                  <a:fillRect l="-1705" t="-1724"/>
+                </a:stretch>
+              </a:blipFill>
+            </p:spPr>
+            <p:txBody>
+              <a:bodyPr/>
+              <a:lstStyle/>
+              <a:p>
+                <a:r>
+                  <a:rPr lang="ja-JP" altLang="en-US">
+                    <a:noFill/>
+                  </a:rPr>
+                  <a:t> </a:t>
+                </a:r>
+              </a:p>
+            </p:txBody>
+          </p:sp>
+        </mc:Fallback>
+      </mc:AlternateContent>
     </p:spTree>
     <p:extLst>
       <p:ext uri="{BB962C8B-B14F-4D97-AF65-F5344CB8AC3E}">
-        <p14:creationId xmlns:p14="http://schemas.microsoft.com/office/powerpoint/2010/main" val="3091208839"/>
+        <p14:creationId xmlns:p14="http://schemas.microsoft.com/office/powerpoint/2010/main" val="3463267639"/>
       </p:ext>
     </p:extLst>
   </p:cSld>
@@ -15451,6 +17516,238 @@
       </p:sp>
       <p:sp>
         <p:nvSpPr>
+          <p:cNvPr id="320" name="Dg 320"/>
+          <p:cNvSpPr/>
+          <p:nvPr/>
+        </p:nvSpPr>
+        <p:spPr>
+          <a:xfrm>
+            <a:off x="546100" y="1397000"/>
+            <a:ext cx="5969000" cy="2413000"/>
+          </a:xfrm>
+          <a:prstGeom prst="rect">
+            <a:avLst/>
+          </a:prstGeom>
+          <a:solidFill>
+            <a:srgbClr val="F4F6FA"/>
+          </a:solidFill>
+          <a:ln>
+            <a:noFill/>
+          </a:ln>
+        </p:spPr>
+        <p:txBody>
+          <a:bodyPr/>
+          <a:lstStyle/>
+          <a:p>
+            <a:endParaRPr/>
+          </a:p>
+        </p:txBody>
+      </p:sp>
+      <p:sp>
+        <p:nvSpPr>
+          <p:cNvPr id="321" name="Dg 321"/>
+          <p:cNvSpPr/>
+          <p:nvPr/>
+        </p:nvSpPr>
+        <p:spPr>
+          <a:xfrm>
+            <a:off x="546100" y="1397000"/>
+            <a:ext cx="38100" cy="2413000"/>
+          </a:xfrm>
+          <a:prstGeom prst="rect">
+            <a:avLst/>
+          </a:prstGeom>
+          <a:solidFill>
+            <a:srgbClr val="8A2E3B"/>
+          </a:solidFill>
+          <a:ln>
+            <a:noFill/>
+          </a:ln>
+        </p:spPr>
+        <p:txBody>
+          <a:bodyPr/>
+          <a:lstStyle/>
+          <a:p>
+            <a:endParaRPr/>
+          </a:p>
+        </p:txBody>
+      </p:sp>
+      <p:sp>
+        <p:nvSpPr>
+          <p:cNvPr id="322" name="Dg 322"/>
+          <p:cNvSpPr/>
+          <p:nvPr/>
+        </p:nvSpPr>
+        <p:spPr>
+          <a:xfrm>
+            <a:off x="546100" y="3937000"/>
+            <a:ext cx="5969000" cy="2235200"/>
+          </a:xfrm>
+          <a:prstGeom prst="rect">
+            <a:avLst/>
+          </a:prstGeom>
+          <a:solidFill>
+            <a:srgbClr val="F4F6FA"/>
+          </a:solidFill>
+          <a:ln>
+            <a:noFill/>
+          </a:ln>
+        </p:spPr>
+        <p:txBody>
+          <a:bodyPr/>
+          <a:lstStyle/>
+          <a:p>
+            <a:endParaRPr/>
+          </a:p>
+        </p:txBody>
+      </p:sp>
+      <p:sp>
+        <p:nvSpPr>
+          <p:cNvPr id="323" name="Dg 323"/>
+          <p:cNvSpPr/>
+          <p:nvPr/>
+        </p:nvSpPr>
+        <p:spPr>
+          <a:xfrm>
+            <a:off x="546100" y="3937000"/>
+            <a:ext cx="38100" cy="2235200"/>
+          </a:xfrm>
+          <a:prstGeom prst="rect">
+            <a:avLst/>
+          </a:prstGeom>
+          <a:solidFill>
+            <a:srgbClr val="8A2E3B"/>
+          </a:solidFill>
+          <a:ln>
+            <a:noFill/>
+          </a:ln>
+        </p:spPr>
+        <p:txBody>
+          <a:bodyPr/>
+          <a:lstStyle/>
+          <a:p>
+            <a:endParaRPr/>
+          </a:p>
+        </p:txBody>
+      </p:sp>
+      <p:sp>
+        <p:nvSpPr>
+          <p:cNvPr id="324" name="Dg 324"/>
+          <p:cNvSpPr/>
+          <p:nvPr/>
+        </p:nvSpPr>
+        <p:spPr>
+          <a:xfrm>
+            <a:off x="6680200" y="1727200"/>
+            <a:ext cx="4965700" cy="2794000"/>
+          </a:xfrm>
+          <a:prstGeom prst="rect">
+            <a:avLst/>
+          </a:prstGeom>
+          <a:solidFill>
+            <a:srgbClr val="F4F6FA"/>
+          </a:solidFill>
+          <a:ln>
+            <a:noFill/>
+          </a:ln>
+        </p:spPr>
+        <p:txBody>
+          <a:bodyPr/>
+          <a:lstStyle/>
+          <a:p>
+            <a:endParaRPr/>
+          </a:p>
+        </p:txBody>
+      </p:sp>
+      <p:sp>
+        <p:nvSpPr>
+          <p:cNvPr id="325" name="Dg 325"/>
+          <p:cNvSpPr/>
+          <p:nvPr/>
+        </p:nvSpPr>
+        <p:spPr>
+          <a:xfrm>
+            <a:off x="6680200" y="1727200"/>
+            <a:ext cx="38100" cy="2794000"/>
+          </a:xfrm>
+          <a:prstGeom prst="rect">
+            <a:avLst/>
+          </a:prstGeom>
+          <a:solidFill>
+            <a:srgbClr val="8A2E3B"/>
+          </a:solidFill>
+          <a:ln>
+            <a:noFill/>
+          </a:ln>
+        </p:spPr>
+        <p:txBody>
+          <a:bodyPr/>
+          <a:lstStyle/>
+          <a:p>
+            <a:endParaRPr/>
+          </a:p>
+        </p:txBody>
+      </p:sp>
+      <p:sp>
+        <p:nvSpPr>
+          <p:cNvPr id="326" name="Dg 326"/>
+          <p:cNvSpPr/>
+          <p:nvPr/>
+        </p:nvSpPr>
+        <p:spPr>
+          <a:xfrm>
+            <a:off x="6680200" y="4622800"/>
+            <a:ext cx="4965700" cy="1549400"/>
+          </a:xfrm>
+          <a:prstGeom prst="rect">
+            <a:avLst/>
+          </a:prstGeom>
+          <a:solidFill>
+            <a:srgbClr val="F4F6FA"/>
+          </a:solidFill>
+          <a:ln>
+            <a:noFill/>
+          </a:ln>
+        </p:spPr>
+        <p:txBody>
+          <a:bodyPr/>
+          <a:lstStyle/>
+          <a:p>
+            <a:endParaRPr/>
+          </a:p>
+        </p:txBody>
+      </p:sp>
+      <p:sp>
+        <p:nvSpPr>
+          <p:cNvPr id="327" name="Dg 327"/>
+          <p:cNvSpPr/>
+          <p:nvPr/>
+        </p:nvSpPr>
+        <p:spPr>
+          <a:xfrm>
+            <a:off x="6680200" y="4622800"/>
+            <a:ext cx="38100" cy="1549400"/>
+          </a:xfrm>
+          <a:prstGeom prst="rect">
+            <a:avLst/>
+          </a:prstGeom>
+          <a:solidFill>
+            <a:srgbClr val="8A2E3B"/>
+          </a:solidFill>
+          <a:ln>
+            <a:noFill/>
+          </a:ln>
+        </p:spPr>
+        <p:txBody>
+          <a:bodyPr/>
+          <a:lstStyle/>
+          <a:p>
+            <a:endParaRPr/>
+          </a:p>
+        </p:txBody>
+      </p:sp>
+      <p:sp>
+        <p:nvSpPr>
           <p:cNvPr id="300" name="Dg 300"/>
           <p:cNvSpPr/>
           <p:nvPr/>
@@ -15523,238 +17820,6 @@
           </a:prstGeom>
           <a:solidFill>
             <a:srgbClr val="D8DEE7"/>
-          </a:solidFill>
-          <a:ln>
-            <a:noFill/>
-          </a:ln>
-        </p:spPr>
-        <p:txBody>
-          <a:bodyPr lIns="0" tIns="0" rIns="0" bIns="0" rtlCol="0" anchor="ctr"/>
-          <a:lstStyle/>
-          <a:p>
-            <a:endParaRPr/>
-          </a:p>
-        </p:txBody>
-      </p:sp>
-      <p:sp>
-        <p:nvSpPr>
-          <p:cNvPr id="320" name="Dg 320"/>
-          <p:cNvSpPr/>
-          <p:nvPr/>
-        </p:nvSpPr>
-        <p:spPr>
-          <a:xfrm>
-            <a:off x="546100" y="1574800"/>
-            <a:ext cx="5969000" cy="1600200"/>
-          </a:xfrm>
-          <a:prstGeom prst="rect">
-            <a:avLst/>
-          </a:prstGeom>
-          <a:solidFill>
-            <a:srgbClr val="F4F6FA"/>
-          </a:solidFill>
-          <a:ln>
-            <a:noFill/>
-          </a:ln>
-        </p:spPr>
-        <p:txBody>
-          <a:bodyPr lIns="0" tIns="0" rIns="0" bIns="0" rtlCol="0" anchor="ctr"/>
-          <a:lstStyle/>
-          <a:p>
-            <a:endParaRPr/>
-          </a:p>
-        </p:txBody>
-      </p:sp>
-      <p:sp>
-        <p:nvSpPr>
-          <p:cNvPr id="321" name="Dg 321"/>
-          <p:cNvSpPr/>
-          <p:nvPr/>
-        </p:nvSpPr>
-        <p:spPr>
-          <a:xfrm>
-            <a:off x="546100" y="1574800"/>
-            <a:ext cx="38100" cy="1600200"/>
-          </a:xfrm>
-          <a:prstGeom prst="rect">
-            <a:avLst/>
-          </a:prstGeom>
-          <a:solidFill>
-            <a:srgbClr val="8A2E3B"/>
-          </a:solidFill>
-          <a:ln>
-            <a:noFill/>
-          </a:ln>
-        </p:spPr>
-        <p:txBody>
-          <a:bodyPr lIns="0" tIns="0" rIns="0" bIns="0" rtlCol="0" anchor="ctr"/>
-          <a:lstStyle/>
-          <a:p>
-            <a:endParaRPr/>
-          </a:p>
-        </p:txBody>
-      </p:sp>
-      <p:sp>
-        <p:nvSpPr>
-          <p:cNvPr id="322" name="Dg 322"/>
-          <p:cNvSpPr/>
-          <p:nvPr/>
-        </p:nvSpPr>
-        <p:spPr>
-          <a:xfrm>
-            <a:off x="546100" y="3327400"/>
-            <a:ext cx="5969000" cy="1498600"/>
-          </a:xfrm>
-          <a:prstGeom prst="rect">
-            <a:avLst/>
-          </a:prstGeom>
-          <a:solidFill>
-            <a:srgbClr val="F4F6FA"/>
-          </a:solidFill>
-          <a:ln>
-            <a:noFill/>
-          </a:ln>
-        </p:spPr>
-        <p:txBody>
-          <a:bodyPr lIns="0" tIns="0" rIns="0" bIns="0" rtlCol="0" anchor="ctr"/>
-          <a:lstStyle/>
-          <a:p>
-            <a:endParaRPr/>
-          </a:p>
-        </p:txBody>
-      </p:sp>
-      <p:sp>
-        <p:nvSpPr>
-          <p:cNvPr id="323" name="Dg 323"/>
-          <p:cNvSpPr/>
-          <p:nvPr/>
-        </p:nvSpPr>
-        <p:spPr>
-          <a:xfrm>
-            <a:off x="546100" y="3327400"/>
-            <a:ext cx="38100" cy="1498600"/>
-          </a:xfrm>
-          <a:prstGeom prst="rect">
-            <a:avLst/>
-          </a:prstGeom>
-          <a:solidFill>
-            <a:srgbClr val="8A2E3B"/>
-          </a:solidFill>
-          <a:ln>
-            <a:noFill/>
-          </a:ln>
-        </p:spPr>
-        <p:txBody>
-          <a:bodyPr lIns="0" tIns="0" rIns="0" bIns="0" rtlCol="0" anchor="ctr"/>
-          <a:lstStyle/>
-          <a:p>
-            <a:endParaRPr/>
-          </a:p>
-        </p:txBody>
-      </p:sp>
-      <p:sp>
-        <p:nvSpPr>
-          <p:cNvPr id="324" name="Dg 324"/>
-          <p:cNvSpPr/>
-          <p:nvPr/>
-        </p:nvSpPr>
-        <p:spPr>
-          <a:xfrm>
-            <a:off x="6680200" y="1574800"/>
-            <a:ext cx="4965700" cy="2235200"/>
-          </a:xfrm>
-          <a:prstGeom prst="rect">
-            <a:avLst/>
-          </a:prstGeom>
-          <a:solidFill>
-            <a:srgbClr val="F4F6FA"/>
-          </a:solidFill>
-          <a:ln>
-            <a:noFill/>
-          </a:ln>
-        </p:spPr>
-        <p:txBody>
-          <a:bodyPr lIns="0" tIns="0" rIns="0" bIns="0" rtlCol="0" anchor="ctr"/>
-          <a:lstStyle/>
-          <a:p>
-            <a:endParaRPr/>
-          </a:p>
-        </p:txBody>
-      </p:sp>
-      <p:sp>
-        <p:nvSpPr>
-          <p:cNvPr id="325" name="Dg 325"/>
-          <p:cNvSpPr/>
-          <p:nvPr/>
-        </p:nvSpPr>
-        <p:spPr>
-          <a:xfrm>
-            <a:off x="6680200" y="1574800"/>
-            <a:ext cx="38100" cy="2235200"/>
-          </a:xfrm>
-          <a:prstGeom prst="rect">
-            <a:avLst/>
-          </a:prstGeom>
-          <a:solidFill>
-            <a:srgbClr val="8A2E3B"/>
-          </a:solidFill>
-          <a:ln>
-            <a:noFill/>
-          </a:ln>
-        </p:spPr>
-        <p:txBody>
-          <a:bodyPr lIns="0" tIns="0" rIns="0" bIns="0" rtlCol="0" anchor="ctr"/>
-          <a:lstStyle/>
-          <a:p>
-            <a:endParaRPr/>
-          </a:p>
-        </p:txBody>
-      </p:sp>
-      <p:sp>
-        <p:nvSpPr>
-          <p:cNvPr id="326" name="Dg 326"/>
-          <p:cNvSpPr/>
-          <p:nvPr/>
-        </p:nvSpPr>
-        <p:spPr>
-          <a:xfrm>
-            <a:off x="6680200" y="3962400"/>
-            <a:ext cx="4965700" cy="2006600"/>
-          </a:xfrm>
-          <a:prstGeom prst="rect">
-            <a:avLst/>
-          </a:prstGeom>
-          <a:solidFill>
-            <a:srgbClr val="F4F6FA"/>
-          </a:solidFill>
-          <a:ln>
-            <a:noFill/>
-          </a:ln>
-        </p:spPr>
-        <p:txBody>
-          <a:bodyPr lIns="0" tIns="0" rIns="0" bIns="0" rtlCol="0" anchor="ctr"/>
-          <a:lstStyle/>
-          <a:p>
-            <a:endParaRPr/>
-          </a:p>
-        </p:txBody>
-      </p:sp>
-      <p:sp>
-        <p:nvSpPr>
-          <p:cNvPr id="327" name="Dg 327"/>
-          <p:cNvSpPr/>
-          <p:nvPr/>
-        </p:nvSpPr>
-        <p:spPr>
-          <a:xfrm>
-            <a:off x="6680200" y="3962400"/>
-            <a:ext cx="4965700" cy="38100"/>
-          </a:xfrm>
-          <a:prstGeom prst="rect">
-            <a:avLst/>
-          </a:prstGeom>
-          <a:solidFill>
-            <a:srgbClr val="8A2E3B"/>
           </a:solidFill>
           <a:ln>
             <a:noFill/>
@@ -15846,8 +17911,8 @@
         </p:nvSpPr>
         <p:spPr>
           <a:xfrm>
-            <a:off x="546100" y="1574800"/>
-            <a:ext cx="5969000" cy="1600200"/>
+            <a:off x="800100" y="5486400"/>
+            <a:ext cx="5461000" cy="609600"/>
           </a:xfrm>
           <a:ln/>
           <a:effectLst/>
@@ -15867,48 +17932,13 @@
           </a:fontRef>
         </p:style>
         <p:txBody>
-          <a:bodyPr wrap="square" lIns="228600" tIns="152400" rIns="152400" bIns="152400" rtlCol="0" anchor="ctr"/>
-          <a:lstStyle/>
-          <a:p>
-            <a:pPr algn="l">
-              <a:spcAft>
-                <a:spcPts val="300"/>
-              </a:spcAft>
-            </a:pPr>
-            <a:r>
-              <a:rPr lang="en-US" sz="1800" dirty="0">
-                <a:solidFill>
-                  <a:srgbClr val="1A2744"/>
-                </a:solidFill>
-                <a:latin typeface="Cambria Math"/>
-              </a:rPr>
-              <a:t>(2Hi/ωs)·d²δi/dt² = Pm,i − Pe,i(δ)</a:t>
-            </a:r>
-          </a:p>
-          <a:p>
-            <a:pPr algn="l">
-              <a:spcAft>
-                <a:spcPts val="300"/>
-              </a:spcAft>
-            </a:pPr>
-            <a:r>
-              <a:rPr lang="en-US" sz="1700" dirty="0">
-                <a:solidFill>
-                  <a:srgbClr val="1A2744"/>
-                </a:solidFill>
-                <a:latin typeface="Cambria Math"/>
-              </a:rPr>
-              <a:t>Pe,i = Ei Σj Ej ( Gij cos δij + Bij sin δij )</a:t>
-            </a:r>
-          </a:p>
+          <a:bodyPr wrap="square" lIns="0" tIns="0" rIns="0" bIns="0" rtlCol="0" anchor="ctr"/>
+          <a:lstStyle/>
           <a:p>
             <a:pPr algn="l">
               <a:lnSpc>
-                <a:spcPct val="135000"/>
+                <a:spcPct val="130000"/>
               </a:lnSpc>
-              <a:spcBef>
-                <a:spcPts val="500"/>
-              </a:spcBef>
             </a:pPr>
             <a:r>
               <a:rPr lang="ja-JP" sz="1400" dirty="0">
@@ -15917,7 +17947,7 @@
                 </a:solidFill>
                 <a:latin typeface="Calibri"/>
               </a:rPr>
-              <a:t>δ=回転子角・H=慣性定数[s]。G,BはYを発電機内部ノードへ縮約(Schur縮約)。</a:t>
+              <a:t>δ = 回転子角 ・ H = 慣性定数[s] ・ Pm = 機械入力 ・ Pe = 電気出力。G, B は Y を発電機内部ノードへ縮約(Schur補元)した値。</a:t>
             </a:r>
           </a:p>
         </p:txBody>
@@ -15930,8 +17960,8 @@
         </p:nvSpPr>
         <p:spPr>
           <a:xfrm>
-            <a:off x="546100" y="3327400"/>
-            <a:ext cx="5969000" cy="1498600"/>
+            <a:off x="6934200" y="4318000"/>
+            <a:ext cx="4457700" cy="254000"/>
           </a:xfrm>
           <a:ln/>
           <a:effectLst/>
@@ -15951,48 +17981,13 @@
           </a:fontRef>
         </p:style>
         <p:txBody>
-          <a:bodyPr wrap="square" lIns="228600" tIns="152400" rIns="152400" bIns="152400" rtlCol="0" anchor="ctr"/>
-          <a:lstStyle/>
-          <a:p>
-            <a:pPr algn="l">
-              <a:spcAft>
-                <a:spcPts val="300"/>
-              </a:spcAft>
-            </a:pPr>
-            <a:r>
-              <a:rPr lang="en-US" sz="1800" dirty="0">
-                <a:solidFill>
-                  <a:srgbClr val="1A2744"/>
-                </a:solidFill>
-                <a:latin typeface="Cambria Math"/>
-              </a:rPr>
-              <a:t>M Δδ̈ = − K Δδ ,   Kij = ∂Pe,i/∂δj</a:t>
-            </a:r>
-          </a:p>
-          <a:p>
-            <a:pPr algn="l">
-              <a:spcAft>
-                <a:spcPts val="300"/>
-              </a:spcAft>
-            </a:pPr>
-            <a:r>
-              <a:rPr lang="en-US" sz="1800" dirty="0">
-                <a:solidFill>
-                  <a:srgbClr val="1A2744"/>
-                </a:solidFill>
-                <a:latin typeface="Cambria Math"/>
-              </a:rPr>
-              <a:t>M⁻¹K の固有値 λk  →  fk = √λk / 2π</a:t>
-            </a:r>
-          </a:p>
+          <a:bodyPr wrap="square" lIns="0" tIns="0" rIns="0" bIns="0" rtlCol="0" anchor="ctr"/>
+          <a:lstStyle/>
           <a:p>
             <a:pPr algn="l">
               <a:lnSpc>
-                <a:spcPct val="135000"/>
+                <a:spcPct val="125000"/>
               </a:lnSpc>
-              <a:spcBef>
-                <a:spcPts val="500"/>
-              </a:spcBef>
             </a:pPr>
             <a:r>
               <a:rPr lang="ja-JP" sz="1400" dirty="0">
@@ -16001,7 +17996,7 @@
                 </a:solidFill>
                 <a:latin typeface="Calibri"/>
               </a:rPr>
-              <a:t>K=同期化トルク・固有ベクトル=モード形(揺れの向き)。運転点は収束ACの E∠δ。</a:t>
+              <a:t>固有ベクトル = モード形(揺れの向き)</a:t>
             </a:r>
           </a:p>
         </p:txBody>
@@ -16014,8 +18009,8 @@
         </p:nvSpPr>
         <p:spPr>
           <a:xfrm>
-            <a:off x="6680200" y="1574800"/>
-            <a:ext cx="4965700" cy="2235200"/>
+            <a:off x="6934200" y="5384800"/>
+            <a:ext cx="4457700" cy="228600"/>
           </a:xfrm>
           <a:ln/>
           <a:effectLst/>
@@ -16035,48 +18030,13 @@
           </a:fontRef>
         </p:style>
         <p:txBody>
-          <a:bodyPr wrap="square" lIns="228600" tIns="152400" rIns="152400" bIns="152400" rtlCol="0" anchor="ctr"/>
-          <a:lstStyle/>
-          <a:p>
-            <a:pPr algn="l">
-              <a:spcAft>
-                <a:spcPts val="300"/>
-              </a:spcAft>
-            </a:pPr>
-            <a:r>
-              <a:rPr lang="en-US" sz="1600" dirty="0">
-                <a:solidFill>
-                  <a:srgbClr val="1A2744"/>
-                </a:solidFill>
-                <a:latin typeface="Cambria Math"/>
-              </a:rPr>
-              <a:t>Hagg = Σ Hi Si / Σ Si ,   1/x″agg = Σ 1/x″i</a:t>
-            </a:r>
-          </a:p>
-          <a:p>
-            <a:pPr algn="l">
-              <a:spcAft>
-                <a:spcPts val="300"/>
-              </a:spcAft>
-            </a:pPr>
-            <a:r>
-              <a:rPr lang="en-US" sz="1800" dirty="0">
-                <a:solidFill>
-                  <a:srgbClr val="1A2744"/>
-                </a:solidFill>
-                <a:latin typeface="Cambria Math"/>
-              </a:rPr>
-              <a:t>E∠δ = V + j x″d · I</a:t>
-            </a:r>
-          </a:p>
+          <a:bodyPr wrap="square" lIns="0" tIns="0" rIns="0" bIns="0" rtlCol="0" anchor="ctr"/>
+          <a:lstStyle/>
           <a:p>
             <a:pPr algn="l">
               <a:lnSpc>
-                <a:spcPct val="135000"/>
+                <a:spcPct val="125000"/>
               </a:lnSpc>
-              <a:spcBef>
-                <a:spcPts val="500"/>
-              </a:spcBef>
             </a:pPr>
             <a:r>
               <a:rPr lang="ja-JP" sz="1400" dirty="0">
@@ -16085,7 +18045,7 @@
                 </a:solidFill>
                 <a:latin typeface="Calibri"/>
               </a:rPr>
-              <a:t>機械集約(容量加重H・xd″並列合成)がFIT極小機の慣性アーティファクト(11〜2,284Hzの非物理)を根治し、0.4Hz帯が現れた。</a:t>
+              <a:t>容量加重H ・ 並列合成 1/x″agg = Σ 1/x″i</a:t>
             </a:r>
           </a:p>
         </p:txBody>
@@ -16098,8 +18058,8 @@
         </p:nvSpPr>
         <p:spPr>
           <a:xfrm>
-            <a:off x="6934200" y="4749800"/>
-            <a:ext cx="4457700" cy="950838"/>
+            <a:off x="6934200" y="5664200"/>
+            <a:ext cx="4457700" cy="482600"/>
           </a:xfrm>
           <a:prstGeom prst="rect">
             <a:avLst/>
@@ -16114,45 +18074,39 @@
           </a:bodyPr>
           <a:lstStyle/>
           <a:p>
-            <a:pPr marL="171450" indent="-171450" algn="l">
+            <a:pPr marL="150000" indent="-150000" algn="l">
               <a:lnSpc>
-                <a:spcPct val="135000"/>
+                <a:spcPct val="115000"/>
               </a:lnSpc>
-              <a:spcAft>
-                <a:spcPts val="600"/>
-              </a:spcAft>
               <a:buFont typeface="Arial"/>
               <a:buChar char="•"/>
             </a:pPr>
             <a:r>
-              <a:rPr lang="ja-JP" sz="1450" dirty="0">
+              <a:rPr lang="ja-JP" sz="1400" dirty="0">
                 <a:solidFill>
                   <a:srgbClr val="3D4657"/>
                 </a:solidFill>
                 <a:latin typeface="Calibri"/>
               </a:rPr>
-              <a:t>インバータ(IBR)は慣性を持たない → 動揺方程式から分離(west 24GVA / 8,026機)</a:t>
-            </a:r>
-          </a:p>
-          <a:p>
-            <a:pPr marL="171450" indent="-171450" algn="l">
+              <a:t>前提: IBRは慣性なし → 分離(west 24GVA)</a:t>
+            </a:r>
+          </a:p>
+          <a:p>
+            <a:pPr marL="150000" indent="-150000" algn="l">
               <a:lnSpc>
-                <a:spcPct val="135000"/>
+                <a:spcPct val="115000"/>
               </a:lnSpc>
-              <a:spcAft>
-                <a:spcPts val="600"/>
-              </a:spcAft>
               <a:buFont typeface="Arial"/>
               <a:buChar char="•"/>
             </a:pPr>
             <a:r>
-              <a:rPr lang="ja-JP" sz="1450" dirty="0">
+              <a:rPr lang="ja-JP" sz="1400" dirty="0">
                 <a:solidFill>
                   <a:srgbClr val="3D4657"/>
                 </a:solidFill>
                 <a:latin typeface="Calibri"/>
               </a:rPr>
-              <a:t>定数 H, xd″ は型式別の典型値(IEEJ/教科書帯)と明示</a:t>
+              <a:t>定数 H, x″d は型式別の典型値(IEEJ帯)</a:t>
             </a:r>
           </a:p>
         </p:txBody>
@@ -16194,14 +18148,43 @@
       </p:sp>
       <p:sp>
         <p:nvSpPr>
-          <p:cNvPr id="340" name="TB 340"/>
+          <p:cNvPr id="700" name="Ln 700"/>
+          <p:cNvSpPr/>
+          <p:nvPr/>
+        </p:nvSpPr>
+        <p:spPr>
+          <a:xfrm>
+            <a:off x="800100" y="1701800"/>
+            <a:ext cx="5461000" cy="0"/>
+          </a:xfrm>
+          <a:prstGeom prst="line">
+            <a:avLst/>
+          </a:prstGeom>
+          <a:ln w="12700">
+            <a:solidFill>
+              <a:srgbClr val="5B6470"/>
+            </a:solidFill>
+            <a:prstDash val="dash"/>
+          </a:ln>
+        </p:spPr>
+        <p:txBody>
+          <a:bodyPr/>
+          <a:lstStyle/>
+          <a:p>
+            <a:endParaRPr/>
+          </a:p>
+        </p:txBody>
+      </p:sp>
+      <p:sp>
+        <p:nvSpPr>
+          <p:cNvPr id="701" name="TB 701"/>
           <p:cNvSpPr txBox="1"/>
           <p:nvPr/>
         </p:nvSpPr>
         <p:spPr>
           <a:xfrm>
-            <a:off x="6934200" y="4241800"/>
-            <a:ext cx="4457700" cy="304800"/>
+            <a:off x="800100" y="1778000"/>
+            <a:ext cx="5461000" cy="254000"/>
           </a:xfrm>
           <a:prstGeom prst="rect">
             <a:avLst/>
@@ -16209,239 +18192,14 @@
           <a:noFill/>
         </p:spPr>
         <p:txBody>
-          <a:bodyPr wrap="square" lIns="0" tIns="0" rIns="0" bIns="0"/>
-          <a:lstStyle/>
-          <a:p>
-            <a:pPr algn="l"/>
-            <a:r>
-              <a:rPr lang="ja-JP" sz="1600" dirty="0">
-                <a:solidFill>
-                  <a:srgbClr val="1A2744"/>
-                </a:solidFill>
-                <a:latin typeface="Calibri"/>
-              </a:rPr>
-              <a:t>前提と限界</a:t>
-            </a:r>
-          </a:p>
-        </p:txBody>
-      </p:sp>
-      <p:sp>
-        <p:nvSpPr>
-          <p:cNvPr id="350" name="TB 350"/>
-          <p:cNvSpPr txBox="1"/>
-          <p:nvPr/>
-        </p:nvSpPr>
-        <p:spPr>
-          <a:xfrm>
-            <a:off x="1854200" y="5003800"/>
-            <a:ext cx="2286000" cy="228600"/>
-          </a:xfrm>
-          <a:prstGeom prst="rect">
-            <a:avLst/>
-          </a:prstGeom>
-          <a:noFill/>
-        </p:spPr>
-        <p:txBody>
-          <a:bodyPr wrap="square" lIns="0" tIns="0" rIns="0" bIns="0"/>
-          <a:lstStyle/>
-          <a:p>
-            <a:pPr algn="ctr"/>
-            <a:r>
-              <a:rPr lang="ja-JP" sz="1400" dirty="0">
-                <a:solidFill>
-                  <a:srgbClr val="8A2E3B"/>
-                </a:solidFill>
-                <a:latin typeface="Cambria Math"/>
-              </a:rPr>
-              <a:t>K = ∂Pe/∂δ</a:t>
-            </a:r>
-          </a:p>
-        </p:txBody>
-      </p:sp>
-      <p:sp>
-        <p:nvSpPr>
-          <p:cNvPr id="351" name="Dg 351"/>
-          <p:cNvSpPr/>
-          <p:nvPr/>
-        </p:nvSpPr>
-        <p:spPr>
-          <a:xfrm>
-            <a:off x="1270000" y="5257800"/>
-            <a:ext cx="609600" cy="457200"/>
-          </a:xfrm>
-          <a:prstGeom prst="rect">
-            <a:avLst/>
-          </a:prstGeom>
-          <a:solidFill>
-            <a:srgbClr val="1A2744"/>
-          </a:solidFill>
-          <a:ln>
-            <a:noFill/>
-          </a:ln>
-        </p:spPr>
-        <p:txBody>
-          <a:bodyPr lIns="0" tIns="0" rIns="0" bIns="0" rtlCol="0" anchor="ctr"/>
-          <a:lstStyle/>
-          <a:p>
-            <a:pPr algn="ctr"/>
-            <a:r>
-              <a:rPr lang="ja-JP" sz="1400" b="1" dirty="0">
-                <a:solidFill>
-                  <a:srgbClr val="FFFFFF"/>
-                </a:solidFill>
-                <a:latin typeface="Calibri"/>
-              </a:rPr>
-              <a:t>G1</a:t>
-            </a:r>
-          </a:p>
-        </p:txBody>
-      </p:sp>
-      <p:sp>
-        <p:nvSpPr>
-          <p:cNvPr id="352" name="Dg 352"/>
-          <p:cNvSpPr/>
-          <p:nvPr/>
-        </p:nvSpPr>
-        <p:spPr>
-          <a:xfrm>
-            <a:off x="4114800" y="5257800"/>
-            <a:ext cx="609600" cy="457200"/>
-          </a:xfrm>
-          <a:prstGeom prst="rect">
-            <a:avLst/>
-          </a:prstGeom>
-          <a:solidFill>
-            <a:srgbClr val="1A2744"/>
-          </a:solidFill>
-          <a:ln>
-            <a:noFill/>
-          </a:ln>
-        </p:spPr>
-        <p:txBody>
-          <a:bodyPr lIns="0" tIns="0" rIns="0" bIns="0" rtlCol="0" anchor="ctr"/>
-          <a:lstStyle/>
-          <a:p>
-            <a:pPr algn="ctr"/>
-            <a:r>
-              <a:rPr lang="ja-JP" sz="1400" b="1" dirty="0">
-                <a:solidFill>
-                  <a:srgbClr val="FFFFFF"/>
-                </a:solidFill>
-                <a:latin typeface="Calibri"/>
-              </a:rPr>
-              <a:t>G2</a:t>
-            </a:r>
-          </a:p>
-        </p:txBody>
-      </p:sp>
-      <p:sp>
-        <p:nvSpPr>
-          <p:cNvPr id="353" name="Dg 353"/>
-          <p:cNvSpPr/>
-          <p:nvPr/>
-        </p:nvSpPr>
-        <p:spPr>
-          <a:xfrm>
-            <a:off x="1879600" y="5473700"/>
-            <a:ext cx="2235200" cy="25400"/>
-          </a:xfrm>
-          <a:prstGeom prst="rect">
-            <a:avLst/>
-          </a:prstGeom>
-          <a:solidFill>
-            <a:srgbClr val="5B6470"/>
-          </a:solidFill>
-          <a:ln>
-            <a:noFill/>
-          </a:ln>
-        </p:spPr>
-        <p:txBody>
-          <a:bodyPr lIns="0" tIns="0" rIns="0" bIns="0" rtlCol="0" anchor="ctr"/>
-          <a:lstStyle/>
-          <a:p>
-            <a:endParaRPr/>
-          </a:p>
-        </p:txBody>
-      </p:sp>
-      <p:sp>
-        <p:nvSpPr>
-          <p:cNvPr id="354" name="Dg 354"/>
-          <p:cNvSpPr/>
-          <p:nvPr/>
-        </p:nvSpPr>
-        <p:spPr>
-          <a:xfrm>
-            <a:off x="762000" y="5359400"/>
-            <a:ext cx="406400" cy="254000"/>
-          </a:xfrm>
-          <a:prstGeom prst="leftArrow">
-            <a:avLst/>
-          </a:prstGeom>
-          <a:solidFill>
-            <a:srgbClr val="8A2E3B"/>
-          </a:solidFill>
-          <a:ln>
-            <a:noFill/>
-          </a:ln>
-        </p:spPr>
-        <p:txBody>
-          <a:bodyPr lIns="0" tIns="0" rIns="0" bIns="0" rtlCol="0" anchor="ctr"/>
-          <a:lstStyle/>
-          <a:p>
-            <a:endParaRPr/>
-          </a:p>
-        </p:txBody>
-      </p:sp>
-      <p:sp>
-        <p:nvSpPr>
-          <p:cNvPr id="355" name="Dg 355"/>
-          <p:cNvSpPr/>
-          <p:nvPr/>
-        </p:nvSpPr>
-        <p:spPr>
-          <a:xfrm>
-            <a:off x="4826000" y="5359400"/>
-            <a:ext cx="406400" cy="254000"/>
-          </a:xfrm>
-          <a:prstGeom prst="rightArrow">
-            <a:avLst/>
-          </a:prstGeom>
-          <a:solidFill>
-            <a:srgbClr val="8A2E3B"/>
-          </a:solidFill>
-          <a:ln>
-            <a:noFill/>
-          </a:ln>
-        </p:spPr>
-        <p:txBody>
-          <a:bodyPr lIns="0" tIns="0" rIns="0" bIns="0" rtlCol="0" anchor="ctr"/>
-          <a:lstStyle/>
-          <a:p>
-            <a:endParaRPr/>
-          </a:p>
-        </p:txBody>
-      </p:sp>
-      <p:sp>
-        <p:nvSpPr>
-          <p:cNvPr id="356" name="TB 356"/>
-          <p:cNvSpPr txBox="1"/>
-          <p:nvPr/>
-        </p:nvSpPr>
-        <p:spPr>
-          <a:xfrm>
-            <a:off x="546100" y="5816600"/>
-            <a:ext cx="5969000" cy="254000"/>
-          </a:xfrm>
-          <a:prstGeom prst="rect">
-            <a:avLst/>
-          </a:prstGeom>
-          <a:noFill/>
-        </p:spPr>
-        <p:txBody>
-          <a:bodyPr wrap="square" lIns="0" tIns="0" rIns="0" bIns="0"/>
-          <a:lstStyle/>
-          <a:p>
-            <a:pPr algn="l"/>
+          <a:bodyPr wrap="square" lIns="0" tIns="0" rIns="0" bIns="0" anchor="t"/>
+          <a:lstStyle/>
+          <a:p>
+            <a:pPr algn="ctr">
+              <a:lnSpc>
+                <a:spcPct val="130000"/>
+              </a:lnSpc>
+            </a:pPr>
             <a:r>
               <a:rPr lang="ja-JP" sz="1400" dirty="0">
                 <a:solidFill>
@@ -16449,15 +18207,3040 @@
                 </a:solidFill>
                 <a:latin typeface="Calibri"/>
               </a:rPr>
-              <a:t>バネ–質点系と同型 — 揺れの周波数は固有値から決まる</a:t>
-            </a:r>
-          </a:p>
-        </p:txBody>
-      </p:sp>
+              <a:t>← 逆位相にシーソー(inter-areaモード) →</a:t>
+            </a:r>
+          </a:p>
+        </p:txBody>
+      </p:sp>
+      <p:sp>
+        <p:nvSpPr>
+          <p:cNvPr id="702" name="Ln 702"/>
+          <p:cNvSpPr/>
+          <p:nvPr/>
+        </p:nvSpPr>
+        <p:spPr>
+          <a:xfrm flipH="1">
+            <a:off x="1905000" y="1727200"/>
+            <a:ext cx="635000" cy="990600"/>
+          </a:xfrm>
+          <a:prstGeom prst="line">
+            <a:avLst/>
+          </a:prstGeom>
+          <a:ln w="15875">
+            <a:solidFill>
+              <a:srgbClr val="5B6470"/>
+            </a:solidFill>
+          </a:ln>
+        </p:spPr>
+        <p:txBody>
+          <a:bodyPr/>
+          <a:lstStyle/>
+          <a:p>
+            <a:endParaRPr/>
+          </a:p>
+        </p:txBody>
+      </p:sp>
+      <p:sp>
+        <p:nvSpPr>
+          <p:cNvPr id="703" name="Ln 703"/>
+          <p:cNvSpPr/>
+          <p:nvPr/>
+        </p:nvSpPr>
+        <p:spPr>
+          <a:xfrm>
+            <a:off x="4521200" y="1727200"/>
+            <a:ext cx="635000" cy="990600"/>
+          </a:xfrm>
+          <a:prstGeom prst="line">
+            <a:avLst/>
+          </a:prstGeom>
+          <a:ln w="15875">
+            <a:solidFill>
+              <a:srgbClr val="5B6470"/>
+            </a:solidFill>
+          </a:ln>
+        </p:spPr>
+        <p:txBody>
+          <a:bodyPr/>
+          <a:lstStyle/>
+          <a:p>
+            <a:endParaRPr/>
+          </a:p>
+        </p:txBody>
+      </p:sp>
+      <p:sp>
+        <p:nvSpPr>
+          <p:cNvPr id="704" name="Dg 704"/>
+          <p:cNvSpPr/>
+          <p:nvPr/>
+        </p:nvSpPr>
+        <p:spPr>
+          <a:xfrm>
+            <a:off x="1625600" y="2717800"/>
+            <a:ext cx="558800" cy="558800"/>
+          </a:xfrm>
+          <a:prstGeom prst="ellipse">
+            <a:avLst/>
+          </a:prstGeom>
+          <a:solidFill>
+            <a:srgbClr val="2C5F8A"/>
+          </a:solidFill>
+          <a:ln>
+            <a:noFill/>
+          </a:ln>
+        </p:spPr>
+        <p:txBody>
+          <a:bodyPr/>
+          <a:lstStyle/>
+          <a:p>
+            <a:endParaRPr/>
+          </a:p>
+        </p:txBody>
+      </p:sp>
+      <p:sp>
+        <p:nvSpPr>
+          <p:cNvPr id="705" name="Dg 705"/>
+          <p:cNvSpPr/>
+          <p:nvPr/>
+        </p:nvSpPr>
+        <p:spPr>
+          <a:xfrm>
+            <a:off x="4876800" y="2717800"/>
+            <a:ext cx="558800" cy="558800"/>
+          </a:xfrm>
+          <a:prstGeom prst="ellipse">
+            <a:avLst/>
+          </a:prstGeom>
+          <a:solidFill>
+            <a:srgbClr val="B4472C"/>
+          </a:solidFill>
+          <a:ln>
+            <a:noFill/>
+          </a:ln>
+        </p:spPr>
+        <p:txBody>
+          <a:bodyPr/>
+          <a:lstStyle/>
+          <a:p>
+            <a:endParaRPr/>
+          </a:p>
+        </p:txBody>
+      </p:sp>
+      <p:sp>
+        <p:nvSpPr>
+          <p:cNvPr id="710" name="Ln 710"/>
+          <p:cNvSpPr/>
+          <p:nvPr/>
+        </p:nvSpPr>
+        <p:spPr>
+          <a:xfrm flipV="1">
+            <a:off x="2184400" y="2857500"/>
+            <a:ext cx="269240" cy="279400"/>
+          </a:xfrm>
+          <a:prstGeom prst="line">
+            <a:avLst/>
+          </a:prstGeom>
+          <a:ln w="19050">
+            <a:solidFill>
+              <a:srgbClr val="8A2E3B"/>
+            </a:solidFill>
+          </a:ln>
+        </p:spPr>
+        <p:txBody>
+          <a:bodyPr/>
+          <a:lstStyle/>
+          <a:p>
+            <a:endParaRPr/>
+          </a:p>
+        </p:txBody>
+      </p:sp>
+      <p:sp>
+        <p:nvSpPr>
+          <p:cNvPr id="711" name="Ln 711"/>
+          <p:cNvSpPr/>
+          <p:nvPr/>
+        </p:nvSpPr>
+        <p:spPr>
+          <a:xfrm>
+            <a:off x="2453640" y="2857500"/>
+            <a:ext cx="269240" cy="279400"/>
+          </a:xfrm>
+          <a:prstGeom prst="line">
+            <a:avLst/>
+          </a:prstGeom>
+          <a:ln w="19050">
+            <a:solidFill>
+              <a:srgbClr val="8A2E3B"/>
+            </a:solidFill>
+          </a:ln>
+        </p:spPr>
+        <p:txBody>
+          <a:bodyPr/>
+          <a:lstStyle/>
+          <a:p>
+            <a:endParaRPr/>
+          </a:p>
+        </p:txBody>
+      </p:sp>
+      <p:sp>
+        <p:nvSpPr>
+          <p:cNvPr id="712" name="Ln 712"/>
+          <p:cNvSpPr/>
+          <p:nvPr/>
+        </p:nvSpPr>
+        <p:spPr>
+          <a:xfrm flipV="1">
+            <a:off x="2722880" y="2857500"/>
+            <a:ext cx="269240" cy="279400"/>
+          </a:xfrm>
+          <a:prstGeom prst="line">
+            <a:avLst/>
+          </a:prstGeom>
+          <a:ln w="19050">
+            <a:solidFill>
+              <a:srgbClr val="8A2E3B"/>
+            </a:solidFill>
+          </a:ln>
+        </p:spPr>
+        <p:txBody>
+          <a:bodyPr/>
+          <a:lstStyle/>
+          <a:p>
+            <a:endParaRPr/>
+          </a:p>
+        </p:txBody>
+      </p:sp>
+      <p:sp>
+        <p:nvSpPr>
+          <p:cNvPr id="713" name="Ln 713"/>
+          <p:cNvSpPr/>
+          <p:nvPr/>
+        </p:nvSpPr>
+        <p:spPr>
+          <a:xfrm>
+            <a:off x="2992120" y="2857500"/>
+            <a:ext cx="269240" cy="279400"/>
+          </a:xfrm>
+          <a:prstGeom prst="line">
+            <a:avLst/>
+          </a:prstGeom>
+          <a:ln w="19050">
+            <a:solidFill>
+              <a:srgbClr val="8A2E3B"/>
+            </a:solidFill>
+          </a:ln>
+        </p:spPr>
+        <p:txBody>
+          <a:bodyPr/>
+          <a:lstStyle/>
+          <a:p>
+            <a:endParaRPr/>
+          </a:p>
+        </p:txBody>
+      </p:sp>
+      <p:sp>
+        <p:nvSpPr>
+          <p:cNvPr id="714" name="Ln 714"/>
+          <p:cNvSpPr/>
+          <p:nvPr/>
+        </p:nvSpPr>
+        <p:spPr>
+          <a:xfrm flipV="1">
+            <a:off x="3261360" y="2857500"/>
+            <a:ext cx="269240" cy="279400"/>
+          </a:xfrm>
+          <a:prstGeom prst="line">
+            <a:avLst/>
+          </a:prstGeom>
+          <a:ln w="19050">
+            <a:solidFill>
+              <a:srgbClr val="8A2E3B"/>
+            </a:solidFill>
+          </a:ln>
+        </p:spPr>
+        <p:txBody>
+          <a:bodyPr/>
+          <a:lstStyle/>
+          <a:p>
+            <a:endParaRPr/>
+          </a:p>
+        </p:txBody>
+      </p:sp>
+      <p:sp>
+        <p:nvSpPr>
+          <p:cNvPr id="715" name="Ln 715"/>
+          <p:cNvSpPr/>
+          <p:nvPr/>
+        </p:nvSpPr>
+        <p:spPr>
+          <a:xfrm>
+            <a:off x="3530600" y="2857500"/>
+            <a:ext cx="269240" cy="279400"/>
+          </a:xfrm>
+          <a:prstGeom prst="line">
+            <a:avLst/>
+          </a:prstGeom>
+          <a:ln w="19050">
+            <a:solidFill>
+              <a:srgbClr val="8A2E3B"/>
+            </a:solidFill>
+          </a:ln>
+        </p:spPr>
+        <p:txBody>
+          <a:bodyPr/>
+          <a:lstStyle/>
+          <a:p>
+            <a:endParaRPr/>
+          </a:p>
+        </p:txBody>
+      </p:sp>
+      <p:sp>
+        <p:nvSpPr>
+          <p:cNvPr id="716" name="Ln 716"/>
+          <p:cNvSpPr/>
+          <p:nvPr/>
+        </p:nvSpPr>
+        <p:spPr>
+          <a:xfrm flipV="1">
+            <a:off x="3799840" y="2857500"/>
+            <a:ext cx="269240" cy="279400"/>
+          </a:xfrm>
+          <a:prstGeom prst="line">
+            <a:avLst/>
+          </a:prstGeom>
+          <a:ln w="19050">
+            <a:solidFill>
+              <a:srgbClr val="8A2E3B"/>
+            </a:solidFill>
+          </a:ln>
+        </p:spPr>
+        <p:txBody>
+          <a:bodyPr/>
+          <a:lstStyle/>
+          <a:p>
+            <a:endParaRPr/>
+          </a:p>
+        </p:txBody>
+      </p:sp>
+      <p:sp>
+        <p:nvSpPr>
+          <p:cNvPr id="717" name="Ln 717"/>
+          <p:cNvSpPr/>
+          <p:nvPr/>
+        </p:nvSpPr>
+        <p:spPr>
+          <a:xfrm>
+            <a:off x="4069080" y="2857500"/>
+            <a:ext cx="269240" cy="279400"/>
+          </a:xfrm>
+          <a:prstGeom prst="line">
+            <a:avLst/>
+          </a:prstGeom>
+          <a:ln w="19050">
+            <a:solidFill>
+              <a:srgbClr val="8A2E3B"/>
+            </a:solidFill>
+          </a:ln>
+        </p:spPr>
+        <p:txBody>
+          <a:bodyPr/>
+          <a:lstStyle/>
+          <a:p>
+            <a:endParaRPr/>
+          </a:p>
+        </p:txBody>
+      </p:sp>
+      <p:sp>
+        <p:nvSpPr>
+          <p:cNvPr id="718" name="Ln 718"/>
+          <p:cNvSpPr/>
+          <p:nvPr/>
+        </p:nvSpPr>
+        <p:spPr>
+          <a:xfrm flipV="1">
+            <a:off x="4338320" y="2857500"/>
+            <a:ext cx="269240" cy="279400"/>
+          </a:xfrm>
+          <a:prstGeom prst="line">
+            <a:avLst/>
+          </a:prstGeom>
+          <a:ln w="19050">
+            <a:solidFill>
+              <a:srgbClr val="8A2E3B"/>
+            </a:solidFill>
+          </a:ln>
+        </p:spPr>
+        <p:txBody>
+          <a:bodyPr/>
+          <a:lstStyle/>
+          <a:p>
+            <a:endParaRPr/>
+          </a:p>
+        </p:txBody>
+      </p:sp>
+      <p:sp>
+        <p:nvSpPr>
+          <p:cNvPr id="719" name="Ln 719"/>
+          <p:cNvSpPr/>
+          <p:nvPr/>
+        </p:nvSpPr>
+        <p:spPr>
+          <a:xfrm>
+            <a:off x="4607560" y="2857500"/>
+            <a:ext cx="269240" cy="279400"/>
+          </a:xfrm>
+          <a:prstGeom prst="line">
+            <a:avLst/>
+          </a:prstGeom>
+          <a:ln w="19050">
+            <a:solidFill>
+              <a:srgbClr val="8A2E3B"/>
+            </a:solidFill>
+          </a:ln>
+        </p:spPr>
+        <p:txBody>
+          <a:bodyPr/>
+          <a:lstStyle/>
+          <a:p>
+            <a:endParaRPr/>
+          </a:p>
+        </p:txBody>
+      </p:sp>
+      <p:sp>
+        <p:nvSpPr>
+          <p:cNvPr id="730" name="TB 730"/>
+          <p:cNvSpPr txBox="1"/>
+          <p:nvPr/>
+        </p:nvSpPr>
+        <p:spPr>
+          <a:xfrm>
+            <a:off x="1270000" y="2438400"/>
+            <a:ext cx="4521200" cy="254000"/>
+          </a:xfrm>
+          <a:prstGeom prst="rect">
+            <a:avLst/>
+          </a:prstGeom>
+          <a:noFill/>
+        </p:spPr>
+        <p:txBody>
+          <a:bodyPr wrap="square" lIns="0" tIns="0" rIns="0" bIns="0" anchor="t"/>
+          <a:lstStyle/>
+          <a:p>
+            <a:pPr algn="ctr">
+              <a:lnSpc>
+                <a:spcPct val="130000"/>
+              </a:lnSpc>
+            </a:pPr>
+            <a:r>
+              <a:rPr lang="ja-JP" sz="1400" dirty="0">
+                <a:solidFill>
+                  <a:srgbClr val="8A2E3B"/>
+                </a:solidFill>
+                <a:latin typeface="Calibri"/>
+              </a:rPr>
+              <a:t>送電網 = バネ(剛性 K ∝ 1/X)</a:t>
+            </a:r>
+          </a:p>
+        </p:txBody>
+      </p:sp>
+      <p:sp>
+        <p:nvSpPr>
+          <p:cNvPr id="731" name="TB 731"/>
+          <p:cNvSpPr txBox="1"/>
+          <p:nvPr/>
+        </p:nvSpPr>
+        <p:spPr>
+          <a:xfrm>
+            <a:off x="546100" y="3403600"/>
+            <a:ext cx="2717800" cy="457200"/>
+          </a:xfrm>
+          <a:prstGeom prst="rect">
+            <a:avLst/>
+          </a:prstGeom>
+          <a:noFill/>
+        </p:spPr>
+        <p:txBody>
+          <a:bodyPr wrap="square" lIns="0" tIns="0" rIns="0" bIns="0" anchor="t"/>
+          <a:lstStyle/>
+          <a:p>
+            <a:pPr algn="ctr">
+              <a:lnSpc>
+                <a:spcPct val="130000"/>
+              </a:lnSpc>
+            </a:pPr>
+            <a:r>
+              <a:rPr lang="ja-JP" sz="1400" dirty="0">
+                <a:solidFill>
+                  <a:srgbClr val="2C5F8A"/>
+                </a:solidFill>
+                <a:latin typeface="Calibri"/>
+              </a:rPr>
+              <a:t>発電機群A(慣性 M = 2H·S/ω)</a:t>
+            </a:r>
+          </a:p>
+        </p:txBody>
+      </p:sp>
+      <p:sp>
+        <p:nvSpPr>
+          <p:cNvPr id="732" name="TB 732"/>
+          <p:cNvSpPr txBox="1"/>
+          <p:nvPr/>
+        </p:nvSpPr>
+        <p:spPr>
+          <a:xfrm>
+            <a:off x="4318000" y="3403600"/>
+            <a:ext cx="1676400" cy="254000"/>
+          </a:xfrm>
+          <a:prstGeom prst="rect">
+            <a:avLst/>
+          </a:prstGeom>
+          <a:noFill/>
+        </p:spPr>
+        <p:txBody>
+          <a:bodyPr wrap="square" lIns="0" tIns="0" rIns="0" bIns="0" anchor="t"/>
+          <a:lstStyle/>
+          <a:p>
+            <a:pPr algn="ctr">
+              <a:lnSpc>
+                <a:spcPct val="130000"/>
+              </a:lnSpc>
+            </a:pPr>
+            <a:r>
+              <a:rPr lang="ja-JP" sz="1400" dirty="0">
+                <a:solidFill>
+                  <a:srgbClr val="B4472C"/>
+                </a:solidFill>
+                <a:latin typeface="Calibri"/>
+              </a:rPr>
+              <a:t>発電機群B</a:t>
+            </a:r>
+          </a:p>
+        </p:txBody>
+      </p:sp>
+      <p:sp>
+        <p:nvSpPr>
+          <p:cNvPr id="750" name="TB 750"/>
+          <p:cNvSpPr txBox="1"/>
+          <p:nvPr/>
+        </p:nvSpPr>
+        <p:spPr>
+          <a:xfrm>
+            <a:off x="6680200" y="1397000"/>
+            <a:ext cx="4965700" cy="279400"/>
+          </a:xfrm>
+          <a:prstGeom prst="rect">
+            <a:avLst/>
+          </a:prstGeom>
+          <a:noFill/>
+        </p:spPr>
+        <p:txBody>
+          <a:bodyPr wrap="square" lIns="0" tIns="0" rIns="0" bIns="0" anchor="t"/>
+          <a:lstStyle/>
+          <a:p>
+            <a:pPr algn="l">
+              <a:lnSpc>
+                <a:spcPct val="130000"/>
+              </a:lnSpc>
+            </a:pPr>
+            <a:r>
+              <a:rPr lang="ja-JP" sz="1500" b="1" dirty="0">
+                <a:solidFill>
+                  <a:srgbClr val="8A2E3B"/>
+                </a:solidFill>
+                <a:latin typeface="Calibri"/>
+              </a:rPr>
+              <a:t>小さな揺れに線形化 → 固有値問題</a:t>
+            </a:r>
+          </a:p>
+        </p:txBody>
+      </p:sp>
+      <mc:AlternateContent xmlns:mc="http://schemas.openxmlformats.org/markup-compatibility/2006">
+        <mc:Choice xmlns:a14="http://schemas.microsoft.com/office/drawing/2010/main" Requires="a14">
+          <p:sp>
+            <p:nvSpPr>
+              <p:cNvPr id="900" name="EQ 900"/>
+              <p:cNvSpPr txBox="1"/>
+              <p:nvPr/>
+            </p:nvSpPr>
+            <p:spPr>
+              <a:xfrm>
+                <a:off x="800100" y="4114800"/>
+                <a:ext cx="5461000" cy="787400"/>
+              </a:xfrm>
+              <a:prstGeom prst="rect">
+                <a:avLst/>
+              </a:prstGeom>
+              <a:noFill/>
+            </p:spPr>
+            <p:txBody>
+              <a:bodyPr wrap="square" lIns="0" tIns="0" rIns="0" bIns="0"/>
+              <a:lstStyle/>
+              <a:p>
+                <a:pPr algn="l"/>
+                <a14:m>
+                  <m:oMathPara xmlns:m="http://schemas.openxmlformats.org/officeDocument/2006/math">
+                    <m:oMathParaPr>
+                      <m:jc m:val="left"/>
+                    </m:oMathParaPr>
+                    <m:oMath>
+                      <m:f>
+                        <m:fPr>
+                          <m:ctrlPr>
+                            <a:rPr lang="en-US" sz="1700" dirty="0">
+                              <a:solidFill>
+                                <a:srgbClr val="1A2744"/>
+                              </a:solidFill>
+                              <a:latin typeface="Cambria Math" panose="02040503050406030204" pitchFamily="18" charset="0"/>
+                            </a:rPr>
+                          </m:ctrlPr>
+                        </m:fPr>
+                        <m:num>
+                          <m:r>
+                            <a:rPr lang="en-US" sz="1700" dirty="0">
+                              <a:solidFill>
+                                <a:srgbClr val="1A2744"/>
+                              </a:solidFill>
+                              <a:latin typeface="Cambria Math" panose="02040503050406030204" pitchFamily="18" charset="0"/>
+                            </a:rPr>
+                            <m:t>2</m:t>
+                          </m:r>
+                          <m:sSub>
+                            <m:sSubPr>
+                              <m:ctrlPr>
+                                <a:rPr lang="en-US" sz="1700" dirty="0">
+                                  <a:solidFill>
+                                    <a:srgbClr val="1A2744"/>
+                                  </a:solidFill>
+                                  <a:latin typeface="Cambria Math" panose="02040503050406030204" pitchFamily="18" charset="0"/>
+                                </a:rPr>
+                              </m:ctrlPr>
+                            </m:sSubPr>
+                            <m:e>
+                              <m:r>
+                                <a:rPr lang="en-US" sz="1700" dirty="0">
+                                  <a:solidFill>
+                                    <a:srgbClr val="1A2744"/>
+                                  </a:solidFill>
+                                  <a:latin typeface="Cambria Math" panose="02040503050406030204" pitchFamily="18" charset="0"/>
+                                </a:rPr>
+                                <m:t>𝐻</m:t>
+                              </m:r>
+                            </m:e>
+                            <m:sub>
+                              <m:r>
+                                <a:rPr lang="en-US" sz="1700" dirty="0">
+                                  <a:solidFill>
+                                    <a:srgbClr val="1A2744"/>
+                                  </a:solidFill>
+                                  <a:latin typeface="Cambria Math" panose="02040503050406030204" pitchFamily="18" charset="0"/>
+                                </a:rPr>
+                                <m:t>𝑖</m:t>
+                              </m:r>
+                            </m:sub>
+                          </m:sSub>
+                        </m:num>
+                        <m:den>
+                          <m:sSub>
+                            <m:sSubPr>
+                              <m:ctrlPr>
+                                <a:rPr lang="en-US" sz="1700" dirty="0">
+                                  <a:solidFill>
+                                    <a:srgbClr val="1A2744"/>
+                                  </a:solidFill>
+                                  <a:latin typeface="Cambria Math" panose="02040503050406030204" pitchFamily="18" charset="0"/>
+                                </a:rPr>
+                              </m:ctrlPr>
+                            </m:sSubPr>
+                            <m:e>
+                              <m:r>
+                                <a:rPr lang="en-US" sz="1700" dirty="0">
+                                  <a:solidFill>
+                                    <a:srgbClr val="1A2744"/>
+                                  </a:solidFill>
+                                  <a:latin typeface="Cambria Math" panose="02040503050406030204" pitchFamily="18" charset="0"/>
+                                </a:rPr>
+                                <m:t>𝜔</m:t>
+                              </m:r>
+                            </m:e>
+                            <m:sub>
+                              <m:r>
+                                <a:rPr lang="en-US" sz="1700" dirty="0">
+                                  <a:solidFill>
+                                    <a:srgbClr val="1A2744"/>
+                                  </a:solidFill>
+                                  <a:latin typeface="Cambria Math" panose="02040503050406030204" pitchFamily="18" charset="0"/>
+                                </a:rPr>
+                                <m:t>𝑠</m:t>
+                              </m:r>
+                            </m:sub>
+                          </m:sSub>
+                        </m:den>
+                      </m:f>
+                      <m:f>
+                        <m:fPr>
+                          <m:ctrlPr>
+                            <a:rPr lang="en-US" sz="1700" i="1" dirty="0">
+                              <a:solidFill>
+                                <a:srgbClr val="1A2744"/>
+                              </a:solidFill>
+                              <a:latin typeface="Cambria Math" panose="02040503050406030204" pitchFamily="18" charset="0"/>
+                            </a:rPr>
+                          </m:ctrlPr>
+                        </m:fPr>
+                        <m:num>
+                          <m:sSup>
+                            <m:sSupPr>
+                              <m:ctrlPr>
+                                <a:rPr lang="en-US" sz="1700" dirty="0">
+                                  <a:solidFill>
+                                    <a:srgbClr val="1A2744"/>
+                                  </a:solidFill>
+                                  <a:latin typeface="Cambria Math" panose="02040503050406030204" pitchFamily="18" charset="0"/>
+                                </a:rPr>
+                              </m:ctrlPr>
+                            </m:sSupPr>
+                            <m:e>
+                              <m:r>
+                                <m:rPr>
+                                  <m:sty m:val="p"/>
+                                </m:rPr>
+                                <a:rPr lang="en-US" sz="1700" dirty="0">
+                                  <a:solidFill>
+                                    <a:srgbClr val="1A2744"/>
+                                  </a:solidFill>
+                                  <a:latin typeface="Cambria Math" panose="02040503050406030204" pitchFamily="18" charset="0"/>
+                                </a:rPr>
+                                <m:t>d</m:t>
+                              </m:r>
+                            </m:e>
+                            <m:sup>
+                              <m:r>
+                                <a:rPr lang="en-US" sz="1700" dirty="0">
+                                  <a:solidFill>
+                                    <a:srgbClr val="1A2744"/>
+                                  </a:solidFill>
+                                  <a:latin typeface="Cambria Math" panose="02040503050406030204" pitchFamily="18" charset="0"/>
+                                </a:rPr>
+                                <m:t>2</m:t>
+                              </m:r>
+                            </m:sup>
+                          </m:sSup>
+                          <m:sSub>
+                            <m:sSubPr>
+                              <m:ctrlPr>
+                                <a:rPr lang="en-US" sz="1700" dirty="0">
+                                  <a:solidFill>
+                                    <a:srgbClr val="8A2E3B"/>
+                                  </a:solidFill>
+                                  <a:latin typeface="Cambria Math" panose="02040503050406030204" pitchFamily="18" charset="0"/>
+                                </a:rPr>
+                              </m:ctrlPr>
+                            </m:sSubPr>
+                            <m:e>
+                              <m:r>
+                                <a:rPr lang="en-US" sz="1700" dirty="0">
+                                  <a:solidFill>
+                                    <a:srgbClr val="8A2E3B"/>
+                                  </a:solidFill>
+                                  <a:latin typeface="Cambria Math" panose="02040503050406030204" pitchFamily="18" charset="0"/>
+                                </a:rPr>
+                                <m:t>𝛿</m:t>
+                              </m:r>
+                            </m:e>
+                            <m:sub>
+                              <m:r>
+                                <a:rPr lang="en-US" sz="1700" dirty="0">
+                                  <a:solidFill>
+                                    <a:srgbClr val="8A2E3B"/>
+                                  </a:solidFill>
+                                  <a:latin typeface="Cambria Math" panose="02040503050406030204" pitchFamily="18" charset="0"/>
+                                </a:rPr>
+                                <m:t>𝑖</m:t>
+                              </m:r>
+                            </m:sub>
+                          </m:sSub>
+                        </m:num>
+                        <m:den>
+                          <m:sSup>
+                            <m:sSupPr>
+                              <m:ctrlPr>
+                                <a:rPr lang="en-US" sz="1700" dirty="0">
+                                  <a:solidFill>
+                                    <a:srgbClr val="1A2744"/>
+                                  </a:solidFill>
+                                  <a:latin typeface="Cambria Math" panose="02040503050406030204" pitchFamily="18" charset="0"/>
+                                </a:rPr>
+                              </m:ctrlPr>
+                            </m:sSupPr>
+                            <m:e>
+                              <m:r>
+                                <m:rPr>
+                                  <m:sty m:val="p"/>
+                                </m:rPr>
+                                <a:rPr lang="en-US" sz="1700" dirty="0">
+                                  <a:solidFill>
+                                    <a:srgbClr val="1A2744"/>
+                                  </a:solidFill>
+                                  <a:latin typeface="Cambria Math" panose="02040503050406030204" pitchFamily="18" charset="0"/>
+                                </a:rPr>
+                                <m:t>dt</m:t>
+                              </m:r>
+                            </m:e>
+                            <m:sup>
+                              <m:r>
+                                <a:rPr lang="en-US" sz="1700" dirty="0">
+                                  <a:solidFill>
+                                    <a:srgbClr val="1A2744"/>
+                                  </a:solidFill>
+                                  <a:latin typeface="Cambria Math" panose="02040503050406030204" pitchFamily="18" charset="0"/>
+                                </a:rPr>
+                                <m:t>2</m:t>
+                              </m:r>
+                            </m:sup>
+                          </m:sSup>
+                        </m:den>
+                      </m:f>
+                      <m:r>
+                        <a:rPr lang="en-US" sz="1700" dirty="0">
+                          <a:solidFill>
+                            <a:srgbClr val="1A2744"/>
+                          </a:solidFill>
+                          <a:latin typeface="Cambria Math" panose="02040503050406030204" pitchFamily="18" charset="0"/>
+                        </a:rPr>
+                        <m:t> = </m:t>
+                      </m:r>
+                      <m:sSub>
+                        <m:sSubPr>
+                          <m:ctrlPr>
+                            <a:rPr lang="en-US" sz="1700" dirty="0">
+                              <a:solidFill>
+                                <a:srgbClr val="1A2744"/>
+                              </a:solidFill>
+                              <a:latin typeface="Cambria Math" panose="02040503050406030204" pitchFamily="18" charset="0"/>
+                            </a:rPr>
+                          </m:ctrlPr>
+                        </m:sSubPr>
+                        <m:e>
+                          <m:r>
+                            <a:rPr lang="en-US" sz="1700" dirty="0">
+                              <a:solidFill>
+                                <a:srgbClr val="1A2744"/>
+                              </a:solidFill>
+                              <a:latin typeface="Cambria Math" panose="02040503050406030204" pitchFamily="18" charset="0"/>
+                            </a:rPr>
+                            <m:t>𝑃</m:t>
+                          </m:r>
+                        </m:e>
+                        <m:sub>
+                          <m:r>
+                            <a:rPr lang="en-US" sz="1700" dirty="0">
+                              <a:solidFill>
+                                <a:srgbClr val="1A2744"/>
+                              </a:solidFill>
+                              <a:latin typeface="Cambria Math" panose="02040503050406030204" pitchFamily="18" charset="0"/>
+                            </a:rPr>
+                            <m:t>𝑚</m:t>
+                          </m:r>
+                          <m:r>
+                            <a:rPr lang="en-US" sz="1700" dirty="0">
+                              <a:solidFill>
+                                <a:srgbClr val="1A2744"/>
+                              </a:solidFill>
+                              <a:latin typeface="Cambria Math" panose="02040503050406030204" pitchFamily="18" charset="0"/>
+                            </a:rPr>
+                            <m:t>,</m:t>
+                          </m:r>
+                          <m:r>
+                            <a:rPr lang="en-US" sz="1700" dirty="0">
+                              <a:solidFill>
+                                <a:srgbClr val="1A2744"/>
+                              </a:solidFill>
+                              <a:latin typeface="Cambria Math" panose="02040503050406030204" pitchFamily="18" charset="0"/>
+                            </a:rPr>
+                            <m:t>𝑖</m:t>
+                          </m:r>
+                        </m:sub>
+                      </m:sSub>
+                      <m:r>
+                        <a:rPr lang="en-US" sz="1700" dirty="0">
+                          <a:solidFill>
+                            <a:srgbClr val="1A2744"/>
+                          </a:solidFill>
+                          <a:latin typeface="Cambria Math" panose="02040503050406030204" pitchFamily="18" charset="0"/>
+                        </a:rPr>
+                        <m:t> − </m:t>
+                      </m:r>
+                      <m:sSub>
+                        <m:sSubPr>
+                          <m:ctrlPr>
+                            <a:rPr lang="en-US" sz="1700" dirty="0">
+                              <a:solidFill>
+                                <a:srgbClr val="1A2744"/>
+                              </a:solidFill>
+                              <a:latin typeface="Cambria Math" panose="02040503050406030204" pitchFamily="18" charset="0"/>
+                            </a:rPr>
+                          </m:ctrlPr>
+                        </m:sSubPr>
+                        <m:e>
+                          <m:r>
+                            <a:rPr lang="en-US" sz="1700" dirty="0">
+                              <a:solidFill>
+                                <a:srgbClr val="1A2744"/>
+                              </a:solidFill>
+                              <a:latin typeface="Cambria Math" panose="02040503050406030204" pitchFamily="18" charset="0"/>
+                            </a:rPr>
+                            <m:t>𝑃</m:t>
+                          </m:r>
+                        </m:e>
+                        <m:sub>
+                          <m:r>
+                            <a:rPr lang="en-US" sz="1700" dirty="0">
+                              <a:solidFill>
+                                <a:srgbClr val="1A2744"/>
+                              </a:solidFill>
+                              <a:latin typeface="Cambria Math" panose="02040503050406030204" pitchFamily="18" charset="0"/>
+                            </a:rPr>
+                            <m:t>𝑒</m:t>
+                          </m:r>
+                          <m:r>
+                            <a:rPr lang="en-US" sz="1700" dirty="0">
+                              <a:solidFill>
+                                <a:srgbClr val="1A2744"/>
+                              </a:solidFill>
+                              <a:latin typeface="Cambria Math" panose="02040503050406030204" pitchFamily="18" charset="0"/>
+                            </a:rPr>
+                            <m:t>,</m:t>
+                          </m:r>
+                          <m:r>
+                            <a:rPr lang="en-US" sz="1700" dirty="0">
+                              <a:solidFill>
+                                <a:srgbClr val="1A2744"/>
+                              </a:solidFill>
+                              <a:latin typeface="Cambria Math" panose="02040503050406030204" pitchFamily="18" charset="0"/>
+                            </a:rPr>
+                            <m:t>𝑖</m:t>
+                          </m:r>
+                        </m:sub>
+                      </m:sSub>
+                      <m:r>
+                        <a:rPr lang="en-US" sz="1700" dirty="0">
+                          <a:solidFill>
+                            <a:srgbClr val="1A2744"/>
+                          </a:solidFill>
+                          <a:latin typeface="Cambria Math" panose="02040503050406030204" pitchFamily="18" charset="0"/>
+                        </a:rPr>
+                        <m:t>(</m:t>
+                      </m:r>
+                      <m:r>
+                        <a:rPr lang="en-US" sz="1700" dirty="0">
+                          <a:solidFill>
+                            <a:srgbClr val="8A2E3B"/>
+                          </a:solidFill>
+                          <a:latin typeface="Cambria Math" panose="02040503050406030204" pitchFamily="18" charset="0"/>
+                        </a:rPr>
+                        <m:t>𝛿</m:t>
+                      </m:r>
+                      <m:r>
+                        <a:rPr lang="en-US" sz="1700" dirty="0">
+                          <a:solidFill>
+                            <a:srgbClr val="1A2744"/>
+                          </a:solidFill>
+                          <a:latin typeface="Cambria Math" panose="02040503050406030204" pitchFamily="18" charset="0"/>
+                        </a:rPr>
+                        <m:t>)</m:t>
+                      </m:r>
+                    </m:oMath>
+                  </m:oMathPara>
+                </a14:m>
+                <a:endParaRPr/>
+              </a:p>
+            </p:txBody>
+          </p:sp>
+        </mc:Choice>
+        <mc:Fallback>
+          <p:sp>
+            <p:nvSpPr>
+              <p:cNvPr id="900" name="EQ 900"/>
+              <p:cNvSpPr txBox="1">
+                <a:spLocks noRot="1" noChangeAspect="1" noMove="1" noResize="1" noEditPoints="1" noAdjustHandles="1" noChangeArrowheads="1" noChangeShapeType="1" noTextEdit="1"/>
+              </p:cNvSpPr>
+              <p:nvPr/>
+            </p:nvSpPr>
+            <p:spPr>
+              <a:xfrm>
+                <a:off x="800100" y="4114800"/>
+                <a:ext cx="5461000" cy="787400"/>
+              </a:xfrm>
+              <a:prstGeom prst="rect">
+                <a:avLst/>
+              </a:prstGeom>
+              <a:blipFill>
+                <a:blip r:embed="rId2"/>
+                <a:stretch>
+                  <a:fillRect l="-1392" t="-1613"/>
+                </a:stretch>
+              </a:blipFill>
+            </p:spPr>
+            <p:txBody>
+              <a:bodyPr/>
+              <a:lstStyle/>
+              <a:p>
+                <a:r>
+                  <a:rPr lang="ja-JP" altLang="en-US">
+                    <a:noFill/>
+                  </a:rPr>
+                  <a:t> </a:t>
+                </a:r>
+              </a:p>
+            </p:txBody>
+          </p:sp>
+        </mc:Fallback>
+      </mc:AlternateContent>
+      <mc:AlternateContent xmlns:mc="http://schemas.openxmlformats.org/markup-compatibility/2006">
+        <mc:Choice xmlns:a14="http://schemas.microsoft.com/office/drawing/2010/main" Requires="a14">
+          <p:sp>
+            <p:nvSpPr>
+              <p:cNvPr id="901" name="EQ 901"/>
+              <p:cNvSpPr txBox="1"/>
+              <p:nvPr/>
+            </p:nvSpPr>
+            <p:spPr>
+              <a:xfrm>
+                <a:off x="800100" y="5003800"/>
+                <a:ext cx="5461000" cy="381000"/>
+              </a:xfrm>
+              <a:prstGeom prst="rect">
+                <a:avLst/>
+              </a:prstGeom>
+              <a:noFill/>
+            </p:spPr>
+            <p:txBody>
+              <a:bodyPr wrap="square" lIns="0" tIns="0" rIns="0" bIns="0"/>
+              <a:lstStyle/>
+              <a:p>
+                <a:pPr algn="l"/>
+                <a14:m>
+                  <m:oMathPara xmlns:m="http://schemas.openxmlformats.org/officeDocument/2006/math">
+                    <m:oMathParaPr>
+                      <m:jc m:val="left"/>
+                    </m:oMathParaPr>
+                    <m:oMath>
+                      <m:sSub>
+                        <m:sSubPr>
+                          <m:ctrlPr>
+                            <a:rPr lang="en-US" sz="1700" dirty="0">
+                              <a:solidFill>
+                                <a:srgbClr val="1A2744"/>
+                              </a:solidFill>
+                              <a:latin typeface="Cambria Math" panose="02040503050406030204" pitchFamily="18" charset="0"/>
+                            </a:rPr>
+                          </m:ctrlPr>
+                        </m:sSubPr>
+                        <m:e>
+                          <m:r>
+                            <a:rPr lang="en-US" sz="1700" dirty="0">
+                              <a:solidFill>
+                                <a:srgbClr val="1A2744"/>
+                              </a:solidFill>
+                              <a:latin typeface="Cambria Math" panose="02040503050406030204" pitchFamily="18" charset="0"/>
+                            </a:rPr>
+                            <m:t>𝑃</m:t>
+                          </m:r>
+                        </m:e>
+                        <m:sub>
+                          <m:r>
+                            <a:rPr lang="en-US" sz="1700" dirty="0">
+                              <a:solidFill>
+                                <a:srgbClr val="1A2744"/>
+                              </a:solidFill>
+                              <a:latin typeface="Cambria Math" panose="02040503050406030204" pitchFamily="18" charset="0"/>
+                            </a:rPr>
+                            <m:t>𝑒</m:t>
+                          </m:r>
+                          <m:r>
+                            <a:rPr lang="en-US" sz="1700" dirty="0">
+                              <a:solidFill>
+                                <a:srgbClr val="1A2744"/>
+                              </a:solidFill>
+                              <a:latin typeface="Cambria Math" panose="02040503050406030204" pitchFamily="18" charset="0"/>
+                            </a:rPr>
+                            <m:t>,</m:t>
+                          </m:r>
+                          <m:r>
+                            <a:rPr lang="en-US" sz="1700" dirty="0">
+                              <a:solidFill>
+                                <a:srgbClr val="1A2744"/>
+                              </a:solidFill>
+                              <a:latin typeface="Cambria Math" panose="02040503050406030204" pitchFamily="18" charset="0"/>
+                            </a:rPr>
+                            <m:t>𝑖</m:t>
+                          </m:r>
+                        </m:sub>
+                      </m:sSub>
+                      <m:r>
+                        <a:rPr lang="en-US" sz="1700" dirty="0">
+                          <a:solidFill>
+                            <a:srgbClr val="1A2744"/>
+                          </a:solidFill>
+                          <a:latin typeface="Cambria Math" panose="02040503050406030204" pitchFamily="18" charset="0"/>
+                        </a:rPr>
+                        <m:t> = </m:t>
+                      </m:r>
+                      <m:sSub>
+                        <m:sSubPr>
+                          <m:ctrlPr>
+                            <a:rPr lang="en-US" sz="1700" dirty="0">
+                              <a:solidFill>
+                                <a:srgbClr val="1A2744"/>
+                              </a:solidFill>
+                              <a:latin typeface="Cambria Math" panose="02040503050406030204" pitchFamily="18" charset="0"/>
+                            </a:rPr>
+                          </m:ctrlPr>
+                        </m:sSubPr>
+                        <m:e>
+                          <m:r>
+                            <a:rPr lang="en-US" sz="1700" dirty="0">
+                              <a:solidFill>
+                                <a:srgbClr val="1A2744"/>
+                              </a:solidFill>
+                              <a:latin typeface="Cambria Math" panose="02040503050406030204" pitchFamily="18" charset="0"/>
+                            </a:rPr>
+                            <m:t>𝐸</m:t>
+                          </m:r>
+                        </m:e>
+                        <m:sub>
+                          <m:r>
+                            <a:rPr lang="en-US" sz="1700" dirty="0">
+                              <a:solidFill>
+                                <a:srgbClr val="1A2744"/>
+                              </a:solidFill>
+                              <a:latin typeface="Cambria Math" panose="02040503050406030204" pitchFamily="18" charset="0"/>
+                            </a:rPr>
+                            <m:t>𝑖</m:t>
+                          </m:r>
+                        </m:sub>
+                      </m:sSub>
+                      <m:nary>
+                        <m:naryPr>
+                          <m:chr m:val="∑"/>
+                          <m:limLoc m:val="subSup"/>
+                          <m:supHide m:val="on"/>
+                          <m:ctrlPr>
+                            <a:rPr lang="en-US" sz="1700" dirty="0">
+                              <a:solidFill>
+                                <a:srgbClr val="1A2744"/>
+                              </a:solidFill>
+                              <a:latin typeface="Cambria Math" panose="02040503050406030204" pitchFamily="18" charset="0"/>
+                            </a:rPr>
+                          </m:ctrlPr>
+                        </m:naryPr>
+                        <m:sub>
+                          <m:r>
+                            <a:rPr lang="en-US" sz="1700" dirty="0">
+                              <a:solidFill>
+                                <a:srgbClr val="1A2744"/>
+                              </a:solidFill>
+                              <a:latin typeface="Cambria Math" panose="02040503050406030204" pitchFamily="18" charset="0"/>
+                            </a:rPr>
+                            <m:t>𝑗</m:t>
+                          </m:r>
+                        </m:sub>
+                        <m:sup/>
+                        <m:e>
+                          <m:sSub>
+                            <m:sSubPr>
+                              <m:ctrlPr>
+                                <a:rPr lang="en-US" sz="1700" dirty="0">
+                                  <a:solidFill>
+                                    <a:srgbClr val="1A2744"/>
+                                  </a:solidFill>
+                                  <a:latin typeface="Cambria Math" panose="02040503050406030204" pitchFamily="18" charset="0"/>
+                                </a:rPr>
+                              </m:ctrlPr>
+                            </m:sSubPr>
+                            <m:e>
+                              <m:r>
+                                <a:rPr lang="en-US" sz="1700" dirty="0">
+                                  <a:solidFill>
+                                    <a:srgbClr val="1A2744"/>
+                                  </a:solidFill>
+                                  <a:latin typeface="Cambria Math" panose="02040503050406030204" pitchFamily="18" charset="0"/>
+                                </a:rPr>
+                                <m:t>𝐸</m:t>
+                              </m:r>
+                            </m:e>
+                            <m:sub>
+                              <m:r>
+                                <a:rPr lang="en-US" sz="1700" dirty="0">
+                                  <a:solidFill>
+                                    <a:srgbClr val="1A2744"/>
+                                  </a:solidFill>
+                                  <a:latin typeface="Cambria Math" panose="02040503050406030204" pitchFamily="18" charset="0"/>
+                                </a:rPr>
+                                <m:t>𝑗</m:t>
+                              </m:r>
+                            </m:sub>
+                          </m:sSub>
+                          <m:r>
+                            <a:rPr lang="en-US" sz="1700" dirty="0">
+                              <a:solidFill>
+                                <a:srgbClr val="1A2744"/>
+                              </a:solidFill>
+                              <a:latin typeface="Cambria Math" panose="02040503050406030204" pitchFamily="18" charset="0"/>
+                            </a:rPr>
+                            <m:t>(</m:t>
+                          </m:r>
+                          <m:sSub>
+                            <m:sSubPr>
+                              <m:ctrlPr>
+                                <a:rPr lang="en-US" sz="1700" dirty="0">
+                                  <a:solidFill>
+                                    <a:srgbClr val="2C5F8A"/>
+                                  </a:solidFill>
+                                  <a:latin typeface="Cambria Math" panose="02040503050406030204" pitchFamily="18" charset="0"/>
+                                </a:rPr>
+                              </m:ctrlPr>
+                            </m:sSubPr>
+                            <m:e>
+                              <m:r>
+                                <a:rPr lang="en-US" sz="1700" dirty="0">
+                                  <a:solidFill>
+                                    <a:srgbClr val="2C5F8A"/>
+                                  </a:solidFill>
+                                  <a:latin typeface="Cambria Math" panose="02040503050406030204" pitchFamily="18" charset="0"/>
+                                </a:rPr>
+                                <m:t>𝐺</m:t>
+                              </m:r>
+                            </m:e>
+                            <m:sub>
+                              <m:r>
+                                <a:rPr lang="en-US" sz="1700" dirty="0">
+                                  <a:solidFill>
+                                    <a:srgbClr val="2C5F8A"/>
+                                  </a:solidFill>
+                                  <a:latin typeface="Cambria Math" panose="02040503050406030204" pitchFamily="18" charset="0"/>
+                                </a:rPr>
+                                <m:t>𝑖𝑗</m:t>
+                              </m:r>
+                            </m:sub>
+                          </m:sSub>
+                          <m:r>
+                            <a:rPr lang="en-US" sz="1700" dirty="0">
+                              <a:solidFill>
+                                <a:srgbClr val="1A2744"/>
+                              </a:solidFill>
+                              <a:latin typeface="Cambria Math" panose="02040503050406030204" pitchFamily="18" charset="0"/>
+                            </a:rPr>
+                            <m:t> </m:t>
+                          </m:r>
+                          <m:r>
+                            <m:rPr>
+                              <m:sty m:val="p"/>
+                            </m:rPr>
+                            <a:rPr lang="en-US" sz="1700" dirty="0">
+                              <a:solidFill>
+                                <a:srgbClr val="1A2744"/>
+                              </a:solidFill>
+                              <a:latin typeface="Cambria Math" panose="02040503050406030204" pitchFamily="18" charset="0"/>
+                            </a:rPr>
+                            <m:t>cos</m:t>
+                          </m:r>
+                          <m:r>
+                            <a:rPr lang="en-US" sz="1700" dirty="0">
+                              <a:solidFill>
+                                <a:srgbClr val="1A2744"/>
+                              </a:solidFill>
+                              <a:latin typeface="Cambria Math" panose="02040503050406030204" pitchFamily="18" charset="0"/>
+                            </a:rPr>
+                            <m:t> </m:t>
+                          </m:r>
+                          <m:sSub>
+                            <m:sSubPr>
+                              <m:ctrlPr>
+                                <a:rPr lang="en-US" sz="1700" dirty="0">
+                                  <a:solidFill>
+                                    <a:srgbClr val="1A2744"/>
+                                  </a:solidFill>
+                                  <a:latin typeface="Cambria Math" panose="02040503050406030204" pitchFamily="18" charset="0"/>
+                                </a:rPr>
+                              </m:ctrlPr>
+                            </m:sSubPr>
+                            <m:e>
+                              <m:r>
+                                <a:rPr lang="en-US" sz="1700" dirty="0">
+                                  <a:solidFill>
+                                    <a:srgbClr val="1A2744"/>
+                                  </a:solidFill>
+                                  <a:latin typeface="Cambria Math" panose="02040503050406030204" pitchFamily="18" charset="0"/>
+                                </a:rPr>
+                                <m:t>𝛿</m:t>
+                              </m:r>
+                            </m:e>
+                            <m:sub>
+                              <m:r>
+                                <a:rPr lang="en-US" sz="1700" dirty="0">
+                                  <a:solidFill>
+                                    <a:srgbClr val="1A2744"/>
+                                  </a:solidFill>
+                                  <a:latin typeface="Cambria Math" panose="02040503050406030204" pitchFamily="18" charset="0"/>
+                                </a:rPr>
+                                <m:t>𝑖𝑗</m:t>
+                              </m:r>
+                            </m:sub>
+                          </m:sSub>
+                          <m:r>
+                            <a:rPr lang="en-US" sz="1700" dirty="0">
+                              <a:solidFill>
+                                <a:srgbClr val="1A2744"/>
+                              </a:solidFill>
+                              <a:latin typeface="Cambria Math" panose="02040503050406030204" pitchFamily="18" charset="0"/>
+                            </a:rPr>
+                            <m:t> + </m:t>
+                          </m:r>
+                          <m:sSub>
+                            <m:sSubPr>
+                              <m:ctrlPr>
+                                <a:rPr lang="en-US" sz="1700" dirty="0">
+                                  <a:solidFill>
+                                    <a:srgbClr val="8A2E3B"/>
+                                  </a:solidFill>
+                                  <a:latin typeface="Cambria Math" panose="02040503050406030204" pitchFamily="18" charset="0"/>
+                                </a:rPr>
+                              </m:ctrlPr>
+                            </m:sSubPr>
+                            <m:e>
+                              <m:r>
+                                <a:rPr lang="en-US" sz="1700" dirty="0">
+                                  <a:solidFill>
+                                    <a:srgbClr val="8A2E3B"/>
+                                  </a:solidFill>
+                                  <a:latin typeface="Cambria Math" panose="02040503050406030204" pitchFamily="18" charset="0"/>
+                                </a:rPr>
+                                <m:t>𝐵</m:t>
+                              </m:r>
+                            </m:e>
+                            <m:sub>
+                              <m:r>
+                                <a:rPr lang="en-US" sz="1700" dirty="0">
+                                  <a:solidFill>
+                                    <a:srgbClr val="8A2E3B"/>
+                                  </a:solidFill>
+                                  <a:latin typeface="Cambria Math" panose="02040503050406030204" pitchFamily="18" charset="0"/>
+                                </a:rPr>
+                                <m:t>𝑖𝑗</m:t>
+                              </m:r>
+                            </m:sub>
+                          </m:sSub>
+                          <m:r>
+                            <a:rPr lang="en-US" sz="1700" dirty="0">
+                              <a:solidFill>
+                                <a:srgbClr val="1A2744"/>
+                              </a:solidFill>
+                              <a:latin typeface="Cambria Math" panose="02040503050406030204" pitchFamily="18" charset="0"/>
+                            </a:rPr>
+                            <m:t> </m:t>
+                          </m:r>
+                          <m:r>
+                            <m:rPr>
+                              <m:sty m:val="p"/>
+                            </m:rPr>
+                            <a:rPr lang="en-US" sz="1700" dirty="0">
+                              <a:solidFill>
+                                <a:srgbClr val="1A2744"/>
+                              </a:solidFill>
+                              <a:latin typeface="Cambria Math" panose="02040503050406030204" pitchFamily="18" charset="0"/>
+                            </a:rPr>
+                            <m:t>sin</m:t>
+                          </m:r>
+                          <m:r>
+                            <a:rPr lang="en-US" sz="1700" dirty="0">
+                              <a:solidFill>
+                                <a:srgbClr val="1A2744"/>
+                              </a:solidFill>
+                              <a:latin typeface="Cambria Math" panose="02040503050406030204" pitchFamily="18" charset="0"/>
+                            </a:rPr>
+                            <m:t> </m:t>
+                          </m:r>
+                          <m:sSub>
+                            <m:sSubPr>
+                              <m:ctrlPr>
+                                <a:rPr lang="en-US" sz="1700" dirty="0">
+                                  <a:solidFill>
+                                    <a:srgbClr val="1A2744"/>
+                                  </a:solidFill>
+                                  <a:latin typeface="Cambria Math" panose="02040503050406030204" pitchFamily="18" charset="0"/>
+                                </a:rPr>
+                              </m:ctrlPr>
+                            </m:sSubPr>
+                            <m:e>
+                              <m:r>
+                                <a:rPr lang="en-US" sz="1700" dirty="0">
+                                  <a:solidFill>
+                                    <a:srgbClr val="1A2744"/>
+                                  </a:solidFill>
+                                  <a:latin typeface="Cambria Math" panose="02040503050406030204" pitchFamily="18" charset="0"/>
+                                </a:rPr>
+                                <m:t>𝛿</m:t>
+                              </m:r>
+                            </m:e>
+                            <m:sub>
+                              <m:r>
+                                <a:rPr lang="en-US" sz="1700" dirty="0">
+                                  <a:solidFill>
+                                    <a:srgbClr val="1A2744"/>
+                                  </a:solidFill>
+                                  <a:latin typeface="Cambria Math" panose="02040503050406030204" pitchFamily="18" charset="0"/>
+                                </a:rPr>
+                                <m:t>𝑖𝑗</m:t>
+                              </m:r>
+                            </m:sub>
+                          </m:sSub>
+                          <m:r>
+                            <a:rPr lang="en-US" sz="1700" dirty="0">
+                              <a:solidFill>
+                                <a:srgbClr val="1A2744"/>
+                              </a:solidFill>
+                              <a:latin typeface="Cambria Math" panose="02040503050406030204" pitchFamily="18" charset="0"/>
+                            </a:rPr>
+                            <m:t>)</m:t>
+                          </m:r>
+                        </m:e>
+                      </m:nary>
+                    </m:oMath>
+                  </m:oMathPara>
+                </a14:m>
+                <a:endParaRPr/>
+              </a:p>
+            </p:txBody>
+          </p:sp>
+        </mc:Choice>
+        <mc:Fallback>
+          <p:sp>
+            <p:nvSpPr>
+              <p:cNvPr id="901" name="EQ 901"/>
+              <p:cNvSpPr txBox="1">
+                <a:spLocks noRot="1" noChangeAspect="1" noMove="1" noResize="1" noEditPoints="1" noAdjustHandles="1" noChangeArrowheads="1" noChangeShapeType="1" noTextEdit="1"/>
+              </p:cNvSpPr>
+              <p:nvPr/>
+            </p:nvSpPr>
+            <p:spPr>
+              <a:xfrm>
+                <a:off x="800100" y="5003800"/>
+                <a:ext cx="5461000" cy="381000"/>
+              </a:xfrm>
+              <a:prstGeom prst="rect">
+                <a:avLst/>
+              </a:prstGeom>
+              <a:blipFill>
+                <a:blip r:embed="rId3"/>
+                <a:stretch>
+                  <a:fillRect l="-1160" t="-260000" b="-393333"/>
+                </a:stretch>
+              </a:blipFill>
+            </p:spPr>
+            <p:txBody>
+              <a:bodyPr/>
+              <a:lstStyle/>
+              <a:p>
+                <a:r>
+                  <a:rPr lang="ja-JP" altLang="en-US">
+                    <a:noFill/>
+                  </a:rPr>
+                  <a:t> </a:t>
+                </a:r>
+              </a:p>
+            </p:txBody>
+          </p:sp>
+        </mc:Fallback>
+      </mc:AlternateContent>
+      <mc:AlternateContent xmlns:mc="http://schemas.openxmlformats.org/markup-compatibility/2006">
+        <mc:Choice xmlns:a14="http://schemas.microsoft.com/office/drawing/2010/main" Requires="a14">
+          <p:sp>
+            <p:nvSpPr>
+              <p:cNvPr id="910" name="EQ 910"/>
+              <p:cNvSpPr txBox="1"/>
+              <p:nvPr/>
+            </p:nvSpPr>
+            <p:spPr>
+              <a:xfrm>
+                <a:off x="6934200" y="1930400"/>
+                <a:ext cx="4457700" cy="381000"/>
+              </a:xfrm>
+              <a:prstGeom prst="rect">
+                <a:avLst/>
+              </a:prstGeom>
+              <a:noFill/>
+            </p:spPr>
+            <p:txBody>
+              <a:bodyPr wrap="square" lIns="0" tIns="0" rIns="0" bIns="0"/>
+              <a:lstStyle/>
+              <a:p>
+                <a:pPr algn="l"/>
+                <a14:m>
+                  <m:oMathPara xmlns:m="http://schemas.openxmlformats.org/officeDocument/2006/math">
+                    <m:oMathParaPr>
+                      <m:jc m:val="left"/>
+                    </m:oMathParaPr>
+                    <m:oMath>
+                      <m:r>
+                        <a:rPr lang="en-US" sz="1700" b="1" dirty="0">
+                          <a:solidFill>
+                            <a:srgbClr val="1A2744"/>
+                          </a:solidFill>
+                          <a:latin typeface="Cambria Math" panose="02040503050406030204" pitchFamily="18" charset="0"/>
+                        </a:rPr>
+                        <m:t>𝑴</m:t>
+                      </m:r>
+                      <m:r>
+                        <a:rPr lang="en-US" sz="1700" dirty="0">
+                          <a:solidFill>
+                            <a:srgbClr val="1A2744"/>
+                          </a:solidFill>
+                          <a:latin typeface="Cambria Math" panose="02040503050406030204" pitchFamily="18" charset="0"/>
+                        </a:rPr>
+                        <m:t> </m:t>
+                      </m:r>
+                      <m:r>
+                        <m:rPr>
+                          <m:sty m:val="p"/>
+                        </m:rPr>
+                        <a:rPr lang="en-US" sz="1700" dirty="0">
+                          <a:solidFill>
+                            <a:srgbClr val="1A2744"/>
+                          </a:solidFill>
+                          <a:latin typeface="Cambria Math" panose="02040503050406030204" pitchFamily="18" charset="0"/>
+                        </a:rPr>
+                        <m:t>Δ</m:t>
+                      </m:r>
+                      <m:r>
+                        <a:rPr lang="en-US" sz="1700" dirty="0">
+                          <a:solidFill>
+                            <a:srgbClr val="8A2E3B"/>
+                          </a:solidFill>
+                          <a:latin typeface="Cambria Math" panose="02040503050406030204" pitchFamily="18" charset="0"/>
+                        </a:rPr>
+                        <m:t>𝛿</m:t>
+                      </m:r>
+                      <m:r>
+                        <a:rPr lang="en-US" sz="1700" dirty="0">
+                          <a:solidFill>
+                            <a:srgbClr val="8A2E3B"/>
+                          </a:solidFill>
+                          <a:latin typeface="Cambria Math" panose="02040503050406030204" pitchFamily="18" charset="0"/>
+                        </a:rPr>
+                        <m:t>̈ = − </m:t>
+                      </m:r>
+                      <m:r>
+                        <a:rPr lang="en-US" sz="1700" b="1" dirty="0">
+                          <a:solidFill>
+                            <a:srgbClr val="1A2744"/>
+                          </a:solidFill>
+                          <a:latin typeface="Cambria Math" panose="02040503050406030204" pitchFamily="18" charset="0"/>
+                        </a:rPr>
+                        <m:t>𝑲</m:t>
+                      </m:r>
+                      <m:r>
+                        <a:rPr lang="en-US" sz="1700" dirty="0">
+                          <a:solidFill>
+                            <a:srgbClr val="1A2744"/>
+                          </a:solidFill>
+                          <a:latin typeface="Cambria Math" panose="02040503050406030204" pitchFamily="18" charset="0"/>
+                        </a:rPr>
+                        <m:t> </m:t>
+                      </m:r>
+                      <m:r>
+                        <m:rPr>
+                          <m:sty m:val="p"/>
+                        </m:rPr>
+                        <a:rPr lang="en-US" sz="1700" dirty="0">
+                          <a:solidFill>
+                            <a:srgbClr val="1A2744"/>
+                          </a:solidFill>
+                          <a:latin typeface="Cambria Math" panose="02040503050406030204" pitchFamily="18" charset="0"/>
+                        </a:rPr>
+                        <m:t>Δ</m:t>
+                      </m:r>
+                      <m:r>
+                        <a:rPr lang="en-US" sz="1700" dirty="0">
+                          <a:solidFill>
+                            <a:srgbClr val="8A2E3B"/>
+                          </a:solidFill>
+                          <a:latin typeface="Cambria Math" panose="02040503050406030204" pitchFamily="18" charset="0"/>
+                        </a:rPr>
+                        <m:t>𝛿</m:t>
+                      </m:r>
+                    </m:oMath>
+                  </m:oMathPara>
+                </a14:m>
+                <a:endParaRPr/>
+              </a:p>
+            </p:txBody>
+          </p:sp>
+        </mc:Choice>
+        <mc:Fallback>
+          <p:sp>
+            <p:nvSpPr>
+              <p:cNvPr id="910" name="EQ 910"/>
+              <p:cNvSpPr txBox="1">
+                <a:spLocks noRot="1" noChangeAspect="1" noMove="1" noResize="1" noEditPoints="1" noAdjustHandles="1" noChangeArrowheads="1" noChangeShapeType="1" noTextEdit="1"/>
+              </p:cNvSpPr>
+              <p:nvPr/>
+            </p:nvSpPr>
+            <p:spPr>
+              <a:xfrm>
+                <a:off x="6934200" y="1930400"/>
+                <a:ext cx="4457700" cy="381000"/>
+              </a:xfrm>
+              <a:prstGeom prst="rect">
+                <a:avLst/>
+              </a:prstGeom>
+              <a:blipFill>
+                <a:blip r:embed="rId4"/>
+                <a:stretch>
+                  <a:fillRect l="-1705" t="-6667"/>
+                </a:stretch>
+              </a:blipFill>
+            </p:spPr>
+            <p:txBody>
+              <a:bodyPr/>
+              <a:lstStyle/>
+              <a:p>
+                <a:r>
+                  <a:rPr lang="ja-JP" altLang="en-US">
+                    <a:noFill/>
+                  </a:rPr>
+                  <a:t> </a:t>
+                </a:r>
+              </a:p>
+            </p:txBody>
+          </p:sp>
+        </mc:Fallback>
+      </mc:AlternateContent>
+      <mc:AlternateContent xmlns:mc="http://schemas.openxmlformats.org/markup-compatibility/2006">
+        <mc:Choice xmlns:a14="http://schemas.microsoft.com/office/drawing/2010/main" Requires="a14">
+          <p:sp>
+            <p:nvSpPr>
+              <p:cNvPr id="911" name="EQ 911"/>
+              <p:cNvSpPr txBox="1"/>
+              <p:nvPr/>
+            </p:nvSpPr>
+            <p:spPr>
+              <a:xfrm>
+                <a:off x="6934200" y="2362200"/>
+                <a:ext cx="4457700" cy="736600"/>
+              </a:xfrm>
+              <a:prstGeom prst="rect">
+                <a:avLst/>
+              </a:prstGeom>
+              <a:noFill/>
+            </p:spPr>
+            <p:txBody>
+              <a:bodyPr wrap="square" lIns="0" tIns="0" rIns="0" bIns="0"/>
+              <a:lstStyle/>
+              <a:p>
+                <a:pPr algn="l"/>
+                <a14:m>
+                  <m:oMathPara xmlns:m="http://schemas.openxmlformats.org/officeDocument/2006/math">
+                    <m:oMathParaPr>
+                      <m:jc m:val="left"/>
+                    </m:oMathParaPr>
+                    <m:oMath>
+                      <m:sSub>
+                        <m:sSubPr>
+                          <m:ctrlPr>
+                            <a:rPr lang="en-US" sz="1700" dirty="0">
+                              <a:solidFill>
+                                <a:srgbClr val="8A2E3B"/>
+                              </a:solidFill>
+                              <a:latin typeface="Cambria Math" panose="02040503050406030204" pitchFamily="18" charset="0"/>
+                            </a:rPr>
+                          </m:ctrlPr>
+                        </m:sSubPr>
+                        <m:e>
+                          <m:r>
+                            <a:rPr lang="en-US" sz="1700" dirty="0">
+                              <a:solidFill>
+                                <a:srgbClr val="8A2E3B"/>
+                              </a:solidFill>
+                              <a:latin typeface="Cambria Math" panose="02040503050406030204" pitchFamily="18" charset="0"/>
+                            </a:rPr>
+                            <m:t>𝐾</m:t>
+                          </m:r>
+                        </m:e>
+                        <m:sub>
+                          <m:r>
+                            <a:rPr lang="en-US" sz="1700" dirty="0">
+                              <a:solidFill>
+                                <a:srgbClr val="8A2E3B"/>
+                              </a:solidFill>
+                              <a:latin typeface="Cambria Math" panose="02040503050406030204" pitchFamily="18" charset="0"/>
+                            </a:rPr>
+                            <m:t>𝑖𝑗</m:t>
+                          </m:r>
+                        </m:sub>
+                      </m:sSub>
+                      <m:r>
+                        <a:rPr lang="en-US" sz="1700" dirty="0">
+                          <a:solidFill>
+                            <a:srgbClr val="1A2744"/>
+                          </a:solidFill>
+                          <a:latin typeface="Cambria Math" panose="02040503050406030204" pitchFamily="18" charset="0"/>
+                        </a:rPr>
+                        <m:t> = </m:t>
+                      </m:r>
+                      <m:f>
+                        <m:fPr>
+                          <m:ctrlPr>
+                            <a:rPr lang="en-US" sz="1700" dirty="0">
+                              <a:solidFill>
+                                <a:srgbClr val="1A2744"/>
+                              </a:solidFill>
+                              <a:latin typeface="Cambria Math" panose="02040503050406030204" pitchFamily="18" charset="0"/>
+                            </a:rPr>
+                          </m:ctrlPr>
+                        </m:fPr>
+                        <m:num>
+                          <m:r>
+                            <a:rPr lang="en-US" sz="1700" dirty="0">
+                              <a:solidFill>
+                                <a:srgbClr val="1A2744"/>
+                              </a:solidFill>
+                              <a:latin typeface="Cambria Math" panose="02040503050406030204" pitchFamily="18" charset="0"/>
+                            </a:rPr>
+                            <m:t>𝜕</m:t>
+                          </m:r>
+                          <m:sSub>
+                            <m:sSubPr>
+                              <m:ctrlPr>
+                                <a:rPr lang="en-US" sz="1700" dirty="0">
+                                  <a:solidFill>
+                                    <a:srgbClr val="1A2744"/>
+                                  </a:solidFill>
+                                  <a:latin typeface="Cambria Math" panose="02040503050406030204" pitchFamily="18" charset="0"/>
+                                </a:rPr>
+                              </m:ctrlPr>
+                            </m:sSubPr>
+                            <m:e>
+                              <m:r>
+                                <a:rPr lang="en-US" sz="1700" dirty="0">
+                                  <a:solidFill>
+                                    <a:srgbClr val="1A2744"/>
+                                  </a:solidFill>
+                                  <a:latin typeface="Cambria Math" panose="02040503050406030204" pitchFamily="18" charset="0"/>
+                                </a:rPr>
+                                <m:t>𝑃</m:t>
+                              </m:r>
+                            </m:e>
+                            <m:sub>
+                              <m:r>
+                                <a:rPr lang="en-US" sz="1700" dirty="0">
+                                  <a:solidFill>
+                                    <a:srgbClr val="1A2744"/>
+                                  </a:solidFill>
+                                  <a:latin typeface="Cambria Math" panose="02040503050406030204" pitchFamily="18" charset="0"/>
+                                </a:rPr>
+                                <m:t>𝑒</m:t>
+                              </m:r>
+                              <m:r>
+                                <a:rPr lang="en-US" sz="1700" dirty="0">
+                                  <a:solidFill>
+                                    <a:srgbClr val="1A2744"/>
+                                  </a:solidFill>
+                                  <a:latin typeface="Cambria Math" panose="02040503050406030204" pitchFamily="18" charset="0"/>
+                                </a:rPr>
+                                <m:t>,</m:t>
+                              </m:r>
+                              <m:r>
+                                <a:rPr lang="en-US" sz="1700" dirty="0">
+                                  <a:solidFill>
+                                    <a:srgbClr val="1A2744"/>
+                                  </a:solidFill>
+                                  <a:latin typeface="Cambria Math" panose="02040503050406030204" pitchFamily="18" charset="0"/>
+                                </a:rPr>
+                                <m:t>𝑖</m:t>
+                              </m:r>
+                            </m:sub>
+                          </m:sSub>
+                        </m:num>
+                        <m:den>
+                          <m:r>
+                            <a:rPr lang="en-US" sz="1700" dirty="0">
+                              <a:solidFill>
+                                <a:srgbClr val="1A2744"/>
+                              </a:solidFill>
+                              <a:latin typeface="Cambria Math" panose="02040503050406030204" pitchFamily="18" charset="0"/>
+                            </a:rPr>
+                            <m:t>𝜕</m:t>
+                          </m:r>
+                          <m:sSub>
+                            <m:sSubPr>
+                              <m:ctrlPr>
+                                <a:rPr lang="en-US" sz="1700" dirty="0">
+                                  <a:solidFill>
+                                    <a:srgbClr val="1A2744"/>
+                                  </a:solidFill>
+                                  <a:latin typeface="Cambria Math" panose="02040503050406030204" pitchFamily="18" charset="0"/>
+                                </a:rPr>
+                              </m:ctrlPr>
+                            </m:sSubPr>
+                            <m:e>
+                              <m:r>
+                                <a:rPr lang="en-US" sz="1700" dirty="0">
+                                  <a:solidFill>
+                                    <a:srgbClr val="1A2744"/>
+                                  </a:solidFill>
+                                  <a:latin typeface="Cambria Math" panose="02040503050406030204" pitchFamily="18" charset="0"/>
+                                </a:rPr>
+                                <m:t>𝛿</m:t>
+                              </m:r>
+                            </m:e>
+                            <m:sub>
+                              <m:r>
+                                <a:rPr lang="en-US" sz="1700" dirty="0">
+                                  <a:solidFill>
+                                    <a:srgbClr val="1A2744"/>
+                                  </a:solidFill>
+                                  <a:latin typeface="Cambria Math" panose="02040503050406030204" pitchFamily="18" charset="0"/>
+                                </a:rPr>
+                                <m:t>𝑗</m:t>
+                              </m:r>
+                            </m:sub>
+                          </m:sSub>
+                        </m:den>
+                      </m:f>
+                    </m:oMath>
+                  </m:oMathPara>
+                </a14:m>
+                <a:endParaRPr/>
+              </a:p>
+            </p:txBody>
+          </p:sp>
+        </mc:Choice>
+        <mc:Fallback>
+          <p:sp>
+            <p:nvSpPr>
+              <p:cNvPr id="911" name="EQ 911"/>
+              <p:cNvSpPr txBox="1">
+                <a:spLocks noRot="1" noChangeAspect="1" noMove="1" noResize="1" noEditPoints="1" noAdjustHandles="1" noChangeArrowheads="1" noChangeShapeType="1" noTextEdit="1"/>
+              </p:cNvSpPr>
+              <p:nvPr/>
+            </p:nvSpPr>
+            <p:spPr>
+              <a:xfrm>
+                <a:off x="6934200" y="2362200"/>
+                <a:ext cx="4457700" cy="736600"/>
+              </a:xfrm>
+              <a:prstGeom prst="rect">
+                <a:avLst/>
+              </a:prstGeom>
+              <a:blipFill>
+                <a:blip r:embed="rId5"/>
+                <a:stretch>
+                  <a:fillRect l="-1705" t="-3448"/>
+                </a:stretch>
+              </a:blipFill>
+            </p:spPr>
+            <p:txBody>
+              <a:bodyPr/>
+              <a:lstStyle/>
+              <a:p>
+                <a:r>
+                  <a:rPr lang="ja-JP" altLang="en-US">
+                    <a:noFill/>
+                  </a:rPr>
+                  <a:t> </a:t>
+                </a:r>
+              </a:p>
+            </p:txBody>
+          </p:sp>
+        </mc:Fallback>
+      </mc:AlternateContent>
+      <mc:AlternateContent xmlns:mc="http://schemas.openxmlformats.org/markup-compatibility/2006">
+        <mc:Choice xmlns:a14="http://schemas.microsoft.com/office/drawing/2010/main" Requires="a14">
+          <p:sp>
+            <p:nvSpPr>
+              <p:cNvPr id="912" name="EQ 912"/>
+              <p:cNvSpPr txBox="1"/>
+              <p:nvPr/>
+            </p:nvSpPr>
+            <p:spPr>
+              <a:xfrm>
+                <a:off x="6934200" y="3149600"/>
+                <a:ext cx="4457700" cy="330200"/>
+              </a:xfrm>
+              <a:prstGeom prst="rect">
+                <a:avLst/>
+              </a:prstGeom>
+              <a:noFill/>
+            </p:spPr>
+            <p:txBody>
+              <a:bodyPr wrap="square" lIns="0" tIns="0" rIns="0" bIns="0"/>
+              <a:lstStyle/>
+              <a:p>
+                <a:pPr algn="l"/>
+                <a14:m>
+                  <m:oMathPara xmlns:m="http://schemas.openxmlformats.org/officeDocument/2006/math">
+                    <m:oMathParaPr>
+                      <m:jc m:val="left"/>
+                    </m:oMathParaPr>
+                    <m:oMath>
+                      <m:r>
+                        <a:rPr lang="en-US" sz="1500" dirty="0">
+                          <a:solidFill>
+                            <a:srgbClr val="1A2744"/>
+                          </a:solidFill>
+                          <a:latin typeface="Cambria Math" panose="02040503050406030204" pitchFamily="18" charset="0"/>
+                        </a:rPr>
+                        <m:t> = </m:t>
+                      </m:r>
+                      <m:sSub>
+                        <m:sSubPr>
+                          <m:ctrlPr>
+                            <a:rPr lang="en-US" sz="1500" dirty="0">
+                              <a:solidFill>
+                                <a:srgbClr val="1A2744"/>
+                              </a:solidFill>
+                              <a:latin typeface="Cambria Math" panose="02040503050406030204" pitchFamily="18" charset="0"/>
+                            </a:rPr>
+                          </m:ctrlPr>
+                        </m:sSubPr>
+                        <m:e>
+                          <m:r>
+                            <a:rPr lang="en-US" sz="1500" dirty="0">
+                              <a:solidFill>
+                                <a:srgbClr val="1A2744"/>
+                              </a:solidFill>
+                              <a:latin typeface="Cambria Math" panose="02040503050406030204" pitchFamily="18" charset="0"/>
+                            </a:rPr>
+                            <m:t>𝐸</m:t>
+                          </m:r>
+                        </m:e>
+                        <m:sub>
+                          <m:r>
+                            <a:rPr lang="en-US" sz="1500" dirty="0">
+                              <a:solidFill>
+                                <a:srgbClr val="1A2744"/>
+                              </a:solidFill>
+                              <a:latin typeface="Cambria Math" panose="02040503050406030204" pitchFamily="18" charset="0"/>
+                            </a:rPr>
+                            <m:t>𝑖</m:t>
+                          </m:r>
+                        </m:sub>
+                      </m:sSub>
+                      <m:sSub>
+                        <m:sSubPr>
+                          <m:ctrlPr>
+                            <a:rPr lang="en-US" sz="1500" dirty="0">
+                              <a:solidFill>
+                                <a:srgbClr val="1A2744"/>
+                              </a:solidFill>
+                              <a:latin typeface="Cambria Math" panose="02040503050406030204" pitchFamily="18" charset="0"/>
+                            </a:rPr>
+                          </m:ctrlPr>
+                        </m:sSubPr>
+                        <m:e>
+                          <m:r>
+                            <a:rPr lang="en-US" sz="1500" dirty="0">
+                              <a:solidFill>
+                                <a:srgbClr val="1A2744"/>
+                              </a:solidFill>
+                              <a:latin typeface="Cambria Math" panose="02040503050406030204" pitchFamily="18" charset="0"/>
+                            </a:rPr>
+                            <m:t>𝐸</m:t>
+                          </m:r>
+                        </m:e>
+                        <m:sub>
+                          <m:r>
+                            <a:rPr lang="en-US" sz="1500" dirty="0">
+                              <a:solidFill>
+                                <a:srgbClr val="1A2744"/>
+                              </a:solidFill>
+                              <a:latin typeface="Cambria Math" panose="02040503050406030204" pitchFamily="18" charset="0"/>
+                            </a:rPr>
+                            <m:t>𝑗</m:t>
+                          </m:r>
+                        </m:sub>
+                      </m:sSub>
+                      <m:r>
+                        <a:rPr lang="en-US" sz="1500" dirty="0">
+                          <a:solidFill>
+                            <a:srgbClr val="1A2744"/>
+                          </a:solidFill>
+                          <a:latin typeface="Cambria Math" panose="02040503050406030204" pitchFamily="18" charset="0"/>
+                        </a:rPr>
+                        <m:t>(</m:t>
+                      </m:r>
+                      <m:sSub>
+                        <m:sSubPr>
+                          <m:ctrlPr>
+                            <a:rPr lang="en-US" sz="1500" dirty="0">
+                              <a:solidFill>
+                                <a:srgbClr val="8A2E3B"/>
+                              </a:solidFill>
+                              <a:latin typeface="Cambria Math" panose="02040503050406030204" pitchFamily="18" charset="0"/>
+                            </a:rPr>
+                          </m:ctrlPr>
+                        </m:sSubPr>
+                        <m:e>
+                          <m:r>
+                            <a:rPr lang="en-US" sz="1500" dirty="0">
+                              <a:solidFill>
+                                <a:srgbClr val="8A2E3B"/>
+                              </a:solidFill>
+                              <a:latin typeface="Cambria Math" panose="02040503050406030204" pitchFamily="18" charset="0"/>
+                            </a:rPr>
+                            <m:t>𝐵</m:t>
+                          </m:r>
+                        </m:e>
+                        <m:sub>
+                          <m:r>
+                            <a:rPr lang="en-US" sz="1500" dirty="0">
+                              <a:solidFill>
+                                <a:srgbClr val="8A2E3B"/>
+                              </a:solidFill>
+                              <a:latin typeface="Cambria Math" panose="02040503050406030204" pitchFamily="18" charset="0"/>
+                            </a:rPr>
+                            <m:t>𝑖𝑗</m:t>
+                          </m:r>
+                        </m:sub>
+                      </m:sSub>
+                      <m:r>
+                        <a:rPr lang="en-US" sz="1500" dirty="0">
+                          <a:solidFill>
+                            <a:srgbClr val="1A2744"/>
+                          </a:solidFill>
+                          <a:latin typeface="Cambria Math" panose="02040503050406030204" pitchFamily="18" charset="0"/>
+                        </a:rPr>
+                        <m:t> </m:t>
+                      </m:r>
+                      <m:r>
+                        <m:rPr>
+                          <m:sty m:val="p"/>
+                        </m:rPr>
+                        <a:rPr lang="en-US" sz="1500" dirty="0">
+                          <a:solidFill>
+                            <a:srgbClr val="1A2744"/>
+                          </a:solidFill>
+                          <a:latin typeface="Cambria Math" panose="02040503050406030204" pitchFamily="18" charset="0"/>
+                        </a:rPr>
+                        <m:t>cos</m:t>
+                      </m:r>
+                      <m:r>
+                        <a:rPr lang="en-US" sz="1500" dirty="0">
+                          <a:solidFill>
+                            <a:srgbClr val="1A2744"/>
+                          </a:solidFill>
+                          <a:latin typeface="Cambria Math" panose="02040503050406030204" pitchFamily="18" charset="0"/>
+                        </a:rPr>
+                        <m:t> </m:t>
+                      </m:r>
+                      <m:sSub>
+                        <m:sSubPr>
+                          <m:ctrlPr>
+                            <a:rPr lang="en-US" sz="1500" dirty="0">
+                              <a:solidFill>
+                                <a:srgbClr val="1A2744"/>
+                              </a:solidFill>
+                              <a:latin typeface="Cambria Math" panose="02040503050406030204" pitchFamily="18" charset="0"/>
+                            </a:rPr>
+                          </m:ctrlPr>
+                        </m:sSubPr>
+                        <m:e>
+                          <m:r>
+                            <a:rPr lang="en-US" sz="1500" dirty="0">
+                              <a:solidFill>
+                                <a:srgbClr val="1A2744"/>
+                              </a:solidFill>
+                              <a:latin typeface="Cambria Math" panose="02040503050406030204" pitchFamily="18" charset="0"/>
+                            </a:rPr>
+                            <m:t>𝛿</m:t>
+                          </m:r>
+                        </m:e>
+                        <m:sub>
+                          <m:r>
+                            <a:rPr lang="en-US" sz="1500" dirty="0">
+                              <a:solidFill>
+                                <a:srgbClr val="1A2744"/>
+                              </a:solidFill>
+                              <a:latin typeface="Cambria Math" panose="02040503050406030204" pitchFamily="18" charset="0"/>
+                            </a:rPr>
+                            <m:t>𝑖𝑗</m:t>
+                          </m:r>
+                        </m:sub>
+                      </m:sSub>
+                      <m:r>
+                        <a:rPr lang="en-US" sz="1500" dirty="0">
+                          <a:solidFill>
+                            <a:srgbClr val="1A2744"/>
+                          </a:solidFill>
+                          <a:latin typeface="Cambria Math" panose="02040503050406030204" pitchFamily="18" charset="0"/>
+                        </a:rPr>
+                        <m:t> − </m:t>
+                      </m:r>
+                      <m:sSub>
+                        <m:sSubPr>
+                          <m:ctrlPr>
+                            <a:rPr lang="en-US" sz="1500" dirty="0">
+                              <a:solidFill>
+                                <a:srgbClr val="2C5F8A"/>
+                              </a:solidFill>
+                              <a:latin typeface="Cambria Math" panose="02040503050406030204" pitchFamily="18" charset="0"/>
+                            </a:rPr>
+                          </m:ctrlPr>
+                        </m:sSubPr>
+                        <m:e>
+                          <m:r>
+                            <a:rPr lang="en-US" sz="1500" dirty="0">
+                              <a:solidFill>
+                                <a:srgbClr val="2C5F8A"/>
+                              </a:solidFill>
+                              <a:latin typeface="Cambria Math" panose="02040503050406030204" pitchFamily="18" charset="0"/>
+                            </a:rPr>
+                            <m:t>𝐺</m:t>
+                          </m:r>
+                        </m:e>
+                        <m:sub>
+                          <m:r>
+                            <a:rPr lang="en-US" sz="1500" dirty="0">
+                              <a:solidFill>
+                                <a:srgbClr val="2C5F8A"/>
+                              </a:solidFill>
+                              <a:latin typeface="Cambria Math" panose="02040503050406030204" pitchFamily="18" charset="0"/>
+                            </a:rPr>
+                            <m:t>𝑖𝑗</m:t>
+                          </m:r>
+                        </m:sub>
+                      </m:sSub>
+                      <m:r>
+                        <a:rPr lang="en-US" sz="1500" dirty="0">
+                          <a:solidFill>
+                            <a:srgbClr val="1A2744"/>
+                          </a:solidFill>
+                          <a:latin typeface="Cambria Math" panose="02040503050406030204" pitchFamily="18" charset="0"/>
+                        </a:rPr>
+                        <m:t> </m:t>
+                      </m:r>
+                      <m:r>
+                        <m:rPr>
+                          <m:sty m:val="p"/>
+                        </m:rPr>
+                        <a:rPr lang="en-US" sz="1500" dirty="0">
+                          <a:solidFill>
+                            <a:srgbClr val="1A2744"/>
+                          </a:solidFill>
+                          <a:latin typeface="Cambria Math" panose="02040503050406030204" pitchFamily="18" charset="0"/>
+                        </a:rPr>
+                        <m:t>sin</m:t>
+                      </m:r>
+                      <m:r>
+                        <a:rPr lang="en-US" sz="1500" dirty="0">
+                          <a:solidFill>
+                            <a:srgbClr val="1A2744"/>
+                          </a:solidFill>
+                          <a:latin typeface="Cambria Math" panose="02040503050406030204" pitchFamily="18" charset="0"/>
+                        </a:rPr>
+                        <m:t> </m:t>
+                      </m:r>
+                      <m:sSub>
+                        <m:sSubPr>
+                          <m:ctrlPr>
+                            <a:rPr lang="en-US" sz="1500" dirty="0">
+                              <a:solidFill>
+                                <a:srgbClr val="1A2744"/>
+                              </a:solidFill>
+                              <a:latin typeface="Cambria Math" panose="02040503050406030204" pitchFamily="18" charset="0"/>
+                            </a:rPr>
+                          </m:ctrlPr>
+                        </m:sSubPr>
+                        <m:e>
+                          <m:r>
+                            <a:rPr lang="en-US" sz="1500" dirty="0">
+                              <a:solidFill>
+                                <a:srgbClr val="1A2744"/>
+                              </a:solidFill>
+                              <a:latin typeface="Cambria Math" panose="02040503050406030204" pitchFamily="18" charset="0"/>
+                            </a:rPr>
+                            <m:t>𝛿</m:t>
+                          </m:r>
+                        </m:e>
+                        <m:sub>
+                          <m:r>
+                            <a:rPr lang="en-US" sz="1500" dirty="0">
+                              <a:solidFill>
+                                <a:srgbClr val="1A2744"/>
+                              </a:solidFill>
+                              <a:latin typeface="Cambria Math" panose="02040503050406030204" pitchFamily="18" charset="0"/>
+                            </a:rPr>
+                            <m:t>𝑖𝑗</m:t>
+                          </m:r>
+                        </m:sub>
+                      </m:sSub>
+                      <m:r>
+                        <a:rPr lang="en-US" sz="1500" dirty="0">
+                          <a:solidFill>
+                            <a:srgbClr val="1A2744"/>
+                          </a:solidFill>
+                          <a:latin typeface="Cambria Math" panose="02040503050406030204" pitchFamily="18" charset="0"/>
+                        </a:rPr>
+                        <m:t>)</m:t>
+                      </m:r>
+                    </m:oMath>
+                  </m:oMathPara>
+                </a14:m>
+                <a:endParaRPr/>
+              </a:p>
+            </p:txBody>
+          </p:sp>
+        </mc:Choice>
+        <mc:Fallback>
+          <p:sp>
+            <p:nvSpPr>
+              <p:cNvPr id="912" name="EQ 912"/>
+              <p:cNvSpPr txBox="1">
+                <a:spLocks noRot="1" noChangeAspect="1" noMove="1" noResize="1" noEditPoints="1" noAdjustHandles="1" noChangeArrowheads="1" noChangeShapeType="1" noTextEdit="1"/>
+              </p:cNvSpPr>
+              <p:nvPr/>
+            </p:nvSpPr>
+            <p:spPr>
+              <a:xfrm>
+                <a:off x="6934200" y="3149600"/>
+                <a:ext cx="4457700" cy="330200"/>
+              </a:xfrm>
+              <a:prstGeom prst="rect">
+                <a:avLst/>
+              </a:prstGeom>
+              <a:blipFill>
+                <a:blip r:embed="rId6"/>
+                <a:stretch>
+                  <a:fillRect l="-2273" t="-7407"/>
+                </a:stretch>
+              </a:blipFill>
+            </p:spPr>
+            <p:txBody>
+              <a:bodyPr/>
+              <a:lstStyle/>
+              <a:p>
+                <a:r>
+                  <a:rPr lang="ja-JP" altLang="en-US">
+                    <a:noFill/>
+                  </a:rPr>
+                  <a:t> </a:t>
+                </a:r>
+              </a:p>
+            </p:txBody>
+          </p:sp>
+        </mc:Fallback>
+      </mc:AlternateContent>
+      <mc:AlternateContent xmlns:mc="http://schemas.openxmlformats.org/markup-compatibility/2006">
+        <mc:Choice xmlns:a14="http://schemas.microsoft.com/office/drawing/2010/main" Requires="a14">
+          <p:sp>
+            <p:nvSpPr>
+              <p:cNvPr id="913" name="EQ 913"/>
+              <p:cNvSpPr txBox="1"/>
+              <p:nvPr/>
+            </p:nvSpPr>
+            <p:spPr>
+              <a:xfrm>
+                <a:off x="6934200" y="3530600"/>
+                <a:ext cx="4457700" cy="736600"/>
+              </a:xfrm>
+              <a:prstGeom prst="rect">
+                <a:avLst/>
+              </a:prstGeom>
+              <a:noFill/>
+            </p:spPr>
+            <p:txBody>
+              <a:bodyPr wrap="square" lIns="0" tIns="0" rIns="0" bIns="0"/>
+              <a:lstStyle/>
+              <a:p>
+                <a:pPr algn="l"/>
+                <a14:m>
+                  <m:oMath xmlns:m="http://schemas.openxmlformats.org/officeDocument/2006/math">
+                    <m:sSup>
+                      <m:sSupPr>
+                        <m:ctrlPr>
+                          <a:rPr lang="en-US" sz="1700" b="1" dirty="0">
+                            <a:solidFill>
+                              <a:srgbClr val="1A2744"/>
+                            </a:solidFill>
+                            <a:latin typeface="Cambria Math" panose="02040503050406030204" pitchFamily="18" charset="0"/>
+                          </a:rPr>
+                        </m:ctrlPr>
+                      </m:sSupPr>
+                      <m:e>
+                        <m:r>
+                          <a:rPr lang="en-US" sz="1700" b="1" dirty="0">
+                            <a:solidFill>
+                              <a:srgbClr val="1A2744"/>
+                            </a:solidFill>
+                            <a:latin typeface="Cambria Math" panose="02040503050406030204" pitchFamily="18" charset="0"/>
+                          </a:rPr>
+                          <m:t>𝑴</m:t>
+                        </m:r>
+                      </m:e>
+                      <m:sup>
+                        <m:r>
+                          <a:rPr lang="en-US" sz="1700" dirty="0">
+                            <a:solidFill>
+                              <a:srgbClr val="1A2744"/>
+                            </a:solidFill>
+                            <a:latin typeface="Cambria Math" panose="02040503050406030204" pitchFamily="18" charset="0"/>
+                          </a:rPr>
+                          <m:t>−1</m:t>
+                        </m:r>
+                      </m:sup>
+                    </m:sSup>
+                    <m:r>
+                      <a:rPr lang="en-US" sz="1700" b="1" dirty="0">
+                        <a:solidFill>
+                          <a:srgbClr val="1A2744"/>
+                        </a:solidFill>
+                        <a:latin typeface="Cambria Math" panose="02040503050406030204" pitchFamily="18" charset="0"/>
+                      </a:rPr>
+                      <m:t>𝑲</m:t>
+                    </m:r>
+                  </m:oMath>
+                </a14:m>
+                <a:r>
+                  <a:rPr lang="ja-JP" sz="1500" dirty="0">
+                    <a:solidFill>
+                      <a:srgbClr val="1A2744"/>
+                    </a:solidFill>
+                    <a:latin typeface="Calibri"/>
+                  </a:rPr>
+                  <a:t> の固有値 </a:t>
+                </a:r>
+                <a14:m>
+                  <m:oMath xmlns:m="http://schemas.openxmlformats.org/officeDocument/2006/math">
+                    <m:sSub>
+                      <m:sSubPr>
+                        <m:ctrlPr>
+                          <a:rPr lang="en-US" sz="1700" dirty="0">
+                            <a:solidFill>
+                              <a:srgbClr val="8A2E3B"/>
+                            </a:solidFill>
+                            <a:latin typeface="Cambria Math" panose="02040503050406030204" pitchFamily="18" charset="0"/>
+                          </a:rPr>
+                        </m:ctrlPr>
+                      </m:sSubPr>
+                      <m:e>
+                        <m:r>
+                          <a:rPr lang="en-US" sz="1700" dirty="0">
+                            <a:solidFill>
+                              <a:srgbClr val="8A2E3B"/>
+                            </a:solidFill>
+                            <a:latin typeface="Cambria Math" panose="02040503050406030204" pitchFamily="18" charset="0"/>
+                          </a:rPr>
+                          <m:t>𝜆</m:t>
+                        </m:r>
+                      </m:e>
+                      <m:sub>
+                        <m:r>
+                          <a:rPr lang="en-US" sz="1700" dirty="0">
+                            <a:solidFill>
+                              <a:srgbClr val="8A2E3B"/>
+                            </a:solidFill>
+                            <a:latin typeface="Cambria Math" panose="02040503050406030204" pitchFamily="18" charset="0"/>
+                          </a:rPr>
+                          <m:t>𝑘</m:t>
+                        </m:r>
+                      </m:sub>
+                    </m:sSub>
+                    <m:r>
+                      <a:rPr lang="en-US" sz="1700" dirty="0">
+                        <a:solidFill>
+                          <a:srgbClr val="1A2744"/>
+                        </a:solidFill>
+                        <a:latin typeface="Cambria Math" panose="02040503050406030204" pitchFamily="18" charset="0"/>
+                      </a:rPr>
+                      <m:t> → </m:t>
+                    </m:r>
+                    <m:sSub>
+                      <m:sSubPr>
+                        <m:ctrlPr>
+                          <a:rPr lang="en-US" sz="1700" dirty="0">
+                            <a:solidFill>
+                              <a:srgbClr val="8A2E3B"/>
+                            </a:solidFill>
+                            <a:latin typeface="Cambria Math" panose="02040503050406030204" pitchFamily="18" charset="0"/>
+                          </a:rPr>
+                        </m:ctrlPr>
+                      </m:sSubPr>
+                      <m:e>
+                        <m:r>
+                          <a:rPr lang="en-US" sz="1700" dirty="0">
+                            <a:solidFill>
+                              <a:srgbClr val="8A2E3B"/>
+                            </a:solidFill>
+                            <a:latin typeface="Cambria Math" panose="02040503050406030204" pitchFamily="18" charset="0"/>
+                          </a:rPr>
+                          <m:t>𝑓</m:t>
+                        </m:r>
+                      </m:e>
+                      <m:sub>
+                        <m:r>
+                          <a:rPr lang="en-US" sz="1700" dirty="0">
+                            <a:solidFill>
+                              <a:srgbClr val="8A2E3B"/>
+                            </a:solidFill>
+                            <a:latin typeface="Cambria Math" panose="02040503050406030204" pitchFamily="18" charset="0"/>
+                          </a:rPr>
+                          <m:t>𝑘</m:t>
+                        </m:r>
+                      </m:sub>
+                    </m:sSub>
+                    <m:r>
+                      <a:rPr lang="en-US" sz="1700" dirty="0">
+                        <a:solidFill>
+                          <a:srgbClr val="1A2744"/>
+                        </a:solidFill>
+                        <a:latin typeface="Cambria Math" panose="02040503050406030204" pitchFamily="18" charset="0"/>
+                      </a:rPr>
+                      <m:t> = </m:t>
+                    </m:r>
+                    <m:f>
+                      <m:fPr>
+                        <m:ctrlPr>
+                          <a:rPr lang="en-US" sz="1700" i="1">
+                            <a:latin typeface="Cambria Math" panose="02040503050406030204" pitchFamily="18" charset="0"/>
+                          </a:rPr>
+                        </m:ctrlPr>
+                      </m:fPr>
+                      <m:num>
+                        <m:rad>
+                          <m:radPr>
+                            <m:degHide m:val="on"/>
+                            <m:ctrlPr>
+                              <a:rPr lang="en-US" sz="1700" i="1">
+                                <a:latin typeface="Cambria Math" panose="02040503050406030204" pitchFamily="18" charset="0"/>
+                              </a:rPr>
+                            </m:ctrlPr>
+                          </m:radPr>
+                          <m:deg/>
+                          <m:e>
+                            <m:sSub>
+                              <m:sSubPr>
+                                <m:ctrlPr>
+                                  <a:rPr lang="en-US" sz="1700" dirty="0">
+                                    <a:solidFill>
+                                      <a:srgbClr val="8A2E3B"/>
+                                    </a:solidFill>
+                                    <a:latin typeface="Cambria Math" panose="02040503050406030204" pitchFamily="18" charset="0"/>
+                                  </a:rPr>
+                                </m:ctrlPr>
+                              </m:sSubPr>
+                              <m:e>
+                                <m:r>
+                                  <a:rPr lang="en-US" sz="1700" dirty="0">
+                                    <a:solidFill>
+                                      <a:srgbClr val="8A2E3B"/>
+                                    </a:solidFill>
+                                    <a:latin typeface="Cambria Math" panose="02040503050406030204" pitchFamily="18" charset="0"/>
+                                  </a:rPr>
+                                  <m:t>𝜆</m:t>
+                                </m:r>
+                              </m:e>
+                              <m:sub>
+                                <m:r>
+                                  <a:rPr lang="en-US" sz="1700" dirty="0">
+                                    <a:solidFill>
+                                      <a:srgbClr val="8A2E3B"/>
+                                    </a:solidFill>
+                                    <a:latin typeface="Cambria Math" panose="02040503050406030204" pitchFamily="18" charset="0"/>
+                                  </a:rPr>
+                                  <m:t>𝑘</m:t>
+                                </m:r>
+                              </m:sub>
+                            </m:sSub>
+                          </m:e>
+                        </m:rad>
+                      </m:num>
+                      <m:den>
+                        <m:r>
+                          <a:rPr lang="en-US" sz="1700" dirty="0">
+                            <a:solidFill>
+                              <a:srgbClr val="1A2744"/>
+                            </a:solidFill>
+                            <a:latin typeface="Cambria Math" panose="02040503050406030204" pitchFamily="18" charset="0"/>
+                          </a:rPr>
+                          <m:t>2</m:t>
+                        </m:r>
+                        <m:r>
+                          <m:rPr>
+                            <m:sty m:val="p"/>
+                          </m:rPr>
+                          <a:rPr lang="en-US" sz="1700" dirty="0">
+                            <a:solidFill>
+                              <a:srgbClr val="1A2744"/>
+                            </a:solidFill>
+                            <a:latin typeface="Cambria Math" panose="02040503050406030204" pitchFamily="18" charset="0"/>
+                          </a:rPr>
+                          <m:t>π</m:t>
+                        </m:r>
+                      </m:den>
+                    </m:f>
+                  </m:oMath>
+                </a14:m>
+                <a:endParaRPr lang="ja-JP" sz="1500" dirty="0">
+                  <a:solidFill>
+                    <a:srgbClr val="1A2744"/>
+                  </a:solidFill>
+                  <a:latin typeface="Calibri"/>
+                </a:endParaRPr>
+              </a:p>
+            </p:txBody>
+          </p:sp>
+        </mc:Choice>
+        <mc:Fallback>
+          <p:sp>
+            <p:nvSpPr>
+              <p:cNvPr id="913" name="EQ 913"/>
+              <p:cNvSpPr txBox="1">
+                <a:spLocks noRot="1" noChangeAspect="1" noMove="1" noResize="1" noEditPoints="1" noAdjustHandles="1" noChangeArrowheads="1" noChangeShapeType="1" noTextEdit="1"/>
+              </p:cNvSpPr>
+              <p:nvPr/>
+            </p:nvSpPr>
+            <p:spPr>
+              <a:xfrm>
+                <a:off x="6934200" y="3530600"/>
+                <a:ext cx="4457700" cy="736600"/>
+              </a:xfrm>
+              <a:prstGeom prst="rect">
+                <a:avLst/>
+              </a:prstGeom>
+              <a:blipFill>
+                <a:blip r:embed="rId7"/>
+                <a:stretch>
+                  <a:fillRect l="-1705"/>
+                </a:stretch>
+              </a:blipFill>
+            </p:spPr>
+            <p:txBody>
+              <a:bodyPr/>
+              <a:lstStyle/>
+              <a:p>
+                <a:r>
+                  <a:rPr lang="ja-JP" altLang="en-US">
+                    <a:noFill/>
+                  </a:rPr>
+                  <a:t> </a:t>
+                </a:r>
+              </a:p>
+            </p:txBody>
+          </p:sp>
+        </mc:Fallback>
+      </mc:AlternateContent>
+      <mc:AlternateContent xmlns:mc="http://schemas.openxmlformats.org/markup-compatibility/2006">
+        <mc:Choice xmlns:a14="http://schemas.microsoft.com/office/drawing/2010/main" Requires="a14">
+          <p:sp>
+            <p:nvSpPr>
+              <p:cNvPr id="920" name="EQ 920"/>
+              <p:cNvSpPr txBox="1"/>
+              <p:nvPr/>
+            </p:nvSpPr>
+            <p:spPr>
+              <a:xfrm>
+                <a:off x="6934200" y="4445000"/>
+                <a:ext cx="4457700" cy="736600"/>
+              </a:xfrm>
+              <a:prstGeom prst="rect">
+                <a:avLst/>
+              </a:prstGeom>
+              <a:noFill/>
+            </p:spPr>
+            <p:txBody>
+              <a:bodyPr wrap="square" lIns="0" tIns="0" rIns="0" bIns="0"/>
+              <a:lstStyle/>
+              <a:p>
+                <a:pPr algn="l"/>
+                <a14:m>
+                  <m:oMathPara xmlns:m="http://schemas.openxmlformats.org/officeDocument/2006/math">
+                    <m:oMathParaPr>
+                      <m:jc m:val="left"/>
+                    </m:oMathParaPr>
+                    <m:oMath>
+                      <m:sSub>
+                        <m:sSubPr>
+                          <m:ctrlPr>
+                            <a:rPr lang="en-US" sz="1700" dirty="0">
+                              <a:solidFill>
+                                <a:srgbClr val="8A2E3B"/>
+                              </a:solidFill>
+                              <a:latin typeface="Cambria Math" panose="02040503050406030204" pitchFamily="18" charset="0"/>
+                            </a:rPr>
+                          </m:ctrlPr>
+                        </m:sSubPr>
+                        <m:e>
+                          <m:r>
+                            <a:rPr lang="en-US" sz="1700" dirty="0">
+                              <a:solidFill>
+                                <a:srgbClr val="8A2E3B"/>
+                              </a:solidFill>
+                              <a:latin typeface="Cambria Math" panose="02040503050406030204" pitchFamily="18" charset="0"/>
+                            </a:rPr>
+                            <m:t>𝐻</m:t>
+                          </m:r>
+                        </m:e>
+                        <m:sub>
+                          <m:r>
+                            <a:rPr lang="en-US" sz="1700" dirty="0">
+                              <a:solidFill>
+                                <a:srgbClr val="8A2E3B"/>
+                              </a:solidFill>
+                              <a:latin typeface="Cambria Math" panose="02040503050406030204" pitchFamily="18" charset="0"/>
+                            </a:rPr>
+                            <m:t>𝑎𝑔𝑔</m:t>
+                          </m:r>
+                        </m:sub>
+                      </m:sSub>
+                      <m:r>
+                        <a:rPr lang="en-US" sz="1700" dirty="0">
+                          <a:solidFill>
+                            <a:srgbClr val="1A2744"/>
+                          </a:solidFill>
+                          <a:latin typeface="Cambria Math" panose="02040503050406030204" pitchFamily="18" charset="0"/>
+                        </a:rPr>
+                        <m:t> = </m:t>
+                      </m:r>
+                      <m:f>
+                        <m:fPr>
+                          <m:ctrlPr>
+                            <a:rPr lang="en-US" sz="1700" i="1" dirty="0">
+                              <a:solidFill>
+                                <a:srgbClr val="1A2744"/>
+                              </a:solidFill>
+                              <a:latin typeface="Cambria Math" panose="02040503050406030204" pitchFamily="18" charset="0"/>
+                            </a:rPr>
+                          </m:ctrlPr>
+                        </m:fPr>
+                        <m:num>
+                          <m:nary>
+                            <m:naryPr>
+                              <m:chr m:val="∑"/>
+                              <m:limLoc m:val="subSup"/>
+                              <m:supHide m:val="on"/>
+                              <m:ctrlPr>
+                                <a:rPr lang="en-US" sz="1700" dirty="0">
+                                  <a:solidFill>
+                                    <a:srgbClr val="1A2744"/>
+                                  </a:solidFill>
+                                  <a:latin typeface="Cambria Math" panose="02040503050406030204" pitchFamily="18" charset="0"/>
+                                </a:rPr>
+                              </m:ctrlPr>
+                            </m:naryPr>
+                            <m:sub>
+                              <m:r>
+                                <a:rPr lang="en-US" sz="1700" dirty="0">
+                                  <a:solidFill>
+                                    <a:srgbClr val="1A2744"/>
+                                  </a:solidFill>
+                                  <a:latin typeface="Cambria Math" panose="02040503050406030204" pitchFamily="18" charset="0"/>
+                                </a:rPr>
+                                <m:t>𝑖</m:t>
+                              </m:r>
+                            </m:sub>
+                            <m:sup/>
+                            <m:e>
+                              <m:sSub>
+                                <m:sSubPr>
+                                  <m:ctrlPr>
+                                    <a:rPr lang="en-US" sz="1700" dirty="0">
+                                      <a:solidFill>
+                                        <a:srgbClr val="1A2744"/>
+                                      </a:solidFill>
+                                      <a:latin typeface="Cambria Math" panose="02040503050406030204" pitchFamily="18" charset="0"/>
+                                    </a:rPr>
+                                  </m:ctrlPr>
+                                </m:sSubPr>
+                                <m:e>
+                                  <m:r>
+                                    <a:rPr lang="en-US" sz="1700" dirty="0">
+                                      <a:solidFill>
+                                        <a:srgbClr val="1A2744"/>
+                                      </a:solidFill>
+                                      <a:latin typeface="Cambria Math" panose="02040503050406030204" pitchFamily="18" charset="0"/>
+                                    </a:rPr>
+                                    <m:t>𝐻</m:t>
+                                  </m:r>
+                                </m:e>
+                                <m:sub>
+                                  <m:r>
+                                    <a:rPr lang="en-US" sz="1700" dirty="0">
+                                      <a:solidFill>
+                                        <a:srgbClr val="1A2744"/>
+                                      </a:solidFill>
+                                      <a:latin typeface="Cambria Math" panose="02040503050406030204" pitchFamily="18" charset="0"/>
+                                    </a:rPr>
+                                    <m:t>𝑖</m:t>
+                                  </m:r>
+                                </m:sub>
+                              </m:sSub>
+                              <m:sSub>
+                                <m:sSubPr>
+                                  <m:ctrlPr>
+                                    <a:rPr lang="en-US" sz="1700" dirty="0">
+                                      <a:solidFill>
+                                        <a:srgbClr val="1A2744"/>
+                                      </a:solidFill>
+                                      <a:latin typeface="Cambria Math" panose="02040503050406030204" pitchFamily="18" charset="0"/>
+                                    </a:rPr>
+                                  </m:ctrlPr>
+                                </m:sSubPr>
+                                <m:e>
+                                  <m:r>
+                                    <a:rPr lang="en-US" sz="1700" dirty="0">
+                                      <a:solidFill>
+                                        <a:srgbClr val="1A2744"/>
+                                      </a:solidFill>
+                                      <a:latin typeface="Cambria Math" panose="02040503050406030204" pitchFamily="18" charset="0"/>
+                                    </a:rPr>
+                                    <m:t>𝑆</m:t>
+                                  </m:r>
+                                </m:e>
+                                <m:sub>
+                                  <m:r>
+                                    <a:rPr lang="en-US" sz="1700" dirty="0">
+                                      <a:solidFill>
+                                        <a:srgbClr val="1A2744"/>
+                                      </a:solidFill>
+                                      <a:latin typeface="Cambria Math" panose="02040503050406030204" pitchFamily="18" charset="0"/>
+                                    </a:rPr>
+                                    <m:t>𝑖</m:t>
+                                  </m:r>
+                                </m:sub>
+                              </m:sSub>
+                            </m:e>
+                          </m:nary>
+                        </m:num>
+                        <m:den>
+                          <m:nary>
+                            <m:naryPr>
+                              <m:chr m:val="∑"/>
+                              <m:limLoc m:val="subSup"/>
+                              <m:supHide m:val="on"/>
+                              <m:ctrlPr>
+                                <a:rPr lang="en-US" sz="1700" dirty="0">
+                                  <a:solidFill>
+                                    <a:srgbClr val="1A2744"/>
+                                  </a:solidFill>
+                                  <a:latin typeface="Cambria Math" panose="02040503050406030204" pitchFamily="18" charset="0"/>
+                                </a:rPr>
+                              </m:ctrlPr>
+                            </m:naryPr>
+                            <m:sub>
+                              <m:r>
+                                <a:rPr lang="en-US" sz="1700" dirty="0">
+                                  <a:solidFill>
+                                    <a:srgbClr val="1A2744"/>
+                                  </a:solidFill>
+                                  <a:latin typeface="Cambria Math" panose="02040503050406030204" pitchFamily="18" charset="0"/>
+                                </a:rPr>
+                                <m:t>𝑖</m:t>
+                              </m:r>
+                            </m:sub>
+                            <m:sup/>
+                            <m:e>
+                              <m:sSub>
+                                <m:sSubPr>
+                                  <m:ctrlPr>
+                                    <a:rPr lang="en-US" sz="1700" dirty="0">
+                                      <a:solidFill>
+                                        <a:srgbClr val="1A2744"/>
+                                      </a:solidFill>
+                                      <a:latin typeface="Cambria Math" panose="02040503050406030204" pitchFamily="18" charset="0"/>
+                                    </a:rPr>
+                                  </m:ctrlPr>
+                                </m:sSubPr>
+                                <m:e>
+                                  <m:r>
+                                    <a:rPr lang="en-US" sz="1700" dirty="0">
+                                      <a:solidFill>
+                                        <a:srgbClr val="1A2744"/>
+                                      </a:solidFill>
+                                      <a:latin typeface="Cambria Math" panose="02040503050406030204" pitchFamily="18" charset="0"/>
+                                    </a:rPr>
+                                    <m:t>𝑆</m:t>
+                                  </m:r>
+                                </m:e>
+                                <m:sub>
+                                  <m:r>
+                                    <a:rPr lang="en-US" sz="1700" dirty="0">
+                                      <a:solidFill>
+                                        <a:srgbClr val="1A2744"/>
+                                      </a:solidFill>
+                                      <a:latin typeface="Cambria Math" panose="02040503050406030204" pitchFamily="18" charset="0"/>
+                                    </a:rPr>
+                                    <m:t>𝑖</m:t>
+                                  </m:r>
+                                </m:sub>
+                              </m:sSub>
+                            </m:e>
+                          </m:nary>
+                        </m:den>
+                      </m:f>
+                    </m:oMath>
+                  </m:oMathPara>
+                </a14:m>
+                <a:endParaRPr/>
+              </a:p>
+            </p:txBody>
+          </p:sp>
+        </mc:Choice>
+        <mc:Fallback>
+          <p:sp>
+            <p:nvSpPr>
+              <p:cNvPr id="920" name="EQ 920"/>
+              <p:cNvSpPr txBox="1">
+                <a:spLocks noRot="1" noChangeAspect="1" noMove="1" noResize="1" noEditPoints="1" noAdjustHandles="1" noChangeArrowheads="1" noChangeShapeType="1" noTextEdit="1"/>
+              </p:cNvSpPr>
+              <p:nvPr/>
+            </p:nvSpPr>
+            <p:spPr>
+              <a:xfrm>
+                <a:off x="6934200" y="4445000"/>
+                <a:ext cx="4457700" cy="736600"/>
+              </a:xfrm>
+              <a:prstGeom prst="rect">
+                <a:avLst/>
+              </a:prstGeom>
+              <a:blipFill>
+                <a:blip r:embed="rId8"/>
+                <a:stretch>
+                  <a:fillRect l="-1705" t="-56667" b="-60000"/>
+                </a:stretch>
+              </a:blipFill>
+            </p:spPr>
+            <p:txBody>
+              <a:bodyPr/>
+              <a:lstStyle/>
+              <a:p>
+                <a:r>
+                  <a:rPr lang="ja-JP" altLang="en-US">
+                    <a:noFill/>
+                  </a:rPr>
+                  <a:t> </a:t>
+                </a:r>
+              </a:p>
+            </p:txBody>
+          </p:sp>
+        </mc:Fallback>
+      </mc:AlternateContent>
+      <mc:AlternateContent xmlns:mc="http://schemas.openxmlformats.org/markup-compatibility/2006">
+        <mc:Choice xmlns:a14="http://schemas.microsoft.com/office/drawing/2010/main" Requires="a14">
+          <p:sp>
+            <p:nvSpPr>
+              <p:cNvPr id="921" name="EQ 921"/>
+              <p:cNvSpPr txBox="1"/>
+              <p:nvPr/>
+            </p:nvSpPr>
+            <p:spPr>
+              <a:xfrm>
+                <a:off x="8890000" y="4622800"/>
+                <a:ext cx="2667000" cy="381000"/>
+              </a:xfrm>
+              <a:prstGeom prst="rect">
+                <a:avLst/>
+              </a:prstGeom>
+              <a:noFill/>
+            </p:spPr>
+            <p:txBody>
+              <a:bodyPr wrap="square" lIns="0" tIns="0" rIns="0" bIns="0"/>
+              <a:lstStyle/>
+              <a:p>
+                <a:pPr algn="l"/>
+                <a14:m>
+                  <m:oMathPara xmlns:m="http://schemas.openxmlformats.org/officeDocument/2006/math">
+                    <m:oMathParaPr>
+                      <m:jc m:val="left"/>
+                    </m:oMathParaPr>
+                    <m:oMath>
+                      <m:r>
+                        <a:rPr lang="en-US" sz="1700" dirty="0">
+                          <a:solidFill>
+                            <a:srgbClr val="8A2E3B"/>
+                          </a:solidFill>
+                          <a:latin typeface="Cambria Math" panose="02040503050406030204" pitchFamily="18" charset="0"/>
+                        </a:rPr>
+                        <m:t>𝐸</m:t>
+                      </m:r>
+                      <m:r>
+                        <a:rPr lang="en-US" sz="1700" dirty="0">
+                          <a:solidFill>
+                            <a:srgbClr val="1A2744"/>
+                          </a:solidFill>
+                          <a:latin typeface="Cambria Math" panose="02040503050406030204" pitchFamily="18" charset="0"/>
+                        </a:rPr>
+                        <m:t> ∠ </m:t>
+                      </m:r>
+                      <m:r>
+                        <a:rPr lang="en-US" sz="1700" dirty="0">
+                          <a:solidFill>
+                            <a:srgbClr val="8A2E3B"/>
+                          </a:solidFill>
+                          <a:latin typeface="Cambria Math" panose="02040503050406030204" pitchFamily="18" charset="0"/>
+                        </a:rPr>
+                        <m:t>𝛿</m:t>
+                      </m:r>
+                      <m:r>
+                        <a:rPr lang="en-US" sz="1700" dirty="0">
+                          <a:solidFill>
+                            <a:srgbClr val="1A2744"/>
+                          </a:solidFill>
+                          <a:latin typeface="Cambria Math" panose="02040503050406030204" pitchFamily="18" charset="0"/>
+                        </a:rPr>
+                        <m:t> = </m:t>
+                      </m:r>
+                      <m:r>
+                        <a:rPr lang="en-US" sz="1700" dirty="0">
+                          <a:solidFill>
+                            <a:srgbClr val="1A2744"/>
+                          </a:solidFill>
+                          <a:latin typeface="Cambria Math" panose="02040503050406030204" pitchFamily="18" charset="0"/>
+                        </a:rPr>
+                        <m:t>𝑉</m:t>
+                      </m:r>
+                      <m:r>
+                        <a:rPr lang="en-US" sz="1700" dirty="0">
+                          <a:solidFill>
+                            <a:srgbClr val="1A2744"/>
+                          </a:solidFill>
+                          <a:latin typeface="Cambria Math" panose="02040503050406030204" pitchFamily="18" charset="0"/>
+                        </a:rPr>
+                        <m:t> + </m:t>
+                      </m:r>
+                      <m:r>
+                        <m:rPr>
+                          <m:sty m:val="p"/>
+                        </m:rPr>
+                        <a:rPr lang="en-US" sz="1700" dirty="0">
+                          <a:solidFill>
+                            <a:srgbClr val="1A2744"/>
+                          </a:solidFill>
+                          <a:latin typeface="Cambria Math" panose="02040503050406030204" pitchFamily="18" charset="0"/>
+                        </a:rPr>
+                        <m:t>j</m:t>
+                      </m:r>
+                      <m:r>
+                        <a:rPr lang="en-US" sz="1700" dirty="0">
+                          <a:solidFill>
+                            <a:srgbClr val="1A2744"/>
+                          </a:solidFill>
+                          <a:latin typeface="Cambria Math" panose="02040503050406030204" pitchFamily="18" charset="0"/>
+                        </a:rPr>
+                        <m:t> </m:t>
+                      </m:r>
+                      <m:sSub>
+                        <m:sSubPr>
+                          <m:ctrlPr>
+                            <a:rPr lang="en-US" sz="1700" dirty="0">
+                              <a:solidFill>
+                                <a:srgbClr val="1A2744"/>
+                              </a:solidFill>
+                              <a:latin typeface="Cambria Math" panose="02040503050406030204" pitchFamily="18" charset="0"/>
+                            </a:rPr>
+                          </m:ctrlPr>
+                        </m:sSubPr>
+                        <m:e>
+                          <m:r>
+                            <a:rPr lang="en-US" sz="1700" dirty="0">
+                              <a:solidFill>
+                                <a:srgbClr val="1A2744"/>
+                              </a:solidFill>
+                              <a:latin typeface="Cambria Math" panose="02040503050406030204" pitchFamily="18" charset="0"/>
+                            </a:rPr>
+                            <m:t>𝑥</m:t>
+                          </m:r>
+                          <m:r>
+                            <a:rPr lang="en-US" sz="1700" dirty="0">
+                              <a:solidFill>
+                                <a:srgbClr val="1A2744"/>
+                              </a:solidFill>
+                              <a:latin typeface="Cambria Math" panose="02040503050406030204" pitchFamily="18" charset="0"/>
+                            </a:rPr>
+                            <m:t>″</m:t>
+                          </m:r>
+                        </m:e>
+                        <m:sub>
+                          <m:r>
+                            <a:rPr lang="en-US" sz="1700" dirty="0">
+                              <a:solidFill>
+                                <a:srgbClr val="1A2744"/>
+                              </a:solidFill>
+                              <a:latin typeface="Cambria Math" panose="02040503050406030204" pitchFamily="18" charset="0"/>
+                            </a:rPr>
+                            <m:t>𝑑</m:t>
+                          </m:r>
+                        </m:sub>
+                      </m:sSub>
+                      <m:r>
+                        <a:rPr lang="en-US" sz="1700" dirty="0">
+                          <a:solidFill>
+                            <a:srgbClr val="1A2744"/>
+                          </a:solidFill>
+                          <a:latin typeface="Cambria Math" panose="02040503050406030204" pitchFamily="18" charset="0"/>
+                        </a:rPr>
+                        <m:t> · </m:t>
+                      </m:r>
+                      <m:r>
+                        <a:rPr lang="en-US" sz="1700" dirty="0">
+                          <a:solidFill>
+                            <a:srgbClr val="1A2744"/>
+                          </a:solidFill>
+                          <a:latin typeface="Cambria Math" panose="02040503050406030204" pitchFamily="18" charset="0"/>
+                        </a:rPr>
+                        <m:t>𝐼</m:t>
+                      </m:r>
+                    </m:oMath>
+                  </m:oMathPara>
+                </a14:m>
+                <a:endParaRPr/>
+              </a:p>
+            </p:txBody>
+          </p:sp>
+        </mc:Choice>
+        <mc:Fallback>
+          <p:sp>
+            <p:nvSpPr>
+              <p:cNvPr id="921" name="EQ 921"/>
+              <p:cNvSpPr txBox="1">
+                <a:spLocks noRot="1" noChangeAspect="1" noMove="1" noResize="1" noEditPoints="1" noAdjustHandles="1" noChangeArrowheads="1" noChangeShapeType="1" noTextEdit="1"/>
+              </p:cNvSpPr>
+              <p:nvPr/>
+            </p:nvSpPr>
+            <p:spPr>
+              <a:xfrm>
+                <a:off x="8890000" y="4622800"/>
+                <a:ext cx="2667000" cy="381000"/>
+              </a:xfrm>
+              <a:prstGeom prst="rect">
+                <a:avLst/>
+              </a:prstGeom>
+              <a:blipFill>
+                <a:blip r:embed="rId9"/>
+                <a:stretch>
+                  <a:fillRect l="-2358" t="-3125"/>
+                </a:stretch>
+              </a:blipFill>
+            </p:spPr>
+            <p:txBody>
+              <a:bodyPr/>
+              <a:lstStyle/>
+              <a:p>
+                <a:r>
+                  <a:rPr lang="ja-JP" altLang="en-US">
+                    <a:noFill/>
+                  </a:rPr>
+                  <a:t> </a:t>
+                </a:r>
+              </a:p>
+            </p:txBody>
+          </p:sp>
+        </mc:Fallback>
+      </mc:AlternateContent>
     </p:spTree>
     <p:extLst>
       <p:ext uri="{BB962C8B-B14F-4D97-AF65-F5344CB8AC3E}">
-        <p14:creationId xmlns:p14="http://schemas.microsoft.com/office/powerpoint/2010/main" val="3480433514"/>
+        <p14:creationId xmlns:p14="http://schemas.microsoft.com/office/powerpoint/2010/main" val="4258617945"/>
       </p:ext>
     </p:extLst>
   </p:cSld>
@@ -16953,15 +21736,15 @@
         </p:nvPicPr>
         <p:blipFill>
           <a:blip r:embed="rId2"/>
-          <a:srcRect l="22000" t="5000" r="16000" b="7000"/>
+          <a:srcRect l="-769" t="-628" r="13230" b="-652"/>
           <a:stretch>
             <a:fillRect/>
           </a:stretch>
         </p:blipFill>
         <p:spPr>
           <a:xfrm>
-            <a:off x="7315438" y="558800"/>
-            <a:ext cx="3631725" cy="5257800"/>
+            <a:off x="6248247" y="-126073"/>
+            <a:ext cx="5918200" cy="6984073"/>
           </a:xfrm>
           <a:prstGeom prst="rect">
             <a:avLst/>
@@ -17308,8 +22091,8 @@
         </p:nvSpPr>
         <p:spPr>
           <a:xfrm>
-            <a:off x="6070600" y="5892800"/>
-            <a:ext cx="6121400" cy="254000"/>
+            <a:off x="7246293" y="5638800"/>
+            <a:ext cx="4945402" cy="254000"/>
           </a:xfrm>
           <a:prstGeom prst="rect">
             <a:avLst/>
@@ -17333,6 +22116,37 @@
           </a:p>
         </p:txBody>
       </p:sp>
+      <p:pic>
+        <p:nvPicPr>
+          <p:cNvPr id="8" name="Picture 5" descr="fig_swing_map_slide.jpg">
+            <a:extLst>
+              <a:ext uri="{FF2B5EF4-FFF2-40B4-BE49-F238E27FC236}">
+                <a16:creationId xmlns:a16="http://schemas.microsoft.com/office/drawing/2014/main" id="{93098576-2AD6-43D5-3615-A19F73E2212B}"/>
+              </a:ext>
+            </a:extLst>
+          </p:cNvPr>
+          <p:cNvPicPr>
+            <a:picLocks noChangeAspect="1"/>
+          </p:cNvPicPr>
+          <p:nvPr/>
+        </p:nvPicPr>
+        <p:blipFill rotWithShape="1">
+          <a:blip r:embed="rId2"/>
+          <a:srcRect l="87038" t="14842" r="603" b="13801"/>
+          <a:stretch>
+            <a:fillRect/>
+          </a:stretch>
+        </p:blipFill>
+        <p:spPr>
+          <a:xfrm>
+            <a:off x="11150371" y="1853799"/>
+            <a:ext cx="685800" cy="4039001"/>
+          </a:xfrm>
+          <a:prstGeom prst="rect">
+            <a:avLst/>
+          </a:prstGeom>
+        </p:spPr>
+      </p:pic>
     </p:spTree>
     <p:extLst>
       <p:ext uri="{BB962C8B-B14F-4D97-AF65-F5344CB8AC3E}">

--- a/docs/slides/AGJ_dynamics_2026-08-17_genspark.pptx
+++ b/docs/slides/AGJ_dynamics_2026-08-17_genspark.pptx
@@ -11,15 +11,15 @@
     <p:sldId id="341" r:id="rId5"/>
     <p:sldId id="372" r:id="rId6"/>
     <p:sldId id="345" r:id="rId7"/>
-    <p:sldId id="373" r:id="rId8"/>
+    <p:sldId id="374" r:id="rId8"/>
     <p:sldId id="346" r:id="rId9"/>
-    <p:sldId id="347" r:id="rId10"/>
+    <p:sldId id="375" r:id="rId10"/>
     <p:sldId id="324" r:id="rId11"/>
     <p:sldId id="348" r:id="rId12"/>
     <p:sldId id="328" r:id="rId13"/>
-    <p:sldId id="330" r:id="rId14"/>
+    <p:sldId id="377" r:id="rId14"/>
     <p:sldId id="331" r:id="rId15"/>
-    <p:sldId id="367" r:id="rId16"/>
+    <p:sldId id="384" r:id="rId16"/>
   </p:sldIdLst>
   <p:sldSz cx="12192000" cy="6858000"/>
   <p:notesSz cx="6858000" cy="9144000"/>
@@ -6908,136 +6908,489 @@
           </a:p>
         </p:txBody>
       </p:sp>
-      <p:sp>
-        <p:nvSpPr>
-          <p:cNvPr id="5" name="Rectangle 4"/>
-          <p:cNvSpPr/>
-          <p:nvPr/>
-        </p:nvSpPr>
-        <p:spPr>
-          <a:xfrm>
-            <a:off x="546100" y="1524000"/>
-            <a:ext cx="5664200" cy="1422400"/>
-          </a:xfrm>
-          <a:ln/>
-          <a:effectLst/>
-        </p:spPr>
-        <p:style>
-          <a:lnRef idx="1">
-            <a:schemeClr val="accent1"/>
-          </a:lnRef>
-          <a:fillRef idx="0">
-            <a:schemeClr val="accent1"/>
-          </a:fillRef>
-          <a:effectRef idx="2">
-            <a:schemeClr val="accent1"/>
-          </a:effectRef>
-          <a:fontRef idx="minor">
-            <a:schemeClr val="lt1"/>
-          </a:fontRef>
-        </p:style>
-        <p:txBody>
-          <a:bodyPr wrap="square" lIns="228600" tIns="152400" rIns="152400" bIns="152400" rtlCol="0" anchor="ctr"/>
-          <a:lstStyle/>
-          <a:p>
-            <a:pPr algn="l">
-              <a:spcAft>
-                <a:spcPts val="600"/>
-              </a:spcAft>
-            </a:pPr>
-            <a:r>
-              <a:rPr lang="en-US" sz="1700" dirty="0">
-                <a:solidFill>
-                  <a:srgbClr val="1A2744"/>
-                </a:solidFill>
-                <a:latin typeface="Cambria Math"/>
-              </a:rPr>
-              <a:t>安定 ⇔ Zgrid(jω) / Zinv(jω) がナイキスト判別を満たす</a:t>
-            </a:r>
-          </a:p>
-          <a:p>
-            <a:pPr algn="l">
-              <a:lnSpc>
-                <a:spcPct val="135000"/>
-              </a:lnSpc>
-            </a:pPr>
-            <a:r>
-              <a:rPr lang="ja-JP" sz="1400" dirty="0">
-                <a:solidFill>
-                  <a:srgbClr val="5B6470"/>
-                </a:solidFill>
-                <a:latin typeface="Calibri"/>
-              </a:rPr>
-              <a:t>Middlebrook(1976) → Sun(2011)の系統連系版。Zgrid(jω)はYbusの周波数依存化から各バスで計算 — 様式5の実R/Xが効く。</a:t>
-            </a:r>
-          </a:p>
-        </p:txBody>
-      </p:sp>
-      <p:sp>
-        <p:nvSpPr>
-          <p:cNvPr id="6" name="Rectangle 5"/>
-          <p:cNvSpPr/>
-          <p:nvPr/>
-        </p:nvSpPr>
-        <p:spPr>
-          <a:xfrm>
-            <a:off x="546100" y="3098800"/>
-            <a:ext cx="5664200" cy="1422400"/>
-          </a:xfrm>
-          <a:ln/>
-          <a:effectLst/>
-        </p:spPr>
-        <p:style>
-          <a:lnRef idx="1">
-            <a:schemeClr val="accent1"/>
-          </a:lnRef>
-          <a:fillRef idx="0">
-            <a:schemeClr val="accent1"/>
-          </a:fillRef>
-          <a:effectRef idx="2">
-            <a:schemeClr val="accent1"/>
-          </a:effectRef>
-          <a:fontRef idx="minor">
-            <a:schemeClr val="lt1"/>
-          </a:fontRef>
-        </p:style>
-        <p:txBody>
-          <a:bodyPr wrap="square" lIns="228600" tIns="152400" rIns="152400" bIns="152400" rtlCol="0" anchor="ctr"/>
-          <a:lstStyle/>
-          <a:p>
-            <a:pPr algn="l">
-              <a:spcAft>
-                <a:spcPts val="600"/>
-              </a:spcAft>
-            </a:pPr>
-            <a:r>
-              <a:rPr lang="en-US" sz="1700" dirty="0">
-                <a:solidFill>
-                  <a:srgbClr val="1A2744"/>
-                </a:solidFill>
-                <a:latin typeface="Cambria Math"/>
-              </a:rPr>
-              <a:t>Re[ Zinv(jω) ] &lt; 0 の帯域 = 負性抵抗</a:t>
-            </a:r>
-          </a:p>
-          <a:p>
-            <a:pPr algn="l">
-              <a:lnSpc>
-                <a:spcPct val="135000"/>
-              </a:lnSpc>
-            </a:pPr>
-            <a:r>
-              <a:rPr lang="ja-JP" sz="1400" dirty="0">
-                <a:solidFill>
-                  <a:srgbClr val="5B6470"/>
-                </a:solidFill>
-                <a:latin typeface="Calibri"/>
-              </a:rPr>
-              <a:t>インバータは制御帯域(PLL)・定電力負荷で負の抵抗に見える。弱い系統 × 負性帯域の重なり = 共振・発振の条件。</a:t>
-            </a:r>
-          </a:p>
-        </p:txBody>
-      </p:sp>
+      <mc:AlternateContent xmlns:mc="http://schemas.openxmlformats.org/markup-compatibility/2006">
+        <mc:Choice xmlns:a14="http://schemas.microsoft.com/office/drawing/2010/main" Requires="a14">
+          <p:sp>
+            <p:nvSpPr>
+              <p:cNvPr id="5" name="Rectangle 4"/>
+              <p:cNvSpPr/>
+              <p:nvPr/>
+            </p:nvSpPr>
+            <p:spPr>
+              <a:xfrm>
+                <a:off x="546100" y="1524000"/>
+                <a:ext cx="5664200" cy="1422400"/>
+              </a:xfrm>
+              <a:ln/>
+              <a:effectLst/>
+            </p:spPr>
+            <p:style>
+              <a:lnRef idx="1">
+                <a:schemeClr val="accent1"/>
+              </a:lnRef>
+              <a:fillRef idx="0">
+                <a:schemeClr val="accent1"/>
+              </a:fillRef>
+              <a:effectRef idx="2">
+                <a:schemeClr val="accent1"/>
+              </a:effectRef>
+              <a:fontRef idx="minor">
+                <a:schemeClr val="lt1"/>
+              </a:fontRef>
+            </p:style>
+            <p:txBody>
+              <a:bodyPr wrap="square" lIns="228600" tIns="152400" rIns="152400" bIns="152400" rtlCol="0" anchor="ctr"/>
+              <a:lstStyle/>
+              <a:p>
+                <a:pPr algn="l"/>
+                <a:r>
+                  <a:rPr lang="ja-JP" sz="1600" dirty="0">
+                    <a:solidFill>
+                      <a:srgbClr val="1A2744"/>
+                    </a:solidFill>
+                    <a:latin typeface="Calibri"/>
+                  </a:rPr>
+                  <a:t>安定 ⇔ </a:t>
+                </a:r>
+                <a14:m>
+                  <m:oMath xmlns:m="http://schemas.openxmlformats.org/officeDocument/2006/math">
+                    <m:f>
+                      <m:fPr>
+                        <m:ctrlPr>
+                          <a:rPr lang="en-US" sz="1600" i="1" dirty="0">
+                            <a:solidFill>
+                              <a:srgbClr val="8A2E3B"/>
+                            </a:solidFill>
+                            <a:latin typeface="Cambria Math" panose="02040503050406030204" pitchFamily="18" charset="0"/>
+                          </a:rPr>
+                        </m:ctrlPr>
+                      </m:fPr>
+                      <m:num>
+                        <m:sSub>
+                          <m:sSubPr>
+                            <m:ctrlPr>
+                              <a:rPr lang="en-US" sz="1600" dirty="0">
+                                <a:solidFill>
+                                  <a:srgbClr val="8A2E3B"/>
+                                </a:solidFill>
+                                <a:latin typeface="Cambria Math" panose="02040503050406030204" pitchFamily="18" charset="0"/>
+                              </a:rPr>
+                            </m:ctrlPr>
+                          </m:sSubPr>
+                          <m:e>
+                            <m:r>
+                              <a:rPr lang="en-US" sz="1600" dirty="0">
+                                <a:solidFill>
+                                  <a:srgbClr val="8A2E3B"/>
+                                </a:solidFill>
+                                <a:latin typeface="Cambria Math" panose="02040503050406030204" pitchFamily="18" charset="0"/>
+                              </a:rPr>
+                              <m:t>𝑍</m:t>
+                            </m:r>
+                          </m:e>
+                          <m:sub>
+                            <m:r>
+                              <a:rPr lang="en-US" sz="1600" dirty="0">
+                                <a:solidFill>
+                                  <a:srgbClr val="8A2E3B"/>
+                                </a:solidFill>
+                                <a:latin typeface="Cambria Math" panose="02040503050406030204" pitchFamily="18" charset="0"/>
+                              </a:rPr>
+                              <m:t>𝑔𝑟𝑖𝑑</m:t>
+                            </m:r>
+                          </m:sub>
+                        </m:sSub>
+                        <m:r>
+                          <a:rPr lang="en-US" sz="1600" dirty="0">
+                            <a:solidFill>
+                              <a:srgbClr val="1A2744"/>
+                            </a:solidFill>
+                            <a:latin typeface="Cambria Math" panose="02040503050406030204" pitchFamily="18" charset="0"/>
+                          </a:rPr>
+                          <m:t>(</m:t>
+                        </m:r>
+                        <m:r>
+                          <m:rPr>
+                            <m:sty m:val="p"/>
+                          </m:rPr>
+                          <a:rPr lang="en-US" sz="1600" dirty="0">
+                            <a:solidFill>
+                              <a:srgbClr val="1A2744"/>
+                            </a:solidFill>
+                            <a:latin typeface="Cambria Math" panose="02040503050406030204" pitchFamily="18" charset="0"/>
+                          </a:rPr>
+                          <m:t>j</m:t>
+                        </m:r>
+                        <m:r>
+                          <a:rPr lang="en-US" sz="1600" dirty="0">
+                            <a:solidFill>
+                              <a:srgbClr val="1A2744"/>
+                            </a:solidFill>
+                            <a:latin typeface="Cambria Math" panose="02040503050406030204" pitchFamily="18" charset="0"/>
+                          </a:rPr>
+                          <m:t>𝜔</m:t>
+                        </m:r>
+                        <m:r>
+                          <a:rPr lang="en-US" sz="1600" dirty="0">
+                            <a:solidFill>
+                              <a:srgbClr val="1A2744"/>
+                            </a:solidFill>
+                            <a:latin typeface="Cambria Math" panose="02040503050406030204" pitchFamily="18" charset="0"/>
+                          </a:rPr>
+                          <m:t>)</m:t>
+                        </m:r>
+                      </m:num>
+                      <m:den>
+                        <m:sSub>
+                          <m:sSubPr>
+                            <m:ctrlPr>
+                              <a:rPr lang="en-US" sz="1600" dirty="0">
+                                <a:solidFill>
+                                  <a:srgbClr val="2C5F8A"/>
+                                </a:solidFill>
+                                <a:latin typeface="Cambria Math" panose="02040503050406030204" pitchFamily="18" charset="0"/>
+                              </a:rPr>
+                            </m:ctrlPr>
+                          </m:sSubPr>
+                          <m:e>
+                            <m:r>
+                              <a:rPr lang="en-US" sz="1600" dirty="0">
+                                <a:solidFill>
+                                  <a:srgbClr val="2C5F8A"/>
+                                </a:solidFill>
+                                <a:latin typeface="Cambria Math" panose="02040503050406030204" pitchFamily="18" charset="0"/>
+                              </a:rPr>
+                              <m:t>𝑍</m:t>
+                            </m:r>
+                          </m:e>
+                          <m:sub>
+                            <m:r>
+                              <a:rPr lang="en-US" sz="1600" dirty="0">
+                                <a:solidFill>
+                                  <a:srgbClr val="2C5F8A"/>
+                                </a:solidFill>
+                                <a:latin typeface="Cambria Math" panose="02040503050406030204" pitchFamily="18" charset="0"/>
+                              </a:rPr>
+                              <m:t>𝑖𝑛𝑣</m:t>
+                            </m:r>
+                          </m:sub>
+                        </m:sSub>
+                        <m:r>
+                          <a:rPr lang="en-US" sz="1600" dirty="0">
+                            <a:solidFill>
+                              <a:srgbClr val="1A2744"/>
+                            </a:solidFill>
+                            <a:latin typeface="Cambria Math" panose="02040503050406030204" pitchFamily="18" charset="0"/>
+                          </a:rPr>
+                          <m:t>(</m:t>
+                        </m:r>
+                        <m:r>
+                          <m:rPr>
+                            <m:sty m:val="p"/>
+                          </m:rPr>
+                          <a:rPr lang="en-US" sz="1600" dirty="0">
+                            <a:solidFill>
+                              <a:srgbClr val="1A2744"/>
+                            </a:solidFill>
+                            <a:latin typeface="Cambria Math" panose="02040503050406030204" pitchFamily="18" charset="0"/>
+                          </a:rPr>
+                          <m:t>j</m:t>
+                        </m:r>
+                        <m:r>
+                          <a:rPr lang="en-US" sz="1600" dirty="0">
+                            <a:solidFill>
+                              <a:srgbClr val="1A2744"/>
+                            </a:solidFill>
+                            <a:latin typeface="Cambria Math" panose="02040503050406030204" pitchFamily="18" charset="0"/>
+                          </a:rPr>
+                          <m:t>𝜔</m:t>
+                        </m:r>
+                        <m:r>
+                          <a:rPr lang="en-US" sz="1600" dirty="0">
+                            <a:solidFill>
+                              <a:srgbClr val="1A2744"/>
+                            </a:solidFill>
+                            <a:latin typeface="Cambria Math" panose="02040503050406030204" pitchFamily="18" charset="0"/>
+                          </a:rPr>
+                          <m:t>)</m:t>
+                        </m:r>
+                      </m:den>
+                    </m:f>
+                  </m:oMath>
+                </a14:m>
+                <a:r>
+                  <a:rPr lang="ja-JP" sz="1600" dirty="0">
+                    <a:solidFill>
+                      <a:srgbClr val="1A2744"/>
+                    </a:solidFill>
+                    <a:latin typeface="Calibri"/>
+                  </a:rPr>
+                  <a:t> がナイキスト判別を満たす</a:t>
+                </a:r>
+              </a:p>
+              <a:p>
+                <a:pPr algn="l">
+                  <a:lnSpc>
+                    <a:spcPct val="130000"/>
+                  </a:lnSpc>
+                  <a:spcBef>
+                    <a:spcPts val="600"/>
+                  </a:spcBef>
+                </a:pPr>
+                <a:r>
+                  <a:rPr lang="ja-JP" sz="1400" dirty="0">
+                    <a:solidFill>
+                      <a:srgbClr val="5B6470"/>
+                    </a:solidFill>
+                    <a:latin typeface="Calibri"/>
+                  </a:rPr>
+                  <a:t>Middlebrook(1976) → Sun(2011)の系統連系版。Zgrid(jω)はYbusの周波数依存化から各バスで計算 — 様式5の実R/Xが効く。</a:t>
+                </a:r>
+              </a:p>
+            </p:txBody>
+          </p:sp>
+        </mc:Choice>
+        <mc:Fallback>
+          <p:sp>
+            <p:nvSpPr>
+              <p:cNvPr id="5" name="Rectangle 4"/>
+              <p:cNvSpPr>
+                <a:spLocks noRot="1" noChangeAspect="1" noMove="1" noResize="1" noEditPoints="1" noAdjustHandles="1" noChangeArrowheads="1" noChangeShapeType="1" noTextEdit="1"/>
+              </p:cNvSpPr>
+              <p:nvPr/>
+            </p:nvSpPr>
+            <p:spPr>
+              <a:xfrm>
+                <a:off x="546100" y="1524000"/>
+                <a:ext cx="5664200" cy="1422400"/>
+              </a:xfrm>
+              <a:blipFill>
+                <a:blip r:embed="rId2"/>
+                <a:stretch>
+                  <a:fillRect/>
+                </a:stretch>
+              </a:blipFill>
+              <a:ln/>
+              <a:effectLst/>
+            </p:spPr>
+            <p:txBody>
+              <a:bodyPr/>
+              <a:lstStyle/>
+              <a:p>
+                <a:r>
+                  <a:rPr lang="ja-JP" altLang="en-US">
+                    <a:noFill/>
+                  </a:rPr>
+                  <a:t> </a:t>
+                </a:r>
+              </a:p>
+            </p:txBody>
+          </p:sp>
+        </mc:Fallback>
+      </mc:AlternateContent>
+      <mc:AlternateContent xmlns:mc="http://schemas.openxmlformats.org/markup-compatibility/2006">
+        <mc:Choice xmlns:a14="http://schemas.microsoft.com/office/drawing/2010/main" Requires="a14">
+          <p:sp>
+            <p:nvSpPr>
+              <p:cNvPr id="6" name="Rectangle 5"/>
+              <p:cNvSpPr/>
+              <p:nvPr/>
+            </p:nvSpPr>
+            <p:spPr>
+              <a:xfrm>
+                <a:off x="546100" y="3098800"/>
+                <a:ext cx="5664200" cy="1422400"/>
+              </a:xfrm>
+              <a:ln/>
+              <a:effectLst/>
+            </p:spPr>
+            <p:style>
+              <a:lnRef idx="1">
+                <a:schemeClr val="accent1"/>
+              </a:lnRef>
+              <a:fillRef idx="0">
+                <a:schemeClr val="accent1"/>
+              </a:fillRef>
+              <a:effectRef idx="2">
+                <a:schemeClr val="accent1"/>
+              </a:effectRef>
+              <a:fontRef idx="minor">
+                <a:schemeClr val="lt1"/>
+              </a:fontRef>
+            </p:style>
+            <p:txBody>
+              <a:bodyPr wrap="square" lIns="228600" tIns="152400" rIns="152400" bIns="152400" rtlCol="0" anchor="ctr"/>
+              <a:lstStyle/>
+              <a:p>
+                <a:pPr algn="l"/>
+                <a14:m>
+                  <m:oMath xmlns:m="http://schemas.openxmlformats.org/officeDocument/2006/math">
+                    <m:r>
+                      <m:rPr>
+                        <m:sty m:val="p"/>
+                      </m:rPr>
+                      <a:rPr lang="en-US" sz="1700" dirty="0">
+                        <a:solidFill>
+                          <a:srgbClr val="1A2744"/>
+                        </a:solidFill>
+                        <a:latin typeface="Cambria Math" panose="02040503050406030204" pitchFamily="18" charset="0"/>
+                      </a:rPr>
+                      <m:t>Re</m:t>
+                    </m:r>
+                    <m:r>
+                      <a:rPr lang="en-US" sz="1700" dirty="0">
+                        <a:solidFill>
+                          <a:srgbClr val="1A2744"/>
+                        </a:solidFill>
+                        <a:latin typeface="Cambria Math" panose="02040503050406030204" pitchFamily="18" charset="0"/>
+                      </a:rPr>
+                      <m:t>[ </m:t>
+                    </m:r>
+                    <m:sSub>
+                      <m:sSubPr>
+                        <m:ctrlPr>
+                          <a:rPr lang="en-US" sz="1700" dirty="0">
+                            <a:solidFill>
+                              <a:srgbClr val="2C5F8A"/>
+                            </a:solidFill>
+                            <a:latin typeface="Cambria Math" panose="02040503050406030204" pitchFamily="18" charset="0"/>
+                          </a:rPr>
+                        </m:ctrlPr>
+                      </m:sSubPr>
+                      <m:e>
+                        <m:r>
+                          <a:rPr lang="en-US" sz="1700" dirty="0">
+                            <a:solidFill>
+                              <a:srgbClr val="2C5F8A"/>
+                            </a:solidFill>
+                            <a:latin typeface="Cambria Math" panose="02040503050406030204" pitchFamily="18" charset="0"/>
+                          </a:rPr>
+                          <m:t>𝑍</m:t>
+                        </m:r>
+                      </m:e>
+                      <m:sub>
+                        <m:r>
+                          <a:rPr lang="en-US" sz="1700" dirty="0">
+                            <a:solidFill>
+                              <a:srgbClr val="2C5F8A"/>
+                            </a:solidFill>
+                            <a:latin typeface="Cambria Math" panose="02040503050406030204" pitchFamily="18" charset="0"/>
+                          </a:rPr>
+                          <m:t>𝑖𝑛𝑣</m:t>
+                        </m:r>
+                      </m:sub>
+                    </m:sSub>
+                    <m:r>
+                      <a:rPr lang="en-US" sz="1700" dirty="0">
+                        <a:solidFill>
+                          <a:srgbClr val="1A2744"/>
+                        </a:solidFill>
+                        <a:latin typeface="Cambria Math" panose="02040503050406030204" pitchFamily="18" charset="0"/>
+                      </a:rPr>
+                      <m:t>(</m:t>
+                    </m:r>
+                    <m:r>
+                      <m:rPr>
+                        <m:sty m:val="p"/>
+                      </m:rPr>
+                      <a:rPr lang="en-US" sz="1700" dirty="0">
+                        <a:solidFill>
+                          <a:srgbClr val="1A2744"/>
+                        </a:solidFill>
+                        <a:latin typeface="Cambria Math" panose="02040503050406030204" pitchFamily="18" charset="0"/>
+                      </a:rPr>
+                      <m:t>j</m:t>
+                    </m:r>
+                    <m:r>
+                      <a:rPr lang="en-US" sz="1700" dirty="0">
+                        <a:solidFill>
+                          <a:srgbClr val="1A2744"/>
+                        </a:solidFill>
+                        <a:latin typeface="Cambria Math" panose="02040503050406030204" pitchFamily="18" charset="0"/>
+                      </a:rPr>
+                      <m:t>𝜔</m:t>
+                    </m:r>
+                    <m:r>
+                      <a:rPr lang="en-US" sz="1700" dirty="0">
+                        <a:solidFill>
+                          <a:srgbClr val="1A2744"/>
+                        </a:solidFill>
+                        <a:latin typeface="Cambria Math" panose="02040503050406030204" pitchFamily="18" charset="0"/>
+                      </a:rPr>
+                      <m:t>) ] &lt; 0</m:t>
+                    </m:r>
+                  </m:oMath>
+                </a14:m>
+                <a:r>
+                  <a:rPr lang="ja-JP" sz="1600" dirty="0">
+                    <a:solidFill>
+                      <a:srgbClr val="1A2744"/>
+                    </a:solidFill>
+                    <a:latin typeface="Calibri"/>
+                  </a:rPr>
+                  <a:t>　の帯域 = 負性抵抗</a:t>
+                </a:r>
+              </a:p>
+              <a:p>
+                <a:pPr algn="l">
+                  <a:lnSpc>
+                    <a:spcPct val="130000"/>
+                  </a:lnSpc>
+                  <a:spcBef>
+                    <a:spcPts val="600"/>
+                  </a:spcBef>
+                </a:pPr>
+                <a:r>
+                  <a:rPr lang="ja-JP" sz="1400" dirty="0">
+                    <a:solidFill>
+                      <a:srgbClr val="5B6470"/>
+                    </a:solidFill>
+                    <a:latin typeface="Calibri"/>
+                  </a:rPr>
+                  <a:t>インバータは制御帯域(PLL)・定電力負荷で負の抵抗に見える。弱い系統 × 負性帯域の重なり = 共振・発振の条件。</a:t>
+                </a:r>
+              </a:p>
+            </p:txBody>
+          </p:sp>
+        </mc:Choice>
+        <mc:Fallback>
+          <p:sp>
+            <p:nvSpPr>
+              <p:cNvPr id="6" name="Rectangle 5"/>
+              <p:cNvSpPr>
+                <a:spLocks noRot="1" noChangeAspect="1" noMove="1" noResize="1" noEditPoints="1" noAdjustHandles="1" noChangeArrowheads="1" noChangeShapeType="1" noTextEdit="1"/>
+              </p:cNvSpPr>
+              <p:nvPr/>
+            </p:nvSpPr>
+            <p:spPr>
+              <a:xfrm>
+                <a:off x="546100" y="3098800"/>
+                <a:ext cx="5664200" cy="1422400"/>
+              </a:xfrm>
+              <a:blipFill>
+                <a:blip r:embed="rId3"/>
+                <a:stretch>
+                  <a:fillRect/>
+                </a:stretch>
+              </a:blipFill>
+              <a:ln/>
+              <a:effectLst/>
+            </p:spPr>
+            <p:txBody>
+              <a:bodyPr/>
+              <a:lstStyle/>
+              <a:p>
+                <a:r>
+                  <a:rPr lang="ja-JP" altLang="en-US">
+                    <a:noFill/>
+                  </a:rPr>
+                  <a:t> </a:t>
+                </a:r>
+              </a:p>
+            </p:txBody>
+          </p:sp>
+        </mc:Fallback>
+      </mc:AlternateContent>
       <p:graphicFrame>
         <p:nvGraphicFramePr>
           <p:cNvPr id="7" name="Table 6"/>
@@ -7047,7 +7400,7 @@
           <p:nvPr>
             <p:extLst>
               <p:ext uri="{D42A27DB-BD31-4B8C-83A1-F6EECF244321}">
-                <p14:modId xmlns:p14="http://schemas.microsoft.com/office/powerpoint/2010/main" val="2270424832"/>
+                <p14:modId xmlns:p14="http://schemas.microsoft.com/office/powerpoint/2010/main" val="1421096436"/>
               </p:ext>
             </p:extLst>
           </p:nvPr>
@@ -7070,14 +7423,14 @@
                     </a:ext>
                   </a:extLst>
                 </a:gridCol>
-                <a:gridCol w="2095500">
+                <a:gridCol w="2311400">
                   <a:extLst>
                     <a:ext uri="{9D8B030D-6E8A-4147-A177-3AD203B41FA5}">
                       <a16:colId xmlns:a16="http://schemas.microsoft.com/office/drawing/2014/main" val="20001"/>
                     </a:ext>
                   </a:extLst>
                 </a:gridCol>
-                <a:gridCol w="2095500">
+                <a:gridCol w="1879600">
                   <a:extLst>
                     <a:ext uri="{9D8B030D-6E8A-4147-A177-3AD203B41FA5}">
                       <a16:colId xmlns:a16="http://schemas.microsoft.com/office/drawing/2014/main" val="20002"/>
@@ -8133,7 +8486,7 @@
     </p:spTree>
     <p:extLst>
       <p:ext uri="{BB962C8B-B14F-4D97-AF65-F5344CB8AC3E}">
-        <p14:creationId xmlns:p14="http://schemas.microsoft.com/office/powerpoint/2010/main" val="33097696"/>
+        <p14:creationId xmlns:p14="http://schemas.microsoft.com/office/powerpoint/2010/main" val="2094966799"/>
       </p:ext>
     </p:extLst>
   </p:cSld>
@@ -9577,8 +9930,8 @@
             </p:nvSpPr>
             <p:spPr>
               <a:xfrm>
-                <a:off x="749300" y="3022600"/>
-                <a:ext cx="2082800" cy="261610"/>
+                <a:off x="749300" y="3835400"/>
+                <a:ext cx="2082800" cy="381000"/>
               </a:xfrm>
               <a:prstGeom prst="rect">
                 <a:avLst/>
@@ -9653,8 +10006,8 @@
             </p:nvSpPr>
             <p:spPr>
               <a:xfrm>
-                <a:off x="749300" y="3022600"/>
-                <a:ext cx="2082800" cy="261610"/>
+                <a:off x="749300" y="3835400"/>
+                <a:ext cx="2082800" cy="381000"/>
               </a:xfrm>
               <a:prstGeom prst="rect">
                 <a:avLst/>
@@ -9662,7 +10015,7 @@
               <a:blipFill>
                 <a:blip r:embed="rId2"/>
                 <a:stretch>
-                  <a:fillRect l="-3636" t="-9524" b="-38095"/>
+                  <a:fillRect l="-3636" t="-3125"/>
                 </a:stretch>
               </a:blipFill>
             </p:spPr>
@@ -9689,8 +10042,8 @@
         </p:nvSpPr>
         <p:spPr>
           <a:xfrm>
-            <a:off x="749300" y="3505200"/>
-            <a:ext cx="2082800" cy="1016000"/>
+            <a:off x="749300" y="4216400"/>
+            <a:ext cx="2159000" cy="532582"/>
           </a:xfrm>
           <a:prstGeom prst="rect">
             <a:avLst/>
@@ -9705,7 +10058,26 @@
           <a:p>
             <a:pPr algn="l">
               <a:lnSpc>
-                <a:spcPct val="130000"/>
+                <a:spcPct val="118000"/>
+              </a:lnSpc>
+              <a:spcAft>
+                <a:spcPts val="200"/>
+              </a:spcAft>
+            </a:pPr>
+            <a:r>
+              <a:rPr lang="ja-JP" sz="1500" b="1" dirty="0">
+                <a:solidFill>
+                  <a:srgbClr val="1A2744"/>
+                </a:solidFill>
+                <a:latin typeface="Calibri"/>
+              </a:rPr>
+              <a:t>土台</a:t>
+            </a:r>
+          </a:p>
+          <a:p>
+            <a:pPr algn="l">
+              <a:lnSpc>
+                <a:spcPct val="118000"/>
               </a:lnSpc>
             </a:pPr>
             <a:r>
@@ -9715,7 +10087,7 @@
                 </a:solidFill>
                 <a:latin typeface="Calibri"/>
               </a:rPr>
-              <a:t>土台 — 公表R/Xと整合(1.22)</a:t>
+              <a:t>公表R/Xと整合 1.22</a:t>
             </a:r>
           </a:p>
         </p:txBody>
@@ -9730,8 +10102,8 @@
             </p:nvSpPr>
             <p:spPr>
               <a:xfrm>
-                <a:off x="3619500" y="3022600"/>
-                <a:ext cx="2082800" cy="261610"/>
+                <a:off x="3619500" y="3835400"/>
+                <a:ext cx="2082800" cy="381000"/>
               </a:xfrm>
               <a:prstGeom prst="rect">
                 <a:avLst/>
@@ -9890,8 +10262,8 @@
             </p:nvSpPr>
             <p:spPr>
               <a:xfrm>
-                <a:off x="3619500" y="3022600"/>
-                <a:ext cx="2082800" cy="261610"/>
+                <a:off x="3619500" y="3835400"/>
+                <a:ext cx="2082800" cy="381000"/>
               </a:xfrm>
               <a:prstGeom prst="rect">
                 <a:avLst/>
@@ -9899,7 +10271,7 @@
               <a:blipFill>
                 <a:blip r:embed="rId3"/>
                 <a:stretch>
-                  <a:fillRect l="-3659" t="-9524" b="-38095"/>
+                  <a:fillRect l="-3659" t="-3125"/>
                 </a:stretch>
               </a:blipFill>
             </p:spPr>
@@ -9926,8 +10298,8 @@
         </p:nvSpPr>
         <p:spPr>
           <a:xfrm>
-            <a:off x="3619500" y="3505200"/>
-            <a:ext cx="2082800" cy="1016000"/>
+            <a:off x="3619500" y="4216400"/>
+            <a:ext cx="2159000" cy="532582"/>
           </a:xfrm>
           <a:prstGeom prst="rect">
             <a:avLst/>
@@ -9942,7 +10314,26 @@
           <a:p>
             <a:pPr algn="l">
               <a:lnSpc>
-                <a:spcPct val="130000"/>
+                <a:spcPct val="118000"/>
+              </a:lnSpc>
+              <a:spcAft>
+                <a:spcPts val="200"/>
+              </a:spcAft>
+            </a:pPr>
+            <a:r>
+              <a:rPr lang="ja-JP" sz="1500" b="1" dirty="0">
+                <a:solidFill>
+                  <a:srgbClr val="1A2744"/>
+                </a:solidFill>
+                <a:latin typeface="Calibri"/>
+              </a:rPr>
+              <a:t>強さの地図</a:t>
+            </a:r>
+          </a:p>
+          <a:p>
+            <a:pPr algn="l">
+              <a:lnSpc>
+                <a:spcPct val="118000"/>
               </a:lnSpc>
             </a:pPr>
             <a:r>
@@ -9952,7 +10343,7 @@
                 </a:solidFill>
                 <a:latin typeface="Calibri"/>
               </a:rPr>
-              <a:t>強さの地図 — 物理帯に整合</a:t>
+              <a:t>物理帯に整合</a:t>
             </a:r>
           </a:p>
         </p:txBody>
@@ -9967,8 +10358,8 @@
             </p:nvSpPr>
             <p:spPr>
               <a:xfrm>
-                <a:off x="6489700" y="3022600"/>
-                <a:ext cx="2082800" cy="261610"/>
+                <a:off x="6489700" y="3835400"/>
+                <a:ext cx="2082800" cy="381000"/>
               </a:xfrm>
               <a:prstGeom prst="rect">
                 <a:avLst/>
@@ -10050,8 +10441,8 @@
             </p:nvSpPr>
             <p:spPr>
               <a:xfrm>
-                <a:off x="6489700" y="3022600"/>
-                <a:ext cx="2082800" cy="261610"/>
+                <a:off x="6489700" y="3835400"/>
+                <a:ext cx="2082800" cy="381000"/>
               </a:xfrm>
               <a:prstGeom prst="rect">
                 <a:avLst/>
@@ -10059,7 +10450,7 @@
               <a:blipFill>
                 <a:blip r:embed="rId4"/>
                 <a:stretch>
-                  <a:fillRect l="-3659" t="-4762" b="-4762"/>
+                  <a:fillRect l="-3659"/>
                 </a:stretch>
               </a:blipFill>
             </p:spPr>
@@ -10086,8 +10477,8 @@
         </p:nvSpPr>
         <p:spPr>
           <a:xfrm>
-            <a:off x="6489700" y="3505200"/>
-            <a:ext cx="2082800" cy="1016000"/>
+            <a:off x="6489700" y="4216400"/>
+            <a:ext cx="2159000" cy="532582"/>
           </a:xfrm>
           <a:prstGeom prst="rect">
             <a:avLst/>
@@ -10102,7 +10493,26 @@
           <a:p>
             <a:pPr algn="l">
               <a:lnSpc>
-                <a:spcPct val="130000"/>
+                <a:spcPct val="118000"/>
+              </a:lnSpc>
+              <a:spcAft>
+                <a:spcPts val="200"/>
+              </a:spcAft>
+            </a:pPr>
+            <a:r>
+              <a:rPr lang="ja-JP" sz="1500" b="1" dirty="0">
+                <a:solidFill>
+                  <a:srgbClr val="1A2744"/>
+                </a:solidFill>
+                <a:latin typeface="Calibri"/>
+              </a:rPr>
+              <a:t>揺れのモード</a:t>
+            </a:r>
+          </a:p>
+          <a:p>
+            <a:pPr algn="l">
+              <a:lnSpc>
+                <a:spcPct val="118000"/>
               </a:lnSpc>
             </a:pPr>
             <a:r>
@@ -10112,7 +10522,7 @@
                 </a:solidFill>
                 <a:latin typeface="Calibri"/>
               </a:rPr>
-              <a:t>揺れのモード — 文献0.4Hzを再現</a:t>
+              <a:t>文献0.4Hzを再現</a:t>
             </a:r>
           </a:p>
         </p:txBody>
@@ -10127,8 +10537,8 @@
             </p:nvSpPr>
             <p:spPr>
               <a:xfrm>
-                <a:off x="9359900" y="3022600"/>
-                <a:ext cx="2082800" cy="282963"/>
+                <a:off x="9359900" y="3835400"/>
+                <a:ext cx="2082800" cy="381000"/>
               </a:xfrm>
               <a:prstGeom prst="rect">
                 <a:avLst/>
@@ -10244,8 +10654,8 @@
             </p:nvSpPr>
             <p:spPr>
               <a:xfrm>
-                <a:off x="9359900" y="3022600"/>
-                <a:ext cx="2082800" cy="282963"/>
+                <a:off x="9359900" y="3835400"/>
+                <a:ext cx="2082800" cy="381000"/>
               </a:xfrm>
               <a:prstGeom prst="rect">
                 <a:avLst/>
@@ -10253,7 +10663,7 @@
               <a:blipFill>
                 <a:blip r:embed="rId5"/>
                 <a:stretch>
-                  <a:fillRect l="-3030" t="-4348" b="-26087"/>
+                  <a:fillRect l="-3030"/>
                 </a:stretch>
               </a:blipFill>
             </p:spPr>
@@ -10280,8 +10690,8 @@
         </p:nvSpPr>
         <p:spPr>
           <a:xfrm>
-            <a:off x="9359900" y="3505200"/>
-            <a:ext cx="2082800" cy="1016000"/>
+            <a:off x="9359900" y="4216400"/>
+            <a:ext cx="2159000" cy="532582"/>
           </a:xfrm>
           <a:prstGeom prst="rect">
             <a:avLst/>
@@ -10296,7 +10706,26 @@
           <a:p>
             <a:pPr algn="l">
               <a:lnSpc>
-                <a:spcPct val="130000"/>
+                <a:spcPct val="118000"/>
+              </a:lnSpc>
+              <a:spcAft>
+                <a:spcPts val="200"/>
+              </a:spcAft>
+            </a:pPr>
+            <a:r>
+              <a:rPr lang="ja-JP" sz="1500" b="1" dirty="0">
+                <a:solidFill>
+                  <a:srgbClr val="1A2744"/>
+                </a:solidFill>
+                <a:latin typeface="Calibri"/>
+              </a:rPr>
+              <a:t>次の一手</a:t>
+            </a:r>
+          </a:p>
+          <a:p>
+            <a:pPr algn="l">
+              <a:lnSpc>
+                <a:spcPct val="118000"/>
               </a:lnSpc>
             </a:pPr>
             <a:r>
@@ -10306,7 +10735,7 @@
                 </a:solidFill>
                 <a:latin typeface="Calibri"/>
               </a:rPr>
-              <a:t>次の一手 — IBR安定性</a:t>
+              <a:t>IBR安定性の判定</a:t>
             </a:r>
           </a:p>
         </p:txBody>
@@ -10383,93 +10812,6 @@
       </p:sp>
       <p:sp>
         <p:nvSpPr>
-          <p:cNvPr id="360" name="Arrow 0"/>
-          <p:cNvSpPr/>
-          <p:nvPr/>
-        </p:nvSpPr>
-        <p:spPr>
-          <a:xfrm>
-            <a:off x="3086100" y="3454400"/>
-            <a:ext cx="254000" cy="203200"/>
-          </a:xfrm>
-          <a:prstGeom prst="rightArrow">
-            <a:avLst/>
-          </a:prstGeom>
-          <a:solidFill>
-            <a:srgbClr val="8A2E3B"/>
-          </a:solidFill>
-          <a:ln>
-            <a:noFill/>
-          </a:ln>
-        </p:spPr>
-        <p:txBody>
-          <a:bodyPr/>
-          <a:lstStyle/>
-          <a:p>
-            <a:endParaRPr/>
-          </a:p>
-        </p:txBody>
-      </p:sp>
-      <p:sp>
-        <p:nvSpPr>
-          <p:cNvPr id="361" name="Arrow 1"/>
-          <p:cNvSpPr/>
-          <p:nvPr/>
-        </p:nvSpPr>
-        <p:spPr>
-          <a:xfrm>
-            <a:off x="5956300" y="3454400"/>
-            <a:ext cx="254000" cy="203200"/>
-          </a:xfrm>
-          <a:prstGeom prst="rightArrow">
-            <a:avLst/>
-          </a:prstGeom>
-          <a:solidFill>
-            <a:srgbClr val="8A2E3B"/>
-          </a:solidFill>
-          <a:ln>
-            <a:noFill/>
-          </a:ln>
-        </p:spPr>
-        <p:txBody>
-          <a:bodyPr/>
-          <a:lstStyle/>
-          <a:p>
-            <a:endParaRPr/>
-          </a:p>
-        </p:txBody>
-      </p:sp>
-      <p:sp>
-        <p:nvSpPr>
-          <p:cNvPr id="362" name="Arrow 2"/>
-          <p:cNvSpPr/>
-          <p:nvPr/>
-        </p:nvSpPr>
-        <p:spPr>
-          <a:xfrm>
-            <a:off x="8826500" y="3454400"/>
-            <a:ext cx="254000" cy="203200"/>
-          </a:xfrm>
-          <a:prstGeom prst="rightArrow">
-            <a:avLst/>
-          </a:prstGeom>
-          <a:solidFill>
-            <a:srgbClr val="8A2E3B"/>
-          </a:solidFill>
-          <a:ln>
-            <a:noFill/>
-          </a:ln>
-        </p:spPr>
-        <p:txBody>
-          <a:bodyPr/>
-          <a:lstStyle/>
-          <a:p>
-            <a:endParaRPr/>
-          </a:p>
-        </p:txBody>
-      </p:sp>
-      <p:sp>
-        <p:nvSpPr>
           <p:cNvPr id="870" name="Num 870"/>
           <p:cNvSpPr/>
           <p:nvPr/>
@@ -10620,10 +10962,872 @@
           </a:p>
         </p:txBody>
       </p:sp>
+      <p:sp>
+        <p:nvSpPr>
+          <p:cNvPr id="950" name="Mini 951"/>
+          <p:cNvSpPr/>
+          <p:nvPr/>
+        </p:nvSpPr>
+        <p:spPr>
+          <a:xfrm flipV="1">
+            <a:off x="927100" y="3048000"/>
+            <a:ext cx="685800" cy="152400"/>
+          </a:xfrm>
+          <a:prstGeom prst="line">
+            <a:avLst/>
+          </a:prstGeom>
+          <a:ln w="12700">
+            <a:solidFill>
+              <a:srgbClr val="5B6470"/>
+            </a:solidFill>
+          </a:ln>
+        </p:spPr>
+        <p:txBody>
+          <a:bodyPr/>
+          <a:lstStyle/>
+          <a:p>
+            <a:endParaRPr/>
+          </a:p>
+        </p:txBody>
+      </p:sp>
+      <p:sp>
+        <p:nvSpPr>
+          <p:cNvPr id="951" name="Mini 952"/>
+          <p:cNvSpPr/>
+          <p:nvPr/>
+        </p:nvSpPr>
+        <p:spPr>
+          <a:xfrm>
+            <a:off x="927100" y="3200400"/>
+            <a:ext cx="685800" cy="406400"/>
+          </a:xfrm>
+          <a:prstGeom prst="line">
+            <a:avLst/>
+          </a:prstGeom>
+          <a:ln w="12700">
+            <a:solidFill>
+              <a:srgbClr val="5B6470"/>
+            </a:solidFill>
+          </a:ln>
+        </p:spPr>
+        <p:txBody>
+          <a:bodyPr/>
+          <a:lstStyle/>
+          <a:p>
+            <a:endParaRPr/>
+          </a:p>
+        </p:txBody>
+      </p:sp>
+      <p:sp>
+        <p:nvSpPr>
+          <p:cNvPr id="952" name="Mini 953"/>
+          <p:cNvSpPr/>
+          <p:nvPr/>
+        </p:nvSpPr>
+        <p:spPr>
+          <a:xfrm>
+            <a:off x="1612900" y="3048000"/>
+            <a:ext cx="0" cy="558800"/>
+          </a:xfrm>
+          <a:prstGeom prst="line">
+            <a:avLst/>
+          </a:prstGeom>
+          <a:ln w="12700">
+            <a:solidFill>
+              <a:srgbClr val="5B6470"/>
+            </a:solidFill>
+          </a:ln>
+        </p:spPr>
+        <p:txBody>
+          <a:bodyPr/>
+          <a:lstStyle/>
+          <a:p>
+            <a:endParaRPr/>
+          </a:p>
+        </p:txBody>
+      </p:sp>
+      <p:sp>
+        <p:nvSpPr>
+          <p:cNvPr id="953" name="Mini 954"/>
+          <p:cNvSpPr/>
+          <p:nvPr/>
+        </p:nvSpPr>
+        <p:spPr>
+          <a:xfrm>
+            <a:off x="1612900" y="3048000"/>
+            <a:ext cx="787400" cy="279400"/>
+          </a:xfrm>
+          <a:prstGeom prst="line">
+            <a:avLst/>
+          </a:prstGeom>
+          <a:ln w="12700">
+            <a:solidFill>
+              <a:srgbClr val="5B6470"/>
+            </a:solidFill>
+          </a:ln>
+        </p:spPr>
+        <p:txBody>
+          <a:bodyPr/>
+          <a:lstStyle/>
+          <a:p>
+            <a:endParaRPr/>
+          </a:p>
+        </p:txBody>
+      </p:sp>
+      <p:sp>
+        <p:nvSpPr>
+          <p:cNvPr id="954" name="Mini 955"/>
+          <p:cNvSpPr/>
+          <p:nvPr/>
+        </p:nvSpPr>
+        <p:spPr>
+          <a:xfrm flipV="1">
+            <a:off x="1612900" y="3327400"/>
+            <a:ext cx="787400" cy="279400"/>
+          </a:xfrm>
+          <a:prstGeom prst="line">
+            <a:avLst/>
+          </a:prstGeom>
+          <a:ln w="12700">
+            <a:solidFill>
+              <a:srgbClr val="5B6470"/>
+            </a:solidFill>
+          </a:ln>
+        </p:spPr>
+        <p:txBody>
+          <a:bodyPr/>
+          <a:lstStyle/>
+          <a:p>
+            <a:endParaRPr/>
+          </a:p>
+        </p:txBody>
+      </p:sp>
+      <p:sp>
+        <p:nvSpPr>
+          <p:cNvPr id="955" name="Mini 956"/>
+          <p:cNvSpPr/>
+          <p:nvPr/>
+        </p:nvSpPr>
+        <p:spPr>
+          <a:xfrm>
+            <a:off x="850900" y="3124200"/>
+            <a:ext cx="152400" cy="152400"/>
+          </a:xfrm>
+          <a:prstGeom prst="ellipse">
+            <a:avLst/>
+          </a:prstGeom>
+          <a:solidFill>
+            <a:srgbClr val="1A2744"/>
+          </a:solidFill>
+          <a:ln>
+            <a:noFill/>
+          </a:ln>
+        </p:spPr>
+        <p:txBody>
+          <a:bodyPr/>
+          <a:lstStyle/>
+          <a:p>
+            <a:endParaRPr/>
+          </a:p>
+        </p:txBody>
+      </p:sp>
+      <p:sp>
+        <p:nvSpPr>
+          <p:cNvPr id="956" name="Mini 957"/>
+          <p:cNvSpPr/>
+          <p:nvPr/>
+        </p:nvSpPr>
+        <p:spPr>
+          <a:xfrm>
+            <a:off x="1536700" y="2971800"/>
+            <a:ext cx="152400" cy="152400"/>
+          </a:xfrm>
+          <a:prstGeom prst="ellipse">
+            <a:avLst/>
+          </a:prstGeom>
+          <a:solidFill>
+            <a:srgbClr val="1A2744"/>
+          </a:solidFill>
+          <a:ln>
+            <a:noFill/>
+          </a:ln>
+        </p:spPr>
+        <p:txBody>
+          <a:bodyPr/>
+          <a:lstStyle/>
+          <a:p>
+            <a:endParaRPr/>
+          </a:p>
+        </p:txBody>
+      </p:sp>
+      <p:sp>
+        <p:nvSpPr>
+          <p:cNvPr id="957" name="Mini 958"/>
+          <p:cNvSpPr/>
+          <p:nvPr/>
+        </p:nvSpPr>
+        <p:spPr>
+          <a:xfrm>
+            <a:off x="1536700" y="3530600"/>
+            <a:ext cx="152400" cy="152400"/>
+          </a:xfrm>
+          <a:prstGeom prst="ellipse">
+            <a:avLst/>
+          </a:prstGeom>
+          <a:solidFill>
+            <a:srgbClr val="1A2744"/>
+          </a:solidFill>
+          <a:ln>
+            <a:noFill/>
+          </a:ln>
+        </p:spPr>
+        <p:txBody>
+          <a:bodyPr/>
+          <a:lstStyle/>
+          <a:p>
+            <a:endParaRPr/>
+          </a:p>
+        </p:txBody>
+      </p:sp>
+      <p:sp>
+        <p:nvSpPr>
+          <p:cNvPr id="958" name="Mini 959"/>
+          <p:cNvSpPr/>
+          <p:nvPr/>
+        </p:nvSpPr>
+        <p:spPr>
+          <a:xfrm>
+            <a:off x="2324100" y="3251200"/>
+            <a:ext cx="152400" cy="152400"/>
+          </a:xfrm>
+          <a:prstGeom prst="ellipse">
+            <a:avLst/>
+          </a:prstGeom>
+          <a:solidFill>
+            <a:srgbClr val="1A2744"/>
+          </a:solidFill>
+          <a:ln>
+            <a:noFill/>
+          </a:ln>
+        </p:spPr>
+        <p:txBody>
+          <a:bodyPr/>
+          <a:lstStyle/>
+          <a:p>
+            <a:endParaRPr/>
+          </a:p>
+        </p:txBody>
+      </p:sp>
+      <p:sp>
+        <p:nvSpPr>
+          <p:cNvPr id="959" name="Mini 960"/>
+          <p:cNvSpPr/>
+          <p:nvPr/>
+        </p:nvSpPr>
+        <p:spPr>
+          <a:xfrm>
+            <a:off x="3746500" y="3213100"/>
+            <a:ext cx="254000" cy="254000"/>
+          </a:xfrm>
+          <a:prstGeom prst="ellipse">
+            <a:avLst/>
+          </a:prstGeom>
+          <a:solidFill>
+            <a:srgbClr val="FFFFFF"/>
+          </a:solidFill>
+          <a:ln w="12700">
+            <a:solidFill>
+              <a:srgbClr val="1A2744"/>
+            </a:solidFill>
+          </a:ln>
+        </p:spPr>
+        <p:txBody>
+          <a:bodyPr/>
+          <a:lstStyle/>
+          <a:p>
+            <a:endParaRPr/>
+          </a:p>
+        </p:txBody>
+      </p:sp>
+      <p:sp>
+        <p:nvSpPr>
+          <p:cNvPr id="960" name="Mini 961"/>
+          <p:cNvSpPr/>
+          <p:nvPr/>
+        </p:nvSpPr>
+        <p:spPr>
+          <a:xfrm>
+            <a:off x="4000500" y="3327400"/>
+            <a:ext cx="279400" cy="25400"/>
+          </a:xfrm>
+          <a:prstGeom prst="rect">
+            <a:avLst/>
+          </a:prstGeom>
+          <a:solidFill>
+            <a:srgbClr val="1A2744"/>
+          </a:solidFill>
+          <a:ln>
+            <a:noFill/>
+          </a:ln>
+        </p:spPr>
+        <p:txBody>
+          <a:bodyPr/>
+          <a:lstStyle/>
+          <a:p>
+            <a:endParaRPr/>
+          </a:p>
+        </p:txBody>
+      </p:sp>
+      <p:sp>
+        <p:nvSpPr>
+          <p:cNvPr id="961" name="Mini 962"/>
+          <p:cNvSpPr/>
+          <p:nvPr/>
+        </p:nvSpPr>
+        <p:spPr>
+          <a:xfrm>
+            <a:off x="4279900" y="3238500"/>
+            <a:ext cx="457200" cy="203200"/>
+          </a:xfrm>
+          <a:prstGeom prst="rect">
+            <a:avLst/>
+          </a:prstGeom>
+          <a:solidFill>
+            <a:srgbClr val="FFFFFF"/>
+          </a:solidFill>
+          <a:ln w="12700">
+            <a:solidFill>
+              <a:srgbClr val="1A2744"/>
+            </a:solidFill>
+          </a:ln>
+        </p:spPr>
+        <p:txBody>
+          <a:bodyPr/>
+          <a:lstStyle/>
+          <a:p>
+            <a:endParaRPr/>
+          </a:p>
+        </p:txBody>
+      </p:sp>
+      <p:sp>
+        <p:nvSpPr>
+          <p:cNvPr id="962" name="Mini 963"/>
+          <p:cNvSpPr/>
+          <p:nvPr/>
+        </p:nvSpPr>
+        <p:spPr>
+          <a:xfrm>
+            <a:off x="4737100" y="3327400"/>
+            <a:ext cx="254000" cy="25400"/>
+          </a:xfrm>
+          <a:prstGeom prst="rect">
+            <a:avLst/>
+          </a:prstGeom>
+          <a:solidFill>
+            <a:srgbClr val="1A2744"/>
+          </a:solidFill>
+          <a:ln>
+            <a:noFill/>
+          </a:ln>
+        </p:spPr>
+        <p:txBody>
+          <a:bodyPr/>
+          <a:lstStyle/>
+          <a:p>
+            <a:endParaRPr/>
+          </a:p>
+        </p:txBody>
+      </p:sp>
+      <p:sp>
+        <p:nvSpPr>
+          <p:cNvPr id="963" name="Mini 964"/>
+          <p:cNvSpPr/>
+          <p:nvPr/>
+        </p:nvSpPr>
+        <p:spPr>
+          <a:xfrm>
+            <a:off x="4991100" y="3149600"/>
+            <a:ext cx="50800" cy="381000"/>
+          </a:xfrm>
+          <a:prstGeom prst="rect">
+            <a:avLst/>
+          </a:prstGeom>
+          <a:solidFill>
+            <a:srgbClr val="1A2744"/>
+          </a:solidFill>
+          <a:ln>
+            <a:noFill/>
+          </a:ln>
+        </p:spPr>
+        <p:txBody>
+          <a:bodyPr/>
+          <a:lstStyle/>
+          <a:p>
+            <a:endParaRPr/>
+          </a:p>
+        </p:txBody>
+      </p:sp>
+      <p:sp>
+        <p:nvSpPr>
+          <p:cNvPr id="964" name="Mini 965"/>
+          <p:cNvSpPr/>
+          <p:nvPr/>
+        </p:nvSpPr>
+        <p:spPr>
+          <a:xfrm>
+            <a:off x="6565900" y="3225800"/>
+            <a:ext cx="254000" cy="254000"/>
+          </a:xfrm>
+          <a:prstGeom prst="ellipse">
+            <a:avLst/>
+          </a:prstGeom>
+          <a:solidFill>
+            <a:srgbClr val="2C5F8A"/>
+          </a:solidFill>
+          <a:ln>
+            <a:noFill/>
+          </a:ln>
+        </p:spPr>
+        <p:txBody>
+          <a:bodyPr/>
+          <a:lstStyle/>
+          <a:p>
+            <a:endParaRPr/>
+          </a:p>
+        </p:txBody>
+      </p:sp>
+      <p:sp>
+        <p:nvSpPr>
+          <p:cNvPr id="965" name="Mini 966"/>
+          <p:cNvSpPr/>
+          <p:nvPr/>
+        </p:nvSpPr>
+        <p:spPr>
+          <a:xfrm>
+            <a:off x="7988300" y="3225800"/>
+            <a:ext cx="254000" cy="254000"/>
+          </a:xfrm>
+          <a:prstGeom prst="ellipse">
+            <a:avLst/>
+          </a:prstGeom>
+          <a:solidFill>
+            <a:srgbClr val="B4472C"/>
+          </a:solidFill>
+          <a:ln>
+            <a:noFill/>
+          </a:ln>
+        </p:spPr>
+        <p:txBody>
+          <a:bodyPr/>
+          <a:lstStyle/>
+          <a:p>
+            <a:endParaRPr/>
+          </a:p>
+        </p:txBody>
+      </p:sp>
+      <p:sp>
+        <p:nvSpPr>
+          <p:cNvPr id="972" name="Mini 973"/>
+          <p:cNvSpPr/>
+          <p:nvPr/>
+        </p:nvSpPr>
+        <p:spPr>
+          <a:xfrm>
+            <a:off x="9461500" y="3352800"/>
+            <a:ext cx="1828800" cy="0"/>
+          </a:xfrm>
+          <a:prstGeom prst="line">
+            <a:avLst/>
+          </a:prstGeom>
+          <a:ln w="9525">
+            <a:solidFill>
+              <a:srgbClr val="5B6470"/>
+            </a:solidFill>
+          </a:ln>
+        </p:spPr>
+        <p:txBody>
+          <a:bodyPr/>
+          <a:lstStyle/>
+          <a:p>
+            <a:endParaRPr/>
+          </a:p>
+        </p:txBody>
+      </p:sp>
+      <p:sp>
+        <p:nvSpPr>
+          <p:cNvPr id="973" name="Mini 974"/>
+          <p:cNvSpPr/>
+          <p:nvPr/>
+        </p:nvSpPr>
+        <p:spPr>
+          <a:xfrm>
+            <a:off x="10147300" y="3022600"/>
+            <a:ext cx="0" cy="660400"/>
+          </a:xfrm>
+          <a:prstGeom prst="line">
+            <a:avLst/>
+          </a:prstGeom>
+          <a:ln w="9525">
+            <a:solidFill>
+              <a:srgbClr val="5B6470"/>
+            </a:solidFill>
+          </a:ln>
+        </p:spPr>
+        <p:txBody>
+          <a:bodyPr/>
+          <a:lstStyle/>
+          <a:p>
+            <a:endParaRPr/>
+          </a:p>
+        </p:txBody>
+      </p:sp>
+      <p:sp>
+        <p:nvSpPr>
+          <p:cNvPr id="974" name="Mini 975"/>
+          <p:cNvSpPr/>
+          <p:nvPr/>
+        </p:nvSpPr>
+        <p:spPr>
+          <a:xfrm>
+            <a:off x="9867900" y="3098800"/>
+            <a:ext cx="508000" cy="508000"/>
+          </a:xfrm>
+          <a:prstGeom prst="ellipse">
+            <a:avLst/>
+          </a:prstGeom>
+          <a:noFill/>
+          <a:ln w="9525">
+            <a:solidFill>
+              <a:srgbClr val="5B6470"/>
+            </a:solidFill>
+            <a:prstDash val="dash"/>
+          </a:ln>
+        </p:spPr>
+        <p:txBody>
+          <a:bodyPr/>
+          <a:lstStyle/>
+          <a:p>
+            <a:endParaRPr/>
+          </a:p>
+        </p:txBody>
+      </p:sp>
+      <p:sp>
+        <p:nvSpPr>
+          <p:cNvPr id="975" name="Mini 976"/>
+          <p:cNvSpPr/>
+          <p:nvPr/>
+        </p:nvSpPr>
+        <p:spPr>
+          <a:xfrm>
+            <a:off x="10121900" y="3149600"/>
+            <a:ext cx="889000" cy="406400"/>
+          </a:xfrm>
+          <a:prstGeom prst="ellipse">
+            <a:avLst/>
+          </a:prstGeom>
+          <a:noFill/>
+          <a:ln w="19050">
+            <a:solidFill>
+              <a:srgbClr val="8A2E3B"/>
+            </a:solidFill>
+          </a:ln>
+        </p:spPr>
+        <p:txBody>
+          <a:bodyPr/>
+          <a:lstStyle/>
+          <a:p>
+            <a:endParaRPr/>
+          </a:p>
+        </p:txBody>
+      </p:sp>
+      <p:sp>
+        <p:nvSpPr>
+          <p:cNvPr id="976" name="Mini 977"/>
+          <p:cNvSpPr/>
+          <p:nvPr/>
+        </p:nvSpPr>
+        <p:spPr>
+          <a:xfrm>
+            <a:off x="9817100" y="3302000"/>
+            <a:ext cx="101600" cy="101600"/>
+          </a:xfrm>
+          <a:prstGeom prst="ellipse">
+            <a:avLst/>
+          </a:prstGeom>
+          <a:solidFill>
+            <a:srgbClr val="8A2E3B"/>
+          </a:solidFill>
+          <a:ln>
+            <a:noFill/>
+          </a:ln>
+        </p:spPr>
+        <p:txBody>
+          <a:bodyPr/>
+          <a:lstStyle/>
+          <a:p>
+            <a:endParaRPr/>
+          </a:p>
+        </p:txBody>
+      </p:sp>
+      <p:sp>
+        <p:nvSpPr>
+          <p:cNvPr id="990" name="Link 991"/>
+          <p:cNvSpPr/>
+          <p:nvPr/>
+        </p:nvSpPr>
+        <p:spPr>
+          <a:xfrm>
+            <a:off x="3035300" y="2654300"/>
+            <a:ext cx="381000" cy="25400"/>
+          </a:xfrm>
+          <a:prstGeom prst="rect">
+            <a:avLst/>
+          </a:prstGeom>
+          <a:solidFill>
+            <a:srgbClr val="8A2E3B"/>
+          </a:solidFill>
+          <a:ln>
+            <a:noFill/>
+          </a:ln>
+        </p:spPr>
+        <p:txBody>
+          <a:bodyPr/>
+          <a:lstStyle/>
+          <a:p>
+            <a:endParaRPr/>
+          </a:p>
+        </p:txBody>
+      </p:sp>
+      <p:sp>
+        <p:nvSpPr>
+          <p:cNvPr id="991" name="Link 992"/>
+          <p:cNvSpPr/>
+          <p:nvPr/>
+        </p:nvSpPr>
+        <p:spPr>
+          <a:xfrm>
+            <a:off x="5905500" y="2654300"/>
+            <a:ext cx="381000" cy="25400"/>
+          </a:xfrm>
+          <a:prstGeom prst="rect">
+            <a:avLst/>
+          </a:prstGeom>
+          <a:solidFill>
+            <a:srgbClr val="8A2E3B"/>
+          </a:solidFill>
+          <a:ln>
+            <a:noFill/>
+          </a:ln>
+        </p:spPr>
+        <p:txBody>
+          <a:bodyPr/>
+          <a:lstStyle/>
+          <a:p>
+            <a:endParaRPr/>
+          </a:p>
+        </p:txBody>
+      </p:sp>
+      <p:sp>
+        <p:nvSpPr>
+          <p:cNvPr id="992" name="Link 993"/>
+          <p:cNvSpPr/>
+          <p:nvPr/>
+        </p:nvSpPr>
+        <p:spPr>
+          <a:xfrm>
+            <a:off x="8775700" y="2654300"/>
+            <a:ext cx="381000" cy="25400"/>
+          </a:xfrm>
+          <a:prstGeom prst="rect">
+            <a:avLst/>
+          </a:prstGeom>
+          <a:solidFill>
+            <a:srgbClr val="8A2E3B"/>
+          </a:solidFill>
+          <a:ln>
+            <a:noFill/>
+          </a:ln>
+        </p:spPr>
+        <p:txBody>
+          <a:bodyPr/>
+          <a:lstStyle/>
+          <a:p>
+            <a:endParaRPr/>
+          </a:p>
+        </p:txBody>
+      </p:sp>
+      <p:sp>
+        <p:nvSpPr>
+          <p:cNvPr id="1040" name="Spring 1041"/>
+          <p:cNvSpPr/>
+          <p:nvPr/>
+        </p:nvSpPr>
+        <p:spPr>
+          <a:xfrm flipV="1">
+            <a:off x="6819900" y="3238500"/>
+            <a:ext cx="194733" cy="228600"/>
+          </a:xfrm>
+          <a:prstGeom prst="line">
+            <a:avLst/>
+          </a:prstGeom>
+          <a:ln w="19050">
+            <a:solidFill>
+              <a:srgbClr val="8A2E3B"/>
+            </a:solidFill>
+          </a:ln>
+        </p:spPr>
+        <p:txBody>
+          <a:bodyPr/>
+          <a:lstStyle/>
+          <a:p>
+            <a:endParaRPr/>
+          </a:p>
+        </p:txBody>
+      </p:sp>
+      <p:sp>
+        <p:nvSpPr>
+          <p:cNvPr id="1041" name="Spring 1042"/>
+          <p:cNvSpPr/>
+          <p:nvPr/>
+        </p:nvSpPr>
+        <p:spPr>
+          <a:xfrm>
+            <a:off x="7014633" y="3238500"/>
+            <a:ext cx="194733" cy="228600"/>
+          </a:xfrm>
+          <a:prstGeom prst="line">
+            <a:avLst/>
+          </a:prstGeom>
+          <a:ln w="19050">
+            <a:solidFill>
+              <a:srgbClr val="8A2E3B"/>
+            </a:solidFill>
+          </a:ln>
+        </p:spPr>
+        <p:txBody>
+          <a:bodyPr/>
+          <a:lstStyle/>
+          <a:p>
+            <a:endParaRPr/>
+          </a:p>
+        </p:txBody>
+      </p:sp>
+      <p:sp>
+        <p:nvSpPr>
+          <p:cNvPr id="1042" name="Spring 1043"/>
+          <p:cNvSpPr/>
+          <p:nvPr/>
+        </p:nvSpPr>
+        <p:spPr>
+          <a:xfrm flipV="1">
+            <a:off x="7209367" y="3238500"/>
+            <a:ext cx="194733" cy="228600"/>
+          </a:xfrm>
+          <a:prstGeom prst="line">
+            <a:avLst/>
+          </a:prstGeom>
+          <a:ln w="19050">
+            <a:solidFill>
+              <a:srgbClr val="8A2E3B"/>
+            </a:solidFill>
+          </a:ln>
+        </p:spPr>
+        <p:txBody>
+          <a:bodyPr/>
+          <a:lstStyle/>
+          <a:p>
+            <a:endParaRPr/>
+          </a:p>
+        </p:txBody>
+      </p:sp>
+      <p:sp>
+        <p:nvSpPr>
+          <p:cNvPr id="1043" name="Spring 1044"/>
+          <p:cNvSpPr/>
+          <p:nvPr/>
+        </p:nvSpPr>
+        <p:spPr>
+          <a:xfrm>
+            <a:off x="7404100" y="3238500"/>
+            <a:ext cx="194733" cy="228600"/>
+          </a:xfrm>
+          <a:prstGeom prst="line">
+            <a:avLst/>
+          </a:prstGeom>
+          <a:ln w="19050">
+            <a:solidFill>
+              <a:srgbClr val="8A2E3B"/>
+            </a:solidFill>
+          </a:ln>
+        </p:spPr>
+        <p:txBody>
+          <a:bodyPr/>
+          <a:lstStyle/>
+          <a:p>
+            <a:endParaRPr/>
+          </a:p>
+        </p:txBody>
+      </p:sp>
+      <p:sp>
+        <p:nvSpPr>
+          <p:cNvPr id="1044" name="Spring 1045"/>
+          <p:cNvSpPr/>
+          <p:nvPr/>
+        </p:nvSpPr>
+        <p:spPr>
+          <a:xfrm flipV="1">
+            <a:off x="7598833" y="3238500"/>
+            <a:ext cx="194733" cy="228600"/>
+          </a:xfrm>
+          <a:prstGeom prst="line">
+            <a:avLst/>
+          </a:prstGeom>
+          <a:ln w="19050">
+            <a:solidFill>
+              <a:srgbClr val="8A2E3B"/>
+            </a:solidFill>
+          </a:ln>
+        </p:spPr>
+        <p:txBody>
+          <a:bodyPr/>
+          <a:lstStyle/>
+          <a:p>
+            <a:endParaRPr/>
+          </a:p>
+        </p:txBody>
+      </p:sp>
+      <p:sp>
+        <p:nvSpPr>
+          <p:cNvPr id="1045" name="Spring 1046"/>
+          <p:cNvSpPr/>
+          <p:nvPr/>
+        </p:nvSpPr>
+        <p:spPr>
+          <a:xfrm>
+            <a:off x="7793567" y="3238500"/>
+            <a:ext cx="194733" cy="228600"/>
+          </a:xfrm>
+          <a:prstGeom prst="line">
+            <a:avLst/>
+          </a:prstGeom>
+          <a:ln w="19050">
+            <a:solidFill>
+              <a:srgbClr val="8A2E3B"/>
+            </a:solidFill>
+          </a:ln>
+        </p:spPr>
+        <p:txBody>
+          <a:bodyPr/>
+          <a:lstStyle/>
+          <a:p>
+            <a:endParaRPr/>
+          </a:p>
+        </p:txBody>
+      </p:sp>
     </p:spTree>
     <p:extLst>
       <p:ext uri="{BB962C8B-B14F-4D97-AF65-F5344CB8AC3E}">
-        <p14:creationId xmlns:p14="http://schemas.microsoft.com/office/powerpoint/2010/main" val="475579695"/>
+        <p14:creationId xmlns:p14="http://schemas.microsoft.com/office/powerpoint/2010/main" val="310639556"/>
       </p:ext>
     </p:extLst>
   </p:cSld>
@@ -11057,45 +12261,154 @@
           </a:p>
         </p:txBody>
       </p:sp>
-      <p:sp>
-        <p:nvSpPr>
-          <p:cNvPr id="5" name="TextBox 4"/>
-          <p:cNvSpPr txBox="1"/>
-          <p:nvPr/>
-        </p:nvSpPr>
-        <p:spPr>
-          <a:xfrm>
-            <a:off x="546100" y="1498600"/>
-            <a:ext cx="11099800" cy="381771"/>
-          </a:xfrm>
-          <a:prstGeom prst="rect">
-            <a:avLst/>
-          </a:prstGeom>
-          <a:noFill/>
-        </p:spPr>
-        <p:txBody>
-          <a:bodyPr wrap="square">
-            <a:spAutoFit/>
-          </a:bodyPr>
-          <a:lstStyle/>
-          <a:p>
-            <a:pPr algn="l">
-              <a:lnSpc>
-                <a:spcPct val="140000"/>
-              </a:lnSpc>
-            </a:pPr>
-            <a:r>
-              <a:rPr lang="ja-JP" sz="1500" dirty="0">
-                <a:solidFill>
-                  <a:srgbClr val="3D4657"/>
-                </a:solidFill>
-                <a:latin typeface="Calibri"/>
-              </a:rPr>
-              <a:t>送電網はバス(節点)と枝(線路・変圧器)のグラフ。各枝のインピーダンス z = r + jx の逆数を節点方程式に並べたもの。</a:t>
-            </a:r>
-          </a:p>
-        </p:txBody>
-      </p:sp>
+      <mc:AlternateContent xmlns:mc="http://schemas.openxmlformats.org/markup-compatibility/2006">
+        <mc:Choice xmlns:a14="http://schemas.microsoft.com/office/drawing/2010/main" Requires="a14">
+          <p:sp>
+            <p:nvSpPr>
+              <p:cNvPr id="5" name="TextBox 4"/>
+              <p:cNvSpPr txBox="1"/>
+              <p:nvPr/>
+            </p:nvSpPr>
+            <p:spPr>
+              <a:xfrm>
+                <a:off x="546100" y="1498600"/>
+                <a:ext cx="11099800" cy="381771"/>
+              </a:xfrm>
+              <a:prstGeom prst="rect">
+                <a:avLst/>
+              </a:prstGeom>
+              <a:noFill/>
+            </p:spPr>
+            <p:txBody>
+              <a:bodyPr wrap="square">
+                <a:spAutoFit/>
+              </a:bodyPr>
+              <a:lstStyle/>
+              <a:p>
+                <a:pPr algn="l">
+                  <a:lnSpc>
+                    <a:spcPct val="140000"/>
+                  </a:lnSpc>
+                </a:pPr>
+                <a:r>
+                  <a:rPr lang="ja-JP" sz="1500" dirty="0">
+                    <a:solidFill>
+                      <a:srgbClr val="3D4657"/>
+                    </a:solidFill>
+                    <a:latin typeface="Calibri"/>
+                  </a:rPr>
+                  <a:t>送電網はバス(節点)と枝(線路・変圧器)のグラフ。各枝のインピーダンス </a:t>
+                </a:r>
+                <a14:m>
+                  <m:oMath xmlns:m="http://schemas.openxmlformats.org/officeDocument/2006/math">
+                    <m:r>
+                      <a:rPr lang="ja-JP" altLang="en-US" sz="1500" i="1" dirty="0" smtClean="0">
+                        <a:solidFill>
+                          <a:srgbClr val="3D4657"/>
+                        </a:solidFill>
+                        <a:latin typeface="Cambria Math" panose="02040503050406030204" pitchFamily="18" charset="0"/>
+                      </a:rPr>
+                      <m:t>𝑧</m:t>
+                    </m:r>
+                    <m:r>
+                      <a:rPr lang="ja-JP" sz="1500" i="1" dirty="0">
+                        <a:solidFill>
+                          <a:srgbClr val="3D4657"/>
+                        </a:solidFill>
+                        <a:latin typeface="Cambria Math" panose="02040503050406030204" pitchFamily="18" charset="0"/>
+                      </a:rPr>
+                      <m:t> = </m:t>
+                    </m:r>
+                    <m:r>
+                      <a:rPr lang="ja-JP" altLang="en-US" sz="1500" i="1" dirty="0">
+                        <a:solidFill>
+                          <a:srgbClr val="3D4657"/>
+                        </a:solidFill>
+                        <a:latin typeface="Cambria Math" panose="02040503050406030204" pitchFamily="18" charset="0"/>
+                      </a:rPr>
+                      <m:t>𝑟</m:t>
+                    </m:r>
+                    <m:r>
+                      <a:rPr lang="ja-JP" sz="1500" i="1" dirty="0">
+                        <a:solidFill>
+                          <a:srgbClr val="3D4657"/>
+                        </a:solidFill>
+                        <a:latin typeface="Cambria Math" panose="02040503050406030204" pitchFamily="18" charset="0"/>
+                      </a:rPr>
+                      <m:t> + </m:t>
+                    </m:r>
+                    <m:r>
+                      <a:rPr lang="ja-JP" altLang="en-US" sz="1500" i="1" dirty="0">
+                        <a:solidFill>
+                          <a:srgbClr val="3D4657"/>
+                        </a:solidFill>
+                        <a:latin typeface="Cambria Math" panose="02040503050406030204" pitchFamily="18" charset="0"/>
+                      </a:rPr>
+                      <m:t>𝑗𝑥</m:t>
+                    </m:r>
+                    <m:r>
+                      <a:rPr lang="ja-JP" sz="1500" i="1" dirty="0">
+                        <a:solidFill>
+                          <a:srgbClr val="3D4657"/>
+                        </a:solidFill>
+                        <a:latin typeface="Cambria Math" panose="02040503050406030204" pitchFamily="18" charset="0"/>
+                      </a:rPr>
+                      <m:t> </m:t>
+                    </m:r>
+                  </m:oMath>
+                </a14:m>
+                <a:r>
+                  <a:rPr lang="ja-JP" sz="1500" dirty="0">
+                    <a:solidFill>
+                      <a:srgbClr val="3D4657"/>
+                    </a:solidFill>
+                    <a:latin typeface="Calibri"/>
+                  </a:rPr>
+                  <a:t>の逆数を節点方程式に並べたもの。</a:t>
+                </a:r>
+              </a:p>
+            </p:txBody>
+          </p:sp>
+        </mc:Choice>
+        <mc:Fallback>
+          <p:sp>
+            <p:nvSpPr>
+              <p:cNvPr id="5" name="TextBox 4"/>
+              <p:cNvSpPr txBox="1">
+                <a:spLocks noRot="1" noChangeAspect="1" noMove="1" noResize="1" noEditPoints="1" noAdjustHandles="1" noChangeArrowheads="1" noChangeShapeType="1" noTextEdit="1"/>
+              </p:cNvSpPr>
+              <p:nvPr/>
+            </p:nvSpPr>
+            <p:spPr>
+              <a:xfrm>
+                <a:off x="546100" y="1498600"/>
+                <a:ext cx="11099800" cy="381771"/>
+              </a:xfrm>
+              <a:prstGeom prst="rect">
+                <a:avLst/>
+              </a:prstGeom>
+              <a:blipFill>
+                <a:blip r:embed="rId2"/>
+                <a:stretch>
+                  <a:fillRect l="-343" b="-20000"/>
+                </a:stretch>
+              </a:blipFill>
+            </p:spPr>
+            <p:txBody>
+              <a:bodyPr/>
+              <a:lstStyle/>
+              <a:p>
+                <a:r>
+                  <a:rPr lang="ja-JP" altLang="en-US">
+                    <a:noFill/>
+                  </a:rPr>
+                  <a:t> </a:t>
+                </a:r>
+              </a:p>
+            </p:txBody>
+          </p:sp>
+        </mc:Fallback>
+      </mc:AlternateContent>
       <mc:AlternateContent xmlns:mc="http://schemas.openxmlformats.org/markup-compatibility/2006">
         <mc:Choice xmlns:a14="http://schemas.microsoft.com/office/drawing/2010/main" Requires="a14">
           <p:sp>
@@ -11503,7 +12816,7 @@
                 <a:avLst/>
               </a:prstGeom>
               <a:blipFill>
-                <a:blip r:embed="rId2"/>
+                <a:blip r:embed="rId3"/>
                 <a:stretch>
                   <a:fillRect/>
                 </a:stretch>
@@ -11982,7 +13295,7 @@
                 <a:avLst/>
               </a:prstGeom>
               <a:blipFill>
-                <a:blip r:embed="rId3"/>
+                <a:blip r:embed="rId4"/>
                 <a:stretch>
                   <a:fillRect t="-39695" b="-32061"/>
                 </a:stretch>
@@ -12527,7 +13840,7 @@
                 <a:avLst/>
               </a:prstGeom>
               <a:blipFill>
-                <a:blip r:embed="rId4"/>
+                <a:blip r:embed="rId5"/>
                 <a:stretch>
                   <a:fillRect l="-1342"/>
                 </a:stretch>
@@ -12695,7 +14008,7 @@
                 <a:avLst/>
               </a:prstGeom>
               <a:blipFill>
-                <a:blip r:embed="rId5"/>
+                <a:blip r:embed="rId6"/>
                 <a:stretch>
                   <a:fillRect t="-23810" b="-28571"/>
                 </a:stretch>
@@ -17639,7 +18952,7 @@
         <p:spPr>
           <a:xfrm>
             <a:off x="6680200" y="1727200"/>
-            <a:ext cx="4965700" cy="2794000"/>
+            <a:ext cx="4965700" cy="2819400"/>
           </a:xfrm>
           <a:prstGeom prst="rect">
             <a:avLst/>
@@ -17668,7 +18981,7 @@
         <p:spPr>
           <a:xfrm>
             <a:off x="6680200" y="1727200"/>
-            <a:ext cx="38100" cy="2794000"/>
+            <a:ext cx="38100" cy="2819400"/>
           </a:xfrm>
           <a:prstGeom prst="rect">
             <a:avLst/>
@@ -17696,8 +19009,8 @@
         </p:nvSpPr>
         <p:spPr>
           <a:xfrm>
-            <a:off x="6680200" y="4622800"/>
-            <a:ext cx="4965700" cy="1549400"/>
+            <a:off x="6680200" y="4673600"/>
+            <a:ext cx="4965700" cy="1498600"/>
           </a:xfrm>
           <a:prstGeom prst="rect">
             <a:avLst/>
@@ -17725,8 +19038,8 @@
         </p:nvSpPr>
         <p:spPr>
           <a:xfrm>
-            <a:off x="6680200" y="4622800"/>
-            <a:ext cx="38100" cy="1549400"/>
+            <a:off x="6680200" y="4673600"/>
+            <a:ext cx="38100" cy="1498600"/>
           </a:xfrm>
           <a:prstGeom prst="rect">
             <a:avLst/>
@@ -17960,8 +19273,8 @@
         </p:nvSpPr>
         <p:spPr>
           <a:xfrm>
-            <a:off x="6934200" y="4318000"/>
-            <a:ext cx="4457700" cy="254000"/>
+            <a:off x="6934200" y="4267200"/>
+            <a:ext cx="4457700" cy="228600"/>
           </a:xfrm>
           <a:ln/>
           <a:effectLst/>
@@ -18009,7 +19322,7 @@
         </p:nvSpPr>
         <p:spPr>
           <a:xfrm>
-            <a:off x="6934200" y="5384800"/>
+            <a:off x="6934200" y="5486400"/>
             <a:ext cx="4457700" cy="228600"/>
           </a:xfrm>
           <a:ln/>
@@ -18058,8 +19371,8 @@
         </p:nvSpPr>
         <p:spPr>
           <a:xfrm>
-            <a:off x="6934200" y="5664200"/>
-            <a:ext cx="4457700" cy="482600"/>
+            <a:off x="6934200" y="5740400"/>
+            <a:ext cx="4457700" cy="458587"/>
           </a:xfrm>
           <a:prstGeom prst="rect">
             <a:avLst/>
@@ -18076,7 +19389,7 @@
           <a:p>
             <a:pPr marL="150000" indent="-150000" algn="l">
               <a:lnSpc>
-                <a:spcPct val="115000"/>
+                <a:spcPct val="110000"/>
               </a:lnSpc>
               <a:buFont typeface="Arial"/>
               <a:buChar char="•"/>
@@ -18088,13 +19401,13 @@
                 </a:solidFill>
                 <a:latin typeface="Calibri"/>
               </a:rPr>
-              <a:t>前提: IBRは慣性なし → 分離(west 24GVA)</a:t>
+              <a:t>前提: IBRは慣性なし → 動揺方程式から分離(west 24GVA)</a:t>
             </a:r>
           </a:p>
           <a:p>
             <a:pPr marL="150000" indent="-150000" algn="l">
               <a:lnSpc>
-                <a:spcPct val="115000"/>
+                <a:spcPct val="110000"/>
               </a:lnSpc>
               <a:buFont typeface="Arial"/>
               <a:buChar char="•"/>
@@ -18106,7 +19419,7 @@
                 </a:solidFill>
                 <a:latin typeface="Calibri"/>
               </a:rPr>
-              <a:t>定数 H, x″d は型式別の典型値(IEEJ帯)</a:t>
+              <a:t>定数 H, x″d は型式別の典型値(IEEJ/教科書帯)</a:t>
             </a:r>
           </a:p>
         </p:txBody>
@@ -20740,8 +22053,8 @@
             </p:nvSpPr>
             <p:spPr>
               <a:xfrm>
-                <a:off x="6934200" y="4445000"/>
-                <a:ext cx="4457700" cy="736600"/>
+                <a:off x="6934200" y="4749800"/>
+                <a:ext cx="4457700" cy="711200"/>
               </a:xfrm>
               <a:prstGeom prst="rect">
                 <a:avLst/>
@@ -20997,8 +22310,8 @@
             </p:nvSpPr>
             <p:spPr>
               <a:xfrm>
-                <a:off x="6934200" y="4445000"/>
-                <a:ext cx="4457700" cy="736600"/>
+                <a:off x="6934200" y="4749800"/>
+                <a:ext cx="4457700" cy="711200"/>
               </a:xfrm>
               <a:prstGeom prst="rect">
                 <a:avLst/>
@@ -21006,7 +22319,7 @@
               <a:blipFill>
                 <a:blip r:embed="rId8"/>
                 <a:stretch>
-                  <a:fillRect l="-1705" t="-56667" b="-60000"/>
+                  <a:fillRect l="-1705" t="-58621" b="-65517"/>
                 </a:stretch>
               </a:blipFill>
             </p:spPr>
@@ -21035,8 +22348,8 @@
             </p:nvSpPr>
             <p:spPr>
               <a:xfrm>
-                <a:off x="8890000" y="4622800"/>
-                <a:ext cx="2667000" cy="381000"/>
+                <a:off x="8890000" y="4927600"/>
+                <a:ext cx="2667000" cy="355600"/>
               </a:xfrm>
               <a:prstGeom prst="rect">
                 <a:avLst/>
@@ -21209,8 +22522,8 @@
             </p:nvSpPr>
             <p:spPr>
               <a:xfrm>
-                <a:off x="8890000" y="4622800"/>
-                <a:ext cx="2667000" cy="381000"/>
+                <a:off x="8890000" y="4927600"/>
+                <a:ext cx="2667000" cy="355600"/>
               </a:xfrm>
               <a:prstGeom prst="rect">
                 <a:avLst/>
@@ -21218,7 +22531,7 @@
               <a:blipFill>
                 <a:blip r:embed="rId9"/>
                 <a:stretch>
-                  <a:fillRect l="-2358" t="-3125"/>
+                  <a:fillRect l="-2358" t="-3333"/>
                 </a:stretch>
               </a:blipFill>
             </p:spPr>
@@ -21240,7 +22553,7 @@
     </p:spTree>
     <p:extLst>
       <p:ext uri="{BB962C8B-B14F-4D97-AF65-F5344CB8AC3E}">
-        <p14:creationId xmlns:p14="http://schemas.microsoft.com/office/powerpoint/2010/main" val="4258617945"/>
+        <p14:creationId xmlns:p14="http://schemas.microsoft.com/office/powerpoint/2010/main" val="1415194184"/>
       </p:ext>
     </p:extLst>
   </p:cSld>
@@ -22695,71 +24008,256 @@
           </a:prstGeom>
         </p:spPr>
       </p:pic>
-      <p:sp>
-        <p:nvSpPr>
-          <p:cNvPr id="6" name="Rectangle 5"/>
-          <p:cNvSpPr/>
-          <p:nvPr/>
-        </p:nvSpPr>
-        <p:spPr>
-          <a:xfrm>
-            <a:off x="8382000" y="1422400"/>
-            <a:ext cx="3263900" cy="2387600"/>
-          </a:xfrm>
-          <a:ln/>
-          <a:effectLst/>
-        </p:spPr>
-        <p:style>
-          <a:lnRef idx="1">
-            <a:schemeClr val="accent1"/>
-          </a:lnRef>
-          <a:fillRef idx="0">
-            <a:schemeClr val="accent1"/>
-          </a:fillRef>
-          <a:effectRef idx="2">
-            <a:schemeClr val="accent1"/>
-          </a:effectRef>
-          <a:fontRef idx="minor">
-            <a:schemeClr val="lt1"/>
-          </a:fontRef>
-        </p:style>
-        <p:txBody>
-          <a:bodyPr wrap="square" lIns="190500" tIns="152400" rIns="152400" bIns="152400" rtlCol="0" anchor="ctr"/>
-          <a:lstStyle/>
-          <a:p>
-            <a:pPr algn="l">
-              <a:spcAft>
-                <a:spcPts val="600"/>
-              </a:spcAft>
-            </a:pPr>
-            <a:r>
-              <a:rPr lang="en-US" sz="1800" dirty="0">
-                <a:solidFill>
-                  <a:srgbClr val="1A2744"/>
-                </a:solidFill>
-                <a:latin typeface="Cambria Math"/>
-              </a:rPr>
-              <a:t>ROCOF = ΔP · f₀ / 2Ek</a:t>
-            </a:r>
-          </a:p>
-          <a:p>
-            <a:pPr algn="l">
-              <a:lnSpc>
-                <a:spcPct val="135000"/>
-              </a:lnSpc>
-            </a:pPr>
-            <a:r>
-              <a:rPr lang="ja-JP" sz="1400" dirty="0">
-                <a:solidFill>
-                  <a:srgbClr val="5B6470"/>
-                </a:solidFill>
-                <a:latin typeface="Calibri"/>
-              </a:rPr>
-              <a:t>正午にPVが46GWの同期機を止め、Ek が east −21% / west −26%。1GW脱落時の周波数低下速度は +27〜36% 悪化。</a:t>
-            </a:r>
-          </a:p>
-        </p:txBody>
-      </p:sp>
+      <mc:AlternateContent xmlns:mc="http://schemas.openxmlformats.org/markup-compatibility/2006">
+        <mc:Choice xmlns:a14="http://schemas.microsoft.com/office/drawing/2010/main" Requires="a14">
+          <p:sp>
+            <p:nvSpPr>
+              <p:cNvPr id="6" name="Rectangle 5"/>
+              <p:cNvSpPr/>
+              <p:nvPr/>
+            </p:nvSpPr>
+            <p:spPr>
+              <a:xfrm>
+                <a:off x="8382000" y="1422400"/>
+                <a:ext cx="3263900" cy="2387600"/>
+              </a:xfrm>
+              <a:ln/>
+              <a:effectLst/>
+            </p:spPr>
+            <p:style>
+              <a:lnRef idx="1">
+                <a:schemeClr val="accent1"/>
+              </a:lnRef>
+              <a:fillRef idx="0">
+                <a:schemeClr val="accent1"/>
+              </a:fillRef>
+              <a:effectRef idx="2">
+                <a:schemeClr val="accent1"/>
+              </a:effectRef>
+              <a:fontRef idx="minor">
+                <a:schemeClr val="lt1"/>
+              </a:fontRef>
+            </p:style>
+            <p:txBody>
+              <a:bodyPr wrap="square" lIns="190500" tIns="152400" rIns="152400" bIns="152400" rtlCol="0" anchor="ctr"/>
+              <a:lstStyle/>
+              <a:p>
+                <a:pPr algn="l"/>
+                <a14:m>
+                  <m:oMathPara xmlns:m="http://schemas.openxmlformats.org/officeDocument/2006/math">
+                    <m:oMathParaPr>
+                      <m:jc m:val="left"/>
+                    </m:oMathParaPr>
+                    <m:oMath>
+                      <m:r>
+                        <m:rPr>
+                          <m:sty m:val="p"/>
+                        </m:rPr>
+                        <a:rPr lang="en-US" sz="1700" dirty="0">
+                          <a:solidFill>
+                            <a:srgbClr val="8A2E3B"/>
+                          </a:solidFill>
+                          <a:latin typeface="Cambria Math" panose="02040503050406030204" pitchFamily="18" charset="0"/>
+                        </a:rPr>
+                        <m:t>ROCOF</m:t>
+                      </m:r>
+                      <m:r>
+                        <a:rPr lang="en-US" sz="1700" dirty="0">
+                          <a:solidFill>
+                            <a:srgbClr val="1A2744"/>
+                          </a:solidFill>
+                          <a:latin typeface="Cambria Math" panose="02040503050406030204" pitchFamily="18" charset="0"/>
+                        </a:rPr>
+                        <m:t> = </m:t>
+                      </m:r>
+                      <m:f>
+                        <m:fPr>
+                          <m:ctrlPr>
+                            <a:rPr lang="en-US" sz="1700" dirty="0">
+                              <a:solidFill>
+                                <a:srgbClr val="1A2744"/>
+                              </a:solidFill>
+                              <a:latin typeface="Cambria Math" panose="02040503050406030204" pitchFamily="18" charset="0"/>
+                            </a:rPr>
+                          </m:ctrlPr>
+                        </m:fPr>
+                        <m:num>
+                          <m:r>
+                            <m:rPr>
+                              <m:sty m:val="p"/>
+                            </m:rPr>
+                            <a:rPr lang="en-US" sz="1700" dirty="0">
+                              <a:solidFill>
+                                <a:srgbClr val="1A2744"/>
+                              </a:solidFill>
+                              <a:latin typeface="Cambria Math" panose="02040503050406030204" pitchFamily="18" charset="0"/>
+                            </a:rPr>
+                            <m:t>Δ</m:t>
+                          </m:r>
+                          <m:r>
+                            <a:rPr lang="en-US" sz="1700" dirty="0">
+                              <a:solidFill>
+                                <a:srgbClr val="1A2744"/>
+                              </a:solidFill>
+                              <a:latin typeface="Cambria Math" panose="02040503050406030204" pitchFamily="18" charset="0"/>
+                            </a:rPr>
+                            <m:t>𝑃</m:t>
+                          </m:r>
+                          <m:r>
+                            <a:rPr lang="en-US" sz="1700" dirty="0">
+                              <a:solidFill>
+                                <a:srgbClr val="1A2744"/>
+                              </a:solidFill>
+                              <a:latin typeface="Cambria Math" panose="02040503050406030204" pitchFamily="18" charset="0"/>
+                            </a:rPr>
+                            <m:t> · </m:t>
+                          </m:r>
+                          <m:sSub>
+                            <m:sSubPr>
+                              <m:ctrlPr>
+                                <a:rPr lang="en-US" sz="1700" dirty="0">
+                                  <a:solidFill>
+                                    <a:srgbClr val="1A2744"/>
+                                  </a:solidFill>
+                                  <a:latin typeface="Cambria Math" panose="02040503050406030204" pitchFamily="18" charset="0"/>
+                                </a:rPr>
+                              </m:ctrlPr>
+                            </m:sSubPr>
+                            <m:e>
+                              <m:r>
+                                <a:rPr lang="en-US" sz="1700" dirty="0">
+                                  <a:solidFill>
+                                    <a:srgbClr val="1A2744"/>
+                                  </a:solidFill>
+                                  <a:latin typeface="Cambria Math" panose="02040503050406030204" pitchFamily="18" charset="0"/>
+                                </a:rPr>
+                                <m:t>𝑓</m:t>
+                              </m:r>
+                            </m:e>
+                            <m:sub>
+                              <m:r>
+                                <a:rPr lang="en-US" sz="1700" dirty="0">
+                                  <a:solidFill>
+                                    <a:srgbClr val="1A2744"/>
+                                  </a:solidFill>
+                                  <a:latin typeface="Cambria Math" panose="02040503050406030204" pitchFamily="18" charset="0"/>
+                                </a:rPr>
+                                <m:t>0</m:t>
+                              </m:r>
+                            </m:sub>
+                          </m:sSub>
+                        </m:num>
+                        <m:den>
+                          <m:r>
+                            <a:rPr lang="en-US" sz="1700" dirty="0">
+                              <a:solidFill>
+                                <a:srgbClr val="1A2744"/>
+                              </a:solidFill>
+                              <a:latin typeface="Cambria Math" panose="02040503050406030204" pitchFamily="18" charset="0"/>
+                            </a:rPr>
+                            <m:t>2</m:t>
+                          </m:r>
+                          <m:sSub>
+                            <m:sSubPr>
+                              <m:ctrlPr>
+                                <a:rPr lang="en-US" sz="1700" dirty="0">
+                                  <a:solidFill>
+                                    <a:srgbClr val="2C5F8A"/>
+                                  </a:solidFill>
+                                  <a:latin typeface="Cambria Math" panose="02040503050406030204" pitchFamily="18" charset="0"/>
+                                </a:rPr>
+                              </m:ctrlPr>
+                            </m:sSubPr>
+                            <m:e>
+                              <m:r>
+                                <a:rPr lang="en-US" sz="1700" dirty="0">
+                                  <a:solidFill>
+                                    <a:srgbClr val="2C5F8A"/>
+                                  </a:solidFill>
+                                  <a:latin typeface="Cambria Math" panose="02040503050406030204" pitchFamily="18" charset="0"/>
+                                </a:rPr>
+                                <m:t>𝐸</m:t>
+                              </m:r>
+                            </m:e>
+                            <m:sub>
+                              <m:r>
+                                <a:rPr lang="en-US" sz="1700" dirty="0">
+                                  <a:solidFill>
+                                    <a:srgbClr val="2C5F8A"/>
+                                  </a:solidFill>
+                                  <a:latin typeface="Cambria Math" panose="02040503050406030204" pitchFamily="18" charset="0"/>
+                                </a:rPr>
+                                <m:t>𝑘</m:t>
+                              </m:r>
+                            </m:sub>
+                          </m:sSub>
+                        </m:den>
+                      </m:f>
+                    </m:oMath>
+                  </m:oMathPara>
+                </a14:m>
+                <a:endParaRPr/>
+              </a:p>
+              <a:p>
+                <a:pPr algn="l">
+                  <a:lnSpc>
+                    <a:spcPct val="130000"/>
+                  </a:lnSpc>
+                  <a:spcBef>
+                    <a:spcPts val="600"/>
+                  </a:spcBef>
+                </a:pPr>
+                <a:r>
+                  <a:rPr lang="ja-JP" sz="1400" dirty="0">
+                    <a:solidFill>
+                      <a:srgbClr val="5B6470"/>
+                    </a:solidFill>
+                    <a:latin typeface="Calibri"/>
+                  </a:rPr>
+                  <a:t>正午にPVが46GWの同期機を止め、Ek が east −21% / west −26%。1GW脱落時の周波数低下速度は +27〜36% 悪化。</a:t>
+                </a:r>
+              </a:p>
+            </p:txBody>
+          </p:sp>
+        </mc:Choice>
+        <mc:Fallback>
+          <p:sp>
+            <p:nvSpPr>
+              <p:cNvPr id="6" name="Rectangle 5"/>
+              <p:cNvSpPr>
+                <a:spLocks noRot="1" noChangeAspect="1" noMove="1" noResize="1" noEditPoints="1" noAdjustHandles="1" noChangeArrowheads="1" noChangeShapeType="1" noTextEdit="1"/>
+              </p:cNvSpPr>
+              <p:nvPr/>
+            </p:nvSpPr>
+            <p:spPr>
+              <a:xfrm>
+                <a:off x="8382000" y="1422400"/>
+                <a:ext cx="3263900" cy="2387600"/>
+              </a:xfrm>
+              <a:blipFill>
+                <a:blip r:embed="rId3"/>
+                <a:stretch>
+                  <a:fillRect/>
+                </a:stretch>
+              </a:blipFill>
+              <a:ln/>
+              <a:effectLst/>
+            </p:spPr>
+            <p:txBody>
+              <a:bodyPr/>
+              <a:lstStyle/>
+              <a:p>
+                <a:r>
+                  <a:rPr lang="ja-JP" altLang="en-US">
+                    <a:noFill/>
+                  </a:rPr>
+                  <a:t> </a:t>
+                </a:r>
+              </a:p>
+            </p:txBody>
+          </p:sp>
+        </mc:Fallback>
+      </mc:AlternateContent>
       <p:sp>
         <p:nvSpPr>
           <p:cNvPr id="7" name="TextBox 6"/>
@@ -23094,7 +24592,7 @@
     </p:spTree>
     <p:extLst>
       <p:ext uri="{BB962C8B-B14F-4D97-AF65-F5344CB8AC3E}">
-        <p14:creationId xmlns:p14="http://schemas.microsoft.com/office/powerpoint/2010/main" val="3490956602"/>
+        <p14:creationId xmlns:p14="http://schemas.microsoft.com/office/powerpoint/2010/main" val="1299237980"/>
       </p:ext>
     </p:extLst>
   </p:cSld>
